--- a/reports/WeeklyPre/5min_pre_fully_editable.pptx
+++ b/reports/WeeklyPre/5min_pre_fully_editable.pptx
@@ -1,20 +1,20 @@
 
 <file path=ppt/presentation.xml><?xml version="1.0" encoding="utf-8"?>
-<p:presentation xmlns:a="http://schemas.openxmlformats.org/drawingml/2006/main" xmlns:r="http://schemas.openxmlformats.org/officeDocument/2006/relationships" xmlns:p="http://schemas.openxmlformats.org/presentationml/2006/main" saveSubsetFonts="1" autoCompressPictures="0">
+<p:presentation xmlns:a="http://schemas.openxmlformats.org/drawingml/2006/main" xmlns:r="http://schemas.openxmlformats.org/officeDocument/2006/relationships" xmlns:p="http://schemas.openxmlformats.org/presentationml/2006/main" autoCompressPictures="0">
   <p:sldMasterIdLst>
     <p:sldMasterId id="2147483648" r:id="rId1"/>
   </p:sldMasterIdLst>
   <p:sldIdLst>
-    <p:sldId id="256" r:id="rId7"/>
-    <p:sldId id="257" r:id="rId8"/>
-    <p:sldId id="258" r:id="rId9"/>
-    <p:sldId id="259" r:id="rId10"/>
-    <p:sldId id="260" r:id="rId11"/>
-    <p:sldId id="261" r:id="rId12"/>
-    <p:sldId id="262" r:id="rId13"/>
-    <p:sldId id="263" r:id="rId14"/>
-    <p:sldId id="264" r:id="rId15"/>
-    <p:sldId id="265" r:id="rId16"/>
+    <p:sldId id="256" r:id="rId3"/>
+    <p:sldId id="257" r:id="rId4"/>
+    <p:sldId id="258" r:id="rId5"/>
+    <p:sldId id="259" r:id="rId6"/>
+    <p:sldId id="260" r:id="rId7"/>
+    <p:sldId id="261" r:id="rId8"/>
+    <p:sldId id="262" r:id="rId9"/>
+    <p:sldId id="263" r:id="rId10"/>
+    <p:sldId id="264" r:id="rId11"/>
+    <p:sldId id="265" r:id="rId12"/>
   </p:sldIdLst>
   <p:sldSz cx="12192000" cy="6858000" type="screen4x3"/>
   <p:notesSz cx="6858000" cy="9144000"/>
@@ -113,11 +113,27 @@
       </a:defRPr>
     </a:lvl9pPr>
   </p:defaultTextStyle>
+  <p:extLst>
+    <p:ext uri="{EFAFB233-063F-42B5-8137-9DF3F51BA10A}">
+      <p15:sldGuideLst xmlns:p15="http://schemas.microsoft.com/office/powerpoint/2012/main">
+        <p15:guide id="1" orient="horz" pos="2160" userDrawn="1">
+          <p15:clr>
+            <a:srgbClr val="A4A3A4"/>
+          </p15:clr>
+        </p15:guide>
+        <p15:guide id="2" pos="2880" userDrawn="1">
+          <p15:clr>
+            <a:srgbClr val="A4A3A4"/>
+          </p15:clr>
+        </p15:guide>
+      </p15:sldGuideLst>
+    </p:ext>
+  </p:extLst>
 </p:presentation>
 </file>
 
-<file path=ppt/slideLayouts/slideLayout7.xml><?xml version="1.0" encoding="utf-8"?>
-<p:sldLayout xmlns:a="http://schemas.openxmlformats.org/drawingml/2006/main" xmlns:p="http://schemas.openxmlformats.org/presentationml/2006/main" type="blank" preserve="1">
+<file path=ppt/slideLayouts/slideLayout1.xml><?xml version="1.0" encoding="utf-8"?>
+<p:sldLayout xmlns:a="http://schemas.openxmlformats.org/drawingml/2006/main" xmlns:r="http://schemas.openxmlformats.org/officeDocument/2006/relationships" xmlns:p="http://schemas.openxmlformats.org/presentationml/2006/main" type="blank" preserve="1">
   <p:cSld name="weekly_five_minute_research_update — Blank">
     <p:spTree>
       <p:nvGrpSpPr>
@@ -150,7 +166,6 @@
           <a:p>
             <a:fld id="{5BCAD085-E8A6-8845-BD4E-CB4CCA059FC4}" type="datetimeFigureOut">
               <a:rPr lang="en-US" smtClean="0"/>
-              <a:t>1/27/13</a:t>
             </a:fld>
             <a:endParaRPr lang="en-US"/>
           </a:p>
@@ -192,7 +207,6 @@
           <a:p>
             <a:fld id="{C1FF6DA9-008F-8B48-92A6-B652298478BF}" type="slidenum">
               <a:rPr lang="en-US" smtClean="0"/>
-              <a:t>‹#›</a:t>
             </a:fld>
             <a:endParaRPr lang="en-US"/>
           </a:p>
@@ -207,8 +221,8 @@
 </file>
 
 <file path=ppt/slideMasters/slideMaster1.xml><?xml version="1.0" encoding="utf-8"?>
-<p:sldMaster xmlns:a="http://schemas.openxmlformats.org/drawingml/2006/main" xmlns:p="http://schemas.openxmlformats.org/presentationml/2006/main" xmlns:r="http://schemas.openxmlformats.org/officeDocument/2006/relationships">
-  <p:cSld name="weekly_five_minute_research_update — Master">
+<p:sldMaster xmlns:a="http://schemas.openxmlformats.org/drawingml/2006/main" xmlns:r="http://schemas.openxmlformats.org/officeDocument/2006/relationships" xmlns:p="http://schemas.openxmlformats.org/presentationml/2006/main">
+  <p:cSld>
     <p:bg>
       <p:bgRef idx="1001">
         <a:schemeClr val="bg1"/>
@@ -263,7 +277,6 @@
           <a:p>
             <a:fld id="{5BCAD085-E8A6-8845-BD4E-CB4CCA059FC4}" type="datetimeFigureOut">
               <a:rPr lang="en-US" smtClean="0"/>
-              <a:t>1/27/13</a:t>
             </a:fld>
             <a:endParaRPr lang="en-US"/>
           </a:p>
@@ -341,7 +354,6 @@
           <a:p>
             <a:fld id="{C1FF6DA9-008F-8B48-92A6-B652298478BF}" type="slidenum">
               <a:rPr lang="en-US" smtClean="0"/>
-              <a:t>‹#›</a:t>
             </a:fld>
             <a:endParaRPr lang="en-US"/>
           </a:p>
@@ -351,7 +363,7 @@
   </p:cSld>
   <p:clrMap bg1="lt1" tx1="dk1" bg2="lt2" tx2="dk2" accent1="accent1" accent2="accent2" accent3="accent3" accent4="accent4" accent5="accent5" accent6="accent6" hlink="hlink" folHlink="folHlink"/>
   <p:sldLayoutIdLst>
-    <p:sldLayoutId id="2147483655" r:id="rId7"/>
+    <p:sldLayoutId id="2147483649" r:id="rId1"/>
   </p:sldLayoutIdLst>
   <p:txStyles>
     <p:titleStyle>
@@ -375,7 +387,7 @@
         <a:spcBef>
           <a:spcPct val="20000"/>
         </a:spcBef>
-        <a:buFont typeface="Arial"/>
+        <a:buFont typeface="Arial" panose="020B0604020202090204"/>
         <a:buChar char="•"/>
         <a:defRPr sz="3200" kern="1200">
           <a:solidFill>
@@ -390,7 +402,7 @@
         <a:spcBef>
           <a:spcPct val="20000"/>
         </a:spcBef>
-        <a:buFont typeface="Arial"/>
+        <a:buFont typeface="Arial" panose="020B0604020202090204"/>
         <a:buChar char="–"/>
         <a:defRPr sz="2800" kern="1200">
           <a:solidFill>
@@ -405,7 +417,7 @@
         <a:spcBef>
           <a:spcPct val="20000"/>
         </a:spcBef>
-        <a:buFont typeface="Arial"/>
+        <a:buFont typeface="Arial" panose="020B0604020202090204"/>
         <a:buChar char="•"/>
         <a:defRPr sz="2400" kern="1200">
           <a:solidFill>
@@ -420,7 +432,7 @@
         <a:spcBef>
           <a:spcPct val="20000"/>
         </a:spcBef>
-        <a:buFont typeface="Arial"/>
+        <a:buFont typeface="Arial" panose="020B0604020202090204"/>
         <a:buChar char="–"/>
         <a:defRPr sz="2000" kern="1200">
           <a:solidFill>
@@ -435,7 +447,7 @@
         <a:spcBef>
           <a:spcPct val="20000"/>
         </a:spcBef>
-        <a:buFont typeface="Arial"/>
+        <a:buFont typeface="Arial" panose="020B0604020202090204"/>
         <a:buChar char="»"/>
         <a:defRPr sz="2000" kern="1200">
           <a:solidFill>
@@ -450,7 +462,7 @@
         <a:spcBef>
           <a:spcPct val="20000"/>
         </a:spcBef>
-        <a:buFont typeface="Arial"/>
+        <a:buFont typeface="Arial" panose="020B0604020202090204"/>
         <a:buChar char="•"/>
         <a:defRPr sz="2000" kern="1200">
           <a:solidFill>
@@ -465,7 +477,7 @@
         <a:spcBef>
           <a:spcPct val="20000"/>
         </a:spcBef>
-        <a:buFont typeface="Arial"/>
+        <a:buFont typeface="Arial" panose="020B0604020202090204"/>
         <a:buChar char="•"/>
         <a:defRPr sz="2000" kern="1200">
           <a:solidFill>
@@ -480,7 +492,7 @@
         <a:spcBef>
           <a:spcPct val="20000"/>
         </a:spcBef>
-        <a:buFont typeface="Arial"/>
+        <a:buFont typeface="Arial" panose="020B0604020202090204"/>
         <a:buChar char="•"/>
         <a:defRPr sz="2000" kern="1200">
           <a:solidFill>
@@ -495,7 +507,7 @@
         <a:spcBef>
           <a:spcPct val="20000"/>
         </a:spcBef>
-        <a:buFont typeface="Arial"/>
+        <a:buFont typeface="Arial" panose="020B0604020202090204"/>
         <a:buChar char="•"/>
         <a:defRPr sz="2000" kern="1200">
           <a:solidFill>
@@ -662,7 +674,7 @@
           <p:nvPr/>
         </p:nvPicPr>
         <p:blipFill>
-          <a:blip r:embed="rId2"/>
+          <a:blip r:embed="rId1"/>
           <a:stretch>
             <a:fillRect/>
           </a:stretch>
@@ -730,12 +742,20 @@
                 <a:solidFill>
                   <a:srgbClr val="FFFFFF"/>
                 </a:solidFill>
-                <a:latin typeface="Arial"/>
-                <a:ea typeface="Arial"/>
-                <a:cs typeface="Arial"/>
+                <a:latin typeface="Arial" panose="020B0604020202090204"/>
+                <a:ea typeface="Arial" panose="020B0604020202090204"/>
+                <a:cs typeface="Arial" panose="020B0604020202090204"/>
               </a:rPr>
               <a:t>EE6008 · HUMAN POSE ANALYTICS</a:t>
             </a:r>
+            <a:endParaRPr lang="en-US" sz="980" dirty="0">
+              <a:solidFill>
+                <a:srgbClr val="FFFFFF"/>
+              </a:solidFill>
+              <a:latin typeface="Arial" panose="020B0604020202090204"/>
+              <a:ea typeface="Arial" panose="020B0604020202090204"/>
+              <a:cs typeface="Arial" panose="020B0604020202090204"/>
+            </a:endParaRPr>
           </a:p>
         </p:txBody>
       </p:sp>
@@ -770,7 +790,7 @@
           <p:nvPr/>
         </p:nvPicPr>
         <p:blipFill>
-          <a:blip r:embed="rId3">
+          <a:blip r:embed="rId2">
             <a:alphaModFix amt="56000"/>
           </a:blip>
           <a:stretch>
@@ -901,12 +921,20 @@
                 <a:solidFill>
                   <a:srgbClr val="181C62"/>
                 </a:solidFill>
-                <a:latin typeface="Arial"/>
-                <a:ea typeface="Arial"/>
-                <a:cs typeface="Arial"/>
+                <a:latin typeface="Arial" panose="020B0604020202090204"/>
+                <a:ea typeface="Arial" panose="020B0604020202090204"/>
+                <a:cs typeface="Arial" panose="020B0604020202090204"/>
               </a:rPr>
               <a:t>Human Pose Analytics</a:t>
             </a:r>
+            <a:endParaRPr lang="en-US" sz="3150" b="1" dirty="0">
+              <a:solidFill>
+                <a:srgbClr val="181C62"/>
+              </a:solidFill>
+              <a:latin typeface="Arial" panose="020B0604020202090204"/>
+              <a:ea typeface="Arial" panose="020B0604020202090204"/>
+              <a:cs typeface="Arial" panose="020B0604020202090204"/>
+            </a:endParaRPr>
           </a:p>
         </p:txBody>
       </p:sp>
@@ -941,12 +969,20 @@
                 <a:solidFill>
                   <a:srgbClr val="20243A"/>
                 </a:solidFill>
-                <a:latin typeface="Arial"/>
-                <a:ea typeface="Arial"/>
-                <a:cs typeface="Arial"/>
+                <a:latin typeface="Arial" panose="020B0604020202090204"/>
+                <a:ea typeface="Arial" panose="020B0604020202090204"/>
+                <a:cs typeface="Arial" panose="020B0604020202090204"/>
               </a:rPr>
               <a:t>Weekly research update · {{SUBTITLE}}</a:t>
             </a:r>
+            <a:endParaRPr lang="en-US" sz="1720" dirty="0">
+              <a:solidFill>
+                <a:srgbClr val="20243A"/>
+              </a:solidFill>
+              <a:latin typeface="Arial" panose="020B0604020202090204"/>
+              <a:ea typeface="Arial" panose="020B0604020202090204"/>
+              <a:cs typeface="Arial" panose="020B0604020202090204"/>
+            </a:endParaRPr>
           </a:p>
         </p:txBody>
       </p:sp>
@@ -981,12 +1017,20 @@
                 <a:solidFill>
                   <a:srgbClr val="D71440"/>
                 </a:solidFill>
-                <a:latin typeface="Arial"/>
-                <a:ea typeface="Arial"/>
-                <a:cs typeface="Arial"/>
+                <a:latin typeface="Arial" panose="020B0604020202090204"/>
+                <a:ea typeface="Arial" panose="020B0604020202090204"/>
+                <a:cs typeface="Arial" panose="020B0604020202090204"/>
               </a:rPr>
               <a:t>Week ending · {{DATE}}</a:t>
             </a:r>
+            <a:endParaRPr lang="en-US" sz="1350" b="1" dirty="0">
+              <a:solidFill>
+                <a:srgbClr val="D71440"/>
+              </a:solidFill>
+              <a:latin typeface="Arial" panose="020B0604020202090204"/>
+              <a:ea typeface="Arial" panose="020B0604020202090204"/>
+              <a:cs typeface="Arial" panose="020B0604020202090204"/>
+            </a:endParaRPr>
           </a:p>
         </p:txBody>
       </p:sp>
@@ -1021,12 +1065,20 @@
                 <a:solidFill>
                   <a:srgbClr val="5E6478"/>
                 </a:solidFill>
-                <a:latin typeface="Arial"/>
-                <a:ea typeface="Arial"/>
-                <a:cs typeface="Arial"/>
+                <a:latin typeface="Arial" panose="020B0604020202090204"/>
+                <a:ea typeface="Arial" panose="020B0604020202090204"/>
+                <a:cs typeface="Arial" panose="020B0604020202090204"/>
               </a:rPr>
               <a:t>Presenter · {{AUTHOR}}</a:t>
             </a:r>
+            <a:endParaRPr lang="en-US" sz="1350" dirty="0">
+              <a:solidFill>
+                <a:srgbClr val="5E6478"/>
+              </a:solidFill>
+              <a:latin typeface="Arial" panose="020B0604020202090204"/>
+              <a:ea typeface="Arial" panose="020B0604020202090204"/>
+              <a:cs typeface="Arial" panose="020B0604020202090204"/>
+            </a:endParaRPr>
           </a:p>
         </p:txBody>
       </p:sp>
@@ -1094,7 +1146,7 @@
           <p:nvPr/>
         </p:nvPicPr>
         <p:blipFill>
-          <a:blip r:embed="rId2"/>
+          <a:blip r:embed="rId1"/>
           <a:stretch>
             <a:fillRect/>
           </a:stretch>
@@ -1162,12 +1214,20 @@
                 <a:solidFill>
                   <a:srgbClr val="FFFFFF"/>
                 </a:solidFill>
-                <a:latin typeface="Arial"/>
-                <a:ea typeface="Arial"/>
-                <a:cs typeface="Arial"/>
+                <a:latin typeface="Arial" panose="020B0604020202090204"/>
+                <a:ea typeface="Arial" panose="020B0604020202090204"/>
+                <a:cs typeface="Arial" panose="020B0604020202090204"/>
               </a:rPr>
               <a:t>EE6008 · HUMAN POSE ANALYTICS</a:t>
             </a:r>
+            <a:endParaRPr lang="en-US" sz="980" dirty="0">
+              <a:solidFill>
+                <a:srgbClr val="FFFFFF"/>
+              </a:solidFill>
+              <a:latin typeface="Arial" panose="020B0604020202090204"/>
+              <a:ea typeface="Arial" panose="020B0604020202090204"/>
+              <a:cs typeface="Arial" panose="020B0604020202090204"/>
+            </a:endParaRPr>
           </a:p>
         </p:txBody>
       </p:sp>
@@ -1180,7 +1240,7 @@
           <p:nvPr/>
         </p:nvPicPr>
         <p:blipFill>
-          <a:blip r:embed="rId3"/>
+          <a:blip r:embed="rId2"/>
           <a:stretch>
             <a:fillRect/>
           </a:stretch>
@@ -1254,7 +1314,7 @@
           <p:nvPr/>
         </p:nvPicPr>
         <p:blipFill>
-          <a:blip r:embed="rId4"/>
+          <a:blip r:embed="rId1"/>
           <a:stretch>
             <a:fillRect/>
           </a:stretch>
@@ -1300,12 +1360,20 @@
                 <a:solidFill>
                   <a:srgbClr val="181C62"/>
                 </a:solidFill>
-                <a:latin typeface="Arial"/>
-                <a:ea typeface="Arial"/>
-                <a:cs typeface="Arial"/>
+                <a:latin typeface="Arial" panose="020B0604020202090204"/>
+                <a:ea typeface="Arial" panose="020B0604020202090204"/>
+                <a:cs typeface="Arial" panose="020B0604020202090204"/>
               </a:rPr>
               <a:t>EE6008 · HUMAN POSE ANALYTICS</a:t>
             </a:r>
+            <a:endParaRPr lang="en-US" sz="1200" b="1" dirty="0">
+              <a:solidFill>
+                <a:srgbClr val="181C62"/>
+              </a:solidFill>
+              <a:latin typeface="Arial" panose="020B0604020202090204"/>
+              <a:ea typeface="Arial" panose="020B0604020202090204"/>
+              <a:cs typeface="Arial" panose="020B0604020202090204"/>
+            </a:endParaRPr>
           </a:p>
         </p:txBody>
       </p:sp>
@@ -1362,12 +1430,20 @@
                 <a:solidFill>
                   <a:srgbClr val="181C62"/>
                 </a:solidFill>
-                <a:latin typeface="Arial"/>
-                <a:ea typeface="Arial"/>
-                <a:cs typeface="Arial"/>
+                <a:latin typeface="Arial" panose="020B0604020202090204"/>
+                <a:ea typeface="Arial" panose="020B0604020202090204"/>
+                <a:cs typeface="Arial" panose="020B0604020202090204"/>
               </a:rPr>
               <a:t>Thank You</a:t>
             </a:r>
+            <a:endParaRPr lang="en-US" sz="4050" b="1" dirty="0">
+              <a:solidFill>
+                <a:srgbClr val="181C62"/>
+              </a:solidFill>
+              <a:latin typeface="Arial" panose="020B0604020202090204"/>
+              <a:ea typeface="Arial" panose="020B0604020202090204"/>
+              <a:cs typeface="Arial" panose="020B0604020202090204"/>
+            </a:endParaRPr>
           </a:p>
         </p:txBody>
       </p:sp>
@@ -1435,7 +1511,7 @@
           <p:nvPr/>
         </p:nvPicPr>
         <p:blipFill>
-          <a:blip r:embed="rId2"/>
+          <a:blip r:embed="rId1"/>
           <a:stretch>
             <a:fillRect/>
           </a:stretch>
@@ -1503,12 +1579,20 @@
                 <a:solidFill>
                   <a:srgbClr val="FFFFFF"/>
                 </a:solidFill>
-                <a:latin typeface="Arial"/>
-                <a:ea typeface="Arial"/>
-                <a:cs typeface="Arial"/>
+                <a:latin typeface="Arial" panose="020B0604020202090204"/>
+                <a:ea typeface="Arial" panose="020B0604020202090204"/>
+                <a:cs typeface="Arial" panose="020B0604020202090204"/>
               </a:rPr>
               <a:t>EE6008 · HUMAN POSE ANALYTICS</a:t>
             </a:r>
+            <a:endParaRPr lang="en-US" sz="980" dirty="0">
+              <a:solidFill>
+                <a:srgbClr val="FFFFFF"/>
+              </a:solidFill>
+              <a:latin typeface="Arial" panose="020B0604020202090204"/>
+              <a:ea typeface="Arial" panose="020B0604020202090204"/>
+              <a:cs typeface="Arial" panose="020B0604020202090204"/>
+            </a:endParaRPr>
           </a:p>
         </p:txBody>
       </p:sp>
@@ -1807,12 +1891,20 @@
                 <a:solidFill>
                   <a:srgbClr val="D71440"/>
                 </a:solidFill>
-                <a:latin typeface="Arial"/>
-                <a:ea typeface="Arial"/>
-                <a:cs typeface="Arial"/>
+                <a:latin typeface="Arial" panose="020B0604020202090204"/>
+                <a:ea typeface="Arial" panose="020B0604020202090204"/>
+                <a:cs typeface="Arial" panose="020B0604020202090204"/>
               </a:rPr>
               <a:t>WEEKLY TAKEAWAY</a:t>
             </a:r>
+            <a:endParaRPr lang="en-US" sz="980" b="1" dirty="0">
+              <a:solidFill>
+                <a:srgbClr val="D71440"/>
+              </a:solidFill>
+              <a:latin typeface="Arial" panose="020B0604020202090204"/>
+              <a:ea typeface="Arial" panose="020B0604020202090204"/>
+              <a:cs typeface="Arial" panose="020B0604020202090204"/>
+            </a:endParaRPr>
           </a:p>
         </p:txBody>
       </p:sp>
@@ -1847,12 +1939,20 @@
                 <a:solidFill>
                   <a:srgbClr val="FFFFFF"/>
                 </a:solidFill>
-                <a:latin typeface="Arial"/>
-                <a:ea typeface="Arial"/>
-                <a:cs typeface="Arial"/>
+                <a:latin typeface="Arial" panose="020B0604020202090204"/>
+                <a:ea typeface="Arial" panose="020B0604020202090204"/>
+                <a:cs typeface="Arial" panose="020B0604020202090204"/>
               </a:rPr>
               <a:t>PROJECT STATUS</a:t>
             </a:r>
+            <a:endParaRPr lang="en-US" sz="980" b="1" dirty="0">
+              <a:solidFill>
+                <a:srgbClr val="FFFFFF"/>
+              </a:solidFill>
+              <a:latin typeface="Arial" panose="020B0604020202090204"/>
+              <a:ea typeface="Arial" panose="020B0604020202090204"/>
+              <a:cs typeface="Arial" panose="020B0604020202090204"/>
+            </a:endParaRPr>
           </a:p>
         </p:txBody>
       </p:sp>
@@ -1887,12 +1987,20 @@
                 <a:solidFill>
                   <a:srgbClr val="181C62"/>
                 </a:solidFill>
-                <a:latin typeface="Arial"/>
-                <a:ea typeface="Arial"/>
-                <a:cs typeface="Arial"/>
+                <a:latin typeface="Arial" panose="020B0604020202090204"/>
+                <a:ea typeface="Arial" panose="020B0604020202090204"/>
+                <a:cs typeface="Arial" panose="020B0604020202090204"/>
               </a:rPr>
               <a:t>CURRENT MILESTONE · EVIDENCE · BLOCKER · NEXT CHECKPOINT</a:t>
             </a:r>
+            <a:endParaRPr lang="en-US" sz="1050" b="1" dirty="0">
+              <a:solidFill>
+                <a:srgbClr val="181C62"/>
+              </a:solidFill>
+              <a:latin typeface="Arial" panose="020B0604020202090204"/>
+              <a:ea typeface="Arial" panose="020B0604020202090204"/>
+              <a:cs typeface="Arial" panose="020B0604020202090204"/>
+            </a:endParaRPr>
           </a:p>
         </p:txBody>
       </p:sp>
@@ -1927,12 +2035,20 @@
                 <a:solidFill>
                   <a:srgbClr val="5E6478"/>
                 </a:solidFill>
-                <a:latin typeface="Arial"/>
-                <a:ea typeface="Arial"/>
-                <a:cs typeface="Arial"/>
+                <a:latin typeface="Arial" panose="020B0604020202090204"/>
+                <a:ea typeface="Arial" panose="020B0604020202090204"/>
+                <a:cs typeface="Arial" panose="020B0604020202090204"/>
               </a:rPr>
               <a:t>Kick-off</a:t>
             </a:r>
+            <a:endParaRPr lang="en-US" sz="900" dirty="0">
+              <a:solidFill>
+                <a:srgbClr val="5E6478"/>
+              </a:solidFill>
+              <a:latin typeface="Arial" panose="020B0604020202090204"/>
+              <a:ea typeface="Arial" panose="020B0604020202090204"/>
+              <a:cs typeface="Arial" panose="020B0604020202090204"/>
+            </a:endParaRPr>
           </a:p>
         </p:txBody>
       </p:sp>
@@ -1967,12 +2083,20 @@
                 <a:solidFill>
                   <a:srgbClr val="5E6478"/>
                 </a:solidFill>
-                <a:latin typeface="Arial"/>
-                <a:ea typeface="Arial"/>
-                <a:cs typeface="Arial"/>
+                <a:latin typeface="Arial" panose="020B0604020202090204"/>
+                <a:ea typeface="Arial" panose="020B0604020202090204"/>
+                <a:cs typeface="Arial" panose="020B0604020202090204"/>
               </a:rPr>
               <a:t>Data</a:t>
             </a:r>
+            <a:endParaRPr lang="en-US" sz="900" dirty="0">
+              <a:solidFill>
+                <a:srgbClr val="5E6478"/>
+              </a:solidFill>
+              <a:latin typeface="Arial" panose="020B0604020202090204"/>
+              <a:ea typeface="Arial" panose="020B0604020202090204"/>
+              <a:cs typeface="Arial" panose="020B0604020202090204"/>
+            </a:endParaRPr>
           </a:p>
         </p:txBody>
       </p:sp>
@@ -2007,12 +2131,20 @@
                 <a:solidFill>
                   <a:srgbClr val="D71440"/>
                 </a:solidFill>
-                <a:latin typeface="Arial"/>
-                <a:ea typeface="Arial"/>
-                <a:cs typeface="Arial"/>
+                <a:latin typeface="Arial" panose="020B0604020202090204"/>
+                <a:ea typeface="Arial" panose="020B0604020202090204"/>
+                <a:cs typeface="Arial" panose="020B0604020202090204"/>
               </a:rPr>
               <a:t>Baselines</a:t>
             </a:r>
+            <a:endParaRPr lang="en-US" sz="900" b="1" dirty="0">
+              <a:solidFill>
+                <a:srgbClr val="D71440"/>
+              </a:solidFill>
+              <a:latin typeface="Arial" panose="020B0604020202090204"/>
+              <a:ea typeface="Arial" panose="020B0604020202090204"/>
+              <a:cs typeface="Arial" panose="020B0604020202090204"/>
+            </a:endParaRPr>
           </a:p>
         </p:txBody>
       </p:sp>
@@ -2047,12 +2179,20 @@
                 <a:solidFill>
                   <a:srgbClr val="5E6478"/>
                 </a:solidFill>
-                <a:latin typeface="Arial"/>
-                <a:ea typeface="Arial"/>
-                <a:cs typeface="Arial"/>
+                <a:latin typeface="Arial" panose="020B0604020202090204"/>
+                <a:ea typeface="Arial" panose="020B0604020202090204"/>
+                <a:cs typeface="Arial" panose="020B0604020202090204"/>
               </a:rPr>
               <a:t>IP Module</a:t>
             </a:r>
+            <a:endParaRPr lang="en-US" sz="900" dirty="0">
+              <a:solidFill>
+                <a:srgbClr val="5E6478"/>
+              </a:solidFill>
+              <a:latin typeface="Arial" panose="020B0604020202090204"/>
+              <a:ea typeface="Arial" panose="020B0604020202090204"/>
+              <a:cs typeface="Arial" panose="020B0604020202090204"/>
+            </a:endParaRPr>
           </a:p>
         </p:txBody>
       </p:sp>
@@ -2087,12 +2227,20 @@
                 <a:solidFill>
                   <a:srgbClr val="5E6478"/>
                 </a:solidFill>
-                <a:latin typeface="Arial"/>
-                <a:ea typeface="Arial"/>
-                <a:cs typeface="Arial"/>
+                <a:latin typeface="Arial" panose="020B0604020202090204"/>
+                <a:ea typeface="Arial" panose="020B0604020202090204"/>
+                <a:cs typeface="Arial" panose="020B0604020202090204"/>
               </a:rPr>
               <a:t>Experiments</a:t>
             </a:r>
+            <a:endParaRPr lang="en-US" sz="900" dirty="0">
+              <a:solidFill>
+                <a:srgbClr val="5E6478"/>
+              </a:solidFill>
+              <a:latin typeface="Arial" panose="020B0604020202090204"/>
+              <a:ea typeface="Arial" panose="020B0604020202090204"/>
+              <a:cs typeface="Arial" panose="020B0604020202090204"/>
+            </a:endParaRPr>
           </a:p>
         </p:txBody>
       </p:sp>
@@ -2127,12 +2275,20 @@
                 <a:solidFill>
                   <a:srgbClr val="5E6478"/>
                 </a:solidFill>
-                <a:latin typeface="Arial"/>
-                <a:ea typeface="Arial"/>
-                <a:cs typeface="Arial"/>
+                <a:latin typeface="Arial" panose="020B0604020202090204"/>
+                <a:ea typeface="Arial" panose="020B0604020202090204"/>
+                <a:cs typeface="Arial" panose="020B0604020202090204"/>
               </a:rPr>
               <a:t>Final Report</a:t>
             </a:r>
+            <a:endParaRPr lang="en-US" sz="900" dirty="0">
+              <a:solidFill>
+                <a:srgbClr val="5E6478"/>
+              </a:solidFill>
+              <a:latin typeface="Arial" panose="020B0604020202090204"/>
+              <a:ea typeface="Arial" panose="020B0604020202090204"/>
+              <a:cs typeface="Arial" panose="020B0604020202090204"/>
+            </a:endParaRPr>
           </a:p>
         </p:txBody>
       </p:sp>
@@ -2167,12 +2323,20 @@
                 <a:solidFill>
                   <a:srgbClr val="20243A"/>
                 </a:solidFill>
-                <a:latin typeface="Arial"/>
-                <a:ea typeface="Arial"/>
-                <a:cs typeface="Arial"/>
+                <a:latin typeface="Arial" panose="020B0604020202090204"/>
+                <a:ea typeface="Arial" panose="020B0604020202090204"/>
+                <a:cs typeface="Arial" panose="020B0604020202090204"/>
               </a:rPr>
               <a:t>Weekly Snapshot &amp; Milestone</a:t>
             </a:r>
+            <a:endParaRPr lang="en-US" sz="2550" b="1" dirty="0">
+              <a:solidFill>
+                <a:srgbClr val="20243A"/>
+              </a:solidFill>
+              <a:latin typeface="Arial" panose="020B0604020202090204"/>
+              <a:ea typeface="Arial" panose="020B0604020202090204"/>
+              <a:cs typeface="Arial" panose="020B0604020202090204"/>
+            </a:endParaRPr>
           </a:p>
         </p:txBody>
       </p:sp>
@@ -2211,12 +2375,20 @@
                 <a:solidFill>
                   <a:srgbClr val="181C62"/>
                 </a:solidFill>
-                <a:latin typeface="Arial"/>
-                <a:ea typeface="Arial"/>
-                <a:cs typeface="Arial"/>
+                <a:latin typeface="Arial" panose="020B0604020202090204"/>
+                <a:ea typeface="Arial" panose="020B0604020202090204"/>
+                <a:cs typeface="Arial" panose="020B0604020202090204"/>
               </a:rPr>
               <a:t>{{KEY_MESSAGE}}</a:t>
             </a:r>
+            <a:endParaRPr lang="en-US" sz="1800" b="1" dirty="0">
+              <a:solidFill>
+                <a:srgbClr val="181C62"/>
+              </a:solidFill>
+              <a:latin typeface="Arial" panose="020B0604020202090204"/>
+              <a:ea typeface="Arial" panose="020B0604020202090204"/>
+              <a:cs typeface="Arial" panose="020B0604020202090204"/>
+            </a:endParaRPr>
           </a:p>
           <a:p>
             <a:pPr algn="l">
@@ -2229,12 +2401,20 @@
                 <a:solidFill>
                   <a:srgbClr val="5E6478"/>
                 </a:solidFill>
-                <a:latin typeface="Arial"/>
-                <a:ea typeface="Arial"/>
-                <a:cs typeface="Arial"/>
+                <a:latin typeface="Arial" panose="020B0604020202090204"/>
+                <a:ea typeface="Arial" panose="020B0604020202090204"/>
+                <a:cs typeface="Arial" panose="020B0604020202090204"/>
               </a:rPr>
               <a:t>State the one result or decision the supervisor should remember.</a:t>
             </a:r>
+            <a:endParaRPr lang="en-US" sz="1050" dirty="0">
+              <a:solidFill>
+                <a:srgbClr val="5E6478"/>
+              </a:solidFill>
+              <a:latin typeface="Arial" panose="020B0604020202090204"/>
+              <a:ea typeface="Arial" panose="020B0604020202090204"/>
+              <a:cs typeface="Arial" panose="020B0604020202090204"/>
+            </a:endParaRPr>
           </a:p>
         </p:txBody>
       </p:sp>
@@ -2273,12 +2453,20 @@
                 <a:solidFill>
                   <a:srgbClr val="FFFFFF"/>
                 </a:solidFill>
-                <a:latin typeface="Arial"/>
-                <a:ea typeface="Arial"/>
-                <a:cs typeface="Arial"/>
+                <a:latin typeface="Arial" panose="020B0604020202090204"/>
+                <a:ea typeface="Arial" panose="020B0604020202090204"/>
+                <a:cs typeface="Arial" panose="020B0604020202090204"/>
               </a:rPr>
               <a:t>{{STATUS}}</a:t>
             </a:r>
+            <a:endParaRPr lang="en-US" sz="1880" b="1" dirty="0">
+              <a:solidFill>
+                <a:srgbClr val="FFFFFF"/>
+              </a:solidFill>
+              <a:latin typeface="Arial" panose="020B0604020202090204"/>
+              <a:ea typeface="Arial" panose="020B0604020202090204"/>
+              <a:cs typeface="Arial" panose="020B0604020202090204"/>
+            </a:endParaRPr>
           </a:p>
           <a:p>
             <a:pPr algn="ctr">
@@ -2291,12 +2479,20 @@
                 <a:solidFill>
                   <a:srgbClr val="C8C8C8"/>
                 </a:solidFill>
-                <a:latin typeface="Arial"/>
-                <a:ea typeface="Arial"/>
-                <a:cs typeface="Arial"/>
+                <a:latin typeface="Arial" panose="020B0604020202090204"/>
+                <a:ea typeface="Arial" panose="020B0604020202090204"/>
+                <a:cs typeface="Arial" panose="020B0604020202090204"/>
               </a:rPr>
               <a:t>ON TRACK · AT RISK · BLOCKED</a:t>
             </a:r>
+            <a:endParaRPr lang="en-US" sz="980" dirty="0">
+              <a:solidFill>
+                <a:srgbClr val="C8C8C8"/>
+              </a:solidFill>
+              <a:latin typeface="Arial" panose="020B0604020202090204"/>
+              <a:ea typeface="Arial" panose="020B0604020202090204"/>
+              <a:cs typeface="Arial" panose="020B0604020202090204"/>
+            </a:endParaRPr>
           </a:p>
         </p:txBody>
       </p:sp>
@@ -2335,12 +2531,20 @@
                 <a:solidFill>
                   <a:srgbClr val="20243A"/>
                 </a:solidFill>
-                <a:latin typeface="Arial"/>
-                <a:ea typeface="Arial"/>
-                <a:cs typeface="Arial"/>
+                <a:latin typeface="Arial" panose="020B0604020202090204"/>
+                <a:ea typeface="Arial" panose="020B0604020202090204"/>
+                <a:cs typeface="Arial" panose="020B0604020202090204"/>
               </a:rPr>
               <a:t>{{MILESTONE}}</a:t>
             </a:r>
+            <a:endParaRPr lang="en-US" sz="1580" dirty="0">
+              <a:solidFill>
+                <a:srgbClr val="20243A"/>
+              </a:solidFill>
+              <a:latin typeface="Arial" panose="020B0604020202090204"/>
+              <a:ea typeface="Arial" panose="020B0604020202090204"/>
+              <a:cs typeface="Arial" panose="020B0604020202090204"/>
+            </a:endParaRPr>
           </a:p>
           <a:p>
             <a:pPr algn="l">
@@ -2353,12 +2557,20 @@
                 <a:solidFill>
                   <a:srgbClr val="5E6478"/>
                 </a:solidFill>
-                <a:latin typeface="Arial"/>
-                <a:ea typeface="Arial"/>
-                <a:cs typeface="Arial"/>
+                <a:latin typeface="Arial" panose="020B0604020202090204"/>
+                <a:ea typeface="Arial" panose="020B0604020202090204"/>
+                <a:cs typeface="Arial" panose="020B0604020202090204"/>
               </a:rPr>
               <a:t>Evidence completed: … | Current blocker: … | Next checkpoint: …</a:t>
             </a:r>
+            <a:endParaRPr lang="en-US" sz="1120" dirty="0">
+              <a:solidFill>
+                <a:srgbClr val="5E6478"/>
+              </a:solidFill>
+              <a:latin typeface="Arial" panose="020B0604020202090204"/>
+              <a:ea typeface="Arial" panose="020B0604020202090204"/>
+              <a:cs typeface="Arial" panose="020B0604020202090204"/>
+            </a:endParaRPr>
           </a:p>
         </p:txBody>
       </p:sp>
@@ -2393,12 +2605,20 @@
                 <a:solidFill>
                   <a:srgbClr val="FFFFFF"/>
                 </a:solidFill>
-                <a:latin typeface="Arial"/>
-                <a:ea typeface="Arial"/>
-                <a:cs typeface="Arial"/>
+                <a:latin typeface="Arial" panose="020B0604020202090204"/>
+                <a:ea typeface="Arial" panose="020B0604020202090204"/>
+                <a:cs typeface="Arial" panose="020B0604020202090204"/>
               </a:rPr>
               <a:t>{{SOURCE}}</a:t>
             </a:r>
+            <a:endParaRPr lang="en-US" sz="900" dirty="0">
+              <a:solidFill>
+                <a:srgbClr val="FFFFFF"/>
+              </a:solidFill>
+              <a:latin typeface="Arial" panose="020B0604020202090204"/>
+              <a:ea typeface="Arial" panose="020B0604020202090204"/>
+              <a:cs typeface="Arial" panose="020B0604020202090204"/>
+            </a:endParaRPr>
           </a:p>
         </p:txBody>
       </p:sp>
@@ -2433,12 +2653,20 @@
                 <a:solidFill>
                   <a:srgbClr val="FFFFFF"/>
                 </a:solidFill>
-                <a:latin typeface="Arial"/>
-                <a:ea typeface="Arial"/>
-                <a:cs typeface="Arial"/>
+                <a:latin typeface="Arial" panose="020B0604020202090204"/>
+                <a:ea typeface="Arial" panose="020B0604020202090204"/>
+                <a:cs typeface="Arial" panose="020B0604020202090204"/>
               </a:rPr>
               <a:t>{{PAGE_NUM}}</a:t>
             </a:r>
+            <a:endParaRPr lang="en-US" sz="900" dirty="0">
+              <a:solidFill>
+                <a:srgbClr val="FFFFFF"/>
+              </a:solidFill>
+              <a:latin typeface="Arial" panose="020B0604020202090204"/>
+              <a:ea typeface="Arial" panose="020B0604020202090204"/>
+              <a:cs typeface="Arial" panose="020B0604020202090204"/>
+            </a:endParaRPr>
           </a:p>
         </p:txBody>
       </p:sp>
@@ -2506,7 +2734,7 @@
           <p:nvPr/>
         </p:nvPicPr>
         <p:blipFill>
-          <a:blip r:embed="rId2"/>
+          <a:blip r:embed="rId1"/>
           <a:stretch>
             <a:fillRect/>
           </a:stretch>
@@ -2574,12 +2802,20 @@
                 <a:solidFill>
                   <a:srgbClr val="FFFFFF"/>
                 </a:solidFill>
-                <a:latin typeface="Arial"/>
-                <a:ea typeface="Arial"/>
-                <a:cs typeface="Arial"/>
+                <a:latin typeface="Arial" panose="020B0604020202090204"/>
+                <a:ea typeface="Arial" panose="020B0604020202090204"/>
+                <a:cs typeface="Arial" panose="020B0604020202090204"/>
               </a:rPr>
               <a:t>EE6008 · HUMAN POSE ANALYTICS</a:t>
             </a:r>
+            <a:endParaRPr lang="en-US" sz="980" dirty="0">
+              <a:solidFill>
+                <a:srgbClr val="FFFFFF"/>
+              </a:solidFill>
+              <a:latin typeface="Arial" panose="020B0604020202090204"/>
+              <a:ea typeface="Arial" panose="020B0604020202090204"/>
+              <a:cs typeface="Arial" panose="020B0604020202090204"/>
+            </a:endParaRPr>
           </a:p>
         </p:txBody>
       </p:sp>
@@ -2732,12 +2968,20 @@
                 <a:solidFill>
                   <a:srgbClr val="D71440"/>
                 </a:solidFill>
-                <a:latin typeface="Arial"/>
-                <a:ea typeface="Arial"/>
-                <a:cs typeface="Arial"/>
+                <a:latin typeface="Arial" panose="020B0604020202090204"/>
+                <a:ea typeface="Arial" panose="020B0604020202090204"/>
+                <a:cs typeface="Arial" panose="020B0604020202090204"/>
               </a:rPr>
               <a:t>THIS WEEK</a:t>
             </a:r>
+            <a:endParaRPr lang="en-US" sz="980" b="1" dirty="0">
+              <a:solidFill>
+                <a:srgbClr val="D71440"/>
+              </a:solidFill>
+              <a:latin typeface="Arial" panose="020B0604020202090204"/>
+              <a:ea typeface="Arial" panose="020B0604020202090204"/>
+              <a:cs typeface="Arial" panose="020B0604020202090204"/>
+            </a:endParaRPr>
           </a:p>
         </p:txBody>
       </p:sp>
@@ -2772,12 +3016,20 @@
                 <a:solidFill>
                   <a:srgbClr val="181C62"/>
                 </a:solidFill>
-                <a:latin typeface="Arial"/>
-                <a:ea typeface="Arial"/>
-                <a:cs typeface="Arial"/>
+                <a:latin typeface="Arial" panose="020B0604020202090204"/>
+                <a:ea typeface="Arial" panose="020B0604020202090204"/>
+                <a:cs typeface="Arial" panose="020B0604020202090204"/>
               </a:rPr>
               <a:t>PIPELINE / ARCHITECTURE / IMPLEMENTATION EVIDENCE</a:t>
             </a:r>
+            <a:endParaRPr lang="en-US" sz="980" b="1" dirty="0">
+              <a:solidFill>
+                <a:srgbClr val="181C62"/>
+              </a:solidFill>
+              <a:latin typeface="Arial" panose="020B0604020202090204"/>
+              <a:ea typeface="Arial" panose="020B0604020202090204"/>
+              <a:cs typeface="Arial" panose="020B0604020202090204"/>
+            </a:endParaRPr>
           </a:p>
         </p:txBody>
       </p:sp>
@@ -2812,12 +3064,20 @@
                 <a:solidFill>
                   <a:srgbClr val="FFFFFF"/>
                 </a:solidFill>
-                <a:latin typeface="Arial"/>
-                <a:ea typeface="Arial"/>
-                <a:cs typeface="Arial"/>
+                <a:latin typeface="Arial" panose="020B0604020202090204"/>
+                <a:ea typeface="Arial" panose="020B0604020202090204"/>
+                <a:cs typeface="Arial" panose="020B0604020202090204"/>
               </a:rPr>
               <a:t>TECHNICAL TAKEAWAY</a:t>
             </a:r>
+            <a:endParaRPr lang="en-US" sz="980" b="1" dirty="0">
+              <a:solidFill>
+                <a:srgbClr val="FFFFFF"/>
+              </a:solidFill>
+              <a:latin typeface="Arial" panose="020B0604020202090204"/>
+              <a:ea typeface="Arial" panose="020B0604020202090204"/>
+              <a:cs typeface="Arial" panose="020B0604020202090204"/>
+            </a:endParaRPr>
           </a:p>
         </p:txBody>
       </p:sp>
@@ -2830,7 +3090,7 @@
         <p:spPr>
           <a:xfrm>
             <a:off x="501396" y="543878"/>
-            <a:ext cx="3345943" cy="498729"/>
+            <a:ext cx="4773930" cy="391795"/>
           </a:xfrm>
           <a:prstGeom prst="rect">
             <a:avLst/>
@@ -2848,16 +3108,24 @@
           <a:p>
             <a:pPr algn="l"/>
             <a:r>
-              <a:rPr lang="en-US" sz="2550" b="1" dirty="0">
+              <a:rPr lang="en-US" altLang="zh-CN" sz="2550" b="1" dirty="0">
                 <a:solidFill>
                   <a:srgbClr val="20243A"/>
                 </a:solidFill>
-                <a:latin typeface="Arial"/>
-                <a:ea typeface="Arial"/>
-                <a:cs typeface="Arial"/>
-              </a:rPr>
-              <a:t>Technical Progress</a:t>
-            </a:r>
+                <a:latin typeface="Arial" panose="020B0604020202090204"/>
+                <a:ea typeface="Arial" panose="020B0604020202090204"/>
+                <a:cs typeface="Arial" panose="020B0604020202090204"/>
+              </a:rPr>
+              <a:t>Scoping the Interaction Subset</a:t>
+            </a:r>
+            <a:endParaRPr lang="en-US" altLang="zh-CN" sz="2550" b="1" dirty="0">
+              <a:solidFill>
+                <a:srgbClr val="20243A"/>
+              </a:solidFill>
+              <a:latin typeface="Arial" panose="020B0604020202090204"/>
+              <a:ea typeface="Arial" panose="020B0604020202090204"/>
+              <a:cs typeface="Arial" panose="020B0604020202090204"/>
+            </a:endParaRPr>
           </a:p>
         </p:txBody>
       </p:sp>
@@ -2896,12 +3164,41 @@
                 <a:solidFill>
                   <a:srgbClr val="20243A"/>
                 </a:solidFill>
-                <a:latin typeface="Arial"/>
-                <a:ea typeface="Arial"/>
-                <a:cs typeface="Arial"/>
-              </a:rPr>
-              <a:t>{{TECHNICAL_PROGRESS}}</a:t>
-            </a:r>
+                <a:latin typeface="Arial" panose="020B0604020202090204"/>
+                <a:ea typeface="Arial" panose="020B0604020202090204"/>
+                <a:cs typeface="Arial" panose="020B0604020202090204"/>
+              </a:rPr>
+              <a:t>NTU RGB+D 120</a:t>
+            </a:r>
+            <a:br>
+              <a:rPr lang="en-US" sz="1580" dirty="0">
+                <a:solidFill>
+                  <a:srgbClr val="20243A"/>
+                </a:solidFill>
+                <a:latin typeface="Arial" panose="020B0604020202090204"/>
+                <a:ea typeface="Arial" panose="020B0604020202090204"/>
+                <a:cs typeface="Arial" panose="020B0604020202090204"/>
+              </a:rPr>
+            </a:br>
+            <a:r>
+              <a:rPr lang="en-US" sz="1580" dirty="0">
+                <a:solidFill>
+                  <a:srgbClr val="20243A"/>
+                </a:solidFill>
+                <a:latin typeface="Arial" panose="020B0604020202090204"/>
+                <a:ea typeface="Arial" panose="020B0604020202090204"/>
+                <a:cs typeface="Arial" panose="020B0604020202090204"/>
+              </a:rPr>
+              <a:t>dataset audit</a:t>
+            </a:r>
+            <a:endParaRPr lang="en-US" sz="1580" dirty="0">
+              <a:solidFill>
+                <a:srgbClr val="20243A"/>
+              </a:solidFill>
+              <a:latin typeface="Arial" panose="020B0604020202090204"/>
+              <a:ea typeface="Arial" panose="020B0604020202090204"/>
+              <a:cs typeface="Arial" panose="020B0604020202090204"/>
+            </a:endParaRPr>
           </a:p>
           <a:p>
             <a:pPr algn="l">
@@ -2917,24 +3214,41 @@
                 <a:solidFill>
                   <a:srgbClr val="5E6478"/>
                 </a:solidFill>
-                <a:latin typeface="Arial"/>
-                <a:ea typeface="Arial"/>
-                <a:cs typeface="Arial"/>
-              </a:rPr>
-              <a:t>Completed · In progress · Blocked</a:t>
-            </a:r>
-            <a:br/>
-            <a:r>
+                <a:latin typeface="Arial" panose="020B0604020202090204"/>
+                <a:ea typeface="Arial" panose="020B0604020202090204"/>
+                <a:cs typeface="Arial" panose="020B0604020202090204"/>
+              </a:rPr>
+              <a:t>Completed · format, splits, cleaning</a:t>
+            </a:r>
+            <a:br>
               <a:rPr lang="en-US" sz="1050" dirty="0">
                 <a:solidFill>
                   <a:srgbClr val="5E6478"/>
                 </a:solidFill>
-                <a:latin typeface="Arial"/>
-                <a:ea typeface="Arial"/>
-                <a:cs typeface="Arial"/>
-              </a:rPr>
-              <a:t>Include the concrete output, not only the activity.</a:t>
-            </a:r>
+                <a:latin typeface="Arial" panose="020B0604020202090204"/>
+                <a:ea typeface="Arial" panose="020B0604020202090204"/>
+                <a:cs typeface="Arial" panose="020B0604020202090204"/>
+              </a:rPr>
+            </a:br>
+            <a:r>
+              <a:rPr lang="en-US" sz="1050" dirty="0">
+                <a:solidFill>
+                  <a:srgbClr val="5E6478"/>
+                </a:solidFill>
+                <a:latin typeface="Arial" panose="020B0604020202090204"/>
+                <a:ea typeface="Arial" panose="020B0604020202090204"/>
+                <a:cs typeface="Arial" panose="020B0604020202090204"/>
+              </a:rPr>
+              <a:t>In progress · raw .skeleton parser</a:t>
+            </a:r>
+            <a:endParaRPr lang="en-US" sz="1050" dirty="0">
+              <a:solidFill>
+                <a:srgbClr val="5E6478"/>
+              </a:solidFill>
+              <a:latin typeface="Arial" panose="020B0604020202090204"/>
+              <a:ea typeface="Arial" panose="020B0604020202090204"/>
+              <a:cs typeface="Arial" panose="020B0604020202090204"/>
+            </a:endParaRPr>
           </a:p>
         </p:txBody>
       </p:sp>
@@ -2973,12 +3287,20 @@
                 <a:solidFill>
                   <a:srgbClr val="5E6478"/>
                 </a:solidFill>
-                <a:latin typeface="Arial"/>
-                <a:ea typeface="Arial"/>
-                <a:cs typeface="Arial"/>
-              </a:rPr>
-              <a:t>{{CONTENT_AREA}}</a:t>
-            </a:r>
+                <a:latin typeface="Arial" panose="020B0604020202090204"/>
+                <a:ea typeface="Arial" panose="020B0604020202090204"/>
+                <a:cs typeface="Arial" panose="020B0604020202090204"/>
+              </a:rPr>
+              <a:t>26 mutual classes · 24,732 clips</a:t>
+            </a:r>
+            <a:endParaRPr lang="en-US" sz="1420" dirty="0">
+              <a:solidFill>
+                <a:srgbClr val="5E6478"/>
+              </a:solidFill>
+              <a:latin typeface="Arial" panose="020B0604020202090204"/>
+              <a:ea typeface="Arial" panose="020B0604020202090204"/>
+              <a:cs typeface="Arial" panose="020B0604020202090204"/>
+            </a:endParaRPr>
           </a:p>
           <a:p>
             <a:pPr algn="l">
@@ -2994,24 +3316,83 @@
                 <a:solidFill>
                   <a:srgbClr val="5E6478"/>
                 </a:solidFill>
-                <a:latin typeface="Arial"/>
-                <a:ea typeface="Arial"/>
-                <a:cs typeface="Arial"/>
-              </a:rPr>
-              <a:t>Recommended: module diagram, interface contract,</a:t>
-            </a:r>
-            <a:br/>
-            <a:r>
+                <a:latin typeface="Arial" panose="020B0604020202090204"/>
+                <a:ea typeface="Arial" panose="020B0604020202090204"/>
+                <a:cs typeface="Arial" panose="020B0604020202090204"/>
+              </a:rPr>
+              <a:t>A050–A060 + A106–A120; the official</a:t>
+            </a:r>
+            <a:br>
               <a:rPr lang="en-US" sz="1050" dirty="0">
                 <a:solidFill>
                   <a:srgbClr val="5E6478"/>
                 </a:solidFill>
-                <a:latin typeface="Arial"/>
-                <a:ea typeface="Arial"/>
-                <a:cs typeface="Arial"/>
-              </a:rPr>
-              <a:t>training pipeline, code evidence, or data-flow change.</a:t>
-            </a:r>
+                <a:latin typeface="Arial" panose="020B0604020202090204"/>
+                <a:ea typeface="Arial" panose="020B0604020202090204"/>
+                <a:cs typeface="Arial" panose="020B0604020202090204"/>
+              </a:rPr>
+            </a:br>
+            <a:r>
+              <a:rPr lang="en-US" sz="1050" dirty="0">
+                <a:solidFill>
+                  <a:srgbClr val="5E6478"/>
+                </a:solidFill>
+                <a:latin typeface="Arial" panose="020B0604020202090204"/>
+                <a:ea typeface="Arial" panose="020B0604020202090204"/>
+                <a:cs typeface="Arial" panose="020B0604020202090204"/>
+              </a:rPr>
+              <a:t>535-entry list removes 96 of them</a:t>
+            </a:r>
+            <a:br>
+              <a:rPr lang="en-US" sz="1050" dirty="0">
+                <a:solidFill>
+                  <a:srgbClr val="5E6478"/>
+                </a:solidFill>
+                <a:latin typeface="Arial" panose="020B0604020202090204"/>
+                <a:ea typeface="Arial" panose="020B0604020202090204"/>
+                <a:cs typeface="Arial" panose="020B0604020202090204"/>
+              </a:rPr>
+            </a:br>
+            <a:r>
+              <a:rPr lang="en-US" sz="1050" dirty="0">
+                <a:solidFill>
+                  <a:srgbClr val="5E6478"/>
+                </a:solidFill>
+                <a:latin typeface="Arial" panose="020B0604020202090204"/>
+                <a:ea typeface="Arial" panose="020B0604020202090204"/>
+                <a:cs typeface="Arial" panose="020B0604020202090204"/>
+              </a:rPr>
+              <a:t>X-Sub 53/53 subjects · X-Set even/odd setups</a:t>
+            </a:r>
+            <a:br>
+              <a:rPr lang="en-US" sz="1050" dirty="0">
+                <a:solidFill>
+                  <a:srgbClr val="5E6478"/>
+                </a:solidFill>
+                <a:latin typeface="Arial" panose="020B0604020202090204"/>
+                <a:ea typeface="Arial" panose="020B0604020202090204"/>
+                <a:cs typeface="Arial" panose="020B0604020202090204"/>
+              </a:rPr>
+            </a:br>
+            <a:r>
+              <a:rPr lang="en-US" sz="1050" dirty="0">
+                <a:solidFill>
+                  <a:srgbClr val="5E6478"/>
+                </a:solidFill>
+                <a:latin typeface="Arial" panose="020B0604020202090204"/>
+                <a:ea typeface="Arial" panose="020B0604020202090204"/>
+                <a:cs typeface="Arial" panose="020B0604020202090204"/>
+              </a:rPr>
+              <a:t>Skeleton-only download: 10.3 GB of the 2.3 TB</a:t>
+            </a:r>
+            <a:endParaRPr lang="en-US" sz="1050" dirty="0">
+              <a:solidFill>
+                <a:srgbClr val="5E6478"/>
+              </a:solidFill>
+              <a:latin typeface="Arial" panose="020B0604020202090204"/>
+              <a:ea typeface="Arial" panose="020B0604020202090204"/>
+              <a:cs typeface="Arial" panose="020B0604020202090204"/>
+            </a:endParaRPr>
           </a:p>
         </p:txBody>
       </p:sp>
@@ -3050,12 +3431,41 @@
                 <a:solidFill>
                   <a:srgbClr val="FFFFFF"/>
                 </a:solidFill>
-                <a:latin typeface="Arial"/>
-                <a:ea typeface="Arial"/>
-                <a:cs typeface="Arial"/>
-              </a:rPr>
-              <a:t>{{KEY_FINDING}}</a:t>
-            </a:r>
+                <a:latin typeface="Arial" panose="020B0604020202090204"/>
+                <a:ea typeface="Arial" panose="020B0604020202090204"/>
+                <a:cs typeface="Arial" panose="020B0604020202090204"/>
+              </a:rPr>
+              <a:t>Identity is lost</a:t>
+            </a:r>
+            <a:br>
+              <a:rPr lang="en-US" sz="1580" b="1" dirty="0">
+                <a:solidFill>
+                  <a:srgbClr val="FFFFFF"/>
+                </a:solidFill>
+                <a:latin typeface="Arial" panose="020B0604020202090204"/>
+                <a:ea typeface="Arial" panose="020B0604020202090204"/>
+                <a:cs typeface="Arial" panose="020B0604020202090204"/>
+              </a:rPr>
+            </a:br>
+            <a:r>
+              <a:rPr lang="en-US" sz="1580" b="1" dirty="0">
+                <a:solidFill>
+                  <a:srgbClr val="FFFFFF"/>
+                </a:solidFill>
+                <a:latin typeface="Arial" panose="020B0604020202090204"/>
+                <a:ea typeface="Arial" panose="020B0604020202090204"/>
+                <a:cs typeface="Arial" panose="020B0604020202090204"/>
+              </a:rPr>
+              <a:t>in preprocessing</a:t>
+            </a:r>
+            <a:endParaRPr lang="en-US" sz="1580" b="1" dirty="0">
+              <a:solidFill>
+                <a:srgbClr val="FFFFFF"/>
+              </a:solidFill>
+              <a:latin typeface="Arial" panose="020B0604020202090204"/>
+              <a:ea typeface="Arial" panose="020B0604020202090204"/>
+              <a:cs typeface="Arial" panose="020B0604020202090204"/>
+            </a:endParaRPr>
           </a:p>
           <a:p>
             <a:pPr algn="l">
@@ -3071,12 +3481,20 @@
                 <a:solidFill>
                   <a:srgbClr val="C8C8C8"/>
                 </a:solidFill>
-                <a:latin typeface="Arial"/>
-                <a:ea typeface="Arial"/>
-                <a:cs typeface="Arial"/>
+                <a:latin typeface="Arial" panose="020B0604020202090204"/>
+                <a:ea typeface="Arial" panose="020B0604020202090204"/>
+                <a:cs typeface="Arial" panose="020B0604020202090204"/>
               </a:rPr>
               <a:t>Why it matters:</a:t>
             </a:r>
+            <a:endParaRPr lang="en-US" sz="1050" dirty="0">
+              <a:solidFill>
+                <a:srgbClr val="C8C8C8"/>
+              </a:solidFill>
+              <a:latin typeface="Arial" panose="020B0604020202090204"/>
+              <a:ea typeface="Arial" panose="020B0604020202090204"/>
+              <a:cs typeface="Arial" panose="020B0604020202090204"/>
+            </a:endParaRPr>
           </a:p>
           <a:p>
             <a:pPr algn="l">
@@ -3092,24 +3510,62 @@
                 <a:solidFill>
                   <a:srgbClr val="FFFFFF"/>
                 </a:solidFill>
-                <a:latin typeface="Arial"/>
-                <a:ea typeface="Arial"/>
-                <a:cs typeface="Arial"/>
-              </a:rPr>
-              <a:t>What changed in the design,</a:t>
-            </a:r>
-            <a:br/>
-            <a:r>
+                <a:latin typeface="Arial" panose="020B0604020202090204"/>
+                <a:ea typeface="Arial" panose="020B0604020202090204"/>
+                <a:cs typeface="Arial" panose="020B0604020202090204"/>
+              </a:rPr>
+              <a:t>bodyID and trackingState are</a:t>
+            </a:r>
+            <a:br>
               <a:rPr lang="en-US" sz="1120" dirty="0">
                 <a:solidFill>
                   <a:srgbClr val="FFFFFF"/>
                 </a:solidFill>
-                <a:latin typeface="Arial"/>
-                <a:ea typeface="Arial"/>
-                <a:cs typeface="Arial"/>
-              </a:rPr>
-              <a:t>evidence, or next decision?</a:t>
-            </a:r>
+                <a:latin typeface="Arial" panose="020B0604020202090204"/>
+                <a:ea typeface="Arial" panose="020B0604020202090204"/>
+                <a:cs typeface="Arial" panose="020B0604020202090204"/>
+              </a:rPr>
+            </a:br>
+            <a:r>
+              <a:rPr lang="en-US" sz="1120" dirty="0">
+                <a:solidFill>
+                  <a:srgbClr val="FFFFFF"/>
+                </a:solidFill>
+                <a:latin typeface="Arial" panose="020B0604020202090204"/>
+                <a:ea typeface="Arial" panose="020B0604020202090204"/>
+                <a:cs typeface="Arial" panose="020B0604020202090204"/>
+              </a:rPr>
+              <a:t>dropped by CTR-GCN and pyskl —</a:t>
+            </a:r>
+            <a:br>
+              <a:rPr lang="en-US" sz="1120" dirty="0">
+                <a:solidFill>
+                  <a:srgbClr val="FFFFFF"/>
+                </a:solidFill>
+                <a:latin typeface="Arial" panose="020B0604020202090204"/>
+                <a:ea typeface="Arial" panose="020B0604020202090204"/>
+                <a:cs typeface="Arial" panose="020B0604020202090204"/>
+              </a:rPr>
+            </a:br>
+            <a:r>
+              <a:rPr lang="en-US" sz="1120" dirty="0">
+                <a:solidFill>
+                  <a:srgbClr val="FFFFFF"/>
+                </a:solidFill>
+                <a:latin typeface="Arial" panose="020B0604020202090204"/>
+                <a:ea typeface="Arial" panose="020B0604020202090204"/>
+                <a:cs typeface="Arial" panose="020B0604020202090204"/>
+              </a:rPr>
+              <a:t>we must parse the raw files</a:t>
+            </a:r>
+            <a:endParaRPr lang="en-US" sz="1120" dirty="0">
+              <a:solidFill>
+                <a:srgbClr val="FFFFFF"/>
+              </a:solidFill>
+              <a:latin typeface="Arial" panose="020B0604020202090204"/>
+              <a:ea typeface="Arial" panose="020B0604020202090204"/>
+              <a:cs typeface="Arial" panose="020B0604020202090204"/>
+            </a:endParaRPr>
           </a:p>
         </p:txBody>
       </p:sp>
@@ -3144,12 +3600,20 @@
                 <a:solidFill>
                   <a:srgbClr val="FFFFFF"/>
                 </a:solidFill>
-                <a:latin typeface="Arial"/>
-                <a:ea typeface="Arial"/>
-                <a:cs typeface="Arial"/>
+                <a:latin typeface="Arial" panose="020B0604020202090204"/>
+                <a:ea typeface="Arial" panose="020B0604020202090204"/>
+                <a:cs typeface="Arial" panose="020B0604020202090204"/>
               </a:rPr>
               <a:t>{{SOURCE}}</a:t>
             </a:r>
+            <a:endParaRPr lang="en-US" sz="900" dirty="0">
+              <a:solidFill>
+                <a:srgbClr val="FFFFFF"/>
+              </a:solidFill>
+              <a:latin typeface="Arial" panose="020B0604020202090204"/>
+              <a:ea typeface="Arial" panose="020B0604020202090204"/>
+              <a:cs typeface="Arial" panose="020B0604020202090204"/>
+            </a:endParaRPr>
           </a:p>
         </p:txBody>
       </p:sp>
@@ -3184,15 +3648,47 @@
                 <a:solidFill>
                   <a:srgbClr val="FFFFFF"/>
                 </a:solidFill>
-                <a:latin typeface="Arial"/>
-                <a:ea typeface="Arial"/>
-                <a:cs typeface="Arial"/>
+                <a:latin typeface="Arial" panose="020B0604020202090204"/>
+                <a:ea typeface="Arial" panose="020B0604020202090204"/>
+                <a:cs typeface="Arial" panose="020B0604020202090204"/>
               </a:rPr>
               <a:t>{{PAGE_NUM}}</a:t>
             </a:r>
-          </a:p>
-        </p:txBody>
-      </p:sp>
+            <a:endParaRPr lang="en-US" sz="900" dirty="0">
+              <a:solidFill>
+                <a:srgbClr val="FFFFFF"/>
+              </a:solidFill>
+              <a:latin typeface="Arial" panose="020B0604020202090204"/>
+              <a:ea typeface="Arial" panose="020B0604020202090204"/>
+              <a:cs typeface="Arial" panose="020B0604020202090204"/>
+            </a:endParaRPr>
+          </a:p>
+        </p:txBody>
+      </p:sp>
+      <p:pic>
+        <p:nvPicPr>
+          <p:cNvPr id="900" name="MissingPerClassChart"/>
+          <p:cNvPicPr>
+            <a:picLocks noChangeAspect="1"/>
+          </p:cNvPicPr>
+          <p:nvPr/>
+        </p:nvPicPr>
+        <p:blipFill>
+          <a:blip r:embed="rId2"/>
+          <a:stretch>
+            <a:fillRect/>
+          </a:stretch>
+        </p:blipFill>
+        <p:spPr>
+          <a:xfrm>
+            <a:off x="4060000" y="3330000"/>
+            <a:ext cx="4460000" cy="2619301"/>
+          </a:xfrm>
+          <a:prstGeom prst="rect">
+            <a:avLst/>
+          </a:prstGeom>
+        </p:spPr>
+      </p:pic>
     </p:spTree>
   </p:cSld>
   <p:clrMapOvr>
@@ -3257,7 +3753,7 @@
           <p:nvPr/>
         </p:nvPicPr>
         <p:blipFill>
-          <a:blip r:embed="rId2"/>
+          <a:blip r:embed="rId1"/>
           <a:stretch>
             <a:fillRect/>
           </a:stretch>
@@ -3325,12 +3821,20 @@
                 <a:solidFill>
                   <a:srgbClr val="FFFFFF"/>
                 </a:solidFill>
-                <a:latin typeface="Arial"/>
-                <a:ea typeface="Arial"/>
-                <a:cs typeface="Arial"/>
+                <a:latin typeface="Arial" panose="020B0604020202090204"/>
+                <a:ea typeface="Arial" panose="020B0604020202090204"/>
+                <a:cs typeface="Arial" panose="020B0604020202090204"/>
               </a:rPr>
               <a:t>EE6008 · HUMAN POSE ANALYTICS</a:t>
             </a:r>
+            <a:endParaRPr lang="en-US" sz="980" dirty="0">
+              <a:solidFill>
+                <a:srgbClr val="FFFFFF"/>
+              </a:solidFill>
+              <a:latin typeface="Arial" panose="020B0604020202090204"/>
+              <a:ea typeface="Arial" panose="020B0604020202090204"/>
+              <a:cs typeface="Arial" panose="020B0604020202090204"/>
+            </a:endParaRPr>
           </a:p>
         </p:txBody>
       </p:sp>
@@ -3483,12 +3987,20 @@
                 <a:solidFill>
                   <a:srgbClr val="D71440"/>
                 </a:solidFill>
-                <a:latin typeface="Arial"/>
-                <a:ea typeface="Arial"/>
-                <a:cs typeface="Arial"/>
+                <a:latin typeface="Arial" panose="020B0604020202090204"/>
+                <a:ea typeface="Arial" panose="020B0604020202090204"/>
+                <a:cs typeface="Arial" panose="020B0604020202090204"/>
               </a:rPr>
               <a:t>ONE-LINE RESULT</a:t>
             </a:r>
+            <a:endParaRPr lang="en-US" sz="900" b="1" dirty="0">
+              <a:solidFill>
+                <a:srgbClr val="D71440"/>
+              </a:solidFill>
+              <a:latin typeface="Arial" panose="020B0604020202090204"/>
+              <a:ea typeface="Arial" panose="020B0604020202090204"/>
+              <a:cs typeface="Arial" panose="020B0604020202090204"/>
+            </a:endParaRPr>
           </a:p>
         </p:txBody>
       </p:sp>
@@ -3523,12 +4035,20 @@
                 <a:solidFill>
                   <a:srgbClr val="181C62"/>
                 </a:solidFill>
-                <a:latin typeface="Arial"/>
-                <a:ea typeface="Arial"/>
-                <a:cs typeface="Arial"/>
+                <a:latin typeface="Arial" panose="020B0604020202090204"/>
+                <a:ea typeface="Arial" panose="020B0604020202090204"/>
+                <a:cs typeface="Arial" panose="020B0604020202090204"/>
               </a:rPr>
               <a:t>EVIDENCE · BASELINE · CONTROL · METRIC</a:t>
             </a:r>
+            <a:endParaRPr lang="en-US" sz="980" b="1" dirty="0">
+              <a:solidFill>
+                <a:srgbClr val="181C62"/>
+              </a:solidFill>
+              <a:latin typeface="Arial" panose="020B0604020202090204"/>
+              <a:ea typeface="Arial" panose="020B0604020202090204"/>
+              <a:cs typeface="Arial" panose="020B0604020202090204"/>
+            </a:endParaRPr>
           </a:p>
         </p:txBody>
       </p:sp>
@@ -3563,12 +4083,20 @@
                 <a:solidFill>
                   <a:srgbClr val="FFFFFF"/>
                 </a:solidFill>
-                <a:latin typeface="Arial"/>
-                <a:ea typeface="Arial"/>
-                <a:cs typeface="Arial"/>
+                <a:latin typeface="Arial" panose="020B0604020202090204"/>
+                <a:ea typeface="Arial" panose="020B0604020202090204"/>
+                <a:cs typeface="Arial" panose="020B0604020202090204"/>
               </a:rPr>
               <a:t>KEY FINDINGS</a:t>
             </a:r>
+            <a:endParaRPr lang="en-US" sz="1050" b="1" dirty="0">
+              <a:solidFill>
+                <a:srgbClr val="FFFFFF"/>
+              </a:solidFill>
+              <a:latin typeface="Arial" panose="020B0604020202090204"/>
+              <a:ea typeface="Arial" panose="020B0604020202090204"/>
+              <a:cs typeface="Arial" panose="020B0604020202090204"/>
+            </a:endParaRPr>
           </a:p>
         </p:txBody>
       </p:sp>
@@ -3603,12 +4131,20 @@
                 <a:solidFill>
                   <a:srgbClr val="20243A"/>
                 </a:solidFill>
-                <a:latin typeface="Arial"/>
-                <a:ea typeface="Arial"/>
-                <a:cs typeface="Arial"/>
+                <a:latin typeface="Arial" panose="020B0604020202090204"/>
+                <a:ea typeface="Arial" panose="020B0604020202090204"/>
+                <a:cs typeface="Arial" panose="020B0604020202090204"/>
               </a:rPr>
               <a:t>Experimental Evidence</a:t>
             </a:r>
+            <a:endParaRPr lang="en-US" sz="2550" b="1" dirty="0">
+              <a:solidFill>
+                <a:srgbClr val="20243A"/>
+              </a:solidFill>
+              <a:latin typeface="Arial" panose="020B0604020202090204"/>
+              <a:ea typeface="Arial" panose="020B0604020202090204"/>
+              <a:cs typeface="Arial" panose="020B0604020202090204"/>
+            </a:endParaRPr>
           </a:p>
         </p:txBody>
       </p:sp>
@@ -3643,12 +4179,20 @@
                 <a:solidFill>
                   <a:srgbClr val="D71440"/>
                 </a:solidFill>
-                <a:latin typeface="Arial"/>
-                <a:ea typeface="Arial"/>
-                <a:cs typeface="Arial"/>
+                <a:latin typeface="Arial" panose="020B0604020202090204"/>
+                <a:ea typeface="Arial" panose="020B0604020202090204"/>
+                <a:cs typeface="Arial" panose="020B0604020202090204"/>
               </a:rPr>
               <a:t>{{KEY_MESSAGE}}</a:t>
             </a:r>
+            <a:endParaRPr lang="en-US" sz="1580" b="1" dirty="0">
+              <a:solidFill>
+                <a:srgbClr val="D71440"/>
+              </a:solidFill>
+              <a:latin typeface="Arial" panose="020B0604020202090204"/>
+              <a:ea typeface="Arial" panose="020B0604020202090204"/>
+              <a:cs typeface="Arial" panose="020B0604020202090204"/>
+            </a:endParaRPr>
           </a:p>
         </p:txBody>
       </p:sp>
@@ -3687,12 +4231,20 @@
                 <a:solidFill>
                   <a:srgbClr val="5E6478"/>
                 </a:solidFill>
-                <a:latin typeface="Arial"/>
-                <a:ea typeface="Arial"/>
-                <a:cs typeface="Arial"/>
+                <a:latin typeface="Arial" panose="020B0604020202090204"/>
+                <a:ea typeface="Arial" panose="020B0604020202090204"/>
+                <a:cs typeface="Arial" panose="020B0604020202090204"/>
               </a:rPr>
               <a:t>{{CONTENT_AREA}}</a:t>
             </a:r>
+            <a:endParaRPr lang="en-US" sz="1420" dirty="0">
+              <a:solidFill>
+                <a:srgbClr val="5E6478"/>
+              </a:solidFill>
+              <a:latin typeface="Arial" panose="020B0604020202090204"/>
+              <a:ea typeface="Arial" panose="020B0604020202090204"/>
+              <a:cs typeface="Arial" panose="020B0604020202090204"/>
+            </a:endParaRPr>
           </a:p>
           <a:p>
             <a:pPr algn="l">
@@ -3708,24 +4260,41 @@
                 <a:solidFill>
                   <a:srgbClr val="5E6478"/>
                 </a:solidFill>
-                <a:latin typeface="Arial"/>
-                <a:ea typeface="Arial"/>
-                <a:cs typeface="Arial"/>
+                <a:latin typeface="Arial" panose="020B0604020202090204"/>
+                <a:ea typeface="Arial" panose="020B0604020202090204"/>
+                <a:cs typeface="Arial" panose="020B0604020202090204"/>
               </a:rPr>
               <a:t>Insert one chart, table, confusion matrix, or controlled comparison.</a:t>
             </a:r>
-            <a:br/>
-            <a:r>
+            <a:br>
               <a:rPr lang="en-US" sz="1050" dirty="0">
                 <a:solidFill>
                   <a:srgbClr val="5E6478"/>
                 </a:solidFill>
-                <a:latin typeface="Arial"/>
-                <a:ea typeface="Arial"/>
-                <a:cs typeface="Arial"/>
+                <a:latin typeface="Arial" panose="020B0604020202090204"/>
+                <a:ea typeface="Arial" panose="020B0604020202090204"/>
+                <a:cs typeface="Arial" panose="020B0604020202090204"/>
+              </a:rPr>
+            </a:br>
+            <a:r>
+              <a:rPr lang="en-US" sz="1050" dirty="0">
+                <a:solidFill>
+                  <a:srgbClr val="5E6478"/>
+                </a:solidFill>
+                <a:latin typeface="Arial" panose="020B0604020202090204"/>
+                <a:ea typeface="Arial" panose="020B0604020202090204"/>
+                <a:cs typeface="Arial" panose="020B0604020202090204"/>
               </a:rPr>
               <a:t>Label the baseline, evaluation split, metric, and uncertainty.</a:t>
             </a:r>
+            <a:endParaRPr lang="en-US" sz="1050" dirty="0">
+              <a:solidFill>
+                <a:srgbClr val="5E6478"/>
+              </a:solidFill>
+              <a:latin typeface="Arial" panose="020B0604020202090204"/>
+              <a:ea typeface="Arial" panose="020B0604020202090204"/>
+              <a:cs typeface="Arial" panose="020B0604020202090204"/>
+            </a:endParaRPr>
           </a:p>
         </p:txBody>
       </p:sp>
@@ -3764,12 +4333,20 @@
                 <a:solidFill>
                   <a:srgbClr val="20243A"/>
                 </a:solidFill>
-                <a:latin typeface="Arial"/>
-                <a:ea typeface="Arial"/>
-                <a:cs typeface="Arial"/>
+                <a:latin typeface="Arial" panose="020B0604020202090204"/>
+                <a:ea typeface="Arial" panose="020B0604020202090204"/>
+                <a:cs typeface="Arial" panose="020B0604020202090204"/>
               </a:rPr>
               <a:t>{{FINDINGS}}</a:t>
             </a:r>
+            <a:endParaRPr lang="en-US" sz="1500" dirty="0">
+              <a:solidFill>
+                <a:srgbClr val="20243A"/>
+              </a:solidFill>
+              <a:latin typeface="Arial" panose="020B0604020202090204"/>
+              <a:ea typeface="Arial" panose="020B0604020202090204"/>
+              <a:cs typeface="Arial" panose="020B0604020202090204"/>
+            </a:endParaRPr>
           </a:p>
           <a:p>
             <a:pPr algn="l">
@@ -3785,36 +4362,62 @@
                 <a:solidFill>
                   <a:srgbClr val="5E6478"/>
                 </a:solidFill>
-                <a:latin typeface="Arial"/>
-                <a:ea typeface="Arial"/>
-                <a:cs typeface="Arial"/>
+                <a:latin typeface="Arial" panose="020B0604020202090204"/>
+                <a:ea typeface="Arial" panose="020B0604020202090204"/>
+                <a:cs typeface="Arial" panose="020B0604020202090204"/>
               </a:rPr>
               <a:t>1 · What changed versus baseline?</a:t>
             </a:r>
-            <a:br/>
-            <a:r>
+            <a:br>
               <a:rPr lang="en-US" sz="1120" dirty="0">
                 <a:solidFill>
                   <a:srgbClr val="5E6478"/>
                 </a:solidFill>
-                <a:latin typeface="Arial"/>
-                <a:ea typeface="Arial"/>
-                <a:cs typeface="Arial"/>
+                <a:latin typeface="Arial" panose="020B0604020202090204"/>
+                <a:ea typeface="Arial" panose="020B0604020202090204"/>
+                <a:cs typeface="Arial" panose="020B0604020202090204"/>
+              </a:rPr>
+            </a:br>
+            <a:r>
+              <a:rPr lang="en-US" sz="1120" dirty="0">
+                <a:solidFill>
+                  <a:srgbClr val="5E6478"/>
+                </a:solidFill>
+                <a:latin typeface="Arial" panose="020B0604020202090204"/>
+                <a:ea typeface="Arial" panose="020B0604020202090204"/>
+                <a:cs typeface="Arial" panose="020B0604020202090204"/>
               </a:rPr>
               <a:t>2 · Which class or case still fails?</a:t>
             </a:r>
-            <a:br/>
-            <a:r>
+            <a:br>
               <a:rPr lang="en-US" sz="1120" dirty="0">
                 <a:solidFill>
                   <a:srgbClr val="5E6478"/>
                 </a:solidFill>
-                <a:latin typeface="Arial"/>
-                <a:ea typeface="Arial"/>
-                <a:cs typeface="Arial"/>
+                <a:latin typeface="Arial" panose="020B0604020202090204"/>
+                <a:ea typeface="Arial" panose="020B0604020202090204"/>
+                <a:cs typeface="Arial" panose="020B0604020202090204"/>
+              </a:rPr>
+            </a:br>
+            <a:r>
+              <a:rPr lang="en-US" sz="1120" dirty="0">
+                <a:solidFill>
+                  <a:srgbClr val="5E6478"/>
+                </a:solidFill>
+                <a:latin typeface="Arial" panose="020B0604020202090204"/>
+                <a:ea typeface="Arial" panose="020B0604020202090204"/>
+                <a:cs typeface="Arial" panose="020B0604020202090204"/>
               </a:rPr>
               <a:t>3 · What experiment comes next?</a:t>
             </a:r>
+            <a:endParaRPr lang="en-US" sz="1120" dirty="0">
+              <a:solidFill>
+                <a:srgbClr val="5E6478"/>
+              </a:solidFill>
+              <a:latin typeface="Arial" panose="020B0604020202090204"/>
+              <a:ea typeface="Arial" panose="020B0604020202090204"/>
+              <a:cs typeface="Arial" panose="020B0604020202090204"/>
+            </a:endParaRPr>
           </a:p>
         </p:txBody>
       </p:sp>
@@ -3849,12 +4452,20 @@
                 <a:solidFill>
                   <a:srgbClr val="FFFFFF"/>
                 </a:solidFill>
-                <a:latin typeface="Arial"/>
-                <a:ea typeface="Arial"/>
-                <a:cs typeface="Arial"/>
+                <a:latin typeface="Arial" panose="020B0604020202090204"/>
+                <a:ea typeface="Arial" panose="020B0604020202090204"/>
+                <a:cs typeface="Arial" panose="020B0604020202090204"/>
               </a:rPr>
               <a:t>{{SOURCE}}</a:t>
             </a:r>
+            <a:endParaRPr lang="en-US" sz="900" dirty="0">
+              <a:solidFill>
+                <a:srgbClr val="FFFFFF"/>
+              </a:solidFill>
+              <a:latin typeface="Arial" panose="020B0604020202090204"/>
+              <a:ea typeface="Arial" panose="020B0604020202090204"/>
+              <a:cs typeface="Arial" panose="020B0604020202090204"/>
+            </a:endParaRPr>
           </a:p>
         </p:txBody>
       </p:sp>
@@ -3889,12 +4500,20 @@
                 <a:solidFill>
                   <a:srgbClr val="FFFFFF"/>
                 </a:solidFill>
-                <a:latin typeface="Arial"/>
-                <a:ea typeface="Arial"/>
-                <a:cs typeface="Arial"/>
+                <a:latin typeface="Arial" panose="020B0604020202090204"/>
+                <a:ea typeface="Arial" panose="020B0604020202090204"/>
+                <a:cs typeface="Arial" panose="020B0604020202090204"/>
               </a:rPr>
               <a:t>{{PAGE_NUM}}</a:t>
             </a:r>
+            <a:endParaRPr lang="en-US" sz="900" dirty="0">
+              <a:solidFill>
+                <a:srgbClr val="FFFFFF"/>
+              </a:solidFill>
+              <a:latin typeface="Arial" panose="020B0604020202090204"/>
+              <a:ea typeface="Arial" panose="020B0604020202090204"/>
+              <a:cs typeface="Arial" panose="020B0604020202090204"/>
+            </a:endParaRPr>
           </a:p>
         </p:txBody>
       </p:sp>
@@ -3962,7 +4581,7 @@
           <p:nvPr/>
         </p:nvPicPr>
         <p:blipFill>
-          <a:blip r:embed="rId2"/>
+          <a:blip r:embed="rId1"/>
           <a:stretch>
             <a:fillRect/>
           </a:stretch>
@@ -4030,12 +4649,20 @@
                 <a:solidFill>
                   <a:srgbClr val="FFFFFF"/>
                 </a:solidFill>
-                <a:latin typeface="Arial"/>
-                <a:ea typeface="Arial"/>
-                <a:cs typeface="Arial"/>
+                <a:latin typeface="Arial" panose="020B0604020202090204"/>
+                <a:ea typeface="Arial" panose="020B0604020202090204"/>
+                <a:cs typeface="Arial" panose="020B0604020202090204"/>
               </a:rPr>
               <a:t>EE6008 · HUMAN POSE ANALYTICS</a:t>
             </a:r>
+            <a:endParaRPr lang="en-US" sz="980" dirty="0">
+              <a:solidFill>
+                <a:srgbClr val="FFFFFF"/>
+              </a:solidFill>
+              <a:latin typeface="Arial" panose="020B0604020202090204"/>
+              <a:ea typeface="Arial" panose="020B0604020202090204"/>
+              <a:cs typeface="Arial" panose="020B0604020202090204"/>
+            </a:endParaRPr>
           </a:p>
         </p:txBody>
       </p:sp>
@@ -4234,12 +4861,20 @@
                 <a:solidFill>
                   <a:srgbClr val="D71440"/>
                 </a:solidFill>
-                <a:latin typeface="Arial"/>
-                <a:ea typeface="Arial"/>
-                <a:cs typeface="Arial"/>
+                <a:latin typeface="Arial" panose="020B0604020202090204"/>
+                <a:ea typeface="Arial" panose="020B0604020202090204"/>
+                <a:cs typeface="Arial" panose="020B0604020202090204"/>
               </a:rPr>
               <a:t>RISK / BLOCKER</a:t>
             </a:r>
+            <a:endParaRPr lang="en-US" sz="1050" b="1" dirty="0">
+              <a:solidFill>
+                <a:srgbClr val="D71440"/>
+              </a:solidFill>
+              <a:latin typeface="Arial" panose="020B0604020202090204"/>
+              <a:ea typeface="Arial" panose="020B0604020202090204"/>
+              <a:cs typeface="Arial" panose="020B0604020202090204"/>
+            </a:endParaRPr>
           </a:p>
         </p:txBody>
       </p:sp>
@@ -4274,12 +4909,20 @@
                 <a:solidFill>
                   <a:srgbClr val="D71440"/>
                 </a:solidFill>
-                <a:latin typeface="Arial"/>
-                <a:ea typeface="Arial"/>
-                <a:cs typeface="Arial"/>
+                <a:latin typeface="Arial" panose="020B0604020202090204"/>
+                <a:ea typeface="Arial" panose="020B0604020202090204"/>
+                <a:cs typeface="Arial" panose="020B0604020202090204"/>
               </a:rPr>
               <a:t>IMPACT ON SCOPE, EVIDENCE, OR TIMELINE</a:t>
             </a:r>
+            <a:endParaRPr lang="en-US" sz="1050" b="1" dirty="0">
+              <a:solidFill>
+                <a:srgbClr val="D71440"/>
+              </a:solidFill>
+              <a:latin typeface="Arial" panose="020B0604020202090204"/>
+              <a:ea typeface="Arial" panose="020B0604020202090204"/>
+              <a:cs typeface="Arial" panose="020B0604020202090204"/>
+            </a:endParaRPr>
           </a:p>
         </p:txBody>
       </p:sp>
@@ -4314,12 +4957,20 @@
                 <a:solidFill>
                   <a:srgbClr val="181C62"/>
                 </a:solidFill>
-                <a:latin typeface="Arial"/>
-                <a:ea typeface="Arial"/>
-                <a:cs typeface="Arial"/>
+                <a:latin typeface="Arial" panose="020B0604020202090204"/>
+                <a:ea typeface="Arial" panose="020B0604020202090204"/>
+                <a:cs typeface="Arial" panose="020B0604020202090204"/>
               </a:rPr>
               <a:t>MITIGATION / OWNER / CHECK DATE</a:t>
             </a:r>
+            <a:endParaRPr lang="en-US" sz="1050" b="1" dirty="0">
+              <a:solidFill>
+                <a:srgbClr val="181C62"/>
+              </a:solidFill>
+              <a:latin typeface="Arial" panose="020B0604020202090204"/>
+              <a:ea typeface="Arial" panose="020B0604020202090204"/>
+              <a:cs typeface="Arial" panose="020B0604020202090204"/>
+            </a:endParaRPr>
           </a:p>
         </p:txBody>
       </p:sp>
@@ -4354,12 +5005,20 @@
                 <a:solidFill>
                   <a:srgbClr val="FFFFFF"/>
                 </a:solidFill>
-                <a:latin typeface="Arial"/>
-                <a:ea typeface="Arial"/>
-                <a:cs typeface="Arial"/>
+                <a:latin typeface="Arial" panose="020B0604020202090204"/>
+                <a:ea typeface="Arial" panose="020B0604020202090204"/>
+                <a:cs typeface="Arial" panose="020B0604020202090204"/>
               </a:rPr>
               <a:t>DECISION OR SUPPORT NEEDED</a:t>
             </a:r>
+            <a:endParaRPr lang="en-US" sz="1050" b="1" dirty="0">
+              <a:solidFill>
+                <a:srgbClr val="FFFFFF"/>
+              </a:solidFill>
+              <a:latin typeface="Arial" panose="020B0604020202090204"/>
+              <a:ea typeface="Arial" panose="020B0604020202090204"/>
+              <a:cs typeface="Arial" panose="020B0604020202090204"/>
+            </a:endParaRPr>
           </a:p>
         </p:txBody>
       </p:sp>
@@ -4394,12 +5053,20 @@
                 <a:solidFill>
                   <a:srgbClr val="20243A"/>
                 </a:solidFill>
-                <a:latin typeface="Arial"/>
-                <a:ea typeface="Arial"/>
-                <a:cs typeface="Arial"/>
+                <a:latin typeface="Arial" panose="020B0604020202090204"/>
+                <a:ea typeface="Arial" panose="020B0604020202090204"/>
+                <a:cs typeface="Arial" panose="020B0604020202090204"/>
               </a:rPr>
               <a:t>Risks &amp; Decisions</a:t>
             </a:r>
+            <a:endParaRPr lang="en-US" sz="2550" b="1" dirty="0">
+              <a:solidFill>
+                <a:srgbClr val="20243A"/>
+              </a:solidFill>
+              <a:latin typeface="Arial" panose="020B0604020202090204"/>
+              <a:ea typeface="Arial" panose="020B0604020202090204"/>
+              <a:cs typeface="Arial" panose="020B0604020202090204"/>
+            </a:endParaRPr>
           </a:p>
         </p:txBody>
       </p:sp>
@@ -4438,12 +5105,20 @@
                 <a:solidFill>
                   <a:srgbClr val="D71440"/>
                 </a:solidFill>
-                <a:latin typeface="Arial"/>
-                <a:ea typeface="Arial"/>
-                <a:cs typeface="Arial"/>
+                <a:latin typeface="Arial" panose="020B0604020202090204"/>
+                <a:ea typeface="Arial" panose="020B0604020202090204"/>
+                <a:cs typeface="Arial" panose="020B0604020202090204"/>
               </a:rPr>
               <a:t>{{RISKS}}</a:t>
             </a:r>
+            <a:endParaRPr lang="en-US" sz="1580" b="1" dirty="0">
+              <a:solidFill>
+                <a:srgbClr val="D71440"/>
+              </a:solidFill>
+              <a:latin typeface="Arial" panose="020B0604020202090204"/>
+              <a:ea typeface="Arial" panose="020B0604020202090204"/>
+              <a:cs typeface="Arial" panose="020B0604020202090204"/>
+            </a:endParaRPr>
           </a:p>
           <a:p>
             <a:pPr algn="l">
@@ -4456,12 +5131,20 @@
                 <a:solidFill>
                   <a:srgbClr val="5E6478"/>
                 </a:solidFill>
-                <a:latin typeface="Arial"/>
-                <a:ea typeface="Arial"/>
-                <a:cs typeface="Arial"/>
+                <a:latin typeface="Arial" panose="020B0604020202090204"/>
+                <a:ea typeface="Arial" panose="020B0604020202090204"/>
+                <a:cs typeface="Arial" panose="020B0604020202090204"/>
               </a:rPr>
               <a:t>Describe the failure mode, trigger, and evidence.</a:t>
             </a:r>
+            <a:endParaRPr lang="en-US" sz="1050" dirty="0">
+              <a:solidFill>
+                <a:srgbClr val="5E6478"/>
+              </a:solidFill>
+              <a:latin typeface="Arial" panose="020B0604020202090204"/>
+              <a:ea typeface="Arial" panose="020B0604020202090204"/>
+              <a:cs typeface="Arial" panose="020B0604020202090204"/>
+            </a:endParaRPr>
           </a:p>
         </p:txBody>
       </p:sp>
@@ -4500,12 +5183,20 @@
                 <a:solidFill>
                   <a:srgbClr val="20243A"/>
                 </a:solidFill>
-                <a:latin typeface="Arial"/>
-                <a:ea typeface="Arial"/>
-                <a:cs typeface="Arial"/>
+                <a:latin typeface="Arial" panose="020B0604020202090204"/>
+                <a:ea typeface="Arial" panose="020B0604020202090204"/>
+                <a:cs typeface="Arial" panose="020B0604020202090204"/>
               </a:rPr>
               <a:t>{{IMPACT}}</a:t>
             </a:r>
+            <a:endParaRPr lang="en-US" sz="1580" dirty="0">
+              <a:solidFill>
+                <a:srgbClr val="20243A"/>
+              </a:solidFill>
+              <a:latin typeface="Arial" panose="020B0604020202090204"/>
+              <a:ea typeface="Arial" panose="020B0604020202090204"/>
+              <a:cs typeface="Arial" panose="020B0604020202090204"/>
+            </a:endParaRPr>
           </a:p>
           <a:p>
             <a:pPr algn="l">
@@ -4518,12 +5209,20 @@
                 <a:solidFill>
                   <a:srgbClr val="5E6478"/>
                 </a:solidFill>
-                <a:latin typeface="Arial"/>
-                <a:ea typeface="Arial"/>
-                <a:cs typeface="Arial"/>
+                <a:latin typeface="Arial" panose="020B0604020202090204"/>
+                <a:ea typeface="Arial" panose="020B0604020202090204"/>
+                <a:cs typeface="Arial" panose="020B0604020202090204"/>
               </a:rPr>
               <a:t>Quantify delay, compute cost, metric risk, or lost scope.</a:t>
             </a:r>
+            <a:endParaRPr lang="en-US" sz="1050" dirty="0">
+              <a:solidFill>
+                <a:srgbClr val="5E6478"/>
+              </a:solidFill>
+              <a:latin typeface="Arial" panose="020B0604020202090204"/>
+              <a:ea typeface="Arial" panose="020B0604020202090204"/>
+              <a:cs typeface="Arial" panose="020B0604020202090204"/>
+            </a:endParaRPr>
           </a:p>
         </p:txBody>
       </p:sp>
@@ -4562,12 +5261,20 @@
                 <a:solidFill>
                   <a:srgbClr val="181C62"/>
                 </a:solidFill>
-                <a:latin typeface="Arial"/>
-                <a:ea typeface="Arial"/>
-                <a:cs typeface="Arial"/>
+                <a:latin typeface="Arial" panose="020B0604020202090204"/>
+                <a:ea typeface="Arial" panose="020B0604020202090204"/>
+                <a:cs typeface="Arial" panose="020B0604020202090204"/>
               </a:rPr>
               <a:t>{{MITIGATION}}</a:t>
             </a:r>
+            <a:endParaRPr lang="en-US" sz="1580" dirty="0">
+              <a:solidFill>
+                <a:srgbClr val="181C62"/>
+              </a:solidFill>
+              <a:latin typeface="Arial" panose="020B0604020202090204"/>
+              <a:ea typeface="Arial" panose="020B0604020202090204"/>
+              <a:cs typeface="Arial" panose="020B0604020202090204"/>
+            </a:endParaRPr>
           </a:p>
           <a:p>
             <a:pPr algn="l">
@@ -4580,12 +5287,20 @@
                 <a:solidFill>
                   <a:srgbClr val="5E6478"/>
                 </a:solidFill>
-                <a:latin typeface="Arial"/>
-                <a:ea typeface="Arial"/>
-                <a:cs typeface="Arial"/>
+                <a:latin typeface="Arial" panose="020B0604020202090204"/>
+                <a:ea typeface="Arial" panose="020B0604020202090204"/>
+                <a:cs typeface="Arial" panose="020B0604020202090204"/>
               </a:rPr>
               <a:t>Owner: … | Check date: … | Fallback: …</a:t>
             </a:r>
+            <a:endParaRPr lang="en-US" sz="1050" dirty="0">
+              <a:solidFill>
+                <a:srgbClr val="5E6478"/>
+              </a:solidFill>
+              <a:latin typeface="Arial" panose="020B0604020202090204"/>
+              <a:ea typeface="Arial" panose="020B0604020202090204"/>
+              <a:cs typeface="Arial" panose="020B0604020202090204"/>
+            </a:endParaRPr>
           </a:p>
         </p:txBody>
       </p:sp>
@@ -4624,12 +5339,20 @@
                 <a:solidFill>
                   <a:srgbClr val="FFFFFF"/>
                 </a:solidFill>
-                <a:latin typeface="Arial"/>
-                <a:ea typeface="Arial"/>
-                <a:cs typeface="Arial"/>
+                <a:latin typeface="Arial" panose="020B0604020202090204"/>
+                <a:ea typeface="Arial" panose="020B0604020202090204"/>
+                <a:cs typeface="Arial" panose="020B0604020202090204"/>
               </a:rPr>
               <a:t>{{DECISION_NEEDED}}</a:t>
             </a:r>
+            <a:endParaRPr lang="en-US" sz="1580" b="1" dirty="0">
+              <a:solidFill>
+                <a:srgbClr val="FFFFFF"/>
+              </a:solidFill>
+              <a:latin typeface="Arial" panose="020B0604020202090204"/>
+              <a:ea typeface="Arial" panose="020B0604020202090204"/>
+              <a:cs typeface="Arial" panose="020B0604020202090204"/>
+            </a:endParaRPr>
           </a:p>
           <a:p>
             <a:pPr algn="l">
@@ -4642,12 +5365,20 @@
                 <a:solidFill>
                   <a:srgbClr val="C8C8C8"/>
                 </a:solidFill>
-                <a:latin typeface="Arial"/>
-                <a:ea typeface="Arial"/>
-                <a:cs typeface="Arial"/>
+                <a:latin typeface="Arial" panose="020B0604020202090204"/>
+                <a:ea typeface="Arial" panose="020B0604020202090204"/>
+                <a:cs typeface="Arial" panose="020B0604020202090204"/>
               </a:rPr>
               <a:t>State the choice, approver, and latest useful date.</a:t>
             </a:r>
+            <a:endParaRPr lang="en-US" sz="1050" dirty="0">
+              <a:solidFill>
+                <a:srgbClr val="C8C8C8"/>
+              </a:solidFill>
+              <a:latin typeface="Arial" panose="020B0604020202090204"/>
+              <a:ea typeface="Arial" panose="020B0604020202090204"/>
+              <a:cs typeface="Arial" panose="020B0604020202090204"/>
+            </a:endParaRPr>
           </a:p>
         </p:txBody>
       </p:sp>
@@ -4682,12 +5413,20 @@
                 <a:solidFill>
                   <a:srgbClr val="FFFFFF"/>
                 </a:solidFill>
-                <a:latin typeface="Arial"/>
-                <a:ea typeface="Arial"/>
-                <a:cs typeface="Arial"/>
+                <a:latin typeface="Arial" panose="020B0604020202090204"/>
+                <a:ea typeface="Arial" panose="020B0604020202090204"/>
+                <a:cs typeface="Arial" panose="020B0604020202090204"/>
               </a:rPr>
               <a:t>{{PAGE_NUM}}</a:t>
             </a:r>
+            <a:endParaRPr lang="en-US" sz="900" dirty="0">
+              <a:solidFill>
+                <a:srgbClr val="FFFFFF"/>
+              </a:solidFill>
+              <a:latin typeface="Arial" panose="020B0604020202090204"/>
+              <a:ea typeface="Arial" panose="020B0604020202090204"/>
+              <a:cs typeface="Arial" panose="020B0604020202090204"/>
+            </a:endParaRPr>
           </a:p>
         </p:txBody>
       </p:sp>
@@ -4755,7 +5494,7 @@
           <p:nvPr/>
         </p:nvPicPr>
         <p:blipFill>
-          <a:blip r:embed="rId2"/>
+          <a:blip r:embed="rId1"/>
           <a:stretch>
             <a:fillRect/>
           </a:stretch>
@@ -4823,12 +5562,20 @@
                 <a:solidFill>
                   <a:srgbClr val="FFFFFF"/>
                 </a:solidFill>
-                <a:latin typeface="Arial"/>
-                <a:ea typeface="Arial"/>
-                <a:cs typeface="Arial"/>
+                <a:latin typeface="Arial" panose="020B0604020202090204"/>
+                <a:ea typeface="Arial" panose="020B0604020202090204"/>
+                <a:cs typeface="Arial" panose="020B0604020202090204"/>
               </a:rPr>
               <a:t>EE6008 · HUMAN POSE ANALYTICS</a:t>
             </a:r>
+            <a:endParaRPr lang="en-US" sz="980" dirty="0">
+              <a:solidFill>
+                <a:srgbClr val="FFFFFF"/>
+              </a:solidFill>
+              <a:latin typeface="Arial" panose="020B0604020202090204"/>
+              <a:ea typeface="Arial" panose="020B0604020202090204"/>
+              <a:cs typeface="Arial" panose="020B0604020202090204"/>
+            </a:endParaRPr>
           </a:p>
         </p:txBody>
       </p:sp>
@@ -5083,12 +5830,20 @@
                 <a:solidFill>
                   <a:srgbClr val="FFFFFF"/>
                 </a:solidFill>
-                <a:latin typeface="Arial"/>
-                <a:ea typeface="Arial"/>
-                <a:cs typeface="Arial"/>
+                <a:latin typeface="Arial" panose="020B0604020202090204"/>
+                <a:ea typeface="Arial" panose="020B0604020202090204"/>
+                <a:cs typeface="Arial" panose="020B0604020202090204"/>
               </a:rPr>
               <a:t>1</a:t>
             </a:r>
+            <a:endParaRPr lang="en-US" sz="1350" b="1" dirty="0">
+              <a:solidFill>
+                <a:srgbClr val="FFFFFF"/>
+              </a:solidFill>
+              <a:latin typeface="Arial" panose="020B0604020202090204"/>
+              <a:ea typeface="Arial" panose="020B0604020202090204"/>
+              <a:cs typeface="Arial" panose="020B0604020202090204"/>
+            </a:endParaRPr>
           </a:p>
         </p:txBody>
       </p:sp>
@@ -5123,12 +5878,20 @@
                 <a:solidFill>
                   <a:srgbClr val="FFFFFF"/>
                 </a:solidFill>
-                <a:latin typeface="Arial"/>
-                <a:ea typeface="Arial"/>
-                <a:cs typeface="Arial"/>
+                <a:latin typeface="Arial" panose="020B0604020202090204"/>
+                <a:ea typeface="Arial" panose="020B0604020202090204"/>
+                <a:cs typeface="Arial" panose="020B0604020202090204"/>
               </a:rPr>
               <a:t>2</a:t>
             </a:r>
+            <a:endParaRPr lang="en-US" sz="1350" b="1" dirty="0">
+              <a:solidFill>
+                <a:srgbClr val="FFFFFF"/>
+              </a:solidFill>
+              <a:latin typeface="Arial" panose="020B0604020202090204"/>
+              <a:ea typeface="Arial" panose="020B0604020202090204"/>
+              <a:cs typeface="Arial" panose="020B0604020202090204"/>
+            </a:endParaRPr>
           </a:p>
         </p:txBody>
       </p:sp>
@@ -5163,12 +5926,20 @@
                 <a:solidFill>
                   <a:srgbClr val="FFFFFF"/>
                 </a:solidFill>
-                <a:latin typeface="Arial"/>
-                <a:ea typeface="Arial"/>
-                <a:cs typeface="Arial"/>
+                <a:latin typeface="Arial" panose="020B0604020202090204"/>
+                <a:ea typeface="Arial" panose="020B0604020202090204"/>
+                <a:cs typeface="Arial" panose="020B0604020202090204"/>
               </a:rPr>
               <a:t>3</a:t>
             </a:r>
+            <a:endParaRPr lang="en-US" sz="1350" b="1" dirty="0">
+              <a:solidFill>
+                <a:srgbClr val="FFFFFF"/>
+              </a:solidFill>
+              <a:latin typeface="Arial" panose="020B0604020202090204"/>
+              <a:ea typeface="Arial" panose="020B0604020202090204"/>
+              <a:cs typeface="Arial" panose="020B0604020202090204"/>
+            </a:endParaRPr>
           </a:p>
         </p:txBody>
       </p:sp>
@@ -5203,12 +5974,20 @@
                 <a:solidFill>
                   <a:srgbClr val="D71440"/>
                 </a:solidFill>
-                <a:latin typeface="Arial"/>
-                <a:ea typeface="Arial"/>
-                <a:cs typeface="Arial"/>
+                <a:latin typeface="Arial" panose="020B0604020202090204"/>
+                <a:ea typeface="Arial" panose="020B0604020202090204"/>
+                <a:cs typeface="Arial" panose="020B0604020202090204"/>
               </a:rPr>
               <a:t>DELIVERABLE 1 · BUILD</a:t>
             </a:r>
+            <a:endParaRPr lang="en-US" sz="980" b="1" dirty="0">
+              <a:solidFill>
+                <a:srgbClr val="D71440"/>
+              </a:solidFill>
+              <a:latin typeface="Arial" panose="020B0604020202090204"/>
+              <a:ea typeface="Arial" panose="020B0604020202090204"/>
+              <a:cs typeface="Arial" panose="020B0604020202090204"/>
+            </a:endParaRPr>
           </a:p>
         </p:txBody>
       </p:sp>
@@ -5243,12 +6022,20 @@
                 <a:solidFill>
                   <a:srgbClr val="181C62"/>
                 </a:solidFill>
-                <a:latin typeface="Arial"/>
-                <a:ea typeface="Arial"/>
-                <a:cs typeface="Arial"/>
+                <a:latin typeface="Arial" panose="020B0604020202090204"/>
+                <a:ea typeface="Arial" panose="020B0604020202090204"/>
+                <a:cs typeface="Arial" panose="020B0604020202090204"/>
               </a:rPr>
               <a:t>DELIVERABLE 2 · VALIDATE</a:t>
             </a:r>
+            <a:endParaRPr lang="en-US" sz="980" b="1" dirty="0">
+              <a:solidFill>
+                <a:srgbClr val="181C62"/>
+              </a:solidFill>
+              <a:latin typeface="Arial" panose="020B0604020202090204"/>
+              <a:ea typeface="Arial" panose="020B0604020202090204"/>
+              <a:cs typeface="Arial" panose="020B0604020202090204"/>
+            </a:endParaRPr>
           </a:p>
         </p:txBody>
       </p:sp>
@@ -5283,12 +6070,20 @@
                 <a:solidFill>
                   <a:srgbClr val="D71440"/>
                 </a:solidFill>
-                <a:latin typeface="Arial"/>
-                <a:ea typeface="Arial"/>
-                <a:cs typeface="Arial"/>
+                <a:latin typeface="Arial" panose="020B0604020202090204"/>
+                <a:ea typeface="Arial" panose="020B0604020202090204"/>
+                <a:cs typeface="Arial" panose="020B0604020202090204"/>
               </a:rPr>
               <a:t>DELIVERABLE 3 · DOCUMENT</a:t>
             </a:r>
+            <a:endParaRPr lang="en-US" sz="980" b="1" dirty="0">
+              <a:solidFill>
+                <a:srgbClr val="D71440"/>
+              </a:solidFill>
+              <a:latin typeface="Arial" panose="020B0604020202090204"/>
+              <a:ea typeface="Arial" panose="020B0604020202090204"/>
+              <a:cs typeface="Arial" panose="020B0604020202090204"/>
+            </a:endParaRPr>
           </a:p>
         </p:txBody>
       </p:sp>
@@ -5323,12 +6118,20 @@
                 <a:solidFill>
                   <a:srgbClr val="FFFFFF"/>
                 </a:solidFill>
-                <a:latin typeface="Arial"/>
-                <a:ea typeface="Arial"/>
-                <a:cs typeface="Arial"/>
+                <a:latin typeface="Arial" panose="020B0604020202090204"/>
+                <a:ea typeface="Arial" panose="020B0604020202090204"/>
+                <a:cs typeface="Arial" panose="020B0604020202090204"/>
               </a:rPr>
               <a:t>OWNER · DUE DATE · SUCCESS CHECK</a:t>
             </a:r>
+            <a:endParaRPr lang="en-US" sz="1050" b="1" dirty="0">
+              <a:solidFill>
+                <a:srgbClr val="FFFFFF"/>
+              </a:solidFill>
+              <a:latin typeface="Arial" panose="020B0604020202090204"/>
+              <a:ea typeface="Arial" panose="020B0604020202090204"/>
+              <a:cs typeface="Arial" panose="020B0604020202090204"/>
+            </a:endParaRPr>
           </a:p>
         </p:txBody>
       </p:sp>
@@ -5363,12 +6166,20 @@
                 <a:solidFill>
                   <a:srgbClr val="20243A"/>
                 </a:solidFill>
-                <a:latin typeface="Arial"/>
-                <a:ea typeface="Arial"/>
-                <a:cs typeface="Arial"/>
+                <a:latin typeface="Arial" panose="020B0604020202090204"/>
+                <a:ea typeface="Arial" panose="020B0604020202090204"/>
+                <a:cs typeface="Arial" panose="020B0604020202090204"/>
               </a:rPr>
               <a:t>Next-Week Commitments</a:t>
             </a:r>
+            <a:endParaRPr lang="en-US" sz="2550" b="1" dirty="0">
+              <a:solidFill>
+                <a:srgbClr val="20243A"/>
+              </a:solidFill>
+              <a:latin typeface="Arial" panose="020B0604020202090204"/>
+              <a:ea typeface="Arial" panose="020B0604020202090204"/>
+              <a:cs typeface="Arial" panose="020B0604020202090204"/>
+            </a:endParaRPr>
           </a:p>
         </p:txBody>
       </p:sp>
@@ -5407,12 +6218,20 @@
                 <a:solidFill>
                   <a:srgbClr val="20243A"/>
                 </a:solidFill>
-                <a:latin typeface="Arial"/>
-                <a:ea typeface="Arial"/>
-                <a:cs typeface="Arial"/>
+                <a:latin typeface="Arial" panose="020B0604020202090204"/>
+                <a:ea typeface="Arial" panose="020B0604020202090204"/>
+                <a:cs typeface="Arial" panose="020B0604020202090204"/>
               </a:rPr>
               <a:t>{{NEXT_ACTION_1}}</a:t>
             </a:r>
+            <a:endParaRPr lang="en-US" sz="1580" b="1" dirty="0">
+              <a:solidFill>
+                <a:srgbClr val="20243A"/>
+              </a:solidFill>
+              <a:latin typeface="Arial" panose="020B0604020202090204"/>
+              <a:ea typeface="Arial" panose="020B0604020202090204"/>
+              <a:cs typeface="Arial" panose="020B0604020202090204"/>
+            </a:endParaRPr>
           </a:p>
           <a:p>
             <a:pPr algn="l">
@@ -5425,12 +6244,20 @@
                 <a:solidFill>
                   <a:srgbClr val="5E6478"/>
                 </a:solidFill>
-                <a:latin typeface="Arial"/>
-                <a:ea typeface="Arial"/>
-                <a:cs typeface="Arial"/>
+                <a:latin typeface="Arial" panose="020B0604020202090204"/>
+                <a:ea typeface="Arial" panose="020B0604020202090204"/>
+                <a:cs typeface="Arial" panose="020B0604020202090204"/>
               </a:rPr>
               <a:t>Output: code, dataset, or runnable module.</a:t>
             </a:r>
+            <a:endParaRPr lang="en-US" sz="1050" dirty="0">
+              <a:solidFill>
+                <a:srgbClr val="5E6478"/>
+              </a:solidFill>
+              <a:latin typeface="Arial" panose="020B0604020202090204"/>
+              <a:ea typeface="Arial" panose="020B0604020202090204"/>
+              <a:cs typeface="Arial" panose="020B0604020202090204"/>
+            </a:endParaRPr>
           </a:p>
         </p:txBody>
       </p:sp>
@@ -5469,12 +6296,20 @@
                 <a:solidFill>
                   <a:srgbClr val="20243A"/>
                 </a:solidFill>
-                <a:latin typeface="Arial"/>
-                <a:ea typeface="Arial"/>
-                <a:cs typeface="Arial"/>
+                <a:latin typeface="Arial" panose="020B0604020202090204"/>
+                <a:ea typeface="Arial" panose="020B0604020202090204"/>
+                <a:cs typeface="Arial" panose="020B0604020202090204"/>
               </a:rPr>
               <a:t>{{NEXT_ACTION_2}}</a:t>
             </a:r>
+            <a:endParaRPr lang="en-US" sz="1580" b="1" dirty="0">
+              <a:solidFill>
+                <a:srgbClr val="20243A"/>
+              </a:solidFill>
+              <a:latin typeface="Arial" panose="020B0604020202090204"/>
+              <a:ea typeface="Arial" panose="020B0604020202090204"/>
+              <a:cs typeface="Arial" panose="020B0604020202090204"/>
+            </a:endParaRPr>
           </a:p>
           <a:p>
             <a:pPr algn="l">
@@ -5487,12 +6322,20 @@
                 <a:solidFill>
                   <a:srgbClr val="5E6478"/>
                 </a:solidFill>
-                <a:latin typeface="Arial"/>
-                <a:ea typeface="Arial"/>
-                <a:cs typeface="Arial"/>
+                <a:latin typeface="Arial" panose="020B0604020202090204"/>
+                <a:ea typeface="Arial" panose="020B0604020202090204"/>
+                <a:cs typeface="Arial" panose="020B0604020202090204"/>
               </a:rPr>
               <a:t>Output: metric table, control, or ablation result.</a:t>
             </a:r>
+            <a:endParaRPr lang="en-US" sz="1050" dirty="0">
+              <a:solidFill>
+                <a:srgbClr val="5E6478"/>
+              </a:solidFill>
+              <a:latin typeface="Arial" panose="020B0604020202090204"/>
+              <a:ea typeface="Arial" panose="020B0604020202090204"/>
+              <a:cs typeface="Arial" panose="020B0604020202090204"/>
+            </a:endParaRPr>
           </a:p>
         </p:txBody>
       </p:sp>
@@ -5531,12 +6374,20 @@
                 <a:solidFill>
                   <a:srgbClr val="20243A"/>
                 </a:solidFill>
-                <a:latin typeface="Arial"/>
-                <a:ea typeface="Arial"/>
-                <a:cs typeface="Arial"/>
+                <a:latin typeface="Arial" panose="020B0604020202090204"/>
+                <a:ea typeface="Arial" panose="020B0604020202090204"/>
+                <a:cs typeface="Arial" panose="020B0604020202090204"/>
               </a:rPr>
               <a:t>{{NEXT_ACTION_3}}</a:t>
             </a:r>
+            <a:endParaRPr lang="en-US" sz="1580" b="1" dirty="0">
+              <a:solidFill>
+                <a:srgbClr val="20243A"/>
+              </a:solidFill>
+              <a:latin typeface="Arial" panose="020B0604020202090204"/>
+              <a:ea typeface="Arial" panose="020B0604020202090204"/>
+              <a:cs typeface="Arial" panose="020B0604020202090204"/>
+            </a:endParaRPr>
           </a:p>
           <a:p>
             <a:pPr algn="l">
@@ -5549,12 +6400,20 @@
                 <a:solidFill>
                   <a:srgbClr val="5E6478"/>
                 </a:solidFill>
-                <a:latin typeface="Arial"/>
-                <a:ea typeface="Arial"/>
-                <a:cs typeface="Arial"/>
+                <a:latin typeface="Arial" panose="020B0604020202090204"/>
+                <a:ea typeface="Arial" panose="020B0604020202090204"/>
+                <a:cs typeface="Arial" panose="020B0604020202090204"/>
               </a:rPr>
               <a:t>Output: updated figure, notes, or report section.</a:t>
             </a:r>
+            <a:endParaRPr lang="en-US" sz="1050" dirty="0">
+              <a:solidFill>
+                <a:srgbClr val="5E6478"/>
+              </a:solidFill>
+              <a:latin typeface="Arial" panose="020B0604020202090204"/>
+              <a:ea typeface="Arial" panose="020B0604020202090204"/>
+              <a:cs typeface="Arial" panose="020B0604020202090204"/>
+            </a:endParaRPr>
           </a:p>
         </p:txBody>
       </p:sp>
@@ -5593,12 +6452,20 @@
                 <a:solidFill>
                   <a:srgbClr val="FFFFFF"/>
                 </a:solidFill>
-                <a:latin typeface="Arial"/>
-                <a:ea typeface="Arial"/>
-                <a:cs typeface="Arial"/>
+                <a:latin typeface="Arial" panose="020B0604020202090204"/>
+                <a:ea typeface="Arial" panose="020B0604020202090204"/>
+                <a:cs typeface="Arial" panose="020B0604020202090204"/>
               </a:rPr>
               <a:t>{{OWNER_AND_DEADLINE}}</a:t>
             </a:r>
+            <a:endParaRPr lang="en-US" sz="1580" dirty="0">
+              <a:solidFill>
+                <a:srgbClr val="FFFFFF"/>
+              </a:solidFill>
+              <a:latin typeface="Arial" panose="020B0604020202090204"/>
+              <a:ea typeface="Arial" panose="020B0604020202090204"/>
+              <a:cs typeface="Arial" panose="020B0604020202090204"/>
+            </a:endParaRPr>
           </a:p>
           <a:p>
             <a:pPr algn="l">
@@ -5614,48 +6481,83 @@
                 <a:solidFill>
                   <a:srgbClr val="C8C8C8"/>
                 </a:solidFill>
-                <a:latin typeface="Arial"/>
-                <a:ea typeface="Arial"/>
-                <a:cs typeface="Arial"/>
+                <a:latin typeface="Arial" panose="020B0604020202090204"/>
+                <a:ea typeface="Arial" panose="020B0604020202090204"/>
+                <a:cs typeface="Arial" panose="020B0604020202090204"/>
               </a:rPr>
               <a:t>Owner: …</a:t>
             </a:r>
-            <a:br/>
-            <a:r>
+            <a:br>
               <a:rPr lang="en-US" sz="1050" dirty="0">
                 <a:solidFill>
                   <a:srgbClr val="C8C8C8"/>
                 </a:solidFill>
-                <a:latin typeface="Arial"/>
-                <a:ea typeface="Arial"/>
-                <a:cs typeface="Arial"/>
+                <a:latin typeface="Arial" panose="020B0604020202090204"/>
+                <a:ea typeface="Arial" panose="020B0604020202090204"/>
+                <a:cs typeface="Arial" panose="020B0604020202090204"/>
+              </a:rPr>
+            </a:br>
+            <a:r>
+              <a:rPr lang="en-US" sz="1050" dirty="0">
+                <a:solidFill>
+                  <a:srgbClr val="C8C8C8"/>
+                </a:solidFill>
+                <a:latin typeface="Arial" panose="020B0604020202090204"/>
+                <a:ea typeface="Arial" panose="020B0604020202090204"/>
+                <a:cs typeface="Arial" panose="020B0604020202090204"/>
               </a:rPr>
               <a:t>Due: …</a:t>
             </a:r>
-            <a:br/>
-            <a:r>
+            <a:br>
               <a:rPr lang="en-US" sz="1050" dirty="0">
                 <a:solidFill>
                   <a:srgbClr val="C8C8C8"/>
                 </a:solidFill>
-                <a:latin typeface="Arial"/>
-                <a:ea typeface="Arial"/>
-                <a:cs typeface="Arial"/>
+                <a:latin typeface="Arial" panose="020B0604020202090204"/>
+                <a:ea typeface="Arial" panose="020B0604020202090204"/>
+                <a:cs typeface="Arial" panose="020B0604020202090204"/>
+              </a:rPr>
+            </a:br>
+            <a:r>
+              <a:rPr lang="en-US" sz="1050" dirty="0">
+                <a:solidFill>
+                  <a:srgbClr val="C8C8C8"/>
+                </a:solidFill>
+                <a:latin typeface="Arial" panose="020B0604020202090204"/>
+                <a:ea typeface="Arial" panose="020B0604020202090204"/>
+                <a:cs typeface="Arial" panose="020B0604020202090204"/>
               </a:rPr>
               <a:t>Success check: observable output</a:t>
             </a:r>
-            <a:br/>
-            <a:r>
+            <a:br>
               <a:rPr lang="en-US" sz="1050" dirty="0">
                 <a:solidFill>
                   <a:srgbClr val="C8C8C8"/>
                 </a:solidFill>
-                <a:latin typeface="Arial"/>
-                <a:ea typeface="Arial"/>
-                <a:cs typeface="Arial"/>
+                <a:latin typeface="Arial" panose="020B0604020202090204"/>
+                <a:ea typeface="Arial" panose="020B0604020202090204"/>
+                <a:cs typeface="Arial" panose="020B0604020202090204"/>
+              </a:rPr>
+            </a:br>
+            <a:r>
+              <a:rPr lang="en-US" sz="1050" dirty="0">
+                <a:solidFill>
+                  <a:srgbClr val="C8C8C8"/>
+                </a:solidFill>
+                <a:latin typeface="Arial" panose="020B0604020202090204"/>
+                <a:ea typeface="Arial" panose="020B0604020202090204"/>
+                <a:cs typeface="Arial" panose="020B0604020202090204"/>
               </a:rPr>
               <a:t>or agreed metric threshold.</a:t>
             </a:r>
+            <a:endParaRPr lang="en-US" sz="1050" dirty="0">
+              <a:solidFill>
+                <a:srgbClr val="C8C8C8"/>
+              </a:solidFill>
+              <a:latin typeface="Arial" panose="020B0604020202090204"/>
+              <a:ea typeface="Arial" panose="020B0604020202090204"/>
+              <a:cs typeface="Arial" panose="020B0604020202090204"/>
+            </a:endParaRPr>
           </a:p>
         </p:txBody>
       </p:sp>
@@ -5690,12 +6592,20 @@
                 <a:solidFill>
                   <a:srgbClr val="FFFFFF"/>
                 </a:solidFill>
-                <a:latin typeface="Arial"/>
-                <a:ea typeface="Arial"/>
-                <a:cs typeface="Arial"/>
+                <a:latin typeface="Arial" panose="020B0604020202090204"/>
+                <a:ea typeface="Arial" panose="020B0604020202090204"/>
+                <a:cs typeface="Arial" panose="020B0604020202090204"/>
               </a:rPr>
               <a:t>{{PAGE_NUM}}</a:t>
             </a:r>
+            <a:endParaRPr lang="en-US" sz="900" dirty="0">
+              <a:solidFill>
+                <a:srgbClr val="FFFFFF"/>
+              </a:solidFill>
+              <a:latin typeface="Arial" panose="020B0604020202090204"/>
+              <a:ea typeface="Arial" panose="020B0604020202090204"/>
+              <a:cs typeface="Arial" panose="020B0604020202090204"/>
+            </a:endParaRPr>
           </a:p>
         </p:txBody>
       </p:sp>
@@ -5763,7 +6673,7 @@
           <p:nvPr/>
         </p:nvPicPr>
         <p:blipFill>
-          <a:blip r:embed="rId2"/>
+          <a:blip r:embed="rId1"/>
           <a:stretch>
             <a:fillRect/>
           </a:stretch>
@@ -5831,12 +6741,20 @@
                 <a:solidFill>
                   <a:srgbClr val="FFFFFF"/>
                 </a:solidFill>
-                <a:latin typeface="Arial"/>
-                <a:ea typeface="Arial"/>
-                <a:cs typeface="Arial"/>
+                <a:latin typeface="Arial" panose="020B0604020202090204"/>
+                <a:ea typeface="Arial" panose="020B0604020202090204"/>
+                <a:cs typeface="Arial" panose="020B0604020202090204"/>
               </a:rPr>
               <a:t>EE6008 · HUMAN POSE ANALYTICS</a:t>
             </a:r>
+            <a:endParaRPr lang="en-US" sz="980" dirty="0">
+              <a:solidFill>
+                <a:srgbClr val="FFFFFF"/>
+              </a:solidFill>
+              <a:latin typeface="Arial" panose="020B0604020202090204"/>
+              <a:ea typeface="Arial" panose="020B0604020202090204"/>
+              <a:cs typeface="Arial" panose="020B0604020202090204"/>
+            </a:endParaRPr>
           </a:p>
         </p:txBody>
       </p:sp>
@@ -5919,12 +6837,20 @@
                 <a:solidFill>
                   <a:srgbClr val="20243A"/>
                 </a:solidFill>
-                <a:latin typeface="Arial"/>
-                <a:ea typeface="Arial"/>
-                <a:cs typeface="Arial"/>
+                <a:latin typeface="Arial" panose="020B0604020202090204"/>
+                <a:ea typeface="Arial" panose="020B0604020202090204"/>
+                <a:cs typeface="Arial" panose="020B0604020202090204"/>
               </a:rPr>
               <a:t>Open Canvas</a:t>
             </a:r>
+            <a:endParaRPr lang="en-US" sz="2550" b="1" dirty="0">
+              <a:solidFill>
+                <a:srgbClr val="20243A"/>
+              </a:solidFill>
+              <a:latin typeface="Arial" panose="020B0604020202090204"/>
+              <a:ea typeface="Arial" panose="020B0604020202090204"/>
+              <a:cs typeface="Arial" panose="020B0604020202090204"/>
+            </a:endParaRPr>
           </a:p>
         </p:txBody>
       </p:sp>
@@ -5959,12 +6885,20 @@
                 <a:solidFill>
                   <a:srgbClr val="FFFFFF"/>
                 </a:solidFill>
-                <a:latin typeface="Arial"/>
-                <a:ea typeface="Arial"/>
-                <a:cs typeface="Arial"/>
+                <a:latin typeface="Arial" panose="020B0604020202090204"/>
+                <a:ea typeface="Arial" panose="020B0604020202090204"/>
+                <a:cs typeface="Arial" panose="020B0604020202090204"/>
               </a:rPr>
               <a:t>{{SOURCE}}</a:t>
             </a:r>
+            <a:endParaRPr lang="en-US" sz="900" dirty="0">
+              <a:solidFill>
+                <a:srgbClr val="FFFFFF"/>
+              </a:solidFill>
+              <a:latin typeface="Arial" panose="020B0604020202090204"/>
+              <a:ea typeface="Arial" panose="020B0604020202090204"/>
+              <a:cs typeface="Arial" panose="020B0604020202090204"/>
+            </a:endParaRPr>
           </a:p>
         </p:txBody>
       </p:sp>
@@ -5999,12 +6933,20 @@
                 <a:solidFill>
                   <a:srgbClr val="FFFFFF"/>
                 </a:solidFill>
-                <a:latin typeface="Arial"/>
-                <a:ea typeface="Arial"/>
-                <a:cs typeface="Arial"/>
+                <a:latin typeface="Arial" panose="020B0604020202090204"/>
+                <a:ea typeface="Arial" panose="020B0604020202090204"/>
+                <a:cs typeface="Arial" panose="020B0604020202090204"/>
               </a:rPr>
               <a:t>{{PAGE_NUM}}</a:t>
             </a:r>
+            <a:endParaRPr lang="en-US" sz="900" dirty="0">
+              <a:solidFill>
+                <a:srgbClr val="FFFFFF"/>
+              </a:solidFill>
+              <a:latin typeface="Arial" panose="020B0604020202090204"/>
+              <a:ea typeface="Arial" panose="020B0604020202090204"/>
+              <a:cs typeface="Arial" panose="020B0604020202090204"/>
+            </a:endParaRPr>
           </a:p>
         </p:txBody>
       </p:sp>
@@ -6072,7 +7014,7 @@
           <p:nvPr/>
         </p:nvPicPr>
         <p:blipFill>
-          <a:blip r:embed="rId2"/>
+          <a:blip r:embed="rId1"/>
           <a:stretch>
             <a:fillRect/>
           </a:stretch>
@@ -6140,12 +7082,20 @@
                 <a:solidFill>
                   <a:srgbClr val="FFFFFF"/>
                 </a:solidFill>
-                <a:latin typeface="Arial"/>
-                <a:ea typeface="Arial"/>
-                <a:cs typeface="Arial"/>
+                <a:latin typeface="Arial" panose="020B0604020202090204"/>
+                <a:ea typeface="Arial" panose="020B0604020202090204"/>
+                <a:cs typeface="Arial" panose="020B0604020202090204"/>
               </a:rPr>
               <a:t>EE6008 · HUMAN POSE ANALYTICS</a:t>
             </a:r>
+            <a:endParaRPr lang="en-US" sz="980" dirty="0">
+              <a:solidFill>
+                <a:srgbClr val="FFFFFF"/>
+              </a:solidFill>
+              <a:latin typeface="Arial" panose="020B0604020202090204"/>
+              <a:ea typeface="Arial" panose="020B0604020202090204"/>
+              <a:cs typeface="Arial" panose="020B0604020202090204"/>
+            </a:endParaRPr>
           </a:p>
         </p:txBody>
       </p:sp>
@@ -6274,12 +7224,20 @@
                 <a:solidFill>
                   <a:srgbClr val="181C62"/>
                 </a:solidFill>
-                <a:latin typeface="Arial"/>
-                <a:ea typeface="Arial"/>
-                <a:cs typeface="Arial"/>
+                <a:latin typeface="Arial" panose="020B0604020202090204"/>
+                <a:ea typeface="Arial" panose="020B0604020202090204"/>
+                <a:cs typeface="Arial" panose="020B0604020202090204"/>
               </a:rPr>
               <a:t>IMAGE DESCRIPTION</a:t>
             </a:r>
+            <a:endParaRPr lang="en-US" sz="980" b="1" dirty="0">
+              <a:solidFill>
+                <a:srgbClr val="181C62"/>
+              </a:solidFill>
+              <a:latin typeface="Arial" panose="020B0604020202090204"/>
+              <a:ea typeface="Arial" panose="020B0604020202090204"/>
+              <a:cs typeface="Arial" panose="020B0604020202090204"/>
+            </a:endParaRPr>
           </a:p>
         </p:txBody>
       </p:sp>
@@ -6314,12 +7272,20 @@
                 <a:solidFill>
                   <a:srgbClr val="20243A"/>
                 </a:solidFill>
-                <a:latin typeface="Arial"/>
-                <a:ea typeface="Arial"/>
-                <a:cs typeface="Arial"/>
+                <a:latin typeface="Arial" panose="020B0604020202090204"/>
+                <a:ea typeface="Arial" panose="020B0604020202090204"/>
+                <a:cs typeface="Arial" panose="020B0604020202090204"/>
               </a:rPr>
               <a:t>Single-Image Story</a:t>
             </a:r>
+            <a:endParaRPr lang="en-US" sz="2550" b="1" dirty="0">
+              <a:solidFill>
+                <a:srgbClr val="20243A"/>
+              </a:solidFill>
+              <a:latin typeface="Arial" panose="020B0604020202090204"/>
+              <a:ea typeface="Arial" panose="020B0604020202090204"/>
+              <a:cs typeface="Arial" panose="020B0604020202090204"/>
+            </a:endParaRPr>
           </a:p>
         </p:txBody>
       </p:sp>
@@ -6332,8 +7298,8 @@
           <p:nvPr/>
         </p:nvPicPr>
         <p:blipFill>
-          <a:blip r:embed="rId3"/>
-          <a:srcRect l="4974" t="0" r="4973" b="0"/>
+          <a:blip r:embed="rId2"/>
+          <a:srcRect l="4974" r="4973"/>
           <a:stretch>
             <a:fillRect/>
           </a:stretch>
@@ -6383,12 +7349,20 @@
                 <a:solidFill>
                   <a:srgbClr val="20243A"/>
                 </a:solidFill>
-                <a:latin typeface="Arial"/>
-                <a:ea typeface="Arial"/>
-                <a:cs typeface="Arial"/>
+                <a:latin typeface="Arial" panose="020B0604020202090204"/>
+                <a:ea typeface="Arial" panose="020B0604020202090204"/>
+                <a:cs typeface="Arial" panose="020B0604020202090204"/>
               </a:rPr>
               <a:t>{{IMAGE_DESCRIPTION}}</a:t>
             </a:r>
+            <a:endParaRPr lang="en-US" sz="1580" dirty="0">
+              <a:solidFill>
+                <a:srgbClr val="20243A"/>
+              </a:solidFill>
+              <a:latin typeface="Arial" panose="020B0604020202090204"/>
+              <a:ea typeface="Arial" panose="020B0604020202090204"/>
+              <a:cs typeface="Arial" panose="020B0604020202090204"/>
+            </a:endParaRPr>
           </a:p>
           <a:p>
             <a:pPr algn="l">
@@ -6404,12 +7378,20 @@
                 <a:solidFill>
                   <a:srgbClr val="5E6478"/>
                 </a:solidFill>
-                <a:latin typeface="Arial"/>
-                <a:ea typeface="Arial"/>
-                <a:cs typeface="Arial"/>
+                <a:latin typeface="Arial" panose="020B0604020202090204"/>
+                <a:ea typeface="Arial" panose="020B0604020202090204"/>
+                <a:cs typeface="Arial" panose="020B0604020202090204"/>
               </a:rPr>
               <a:t>What does the image show?</a:t>
             </a:r>
+            <a:endParaRPr lang="en-US" sz="1120" dirty="0">
+              <a:solidFill>
+                <a:srgbClr val="5E6478"/>
+              </a:solidFill>
+              <a:latin typeface="Arial" panose="020B0604020202090204"/>
+              <a:ea typeface="Arial" panose="020B0604020202090204"/>
+              <a:cs typeface="Arial" panose="020B0604020202090204"/>
+            </a:endParaRPr>
           </a:p>
           <a:p>
             <a:pPr algn="l">
@@ -6425,12 +7407,20 @@
                 <a:solidFill>
                   <a:srgbClr val="5E6478"/>
                 </a:solidFill>
-                <a:latin typeface="Arial"/>
-                <a:ea typeface="Arial"/>
-                <a:cs typeface="Arial"/>
+                <a:latin typeface="Arial" panose="020B0604020202090204"/>
+                <a:ea typeface="Arial" panose="020B0604020202090204"/>
+                <a:cs typeface="Arial" panose="020B0604020202090204"/>
               </a:rPr>
               <a:t>Why is it relevant this week?</a:t>
             </a:r>
+            <a:endParaRPr lang="en-US" sz="1120" dirty="0">
+              <a:solidFill>
+                <a:srgbClr val="5E6478"/>
+              </a:solidFill>
+              <a:latin typeface="Arial" panose="020B0604020202090204"/>
+              <a:ea typeface="Arial" panose="020B0604020202090204"/>
+              <a:cs typeface="Arial" panose="020B0604020202090204"/>
+            </a:endParaRPr>
           </a:p>
           <a:p>
             <a:pPr algn="l">
@@ -6446,12 +7436,20 @@
                 <a:solidFill>
                   <a:srgbClr val="5E6478"/>
                 </a:solidFill>
-                <a:latin typeface="Arial"/>
-                <a:ea typeface="Arial"/>
-                <a:cs typeface="Arial"/>
+                <a:latin typeface="Arial" panose="020B0604020202090204"/>
+                <a:ea typeface="Arial" panose="020B0604020202090204"/>
+                <a:cs typeface="Arial" panose="020B0604020202090204"/>
               </a:rPr>
               <a:t>What should the audience notice?</a:t>
             </a:r>
+            <a:endParaRPr lang="en-US" sz="1120" dirty="0">
+              <a:solidFill>
+                <a:srgbClr val="5E6478"/>
+              </a:solidFill>
+              <a:latin typeface="Arial" panose="020B0604020202090204"/>
+              <a:ea typeface="Arial" panose="020B0604020202090204"/>
+              <a:cs typeface="Arial" panose="020B0604020202090204"/>
+            </a:endParaRPr>
           </a:p>
           <a:p>
             <a:pPr algn="l">
@@ -6467,12 +7465,20 @@
                 <a:solidFill>
                   <a:srgbClr val="D71440"/>
                 </a:solidFill>
-                <a:latin typeface="Arial"/>
-                <a:ea typeface="Arial"/>
-                <a:cs typeface="Arial"/>
+                <a:latin typeface="Arial" panose="020B0604020202090204"/>
+                <a:ea typeface="Arial" panose="020B0604020202090204"/>
+                <a:cs typeface="Arial" panose="020B0604020202090204"/>
               </a:rPr>
               <a:t>TIP</a:t>
             </a:r>
+            <a:endParaRPr lang="en-US" sz="1050" b="1" dirty="0">
+              <a:solidFill>
+                <a:srgbClr val="D71440"/>
+              </a:solidFill>
+              <a:latin typeface="Arial" panose="020B0604020202090204"/>
+              <a:ea typeface="Arial" panose="020B0604020202090204"/>
+              <a:cs typeface="Arial" panose="020B0604020202090204"/>
+            </a:endParaRPr>
           </a:p>
           <a:p>
             <a:pPr algn="l">
@@ -6488,36 +7494,62 @@
                 <a:solidFill>
                   <a:srgbClr val="5E6478"/>
                 </a:solidFill>
-                <a:latin typeface="Arial"/>
-                <a:ea typeface="Arial"/>
-                <a:cs typeface="Arial"/>
+                <a:latin typeface="Arial" panose="020B0604020202090204"/>
+                <a:ea typeface="Arial" panose="020B0604020202090204"/>
+                <a:cs typeface="Arial" panose="020B0604020202090204"/>
               </a:rPr>
               <a:t>Use one annotated result, system</a:t>
             </a:r>
-            <a:br/>
-            <a:r>
+            <a:br>
               <a:rPr lang="en-US" sz="1050" dirty="0">
                 <a:solidFill>
                   <a:srgbClr val="5E6478"/>
                 </a:solidFill>
-                <a:latin typeface="Arial"/>
-                <a:ea typeface="Arial"/>
-                <a:cs typeface="Arial"/>
+                <a:latin typeface="Arial" panose="020B0604020202090204"/>
+                <a:ea typeface="Arial" panose="020B0604020202090204"/>
+                <a:cs typeface="Arial" panose="020B0604020202090204"/>
+              </a:rPr>
+            </a:br>
+            <a:r>
+              <a:rPr lang="en-US" sz="1050" dirty="0">
+                <a:solidFill>
+                  <a:srgbClr val="5E6478"/>
+                </a:solidFill>
+                <a:latin typeface="Arial" panose="020B0604020202090204"/>
+                <a:ea typeface="Arial" panose="020B0604020202090204"/>
+                <a:cs typeface="Arial" panose="020B0604020202090204"/>
               </a:rPr>
               <a:t>overview, qualitative example,</a:t>
             </a:r>
-            <a:br/>
-            <a:r>
+            <a:br>
               <a:rPr lang="en-US" sz="1050" dirty="0">
                 <a:solidFill>
                   <a:srgbClr val="5E6478"/>
                 </a:solidFill>
-                <a:latin typeface="Arial"/>
-                <a:ea typeface="Arial"/>
-                <a:cs typeface="Arial"/>
+                <a:latin typeface="Arial" panose="020B0604020202090204"/>
+                <a:ea typeface="Arial" panose="020B0604020202090204"/>
+                <a:cs typeface="Arial" panose="020B0604020202090204"/>
+              </a:rPr>
+            </a:br>
+            <a:r>
+              <a:rPr lang="en-US" sz="1050" dirty="0">
+                <a:solidFill>
+                  <a:srgbClr val="5E6478"/>
+                </a:solidFill>
+                <a:latin typeface="Arial" panose="020B0604020202090204"/>
+                <a:ea typeface="Arial" panose="020B0604020202090204"/>
+                <a:cs typeface="Arial" panose="020B0604020202090204"/>
               </a:rPr>
               <a:t>or implementation photograph.</a:t>
             </a:r>
+            <a:endParaRPr lang="en-US" sz="1050" dirty="0">
+              <a:solidFill>
+                <a:srgbClr val="5E6478"/>
+              </a:solidFill>
+              <a:latin typeface="Arial" panose="020B0604020202090204"/>
+              <a:ea typeface="Arial" panose="020B0604020202090204"/>
+              <a:cs typeface="Arial" panose="020B0604020202090204"/>
+            </a:endParaRPr>
           </a:p>
         </p:txBody>
       </p:sp>
@@ -6552,12 +7584,20 @@
                 <a:solidFill>
                   <a:srgbClr val="FFFFFF"/>
                 </a:solidFill>
-                <a:latin typeface="Arial"/>
-                <a:ea typeface="Arial"/>
-                <a:cs typeface="Arial"/>
+                <a:latin typeface="Arial" panose="020B0604020202090204"/>
+                <a:ea typeface="Arial" panose="020B0604020202090204"/>
+                <a:cs typeface="Arial" panose="020B0604020202090204"/>
               </a:rPr>
               <a:t>{{SOURCE}}</a:t>
             </a:r>
+            <a:endParaRPr lang="en-US" sz="900" dirty="0">
+              <a:solidFill>
+                <a:srgbClr val="FFFFFF"/>
+              </a:solidFill>
+              <a:latin typeface="Arial" panose="020B0604020202090204"/>
+              <a:ea typeface="Arial" panose="020B0604020202090204"/>
+              <a:cs typeface="Arial" panose="020B0604020202090204"/>
+            </a:endParaRPr>
           </a:p>
         </p:txBody>
       </p:sp>
@@ -6592,12 +7632,20 @@
                 <a:solidFill>
                   <a:srgbClr val="FFFFFF"/>
                 </a:solidFill>
-                <a:latin typeface="Arial"/>
-                <a:ea typeface="Arial"/>
-                <a:cs typeface="Arial"/>
+                <a:latin typeface="Arial" panose="020B0604020202090204"/>
+                <a:ea typeface="Arial" panose="020B0604020202090204"/>
+                <a:cs typeface="Arial" panose="020B0604020202090204"/>
               </a:rPr>
               <a:t>{{PAGE_NUM}}</a:t>
             </a:r>
+            <a:endParaRPr lang="en-US" sz="900" dirty="0">
+              <a:solidFill>
+                <a:srgbClr val="FFFFFF"/>
+              </a:solidFill>
+              <a:latin typeface="Arial" panose="020B0604020202090204"/>
+              <a:ea typeface="Arial" panose="020B0604020202090204"/>
+              <a:cs typeface="Arial" panose="020B0604020202090204"/>
+            </a:endParaRPr>
           </a:p>
         </p:txBody>
       </p:sp>
@@ -6665,7 +7713,7 @@
           <p:nvPr/>
         </p:nvPicPr>
         <p:blipFill>
-          <a:blip r:embed="rId2"/>
+          <a:blip r:embed="rId1"/>
           <a:stretch>
             <a:fillRect/>
           </a:stretch>
@@ -6733,12 +7781,20 @@
                 <a:solidFill>
                   <a:srgbClr val="FFFFFF"/>
                 </a:solidFill>
-                <a:latin typeface="Arial"/>
-                <a:ea typeface="Arial"/>
-                <a:cs typeface="Arial"/>
+                <a:latin typeface="Arial" panose="020B0604020202090204"/>
+                <a:ea typeface="Arial" panose="020B0604020202090204"/>
+                <a:cs typeface="Arial" panose="020B0604020202090204"/>
               </a:rPr>
               <a:t>EE6008 · HUMAN POSE ANALYTICS</a:t>
             </a:r>
+            <a:endParaRPr lang="en-US" sz="980" dirty="0">
+              <a:solidFill>
+                <a:srgbClr val="FFFFFF"/>
+              </a:solidFill>
+              <a:latin typeface="Arial" panose="020B0604020202090204"/>
+              <a:ea typeface="Arial" panose="020B0604020202090204"/>
+              <a:cs typeface="Arial" panose="020B0604020202090204"/>
+            </a:endParaRPr>
           </a:p>
         </p:txBody>
       </p:sp>
@@ -6795,12 +7851,20 @@
                 <a:solidFill>
                   <a:srgbClr val="5E6478"/>
                 </a:solidFill>
-                <a:latin typeface="Arial"/>
-                <a:ea typeface="Arial"/>
-                <a:cs typeface="Arial"/>
+                <a:latin typeface="Arial" panose="020B0604020202090204"/>
+                <a:ea typeface="Arial" panose="020B0604020202090204"/>
+                <a:cs typeface="Arial" panose="020B0604020202090204"/>
               </a:rPr>
               <a:t>USE 2–4 IMAGES</a:t>
             </a:r>
+            <a:endParaRPr lang="en-US" sz="980" b="1" dirty="0">
+              <a:solidFill>
+                <a:srgbClr val="5E6478"/>
+              </a:solidFill>
+              <a:latin typeface="Arial" panose="020B0604020202090204"/>
+              <a:ea typeface="Arial" panose="020B0604020202090204"/>
+              <a:cs typeface="Arial" panose="020B0604020202090204"/>
+            </a:endParaRPr>
           </a:p>
         </p:txBody>
       </p:sp>
@@ -7027,12 +8091,20 @@
                 <a:solidFill>
                   <a:srgbClr val="20243A"/>
                 </a:solidFill>
-                <a:latin typeface="Arial"/>
-                <a:ea typeface="Arial"/>
-                <a:cs typeface="Arial"/>
+                <a:latin typeface="Arial" panose="020B0604020202090204"/>
+                <a:ea typeface="Arial" panose="020B0604020202090204"/>
+                <a:cs typeface="Arial" panose="020B0604020202090204"/>
               </a:rPr>
               <a:t>Multi-Image Story</a:t>
             </a:r>
+            <a:endParaRPr lang="en-US" sz="2550" b="1" dirty="0">
+              <a:solidFill>
+                <a:srgbClr val="20243A"/>
+              </a:solidFill>
+              <a:latin typeface="Arial" panose="020B0604020202090204"/>
+              <a:ea typeface="Arial" panose="020B0604020202090204"/>
+              <a:cs typeface="Arial" panose="020B0604020202090204"/>
+            </a:endParaRPr>
           </a:p>
         </p:txBody>
       </p:sp>
@@ -7045,8 +8117,8 @@
           <p:nvPr/>
         </p:nvPicPr>
         <p:blipFill>
-          <a:blip r:embed="rId3"/>
-          <a:srcRect l="0" t="19517" r="0" b="19517"/>
+          <a:blip r:embed="rId2"/>
+          <a:srcRect t="19517" b="19517"/>
           <a:stretch>
             <a:fillRect/>
           </a:stretch>
@@ -7070,8 +8142,8 @@
           <p:nvPr/>
         </p:nvPicPr>
         <p:blipFill>
-          <a:blip r:embed="rId4"/>
-          <a:srcRect l="0" t="14228" r="0" b="14227"/>
+          <a:blip r:embed="rId3"/>
+          <a:srcRect t="14228" b="14227"/>
           <a:stretch>
             <a:fillRect/>
           </a:stretch>
@@ -7095,8 +8167,8 @@
           <p:nvPr/>
         </p:nvPicPr>
         <p:blipFill>
-          <a:blip r:embed="rId5"/>
-          <a:srcRect l="0" t="25000" r="0" b="25000"/>
+          <a:blip r:embed="rId4"/>
+          <a:srcRect t="25000" b="25000"/>
           <a:stretch>
             <a:fillRect/>
           </a:stretch>
@@ -7120,8 +8192,8 @@
           <p:nvPr/>
         </p:nvPicPr>
         <p:blipFill>
-          <a:blip r:embed="rId6"/>
-          <a:srcRect l="0" t="28986" r="0" b="28987"/>
+          <a:blip r:embed="rId5"/>
+          <a:srcRect t="28986" b="28987"/>
           <a:stretch>
             <a:fillRect/>
           </a:stretch>
@@ -7167,12 +8239,20 @@
                 <a:solidFill>
                   <a:srgbClr val="20243A"/>
                 </a:solidFill>
-                <a:latin typeface="Arial"/>
-                <a:ea typeface="Arial"/>
-                <a:cs typeface="Arial"/>
+                <a:latin typeface="Arial" panose="020B0604020202090204"/>
+                <a:ea typeface="Arial" panose="020B0604020202090204"/>
+                <a:cs typeface="Arial" panose="020B0604020202090204"/>
               </a:rPr>
               <a:t>{{CAPTION_1}}</a:t>
             </a:r>
+            <a:endParaRPr lang="en-US" sz="1120" dirty="0">
+              <a:solidFill>
+                <a:srgbClr val="20243A"/>
+              </a:solidFill>
+              <a:latin typeface="Arial" panose="020B0604020202090204"/>
+              <a:ea typeface="Arial" panose="020B0604020202090204"/>
+              <a:cs typeface="Arial" panose="020B0604020202090204"/>
+            </a:endParaRPr>
           </a:p>
         </p:txBody>
       </p:sp>
@@ -7207,12 +8287,20 @@
                 <a:solidFill>
                   <a:srgbClr val="20243A"/>
                 </a:solidFill>
-                <a:latin typeface="Arial"/>
-                <a:ea typeface="Arial"/>
-                <a:cs typeface="Arial"/>
+                <a:latin typeface="Arial" panose="020B0604020202090204"/>
+                <a:ea typeface="Arial" panose="020B0604020202090204"/>
+                <a:cs typeface="Arial" panose="020B0604020202090204"/>
               </a:rPr>
               <a:t>{{CAPTION_2}}</a:t>
             </a:r>
+            <a:endParaRPr lang="en-US" sz="1120" dirty="0">
+              <a:solidFill>
+                <a:srgbClr val="20243A"/>
+              </a:solidFill>
+              <a:latin typeface="Arial" panose="020B0604020202090204"/>
+              <a:ea typeface="Arial" panose="020B0604020202090204"/>
+              <a:cs typeface="Arial" panose="020B0604020202090204"/>
+            </a:endParaRPr>
           </a:p>
         </p:txBody>
       </p:sp>
@@ -7247,12 +8335,20 @@
                 <a:solidFill>
                   <a:srgbClr val="20243A"/>
                 </a:solidFill>
-                <a:latin typeface="Arial"/>
-                <a:ea typeface="Arial"/>
-                <a:cs typeface="Arial"/>
+                <a:latin typeface="Arial" panose="020B0604020202090204"/>
+                <a:ea typeface="Arial" panose="020B0604020202090204"/>
+                <a:cs typeface="Arial" panose="020B0604020202090204"/>
               </a:rPr>
               <a:t>{{CAPTION_3}}</a:t>
             </a:r>
+            <a:endParaRPr lang="en-US" sz="1120" dirty="0">
+              <a:solidFill>
+                <a:srgbClr val="20243A"/>
+              </a:solidFill>
+              <a:latin typeface="Arial" panose="020B0604020202090204"/>
+              <a:ea typeface="Arial" panose="020B0604020202090204"/>
+              <a:cs typeface="Arial" panose="020B0604020202090204"/>
+            </a:endParaRPr>
           </a:p>
         </p:txBody>
       </p:sp>
@@ -7287,12 +8383,20 @@
                 <a:solidFill>
                   <a:srgbClr val="20243A"/>
                 </a:solidFill>
-                <a:latin typeface="Arial"/>
-                <a:ea typeface="Arial"/>
-                <a:cs typeface="Arial"/>
+                <a:latin typeface="Arial" panose="020B0604020202090204"/>
+                <a:ea typeface="Arial" panose="020B0604020202090204"/>
+                <a:cs typeface="Arial" panose="020B0604020202090204"/>
               </a:rPr>
               <a:t>{{CAPTION_4}}</a:t>
             </a:r>
+            <a:endParaRPr lang="en-US" sz="1120" dirty="0">
+              <a:solidFill>
+                <a:srgbClr val="20243A"/>
+              </a:solidFill>
+              <a:latin typeface="Arial" panose="020B0604020202090204"/>
+              <a:ea typeface="Arial" panose="020B0604020202090204"/>
+              <a:cs typeface="Arial" panose="020B0604020202090204"/>
+            </a:endParaRPr>
           </a:p>
         </p:txBody>
       </p:sp>
@@ -7327,12 +8431,20 @@
                 <a:solidFill>
                   <a:srgbClr val="FFFFFF"/>
                 </a:solidFill>
-                <a:latin typeface="Arial"/>
-                <a:ea typeface="Arial"/>
-                <a:cs typeface="Arial"/>
+                <a:latin typeface="Arial" panose="020B0604020202090204"/>
+                <a:ea typeface="Arial" panose="020B0604020202090204"/>
+                <a:cs typeface="Arial" panose="020B0604020202090204"/>
               </a:rPr>
               <a:t>{{SOURCE}}</a:t>
             </a:r>
+            <a:endParaRPr lang="en-US" sz="900" dirty="0">
+              <a:solidFill>
+                <a:srgbClr val="FFFFFF"/>
+              </a:solidFill>
+              <a:latin typeface="Arial" panose="020B0604020202090204"/>
+              <a:ea typeface="Arial" panose="020B0604020202090204"/>
+              <a:cs typeface="Arial" panose="020B0604020202090204"/>
+            </a:endParaRPr>
           </a:p>
         </p:txBody>
       </p:sp>
@@ -7367,12 +8479,20 @@
                 <a:solidFill>
                   <a:srgbClr val="FFFFFF"/>
                 </a:solidFill>
-                <a:latin typeface="Arial"/>
-                <a:ea typeface="Arial"/>
-                <a:cs typeface="Arial"/>
+                <a:latin typeface="Arial" panose="020B0604020202090204"/>
+                <a:ea typeface="Arial" panose="020B0604020202090204"/>
+                <a:cs typeface="Arial" panose="020B0604020202090204"/>
               </a:rPr>
               <a:t>{{PAGE_NUM}}</a:t>
             </a:r>
+            <a:endParaRPr lang="en-US" sz="900" dirty="0">
+              <a:solidFill>
+                <a:srgbClr val="FFFFFF"/>
+              </a:solidFill>
+              <a:latin typeface="Arial" panose="020B0604020202090204"/>
+              <a:ea typeface="Arial" panose="020B0604020202090204"/>
+              <a:cs typeface="Arial" panose="020B0604020202090204"/>
+            </a:endParaRPr>
           </a:p>
         </p:txBody>
       </p:sp>
@@ -7700,6 +8820,10 @@
       </a:style>
     </a:lnDef>
   </a:objectDefaults>
-  <a:extraClrSchemeLst/>
+  <a:extLst>
+    <a:ext uri="{05A4C25C-085E-4340-85A3-A5531E510DB2}">
+      <thm15:themeFamily xmlns:thm15="http://schemas.microsoft.com/office/thememl/2012/main" name="Office Theme" id="{62F939B6-93AF-4DB8-9C6B-D6C7DFDC589F}" vid="{4A3C46E8-61CC-4603-A589-7422A47A8E4A}"/>
+    </a:ext>
+  </a:extLst>
 </a:theme>
 </file>
--- a/reports/WeeklyPre/5min_pre_fully_editable.pptx
+++ b/reports/WeeklyPre/5min_pre_fully_editable.pptx
@@ -1,20 +1,20 @@
 
 <file path=ppt/presentation.xml><?xml version="1.0" encoding="utf-8"?>
-<p:presentation xmlns:a="http://schemas.openxmlformats.org/drawingml/2006/main" xmlns:r="http://schemas.openxmlformats.org/officeDocument/2006/relationships" xmlns:p="http://schemas.openxmlformats.org/presentationml/2006/main" autoCompressPictures="0">
+<p:presentation xmlns:a="http://schemas.openxmlformats.org/drawingml/2006/main" xmlns:r="http://schemas.openxmlformats.org/officeDocument/2006/relationships" xmlns:p="http://schemas.openxmlformats.org/presentationml/2006/main" saveSubsetFonts="1" autoCompressPictures="0">
   <p:sldMasterIdLst>
     <p:sldMasterId id="2147483648" r:id="rId1"/>
   </p:sldMasterIdLst>
   <p:sldIdLst>
-    <p:sldId id="256" r:id="rId3"/>
-    <p:sldId id="257" r:id="rId4"/>
-    <p:sldId id="258" r:id="rId5"/>
-    <p:sldId id="259" r:id="rId6"/>
-    <p:sldId id="260" r:id="rId7"/>
-    <p:sldId id="261" r:id="rId8"/>
-    <p:sldId id="262" r:id="rId9"/>
-    <p:sldId id="263" r:id="rId10"/>
-    <p:sldId id="264" r:id="rId11"/>
-    <p:sldId id="265" r:id="rId12"/>
+    <p:sldId id="256" r:id="rId7"/>
+    <p:sldId id="257" r:id="rId8"/>
+    <p:sldId id="258" r:id="rId9"/>
+    <p:sldId id="259" r:id="rId10"/>
+    <p:sldId id="260" r:id="rId11"/>
+    <p:sldId id="261" r:id="rId12"/>
+    <p:sldId id="262" r:id="rId13"/>
+    <p:sldId id="263" r:id="rId14"/>
+    <p:sldId id="264" r:id="rId15"/>
+    <p:sldId id="265" r:id="rId16"/>
   </p:sldIdLst>
   <p:sldSz cx="12192000" cy="6858000" type="screen4x3"/>
   <p:notesSz cx="6858000" cy="9144000"/>
@@ -113,27 +113,11 @@
       </a:defRPr>
     </a:lvl9pPr>
   </p:defaultTextStyle>
-  <p:extLst>
-    <p:ext uri="{EFAFB233-063F-42B5-8137-9DF3F51BA10A}">
-      <p15:sldGuideLst xmlns:p15="http://schemas.microsoft.com/office/powerpoint/2012/main">
-        <p15:guide id="1" orient="horz" pos="2160" userDrawn="1">
-          <p15:clr>
-            <a:srgbClr val="A4A3A4"/>
-          </p15:clr>
-        </p15:guide>
-        <p15:guide id="2" pos="2880" userDrawn="1">
-          <p15:clr>
-            <a:srgbClr val="A4A3A4"/>
-          </p15:clr>
-        </p15:guide>
-      </p15:sldGuideLst>
-    </p:ext>
-  </p:extLst>
 </p:presentation>
 </file>
 
-<file path=ppt/slideLayouts/slideLayout1.xml><?xml version="1.0" encoding="utf-8"?>
-<p:sldLayout xmlns:a="http://schemas.openxmlformats.org/drawingml/2006/main" xmlns:r="http://schemas.openxmlformats.org/officeDocument/2006/relationships" xmlns:p="http://schemas.openxmlformats.org/presentationml/2006/main" type="blank" preserve="1">
+<file path=ppt/slideLayouts/slideLayout7.xml><?xml version="1.0" encoding="utf-8"?>
+<p:sldLayout xmlns:a="http://schemas.openxmlformats.org/drawingml/2006/main" xmlns:p="http://schemas.openxmlformats.org/presentationml/2006/main" type="blank" preserve="1">
   <p:cSld name="weekly_five_minute_research_update — Blank">
     <p:spTree>
       <p:nvGrpSpPr>
@@ -166,6 +150,7 @@
           <a:p>
             <a:fld id="{5BCAD085-E8A6-8845-BD4E-CB4CCA059FC4}" type="datetimeFigureOut">
               <a:rPr lang="en-US" smtClean="0"/>
+              <a:t>1/27/13</a:t>
             </a:fld>
             <a:endParaRPr lang="en-US"/>
           </a:p>
@@ -207,6 +192,7 @@
           <a:p>
             <a:fld id="{C1FF6DA9-008F-8B48-92A6-B652298478BF}" type="slidenum">
               <a:rPr lang="en-US" smtClean="0"/>
+              <a:t>‹#›</a:t>
             </a:fld>
             <a:endParaRPr lang="en-US"/>
           </a:p>
@@ -221,8 +207,8 @@
 </file>
 
 <file path=ppt/slideMasters/slideMaster1.xml><?xml version="1.0" encoding="utf-8"?>
-<p:sldMaster xmlns:a="http://schemas.openxmlformats.org/drawingml/2006/main" xmlns:r="http://schemas.openxmlformats.org/officeDocument/2006/relationships" xmlns:p="http://schemas.openxmlformats.org/presentationml/2006/main">
-  <p:cSld>
+<p:sldMaster xmlns:a="http://schemas.openxmlformats.org/drawingml/2006/main" xmlns:p="http://schemas.openxmlformats.org/presentationml/2006/main" xmlns:r="http://schemas.openxmlformats.org/officeDocument/2006/relationships">
+  <p:cSld name="weekly_five_minute_research_update — Master">
     <p:bg>
       <p:bgRef idx="1001">
         <a:schemeClr val="bg1"/>
@@ -277,6 +263,7 @@
           <a:p>
             <a:fld id="{5BCAD085-E8A6-8845-BD4E-CB4CCA059FC4}" type="datetimeFigureOut">
               <a:rPr lang="en-US" smtClean="0"/>
+              <a:t>1/27/13</a:t>
             </a:fld>
             <a:endParaRPr lang="en-US"/>
           </a:p>
@@ -354,6 +341,7 @@
           <a:p>
             <a:fld id="{C1FF6DA9-008F-8B48-92A6-B652298478BF}" type="slidenum">
               <a:rPr lang="en-US" smtClean="0"/>
+              <a:t>‹#›</a:t>
             </a:fld>
             <a:endParaRPr lang="en-US"/>
           </a:p>
@@ -363,7 +351,7 @@
   </p:cSld>
   <p:clrMap bg1="lt1" tx1="dk1" bg2="lt2" tx2="dk2" accent1="accent1" accent2="accent2" accent3="accent3" accent4="accent4" accent5="accent5" accent6="accent6" hlink="hlink" folHlink="folHlink"/>
   <p:sldLayoutIdLst>
-    <p:sldLayoutId id="2147483649" r:id="rId1"/>
+    <p:sldLayoutId id="2147483655" r:id="rId7"/>
   </p:sldLayoutIdLst>
   <p:txStyles>
     <p:titleStyle>
@@ -387,7 +375,7 @@
         <a:spcBef>
           <a:spcPct val="20000"/>
         </a:spcBef>
-        <a:buFont typeface="Arial" panose="020B0604020202090204"/>
+        <a:buFont typeface="Arial"/>
         <a:buChar char="•"/>
         <a:defRPr sz="3200" kern="1200">
           <a:solidFill>
@@ -402,7 +390,7 @@
         <a:spcBef>
           <a:spcPct val="20000"/>
         </a:spcBef>
-        <a:buFont typeface="Arial" panose="020B0604020202090204"/>
+        <a:buFont typeface="Arial"/>
         <a:buChar char="–"/>
         <a:defRPr sz="2800" kern="1200">
           <a:solidFill>
@@ -417,7 +405,7 @@
         <a:spcBef>
           <a:spcPct val="20000"/>
         </a:spcBef>
-        <a:buFont typeface="Arial" panose="020B0604020202090204"/>
+        <a:buFont typeface="Arial"/>
         <a:buChar char="•"/>
         <a:defRPr sz="2400" kern="1200">
           <a:solidFill>
@@ -432,7 +420,7 @@
         <a:spcBef>
           <a:spcPct val="20000"/>
         </a:spcBef>
-        <a:buFont typeface="Arial" panose="020B0604020202090204"/>
+        <a:buFont typeface="Arial"/>
         <a:buChar char="–"/>
         <a:defRPr sz="2000" kern="1200">
           <a:solidFill>
@@ -447,7 +435,7 @@
         <a:spcBef>
           <a:spcPct val="20000"/>
         </a:spcBef>
-        <a:buFont typeface="Arial" panose="020B0604020202090204"/>
+        <a:buFont typeface="Arial"/>
         <a:buChar char="»"/>
         <a:defRPr sz="2000" kern="1200">
           <a:solidFill>
@@ -462,7 +450,7 @@
         <a:spcBef>
           <a:spcPct val="20000"/>
         </a:spcBef>
-        <a:buFont typeface="Arial" panose="020B0604020202090204"/>
+        <a:buFont typeface="Arial"/>
         <a:buChar char="•"/>
         <a:defRPr sz="2000" kern="1200">
           <a:solidFill>
@@ -477,7 +465,7 @@
         <a:spcBef>
           <a:spcPct val="20000"/>
         </a:spcBef>
-        <a:buFont typeface="Arial" panose="020B0604020202090204"/>
+        <a:buFont typeface="Arial"/>
         <a:buChar char="•"/>
         <a:defRPr sz="2000" kern="1200">
           <a:solidFill>
@@ -492,7 +480,7 @@
         <a:spcBef>
           <a:spcPct val="20000"/>
         </a:spcBef>
-        <a:buFont typeface="Arial" panose="020B0604020202090204"/>
+        <a:buFont typeface="Arial"/>
         <a:buChar char="•"/>
         <a:defRPr sz="2000" kern="1200">
           <a:solidFill>
@@ -507,7 +495,7 @@
         <a:spcBef>
           <a:spcPct val="20000"/>
         </a:spcBef>
-        <a:buFont typeface="Arial" panose="020B0604020202090204"/>
+        <a:buFont typeface="Arial"/>
         <a:buChar char="•"/>
         <a:defRPr sz="2000" kern="1200">
           <a:solidFill>
@@ -674,7 +662,7 @@
           <p:nvPr/>
         </p:nvPicPr>
         <p:blipFill>
-          <a:blip r:embed="rId1"/>
+          <a:blip r:embed="rId2"/>
           <a:stretch>
             <a:fillRect/>
           </a:stretch>
@@ -742,20 +730,12 @@
                 <a:solidFill>
                   <a:srgbClr val="FFFFFF"/>
                 </a:solidFill>
-                <a:latin typeface="Arial" panose="020B0604020202090204"/>
-                <a:ea typeface="Arial" panose="020B0604020202090204"/>
-                <a:cs typeface="Arial" panose="020B0604020202090204"/>
+                <a:latin typeface="Arial"/>
+                <a:ea typeface="Arial"/>
+                <a:cs typeface="Arial"/>
               </a:rPr>
               <a:t>EE6008 · HUMAN POSE ANALYTICS</a:t>
             </a:r>
-            <a:endParaRPr lang="en-US" sz="980" dirty="0">
-              <a:solidFill>
-                <a:srgbClr val="FFFFFF"/>
-              </a:solidFill>
-              <a:latin typeface="Arial" panose="020B0604020202090204"/>
-              <a:ea typeface="Arial" panose="020B0604020202090204"/>
-              <a:cs typeface="Arial" panose="020B0604020202090204"/>
-            </a:endParaRPr>
           </a:p>
         </p:txBody>
       </p:sp>
@@ -790,7 +770,7 @@
           <p:nvPr/>
         </p:nvPicPr>
         <p:blipFill>
-          <a:blip r:embed="rId2">
+          <a:blip r:embed="rId3">
             <a:alphaModFix amt="56000"/>
           </a:blip>
           <a:stretch>
@@ -921,20 +901,12 @@
                 <a:solidFill>
                   <a:srgbClr val="181C62"/>
                 </a:solidFill>
-                <a:latin typeface="Arial" panose="020B0604020202090204"/>
-                <a:ea typeface="Arial" panose="020B0604020202090204"/>
-                <a:cs typeface="Arial" panose="020B0604020202090204"/>
+                <a:latin typeface="Arial"/>
+                <a:ea typeface="Arial"/>
+                <a:cs typeface="Arial"/>
               </a:rPr>
               <a:t>Human Pose Analytics</a:t>
             </a:r>
-            <a:endParaRPr lang="en-US" sz="3150" b="1" dirty="0">
-              <a:solidFill>
-                <a:srgbClr val="181C62"/>
-              </a:solidFill>
-              <a:latin typeface="Arial" panose="020B0604020202090204"/>
-              <a:ea typeface="Arial" panose="020B0604020202090204"/>
-              <a:cs typeface="Arial" panose="020B0604020202090204"/>
-            </a:endParaRPr>
           </a:p>
         </p:txBody>
       </p:sp>
@@ -969,20 +941,12 @@
                 <a:solidFill>
                   <a:srgbClr val="20243A"/>
                 </a:solidFill>
-                <a:latin typeface="Arial" panose="020B0604020202090204"/>
-                <a:ea typeface="Arial" panose="020B0604020202090204"/>
-                <a:cs typeface="Arial" panose="020B0604020202090204"/>
+                <a:latin typeface="Arial"/>
+                <a:ea typeface="Arial"/>
+                <a:cs typeface="Arial"/>
               </a:rPr>
               <a:t>Weekly research update · {{SUBTITLE}}</a:t>
             </a:r>
-            <a:endParaRPr lang="en-US" sz="1720" dirty="0">
-              <a:solidFill>
-                <a:srgbClr val="20243A"/>
-              </a:solidFill>
-              <a:latin typeface="Arial" panose="020B0604020202090204"/>
-              <a:ea typeface="Arial" panose="020B0604020202090204"/>
-              <a:cs typeface="Arial" panose="020B0604020202090204"/>
-            </a:endParaRPr>
           </a:p>
         </p:txBody>
       </p:sp>
@@ -1017,20 +981,12 @@
                 <a:solidFill>
                   <a:srgbClr val="D71440"/>
                 </a:solidFill>
-                <a:latin typeface="Arial" panose="020B0604020202090204"/>
-                <a:ea typeface="Arial" panose="020B0604020202090204"/>
-                <a:cs typeface="Arial" panose="020B0604020202090204"/>
+                <a:latin typeface="Arial"/>
+                <a:ea typeface="Arial"/>
+                <a:cs typeface="Arial"/>
               </a:rPr>
               <a:t>Week ending · {{DATE}}</a:t>
             </a:r>
-            <a:endParaRPr lang="en-US" sz="1350" b="1" dirty="0">
-              <a:solidFill>
-                <a:srgbClr val="D71440"/>
-              </a:solidFill>
-              <a:latin typeface="Arial" panose="020B0604020202090204"/>
-              <a:ea typeface="Arial" panose="020B0604020202090204"/>
-              <a:cs typeface="Arial" panose="020B0604020202090204"/>
-            </a:endParaRPr>
           </a:p>
         </p:txBody>
       </p:sp>
@@ -1065,20 +1021,12 @@
                 <a:solidFill>
                   <a:srgbClr val="5E6478"/>
                 </a:solidFill>
-                <a:latin typeface="Arial" panose="020B0604020202090204"/>
-                <a:ea typeface="Arial" panose="020B0604020202090204"/>
-                <a:cs typeface="Arial" panose="020B0604020202090204"/>
+                <a:latin typeface="Arial"/>
+                <a:ea typeface="Arial"/>
+                <a:cs typeface="Arial"/>
               </a:rPr>
               <a:t>Presenter · {{AUTHOR}}</a:t>
             </a:r>
-            <a:endParaRPr lang="en-US" sz="1350" dirty="0">
-              <a:solidFill>
-                <a:srgbClr val="5E6478"/>
-              </a:solidFill>
-              <a:latin typeface="Arial" panose="020B0604020202090204"/>
-              <a:ea typeface="Arial" panose="020B0604020202090204"/>
-              <a:cs typeface="Arial" panose="020B0604020202090204"/>
-            </a:endParaRPr>
           </a:p>
         </p:txBody>
       </p:sp>
@@ -1146,7 +1094,7 @@
           <p:nvPr/>
         </p:nvPicPr>
         <p:blipFill>
-          <a:blip r:embed="rId1"/>
+          <a:blip r:embed="rId2"/>
           <a:stretch>
             <a:fillRect/>
           </a:stretch>
@@ -1214,20 +1162,12 @@
                 <a:solidFill>
                   <a:srgbClr val="FFFFFF"/>
                 </a:solidFill>
-                <a:latin typeface="Arial" panose="020B0604020202090204"/>
-                <a:ea typeface="Arial" panose="020B0604020202090204"/>
-                <a:cs typeface="Arial" panose="020B0604020202090204"/>
+                <a:latin typeface="Arial"/>
+                <a:ea typeface="Arial"/>
+                <a:cs typeface="Arial"/>
               </a:rPr>
               <a:t>EE6008 · HUMAN POSE ANALYTICS</a:t>
             </a:r>
-            <a:endParaRPr lang="en-US" sz="980" dirty="0">
-              <a:solidFill>
-                <a:srgbClr val="FFFFFF"/>
-              </a:solidFill>
-              <a:latin typeface="Arial" panose="020B0604020202090204"/>
-              <a:ea typeface="Arial" panose="020B0604020202090204"/>
-              <a:cs typeface="Arial" panose="020B0604020202090204"/>
-            </a:endParaRPr>
           </a:p>
         </p:txBody>
       </p:sp>
@@ -1240,7 +1180,7 @@
           <p:nvPr/>
         </p:nvPicPr>
         <p:blipFill>
-          <a:blip r:embed="rId2"/>
+          <a:blip r:embed="rId3"/>
           <a:stretch>
             <a:fillRect/>
           </a:stretch>
@@ -1314,7 +1254,7 @@
           <p:nvPr/>
         </p:nvPicPr>
         <p:blipFill>
-          <a:blip r:embed="rId1"/>
+          <a:blip r:embed="rId4"/>
           <a:stretch>
             <a:fillRect/>
           </a:stretch>
@@ -1360,20 +1300,12 @@
                 <a:solidFill>
                   <a:srgbClr val="181C62"/>
                 </a:solidFill>
-                <a:latin typeface="Arial" panose="020B0604020202090204"/>
-                <a:ea typeface="Arial" panose="020B0604020202090204"/>
-                <a:cs typeface="Arial" panose="020B0604020202090204"/>
+                <a:latin typeface="Arial"/>
+                <a:ea typeface="Arial"/>
+                <a:cs typeface="Arial"/>
               </a:rPr>
               <a:t>EE6008 · HUMAN POSE ANALYTICS</a:t>
             </a:r>
-            <a:endParaRPr lang="en-US" sz="1200" b="1" dirty="0">
-              <a:solidFill>
-                <a:srgbClr val="181C62"/>
-              </a:solidFill>
-              <a:latin typeface="Arial" panose="020B0604020202090204"/>
-              <a:ea typeface="Arial" panose="020B0604020202090204"/>
-              <a:cs typeface="Arial" panose="020B0604020202090204"/>
-            </a:endParaRPr>
           </a:p>
         </p:txBody>
       </p:sp>
@@ -1430,20 +1362,12 @@
                 <a:solidFill>
                   <a:srgbClr val="181C62"/>
                 </a:solidFill>
-                <a:latin typeface="Arial" panose="020B0604020202090204"/>
-                <a:ea typeface="Arial" panose="020B0604020202090204"/>
-                <a:cs typeface="Arial" panose="020B0604020202090204"/>
+                <a:latin typeface="Arial"/>
+                <a:ea typeface="Arial"/>
+                <a:cs typeface="Arial"/>
               </a:rPr>
               <a:t>Thank You</a:t>
             </a:r>
-            <a:endParaRPr lang="en-US" sz="4050" b="1" dirty="0">
-              <a:solidFill>
-                <a:srgbClr val="181C62"/>
-              </a:solidFill>
-              <a:latin typeface="Arial" panose="020B0604020202090204"/>
-              <a:ea typeface="Arial" panose="020B0604020202090204"/>
-              <a:cs typeface="Arial" panose="020B0604020202090204"/>
-            </a:endParaRPr>
           </a:p>
         </p:txBody>
       </p:sp>
@@ -1511,7 +1435,7 @@
           <p:nvPr/>
         </p:nvPicPr>
         <p:blipFill>
-          <a:blip r:embed="rId1"/>
+          <a:blip r:embed="rId2"/>
           <a:stretch>
             <a:fillRect/>
           </a:stretch>
@@ -1579,20 +1503,12 @@
                 <a:solidFill>
                   <a:srgbClr val="FFFFFF"/>
                 </a:solidFill>
-                <a:latin typeface="Arial" panose="020B0604020202090204"/>
-                <a:ea typeface="Arial" panose="020B0604020202090204"/>
-                <a:cs typeface="Arial" panose="020B0604020202090204"/>
+                <a:latin typeface="Arial"/>
+                <a:ea typeface="Arial"/>
+                <a:cs typeface="Arial"/>
               </a:rPr>
               <a:t>EE6008 · HUMAN POSE ANALYTICS</a:t>
             </a:r>
-            <a:endParaRPr lang="en-US" sz="980" dirty="0">
-              <a:solidFill>
-                <a:srgbClr val="FFFFFF"/>
-              </a:solidFill>
-              <a:latin typeface="Arial" panose="020B0604020202090204"/>
-              <a:ea typeface="Arial" panose="020B0604020202090204"/>
-              <a:cs typeface="Arial" panose="020B0604020202090204"/>
-            </a:endParaRPr>
           </a:p>
         </p:txBody>
       </p:sp>
@@ -1891,20 +1807,12 @@
                 <a:solidFill>
                   <a:srgbClr val="D71440"/>
                 </a:solidFill>
-                <a:latin typeface="Arial" panose="020B0604020202090204"/>
-                <a:ea typeface="Arial" panose="020B0604020202090204"/>
-                <a:cs typeface="Arial" panose="020B0604020202090204"/>
+                <a:latin typeface="Arial"/>
+                <a:ea typeface="Arial"/>
+                <a:cs typeface="Arial"/>
               </a:rPr>
               <a:t>WEEKLY TAKEAWAY</a:t>
             </a:r>
-            <a:endParaRPr lang="en-US" sz="980" b="1" dirty="0">
-              <a:solidFill>
-                <a:srgbClr val="D71440"/>
-              </a:solidFill>
-              <a:latin typeface="Arial" panose="020B0604020202090204"/>
-              <a:ea typeface="Arial" panose="020B0604020202090204"/>
-              <a:cs typeface="Arial" panose="020B0604020202090204"/>
-            </a:endParaRPr>
           </a:p>
         </p:txBody>
       </p:sp>
@@ -1939,20 +1847,12 @@
                 <a:solidFill>
                   <a:srgbClr val="FFFFFF"/>
                 </a:solidFill>
-                <a:latin typeface="Arial" panose="020B0604020202090204"/>
-                <a:ea typeface="Arial" panose="020B0604020202090204"/>
-                <a:cs typeface="Arial" panose="020B0604020202090204"/>
+                <a:latin typeface="Arial"/>
+                <a:ea typeface="Arial"/>
+                <a:cs typeface="Arial"/>
               </a:rPr>
               <a:t>PROJECT STATUS</a:t>
             </a:r>
-            <a:endParaRPr lang="en-US" sz="980" b="1" dirty="0">
-              <a:solidFill>
-                <a:srgbClr val="FFFFFF"/>
-              </a:solidFill>
-              <a:latin typeface="Arial" panose="020B0604020202090204"/>
-              <a:ea typeface="Arial" panose="020B0604020202090204"/>
-              <a:cs typeface="Arial" panose="020B0604020202090204"/>
-            </a:endParaRPr>
           </a:p>
         </p:txBody>
       </p:sp>
@@ -1987,20 +1887,12 @@
                 <a:solidFill>
                   <a:srgbClr val="181C62"/>
                 </a:solidFill>
-                <a:latin typeface="Arial" panose="020B0604020202090204"/>
-                <a:ea typeface="Arial" panose="020B0604020202090204"/>
-                <a:cs typeface="Arial" panose="020B0604020202090204"/>
+                <a:latin typeface="Arial"/>
+                <a:ea typeface="Arial"/>
+                <a:cs typeface="Arial"/>
               </a:rPr>
               <a:t>CURRENT MILESTONE · EVIDENCE · BLOCKER · NEXT CHECKPOINT</a:t>
             </a:r>
-            <a:endParaRPr lang="en-US" sz="1050" b="1" dirty="0">
-              <a:solidFill>
-                <a:srgbClr val="181C62"/>
-              </a:solidFill>
-              <a:latin typeface="Arial" panose="020B0604020202090204"/>
-              <a:ea typeface="Arial" panose="020B0604020202090204"/>
-              <a:cs typeface="Arial" panose="020B0604020202090204"/>
-            </a:endParaRPr>
           </a:p>
         </p:txBody>
       </p:sp>
@@ -2035,20 +1927,12 @@
                 <a:solidFill>
                   <a:srgbClr val="5E6478"/>
                 </a:solidFill>
-                <a:latin typeface="Arial" panose="020B0604020202090204"/>
-                <a:ea typeface="Arial" panose="020B0604020202090204"/>
-                <a:cs typeface="Arial" panose="020B0604020202090204"/>
+                <a:latin typeface="Arial"/>
+                <a:ea typeface="Arial"/>
+                <a:cs typeface="Arial"/>
               </a:rPr>
               <a:t>Kick-off</a:t>
             </a:r>
-            <a:endParaRPr lang="en-US" sz="900" dirty="0">
-              <a:solidFill>
-                <a:srgbClr val="5E6478"/>
-              </a:solidFill>
-              <a:latin typeface="Arial" panose="020B0604020202090204"/>
-              <a:ea typeface="Arial" panose="020B0604020202090204"/>
-              <a:cs typeface="Arial" panose="020B0604020202090204"/>
-            </a:endParaRPr>
           </a:p>
         </p:txBody>
       </p:sp>
@@ -2083,20 +1967,12 @@
                 <a:solidFill>
                   <a:srgbClr val="5E6478"/>
                 </a:solidFill>
-                <a:latin typeface="Arial" panose="020B0604020202090204"/>
-                <a:ea typeface="Arial" panose="020B0604020202090204"/>
-                <a:cs typeface="Arial" panose="020B0604020202090204"/>
+                <a:latin typeface="Arial"/>
+                <a:ea typeface="Arial"/>
+                <a:cs typeface="Arial"/>
               </a:rPr>
               <a:t>Data</a:t>
             </a:r>
-            <a:endParaRPr lang="en-US" sz="900" dirty="0">
-              <a:solidFill>
-                <a:srgbClr val="5E6478"/>
-              </a:solidFill>
-              <a:latin typeface="Arial" panose="020B0604020202090204"/>
-              <a:ea typeface="Arial" panose="020B0604020202090204"/>
-              <a:cs typeface="Arial" panose="020B0604020202090204"/>
-            </a:endParaRPr>
           </a:p>
         </p:txBody>
       </p:sp>
@@ -2131,20 +2007,12 @@
                 <a:solidFill>
                   <a:srgbClr val="D71440"/>
                 </a:solidFill>
-                <a:latin typeface="Arial" panose="020B0604020202090204"/>
-                <a:ea typeface="Arial" panose="020B0604020202090204"/>
-                <a:cs typeface="Arial" panose="020B0604020202090204"/>
+                <a:latin typeface="Arial"/>
+                <a:ea typeface="Arial"/>
+                <a:cs typeface="Arial"/>
               </a:rPr>
               <a:t>Baselines</a:t>
             </a:r>
-            <a:endParaRPr lang="en-US" sz="900" b="1" dirty="0">
-              <a:solidFill>
-                <a:srgbClr val="D71440"/>
-              </a:solidFill>
-              <a:latin typeface="Arial" panose="020B0604020202090204"/>
-              <a:ea typeface="Arial" panose="020B0604020202090204"/>
-              <a:cs typeface="Arial" panose="020B0604020202090204"/>
-            </a:endParaRPr>
           </a:p>
         </p:txBody>
       </p:sp>
@@ -2179,20 +2047,12 @@
                 <a:solidFill>
                   <a:srgbClr val="5E6478"/>
                 </a:solidFill>
-                <a:latin typeface="Arial" panose="020B0604020202090204"/>
-                <a:ea typeface="Arial" panose="020B0604020202090204"/>
-                <a:cs typeface="Arial" panose="020B0604020202090204"/>
+                <a:latin typeface="Arial"/>
+                <a:ea typeface="Arial"/>
+                <a:cs typeface="Arial"/>
               </a:rPr>
               <a:t>IP Module</a:t>
             </a:r>
-            <a:endParaRPr lang="en-US" sz="900" dirty="0">
-              <a:solidFill>
-                <a:srgbClr val="5E6478"/>
-              </a:solidFill>
-              <a:latin typeface="Arial" panose="020B0604020202090204"/>
-              <a:ea typeface="Arial" panose="020B0604020202090204"/>
-              <a:cs typeface="Arial" panose="020B0604020202090204"/>
-            </a:endParaRPr>
           </a:p>
         </p:txBody>
       </p:sp>
@@ -2227,20 +2087,12 @@
                 <a:solidFill>
                   <a:srgbClr val="5E6478"/>
                 </a:solidFill>
-                <a:latin typeface="Arial" panose="020B0604020202090204"/>
-                <a:ea typeface="Arial" panose="020B0604020202090204"/>
-                <a:cs typeface="Arial" panose="020B0604020202090204"/>
+                <a:latin typeface="Arial"/>
+                <a:ea typeface="Arial"/>
+                <a:cs typeface="Arial"/>
               </a:rPr>
               <a:t>Experiments</a:t>
             </a:r>
-            <a:endParaRPr lang="en-US" sz="900" dirty="0">
-              <a:solidFill>
-                <a:srgbClr val="5E6478"/>
-              </a:solidFill>
-              <a:latin typeface="Arial" panose="020B0604020202090204"/>
-              <a:ea typeface="Arial" panose="020B0604020202090204"/>
-              <a:cs typeface="Arial" panose="020B0604020202090204"/>
-            </a:endParaRPr>
           </a:p>
         </p:txBody>
       </p:sp>
@@ -2275,20 +2127,12 @@
                 <a:solidFill>
                   <a:srgbClr val="5E6478"/>
                 </a:solidFill>
-                <a:latin typeface="Arial" panose="020B0604020202090204"/>
-                <a:ea typeface="Arial" panose="020B0604020202090204"/>
-                <a:cs typeface="Arial" panose="020B0604020202090204"/>
+                <a:latin typeface="Arial"/>
+                <a:ea typeface="Arial"/>
+                <a:cs typeface="Arial"/>
               </a:rPr>
               <a:t>Final Report</a:t>
             </a:r>
-            <a:endParaRPr lang="en-US" sz="900" dirty="0">
-              <a:solidFill>
-                <a:srgbClr val="5E6478"/>
-              </a:solidFill>
-              <a:latin typeface="Arial" panose="020B0604020202090204"/>
-              <a:ea typeface="Arial" panose="020B0604020202090204"/>
-              <a:cs typeface="Arial" panose="020B0604020202090204"/>
-            </a:endParaRPr>
           </a:p>
         </p:txBody>
       </p:sp>
@@ -2323,20 +2167,12 @@
                 <a:solidFill>
                   <a:srgbClr val="20243A"/>
                 </a:solidFill>
-                <a:latin typeface="Arial" panose="020B0604020202090204"/>
-                <a:ea typeface="Arial" panose="020B0604020202090204"/>
-                <a:cs typeface="Arial" panose="020B0604020202090204"/>
+                <a:latin typeface="Arial"/>
+                <a:ea typeface="Arial"/>
+                <a:cs typeface="Arial"/>
               </a:rPr>
               <a:t>Weekly Snapshot &amp; Milestone</a:t>
             </a:r>
-            <a:endParaRPr lang="en-US" sz="2550" b="1" dirty="0">
-              <a:solidFill>
-                <a:srgbClr val="20243A"/>
-              </a:solidFill>
-              <a:latin typeface="Arial" panose="020B0604020202090204"/>
-              <a:ea typeface="Arial" panose="020B0604020202090204"/>
-              <a:cs typeface="Arial" panose="020B0604020202090204"/>
-            </a:endParaRPr>
           </a:p>
         </p:txBody>
       </p:sp>
@@ -2375,20 +2211,12 @@
                 <a:solidFill>
                   <a:srgbClr val="181C62"/>
                 </a:solidFill>
-                <a:latin typeface="Arial" panose="020B0604020202090204"/>
-                <a:ea typeface="Arial" panose="020B0604020202090204"/>
-                <a:cs typeface="Arial" panose="020B0604020202090204"/>
+                <a:latin typeface="Arial"/>
+                <a:ea typeface="Arial"/>
+                <a:cs typeface="Arial"/>
               </a:rPr>
               <a:t>{{KEY_MESSAGE}}</a:t>
             </a:r>
-            <a:endParaRPr lang="en-US" sz="1800" b="1" dirty="0">
-              <a:solidFill>
-                <a:srgbClr val="181C62"/>
-              </a:solidFill>
-              <a:latin typeface="Arial" panose="020B0604020202090204"/>
-              <a:ea typeface="Arial" panose="020B0604020202090204"/>
-              <a:cs typeface="Arial" panose="020B0604020202090204"/>
-            </a:endParaRPr>
           </a:p>
           <a:p>
             <a:pPr algn="l">
@@ -2401,20 +2229,12 @@
                 <a:solidFill>
                   <a:srgbClr val="5E6478"/>
                 </a:solidFill>
-                <a:latin typeface="Arial" panose="020B0604020202090204"/>
-                <a:ea typeface="Arial" panose="020B0604020202090204"/>
-                <a:cs typeface="Arial" panose="020B0604020202090204"/>
+                <a:latin typeface="Arial"/>
+                <a:ea typeface="Arial"/>
+                <a:cs typeface="Arial"/>
               </a:rPr>
               <a:t>State the one result or decision the supervisor should remember.</a:t>
             </a:r>
-            <a:endParaRPr lang="en-US" sz="1050" dirty="0">
-              <a:solidFill>
-                <a:srgbClr val="5E6478"/>
-              </a:solidFill>
-              <a:latin typeface="Arial" panose="020B0604020202090204"/>
-              <a:ea typeface="Arial" panose="020B0604020202090204"/>
-              <a:cs typeface="Arial" panose="020B0604020202090204"/>
-            </a:endParaRPr>
           </a:p>
         </p:txBody>
       </p:sp>
@@ -2453,20 +2273,12 @@
                 <a:solidFill>
                   <a:srgbClr val="FFFFFF"/>
                 </a:solidFill>
-                <a:latin typeface="Arial" panose="020B0604020202090204"/>
-                <a:ea typeface="Arial" panose="020B0604020202090204"/>
-                <a:cs typeface="Arial" panose="020B0604020202090204"/>
+                <a:latin typeface="Arial"/>
+                <a:ea typeface="Arial"/>
+                <a:cs typeface="Arial"/>
               </a:rPr>
               <a:t>{{STATUS}}</a:t>
             </a:r>
-            <a:endParaRPr lang="en-US" sz="1880" b="1" dirty="0">
-              <a:solidFill>
-                <a:srgbClr val="FFFFFF"/>
-              </a:solidFill>
-              <a:latin typeface="Arial" panose="020B0604020202090204"/>
-              <a:ea typeface="Arial" panose="020B0604020202090204"/>
-              <a:cs typeface="Arial" panose="020B0604020202090204"/>
-            </a:endParaRPr>
           </a:p>
           <a:p>
             <a:pPr algn="ctr">
@@ -2479,20 +2291,12 @@
                 <a:solidFill>
                   <a:srgbClr val="C8C8C8"/>
                 </a:solidFill>
-                <a:latin typeface="Arial" panose="020B0604020202090204"/>
-                <a:ea typeface="Arial" panose="020B0604020202090204"/>
-                <a:cs typeface="Arial" panose="020B0604020202090204"/>
+                <a:latin typeface="Arial"/>
+                <a:ea typeface="Arial"/>
+                <a:cs typeface="Arial"/>
               </a:rPr>
               <a:t>ON TRACK · AT RISK · BLOCKED</a:t>
             </a:r>
-            <a:endParaRPr lang="en-US" sz="980" dirty="0">
-              <a:solidFill>
-                <a:srgbClr val="C8C8C8"/>
-              </a:solidFill>
-              <a:latin typeface="Arial" panose="020B0604020202090204"/>
-              <a:ea typeface="Arial" panose="020B0604020202090204"/>
-              <a:cs typeface="Arial" panose="020B0604020202090204"/>
-            </a:endParaRPr>
           </a:p>
         </p:txBody>
       </p:sp>
@@ -2531,20 +2335,12 @@
                 <a:solidFill>
                   <a:srgbClr val="20243A"/>
                 </a:solidFill>
-                <a:latin typeface="Arial" panose="020B0604020202090204"/>
-                <a:ea typeface="Arial" panose="020B0604020202090204"/>
-                <a:cs typeface="Arial" panose="020B0604020202090204"/>
+                <a:latin typeface="Arial"/>
+                <a:ea typeface="Arial"/>
+                <a:cs typeface="Arial"/>
               </a:rPr>
               <a:t>{{MILESTONE}}</a:t>
             </a:r>
-            <a:endParaRPr lang="en-US" sz="1580" dirty="0">
-              <a:solidFill>
-                <a:srgbClr val="20243A"/>
-              </a:solidFill>
-              <a:latin typeface="Arial" panose="020B0604020202090204"/>
-              <a:ea typeface="Arial" panose="020B0604020202090204"/>
-              <a:cs typeface="Arial" panose="020B0604020202090204"/>
-            </a:endParaRPr>
           </a:p>
           <a:p>
             <a:pPr algn="l">
@@ -2557,20 +2353,12 @@
                 <a:solidFill>
                   <a:srgbClr val="5E6478"/>
                 </a:solidFill>
-                <a:latin typeface="Arial" panose="020B0604020202090204"/>
-                <a:ea typeface="Arial" panose="020B0604020202090204"/>
-                <a:cs typeface="Arial" panose="020B0604020202090204"/>
+                <a:latin typeface="Arial"/>
+                <a:ea typeface="Arial"/>
+                <a:cs typeface="Arial"/>
               </a:rPr>
               <a:t>Evidence completed: … | Current blocker: … | Next checkpoint: …</a:t>
             </a:r>
-            <a:endParaRPr lang="en-US" sz="1120" dirty="0">
-              <a:solidFill>
-                <a:srgbClr val="5E6478"/>
-              </a:solidFill>
-              <a:latin typeface="Arial" panose="020B0604020202090204"/>
-              <a:ea typeface="Arial" panose="020B0604020202090204"/>
-              <a:cs typeface="Arial" panose="020B0604020202090204"/>
-            </a:endParaRPr>
           </a:p>
         </p:txBody>
       </p:sp>
@@ -2605,20 +2393,12 @@
                 <a:solidFill>
                   <a:srgbClr val="FFFFFF"/>
                 </a:solidFill>
-                <a:latin typeface="Arial" panose="020B0604020202090204"/>
-                <a:ea typeface="Arial" panose="020B0604020202090204"/>
-                <a:cs typeface="Arial" panose="020B0604020202090204"/>
+                <a:latin typeface="Arial"/>
+                <a:ea typeface="Arial"/>
+                <a:cs typeface="Arial"/>
               </a:rPr>
               <a:t>{{SOURCE}}</a:t>
             </a:r>
-            <a:endParaRPr lang="en-US" sz="900" dirty="0">
-              <a:solidFill>
-                <a:srgbClr val="FFFFFF"/>
-              </a:solidFill>
-              <a:latin typeface="Arial" panose="020B0604020202090204"/>
-              <a:ea typeface="Arial" panose="020B0604020202090204"/>
-              <a:cs typeface="Arial" panose="020B0604020202090204"/>
-            </a:endParaRPr>
           </a:p>
         </p:txBody>
       </p:sp>
@@ -2653,20 +2433,12 @@
                 <a:solidFill>
                   <a:srgbClr val="FFFFFF"/>
                 </a:solidFill>
-                <a:latin typeface="Arial" panose="020B0604020202090204"/>
-                <a:ea typeface="Arial" panose="020B0604020202090204"/>
-                <a:cs typeface="Arial" panose="020B0604020202090204"/>
+                <a:latin typeface="Arial"/>
+                <a:ea typeface="Arial"/>
+                <a:cs typeface="Arial"/>
               </a:rPr>
               <a:t>{{PAGE_NUM}}</a:t>
             </a:r>
-            <a:endParaRPr lang="en-US" sz="900" dirty="0">
-              <a:solidFill>
-                <a:srgbClr val="FFFFFF"/>
-              </a:solidFill>
-              <a:latin typeface="Arial" panose="020B0604020202090204"/>
-              <a:ea typeface="Arial" panose="020B0604020202090204"/>
-              <a:cs typeface="Arial" panose="020B0604020202090204"/>
-            </a:endParaRPr>
           </a:p>
         </p:txBody>
       </p:sp>
@@ -2734,7 +2506,7 @@
           <p:nvPr/>
         </p:nvPicPr>
         <p:blipFill>
-          <a:blip r:embed="rId1"/>
+          <a:blip r:embed="rId2"/>
           <a:stretch>
             <a:fillRect/>
           </a:stretch>
@@ -2802,20 +2574,12 @@
                 <a:solidFill>
                   <a:srgbClr val="FFFFFF"/>
                 </a:solidFill>
-                <a:latin typeface="Arial" panose="020B0604020202090204"/>
-                <a:ea typeface="Arial" panose="020B0604020202090204"/>
-                <a:cs typeface="Arial" panose="020B0604020202090204"/>
+                <a:latin typeface="Arial"/>
+                <a:ea typeface="Arial"/>
+                <a:cs typeface="Arial"/>
               </a:rPr>
               <a:t>EE6008 · HUMAN POSE ANALYTICS</a:t>
             </a:r>
-            <a:endParaRPr lang="en-US" sz="980" dirty="0">
-              <a:solidFill>
-                <a:srgbClr val="FFFFFF"/>
-              </a:solidFill>
-              <a:latin typeface="Arial" panose="020B0604020202090204"/>
-              <a:ea typeface="Arial" panose="020B0604020202090204"/>
-              <a:cs typeface="Arial" panose="020B0604020202090204"/>
-            </a:endParaRPr>
           </a:p>
         </p:txBody>
       </p:sp>
@@ -2968,20 +2732,12 @@
                 <a:solidFill>
                   <a:srgbClr val="D71440"/>
                 </a:solidFill>
-                <a:latin typeface="Arial" panose="020B0604020202090204"/>
-                <a:ea typeface="Arial" panose="020B0604020202090204"/>
-                <a:cs typeface="Arial" panose="020B0604020202090204"/>
+                <a:latin typeface="Arial"/>
+                <a:ea typeface="Arial"/>
+                <a:cs typeface="Arial"/>
               </a:rPr>
               <a:t>THIS WEEK</a:t>
             </a:r>
-            <a:endParaRPr lang="en-US" sz="980" b="1" dirty="0">
-              <a:solidFill>
-                <a:srgbClr val="D71440"/>
-              </a:solidFill>
-              <a:latin typeface="Arial" panose="020B0604020202090204"/>
-              <a:ea typeface="Arial" panose="020B0604020202090204"/>
-              <a:cs typeface="Arial" panose="020B0604020202090204"/>
-            </a:endParaRPr>
           </a:p>
         </p:txBody>
       </p:sp>
@@ -3016,20 +2772,12 @@
                 <a:solidFill>
                   <a:srgbClr val="181C62"/>
                 </a:solidFill>
-                <a:latin typeface="Arial" panose="020B0604020202090204"/>
-                <a:ea typeface="Arial" panose="020B0604020202090204"/>
-                <a:cs typeface="Arial" panose="020B0604020202090204"/>
+                <a:latin typeface="Arial"/>
+                <a:ea typeface="Arial"/>
+                <a:cs typeface="Arial"/>
               </a:rPr>
               <a:t>PIPELINE / ARCHITECTURE / IMPLEMENTATION EVIDENCE</a:t>
             </a:r>
-            <a:endParaRPr lang="en-US" sz="980" b="1" dirty="0">
-              <a:solidFill>
-                <a:srgbClr val="181C62"/>
-              </a:solidFill>
-              <a:latin typeface="Arial" panose="020B0604020202090204"/>
-              <a:ea typeface="Arial" panose="020B0604020202090204"/>
-              <a:cs typeface="Arial" panose="020B0604020202090204"/>
-            </a:endParaRPr>
           </a:p>
         </p:txBody>
       </p:sp>
@@ -3064,20 +2812,12 @@
                 <a:solidFill>
                   <a:srgbClr val="FFFFFF"/>
                 </a:solidFill>
-                <a:latin typeface="Arial" panose="020B0604020202090204"/>
-                <a:ea typeface="Arial" panose="020B0604020202090204"/>
-                <a:cs typeface="Arial" panose="020B0604020202090204"/>
+                <a:latin typeface="Arial"/>
+                <a:ea typeface="Arial"/>
+                <a:cs typeface="Arial"/>
               </a:rPr>
               <a:t>TECHNICAL TAKEAWAY</a:t>
             </a:r>
-            <a:endParaRPr lang="en-US" sz="980" b="1" dirty="0">
-              <a:solidFill>
-                <a:srgbClr val="FFFFFF"/>
-              </a:solidFill>
-              <a:latin typeface="Arial" panose="020B0604020202090204"/>
-              <a:ea typeface="Arial" panose="020B0604020202090204"/>
-              <a:cs typeface="Arial" panose="020B0604020202090204"/>
-            </a:endParaRPr>
           </a:p>
         </p:txBody>
       </p:sp>
@@ -3090,7 +2830,7 @@
         <p:spPr>
           <a:xfrm>
             <a:off x="501396" y="543878"/>
-            <a:ext cx="4773930" cy="391795"/>
+            <a:ext cx="3345943" cy="498729"/>
           </a:xfrm>
           <a:prstGeom prst="rect">
             <a:avLst/>
@@ -3108,24 +2848,16 @@
           <a:p>
             <a:pPr algn="l"/>
             <a:r>
-              <a:rPr lang="en-US" altLang="zh-CN" sz="2550" b="1" dirty="0">
+              <a:rPr lang="en-US" sz="2550" b="1" dirty="0">
                 <a:solidFill>
                   <a:srgbClr val="20243A"/>
                 </a:solidFill>
-                <a:latin typeface="Arial" panose="020B0604020202090204"/>
-                <a:ea typeface="Arial" panose="020B0604020202090204"/>
-                <a:cs typeface="Arial" panose="020B0604020202090204"/>
-              </a:rPr>
-              <a:t>Scoping the Interaction Subset</a:t>
-            </a:r>
-            <a:endParaRPr lang="en-US" altLang="zh-CN" sz="2550" b="1" dirty="0">
-              <a:solidFill>
-                <a:srgbClr val="20243A"/>
-              </a:solidFill>
-              <a:latin typeface="Arial" panose="020B0604020202090204"/>
-              <a:ea typeface="Arial" panose="020B0604020202090204"/>
-              <a:cs typeface="Arial" panose="020B0604020202090204"/>
-            </a:endParaRPr>
+                <a:latin typeface="Arial"/>
+                <a:ea typeface="Arial"/>
+                <a:cs typeface="Arial"/>
+              </a:rPr>
+              <a:t>Technical Progress</a:t>
+            </a:r>
           </a:p>
         </p:txBody>
       </p:sp>
@@ -3164,41 +2896,24 @@
                 <a:solidFill>
                   <a:srgbClr val="20243A"/>
                 </a:solidFill>
-                <a:latin typeface="Arial" panose="020B0604020202090204"/>
-                <a:ea typeface="Arial" panose="020B0604020202090204"/>
-                <a:cs typeface="Arial" panose="020B0604020202090204"/>
+                <a:latin typeface="Arial"/>
+                <a:ea typeface="Arial"/>
+                <a:cs typeface="Arial"/>
               </a:rPr>
               <a:t>NTU RGB+D 120</a:t>
             </a:r>
-            <a:br>
+            <a:br/>
+            <a:r>
               <a:rPr lang="en-US" sz="1580" dirty="0">
                 <a:solidFill>
                   <a:srgbClr val="20243A"/>
                 </a:solidFill>
-                <a:latin typeface="Arial" panose="020B0604020202090204"/>
-                <a:ea typeface="Arial" panose="020B0604020202090204"/>
-                <a:cs typeface="Arial" panose="020B0604020202090204"/>
-              </a:rPr>
-            </a:br>
-            <a:r>
-              <a:rPr lang="en-US" sz="1580" dirty="0">
-                <a:solidFill>
-                  <a:srgbClr val="20243A"/>
-                </a:solidFill>
-                <a:latin typeface="Arial" panose="020B0604020202090204"/>
-                <a:ea typeface="Arial" panose="020B0604020202090204"/>
-                <a:cs typeface="Arial" panose="020B0604020202090204"/>
+                <a:latin typeface="Arial"/>
+                <a:ea typeface="Arial"/>
+                <a:cs typeface="Arial"/>
               </a:rPr>
               <a:t>dataset audit</a:t>
             </a:r>
-            <a:endParaRPr lang="en-US" sz="1580" dirty="0">
-              <a:solidFill>
-                <a:srgbClr val="20243A"/>
-              </a:solidFill>
-              <a:latin typeface="Arial" panose="020B0604020202090204"/>
-              <a:ea typeface="Arial" panose="020B0604020202090204"/>
-              <a:cs typeface="Arial" panose="020B0604020202090204"/>
-            </a:endParaRPr>
           </a:p>
           <a:p>
             <a:pPr algn="l">
@@ -3214,41 +2929,24 @@
                 <a:solidFill>
                   <a:srgbClr val="5E6478"/>
                 </a:solidFill>
-                <a:latin typeface="Arial" panose="020B0604020202090204"/>
-                <a:ea typeface="Arial" panose="020B0604020202090204"/>
-                <a:cs typeface="Arial" panose="020B0604020202090204"/>
+                <a:latin typeface="Arial"/>
+                <a:ea typeface="Arial"/>
+                <a:cs typeface="Arial"/>
               </a:rPr>
               <a:t>Completed · format, splits, cleaning</a:t>
             </a:r>
-            <a:br>
+            <a:br/>
+            <a:r>
               <a:rPr lang="en-US" sz="1050" dirty="0">
                 <a:solidFill>
                   <a:srgbClr val="5E6478"/>
                 </a:solidFill>
-                <a:latin typeface="Arial" panose="020B0604020202090204"/>
-                <a:ea typeface="Arial" panose="020B0604020202090204"/>
-                <a:cs typeface="Arial" panose="020B0604020202090204"/>
-              </a:rPr>
-            </a:br>
-            <a:r>
-              <a:rPr lang="en-US" sz="1050" dirty="0">
-                <a:solidFill>
-                  <a:srgbClr val="5E6478"/>
-                </a:solidFill>
-                <a:latin typeface="Arial" panose="020B0604020202090204"/>
-                <a:ea typeface="Arial" panose="020B0604020202090204"/>
-                <a:cs typeface="Arial" panose="020B0604020202090204"/>
-              </a:rPr>
-              <a:t>In progress · raw .skeleton parser</a:t>
-            </a:r>
-            <a:endParaRPr lang="en-US" sz="1050" dirty="0">
-              <a:solidFill>
-                <a:srgbClr val="5E6478"/>
-              </a:solidFill>
-              <a:latin typeface="Arial" panose="020B0604020202090204"/>
-              <a:ea typeface="Arial" panose="020B0604020202090204"/>
-              <a:cs typeface="Arial" panose="020B0604020202090204"/>
-            </a:endParaRPr>
+                <a:latin typeface="Arial"/>
+                <a:ea typeface="Arial"/>
+                <a:cs typeface="Arial"/>
+              </a:rPr>
+              <a:t>Planned · parser that keeps bodyID</a:t>
+            </a:r>
           </a:p>
         </p:txBody>
       </p:sp>
@@ -3287,20 +2985,12 @@
                 <a:solidFill>
                   <a:srgbClr val="5E6478"/>
                 </a:solidFill>
-                <a:latin typeface="Arial" panose="020B0604020202090204"/>
-                <a:ea typeface="Arial" panose="020B0604020202090204"/>
-                <a:cs typeface="Arial" panose="020B0604020202090204"/>
+                <a:latin typeface="Arial"/>
+                <a:ea typeface="Arial"/>
+                <a:cs typeface="Arial"/>
               </a:rPr>
               <a:t>26 mutual classes · 24,732 clips</a:t>
             </a:r>
-            <a:endParaRPr lang="en-US" sz="1420" dirty="0">
-              <a:solidFill>
-                <a:srgbClr val="5E6478"/>
-              </a:solidFill>
-              <a:latin typeface="Arial" panose="020B0604020202090204"/>
-              <a:ea typeface="Arial" panose="020B0604020202090204"/>
-              <a:cs typeface="Arial" panose="020B0604020202090204"/>
-            </a:endParaRPr>
           </a:p>
           <a:p>
             <a:pPr algn="l">
@@ -3316,83 +3006,48 @@
                 <a:solidFill>
                   <a:srgbClr val="5E6478"/>
                 </a:solidFill>
-                <a:latin typeface="Arial" panose="020B0604020202090204"/>
-                <a:ea typeface="Arial" panose="020B0604020202090204"/>
-                <a:cs typeface="Arial" panose="020B0604020202090204"/>
+                <a:latin typeface="Arial"/>
+                <a:ea typeface="Arial"/>
+                <a:cs typeface="Arial"/>
               </a:rPr>
               <a:t>A050–A060 + A106–A120; the official</a:t>
             </a:r>
-            <a:br>
+            <a:br/>
+            <a:r>
               <a:rPr lang="en-US" sz="1050" dirty="0">
                 <a:solidFill>
                   <a:srgbClr val="5E6478"/>
                 </a:solidFill>
-                <a:latin typeface="Arial" panose="020B0604020202090204"/>
-                <a:ea typeface="Arial" panose="020B0604020202090204"/>
-                <a:cs typeface="Arial" panose="020B0604020202090204"/>
-              </a:rPr>
-            </a:br>
+                <a:latin typeface="Arial"/>
+                <a:ea typeface="Arial"/>
+                <a:cs typeface="Arial"/>
+              </a:rPr>
+              <a:t>535-entry list removes 96 of them</a:t>
+            </a:r>
+            <a:br/>
             <a:r>
               <a:rPr lang="en-US" sz="1050" dirty="0">
                 <a:solidFill>
                   <a:srgbClr val="5E6478"/>
                 </a:solidFill>
-                <a:latin typeface="Arial" panose="020B0604020202090204"/>
-                <a:ea typeface="Arial" panose="020B0604020202090204"/>
-                <a:cs typeface="Arial" panose="020B0604020202090204"/>
-              </a:rPr>
-              <a:t>535-entry list removes 96 of them</a:t>
-            </a:r>
-            <a:br>
+                <a:latin typeface="Arial"/>
+                <a:ea typeface="Arial"/>
+                <a:cs typeface="Arial"/>
+              </a:rPr>
+              <a:t>X-Sub 53/53 subjects · X-Set even/odd setups</a:t>
+            </a:r>
+            <a:br/>
+            <a:r>
               <a:rPr lang="en-US" sz="1050" dirty="0">
                 <a:solidFill>
                   <a:srgbClr val="5E6478"/>
                 </a:solidFill>
-                <a:latin typeface="Arial" panose="020B0604020202090204"/>
-                <a:ea typeface="Arial" panose="020B0604020202090204"/>
-                <a:cs typeface="Arial" panose="020B0604020202090204"/>
-              </a:rPr>
-            </a:br>
-            <a:r>
-              <a:rPr lang="en-US" sz="1050" dirty="0">
-                <a:solidFill>
-                  <a:srgbClr val="5E6478"/>
-                </a:solidFill>
-                <a:latin typeface="Arial" panose="020B0604020202090204"/>
-                <a:ea typeface="Arial" panose="020B0604020202090204"/>
-                <a:cs typeface="Arial" panose="020B0604020202090204"/>
-              </a:rPr>
-              <a:t>X-Sub 53/53 subjects · X-Set even/odd setups</a:t>
-            </a:r>
-            <a:br>
-              <a:rPr lang="en-US" sz="1050" dirty="0">
-                <a:solidFill>
-                  <a:srgbClr val="5E6478"/>
-                </a:solidFill>
-                <a:latin typeface="Arial" panose="020B0604020202090204"/>
-                <a:ea typeface="Arial" panose="020B0604020202090204"/>
-                <a:cs typeface="Arial" panose="020B0604020202090204"/>
-              </a:rPr>
-            </a:br>
-            <a:r>
-              <a:rPr lang="en-US" sz="1050" dirty="0">
-                <a:solidFill>
-                  <a:srgbClr val="5E6478"/>
-                </a:solidFill>
-                <a:latin typeface="Arial" panose="020B0604020202090204"/>
-                <a:ea typeface="Arial" panose="020B0604020202090204"/>
-                <a:cs typeface="Arial" panose="020B0604020202090204"/>
+                <a:latin typeface="Arial"/>
+                <a:ea typeface="Arial"/>
+                <a:cs typeface="Arial"/>
               </a:rPr>
               <a:t>Skeleton-only download: 10.3 GB of the 2.3 TB</a:t>
             </a:r>
-            <a:endParaRPr lang="en-US" sz="1050" dirty="0">
-              <a:solidFill>
-                <a:srgbClr val="5E6478"/>
-              </a:solidFill>
-              <a:latin typeface="Arial" panose="020B0604020202090204"/>
-              <a:ea typeface="Arial" panose="020B0604020202090204"/>
-              <a:cs typeface="Arial" panose="020B0604020202090204"/>
-            </a:endParaRPr>
           </a:p>
         </p:txBody>
       </p:sp>
@@ -3431,41 +3086,24 @@
                 <a:solidFill>
                   <a:srgbClr val="FFFFFF"/>
                 </a:solidFill>
-                <a:latin typeface="Arial" panose="020B0604020202090204"/>
-                <a:ea typeface="Arial" panose="020B0604020202090204"/>
-                <a:cs typeface="Arial" panose="020B0604020202090204"/>
+                <a:latin typeface="Arial"/>
+                <a:ea typeface="Arial"/>
+                <a:cs typeface="Arial"/>
               </a:rPr>
               <a:t>Identity is lost</a:t>
             </a:r>
-            <a:br>
+            <a:br/>
+            <a:r>
               <a:rPr lang="en-US" sz="1580" b="1" dirty="0">
                 <a:solidFill>
                   <a:srgbClr val="FFFFFF"/>
                 </a:solidFill>
-                <a:latin typeface="Arial" panose="020B0604020202090204"/>
-                <a:ea typeface="Arial" panose="020B0604020202090204"/>
-                <a:cs typeface="Arial" panose="020B0604020202090204"/>
-              </a:rPr>
-            </a:br>
-            <a:r>
-              <a:rPr lang="en-US" sz="1580" b="1" dirty="0">
-                <a:solidFill>
-                  <a:srgbClr val="FFFFFF"/>
-                </a:solidFill>
-                <a:latin typeface="Arial" panose="020B0604020202090204"/>
-                <a:ea typeface="Arial" panose="020B0604020202090204"/>
-                <a:cs typeface="Arial" panose="020B0604020202090204"/>
+                <a:latin typeface="Arial"/>
+                <a:ea typeface="Arial"/>
+                <a:cs typeface="Arial"/>
               </a:rPr>
               <a:t>in preprocessing</a:t>
             </a:r>
-            <a:endParaRPr lang="en-US" sz="1580" b="1" dirty="0">
-              <a:solidFill>
-                <a:srgbClr val="FFFFFF"/>
-              </a:solidFill>
-              <a:latin typeface="Arial" panose="020B0604020202090204"/>
-              <a:ea typeface="Arial" panose="020B0604020202090204"/>
-              <a:cs typeface="Arial" panose="020B0604020202090204"/>
-            </a:endParaRPr>
           </a:p>
           <a:p>
             <a:pPr algn="l">
@@ -3481,20 +3119,12 @@
                 <a:solidFill>
                   <a:srgbClr val="C8C8C8"/>
                 </a:solidFill>
-                <a:latin typeface="Arial" panose="020B0604020202090204"/>
-                <a:ea typeface="Arial" panose="020B0604020202090204"/>
-                <a:cs typeface="Arial" panose="020B0604020202090204"/>
+                <a:latin typeface="Arial"/>
+                <a:ea typeface="Arial"/>
+                <a:cs typeface="Arial"/>
               </a:rPr>
               <a:t>Why it matters:</a:t>
             </a:r>
-            <a:endParaRPr lang="en-US" sz="1050" dirty="0">
-              <a:solidFill>
-                <a:srgbClr val="C8C8C8"/>
-              </a:solidFill>
-              <a:latin typeface="Arial" panose="020B0604020202090204"/>
-              <a:ea typeface="Arial" panose="020B0604020202090204"/>
-              <a:cs typeface="Arial" panose="020B0604020202090204"/>
-            </a:endParaRPr>
           </a:p>
           <a:p>
             <a:pPr algn="l">
@@ -3510,62 +3140,48 @@
                 <a:solidFill>
                   <a:srgbClr val="FFFFFF"/>
                 </a:solidFill>
-                <a:latin typeface="Arial" panose="020B0604020202090204"/>
-                <a:ea typeface="Arial" panose="020B0604020202090204"/>
-                <a:cs typeface="Arial" panose="020B0604020202090204"/>
+                <a:latin typeface="Arial"/>
+                <a:ea typeface="Arial"/>
+                <a:cs typeface="Arial"/>
               </a:rPr>
               <a:t>bodyID and trackingState are</a:t>
             </a:r>
-            <a:br>
+            <a:br/>
+            <a:r>
               <a:rPr lang="en-US" sz="1120" dirty="0">
                 <a:solidFill>
                   <a:srgbClr val="FFFFFF"/>
                 </a:solidFill>
-                <a:latin typeface="Arial" panose="020B0604020202090204"/>
-                <a:ea typeface="Arial" panose="020B0604020202090204"/>
-                <a:cs typeface="Arial" panose="020B0604020202090204"/>
-              </a:rPr>
-            </a:br>
+                <a:latin typeface="Arial"/>
+                <a:ea typeface="Arial"/>
+                <a:cs typeface="Arial"/>
+              </a:rPr>
+              <a:t>dropped by CTR-GCN and pyskl.</a:t>
+            </a:r>
+            <a:br/>
             <a:r>
               <a:rPr lang="en-US" sz="1120" dirty="0">
                 <a:solidFill>
                   <a:srgbClr val="FFFFFF"/>
                 </a:solidFill>
-                <a:latin typeface="Arial" panose="020B0604020202090204"/>
-                <a:ea typeface="Arial" panose="020B0604020202090204"/>
-                <a:cs typeface="Arial" panose="020B0604020202090204"/>
-              </a:rPr>
-              <a:t>dropped by CTR-GCN and pyskl —</a:t>
-            </a:r>
-            <a:br>
+                <a:latin typeface="Arial"/>
+                <a:ea typeface="Arial"/>
+                <a:cs typeface="Arial"/>
+              </a:rPr>
+              <a:t>Our plan: parse .skeleton</a:t>
+            </a:r>
+            <a:br/>
+            <a:r>
               <a:rPr lang="en-US" sz="1120" dirty="0">
                 <a:solidFill>
                   <a:srgbClr val="FFFFFF"/>
                 </a:solidFill>
-                <a:latin typeface="Arial" panose="020B0604020202090204"/>
-                <a:ea typeface="Arial" panose="020B0604020202090204"/>
-                <a:cs typeface="Arial" panose="020B0604020202090204"/>
-              </a:rPr>
-            </a:br>
-            <a:r>
-              <a:rPr lang="en-US" sz="1120" dirty="0">
-                <a:solidFill>
-                  <a:srgbClr val="FFFFFF"/>
-                </a:solidFill>
-                <a:latin typeface="Arial" panose="020B0604020202090204"/>
-                <a:ea typeface="Arial" panose="020B0604020202090204"/>
-                <a:cs typeface="Arial" panose="020B0604020202090204"/>
-              </a:rPr>
-              <a:t>we must parse the raw files</a:t>
-            </a:r>
-            <a:endParaRPr lang="en-US" sz="1120" dirty="0">
-              <a:solidFill>
-                <a:srgbClr val="FFFFFF"/>
-              </a:solidFill>
-              <a:latin typeface="Arial" panose="020B0604020202090204"/>
-              <a:ea typeface="Arial" panose="020B0604020202090204"/>
-              <a:cs typeface="Arial" panose="020B0604020202090204"/>
-            </a:endParaRPr>
+                <a:latin typeface="Arial"/>
+                <a:ea typeface="Arial"/>
+                <a:cs typeface="Arial"/>
+              </a:rPr>
+              <a:t>ourselves and keep both.</a:t>
+            </a:r>
           </a:p>
         </p:txBody>
       </p:sp>
@@ -3600,20 +3216,12 @@
                 <a:solidFill>
                   <a:srgbClr val="FFFFFF"/>
                 </a:solidFill>
-                <a:latin typeface="Arial" panose="020B0604020202090204"/>
-                <a:ea typeface="Arial" panose="020B0604020202090204"/>
-                <a:cs typeface="Arial" panose="020B0604020202090204"/>
+                <a:latin typeface="Arial"/>
+                <a:ea typeface="Arial"/>
+                <a:cs typeface="Arial"/>
               </a:rPr>
               <a:t>{{SOURCE}}</a:t>
             </a:r>
-            <a:endParaRPr lang="en-US" sz="900" dirty="0">
-              <a:solidFill>
-                <a:srgbClr val="FFFFFF"/>
-              </a:solidFill>
-              <a:latin typeface="Arial" panose="020B0604020202090204"/>
-              <a:ea typeface="Arial" panose="020B0604020202090204"/>
-              <a:cs typeface="Arial" panose="020B0604020202090204"/>
-            </a:endParaRPr>
           </a:p>
         </p:txBody>
       </p:sp>
@@ -3648,20 +3256,12 @@
                 <a:solidFill>
                   <a:srgbClr val="FFFFFF"/>
                 </a:solidFill>
-                <a:latin typeface="Arial" panose="020B0604020202090204"/>
-                <a:ea typeface="Arial" panose="020B0604020202090204"/>
-                <a:cs typeface="Arial" panose="020B0604020202090204"/>
+                <a:latin typeface="Arial"/>
+                <a:ea typeface="Arial"/>
+                <a:cs typeface="Arial"/>
               </a:rPr>
               <a:t>{{PAGE_NUM}}</a:t>
             </a:r>
-            <a:endParaRPr lang="en-US" sz="900" dirty="0">
-              <a:solidFill>
-                <a:srgbClr val="FFFFFF"/>
-              </a:solidFill>
-              <a:latin typeface="Arial" panose="020B0604020202090204"/>
-              <a:ea typeface="Arial" panose="020B0604020202090204"/>
-              <a:cs typeface="Arial" panose="020B0604020202090204"/>
-            </a:endParaRPr>
           </a:p>
         </p:txBody>
       </p:sp>
@@ -3674,7 +3274,7 @@
           <p:nvPr/>
         </p:nvPicPr>
         <p:blipFill>
-          <a:blip r:embed="rId2"/>
+          <a:blip r:embed="rId3"/>
           <a:stretch>
             <a:fillRect/>
           </a:stretch>
@@ -3753,7 +3353,7 @@
           <p:nvPr/>
         </p:nvPicPr>
         <p:blipFill>
-          <a:blip r:embed="rId1"/>
+          <a:blip r:embed="rId2"/>
           <a:stretch>
             <a:fillRect/>
           </a:stretch>
@@ -3821,20 +3421,12 @@
                 <a:solidFill>
                   <a:srgbClr val="FFFFFF"/>
                 </a:solidFill>
-                <a:latin typeface="Arial" panose="020B0604020202090204"/>
-                <a:ea typeface="Arial" panose="020B0604020202090204"/>
-                <a:cs typeface="Arial" panose="020B0604020202090204"/>
+                <a:latin typeface="Arial"/>
+                <a:ea typeface="Arial"/>
+                <a:cs typeface="Arial"/>
               </a:rPr>
               <a:t>EE6008 · HUMAN POSE ANALYTICS</a:t>
             </a:r>
-            <a:endParaRPr lang="en-US" sz="980" dirty="0">
-              <a:solidFill>
-                <a:srgbClr val="FFFFFF"/>
-              </a:solidFill>
-              <a:latin typeface="Arial" panose="020B0604020202090204"/>
-              <a:ea typeface="Arial" panose="020B0604020202090204"/>
-              <a:cs typeface="Arial" panose="020B0604020202090204"/>
-            </a:endParaRPr>
           </a:p>
         </p:txBody>
       </p:sp>
@@ -3987,20 +3579,12 @@
                 <a:solidFill>
                   <a:srgbClr val="D71440"/>
                 </a:solidFill>
-                <a:latin typeface="Arial" panose="020B0604020202090204"/>
-                <a:ea typeface="Arial" panose="020B0604020202090204"/>
-                <a:cs typeface="Arial" panose="020B0604020202090204"/>
+                <a:latin typeface="Arial"/>
+                <a:ea typeface="Arial"/>
+                <a:cs typeface="Arial"/>
               </a:rPr>
               <a:t>ONE-LINE RESULT</a:t>
             </a:r>
-            <a:endParaRPr lang="en-US" sz="900" b="1" dirty="0">
-              <a:solidFill>
-                <a:srgbClr val="D71440"/>
-              </a:solidFill>
-              <a:latin typeface="Arial" panose="020B0604020202090204"/>
-              <a:ea typeface="Arial" panose="020B0604020202090204"/>
-              <a:cs typeface="Arial" panose="020B0604020202090204"/>
-            </a:endParaRPr>
           </a:p>
         </p:txBody>
       </p:sp>
@@ -4035,20 +3619,12 @@
                 <a:solidFill>
                   <a:srgbClr val="181C62"/>
                 </a:solidFill>
-                <a:latin typeface="Arial" panose="020B0604020202090204"/>
-                <a:ea typeface="Arial" panose="020B0604020202090204"/>
-                <a:cs typeface="Arial" panose="020B0604020202090204"/>
+                <a:latin typeface="Arial"/>
+                <a:ea typeface="Arial"/>
+                <a:cs typeface="Arial"/>
               </a:rPr>
               <a:t>EVIDENCE · BASELINE · CONTROL · METRIC</a:t>
             </a:r>
-            <a:endParaRPr lang="en-US" sz="980" b="1" dirty="0">
-              <a:solidFill>
-                <a:srgbClr val="181C62"/>
-              </a:solidFill>
-              <a:latin typeface="Arial" panose="020B0604020202090204"/>
-              <a:ea typeface="Arial" panose="020B0604020202090204"/>
-              <a:cs typeface="Arial" panose="020B0604020202090204"/>
-            </a:endParaRPr>
           </a:p>
         </p:txBody>
       </p:sp>
@@ -4083,20 +3659,12 @@
                 <a:solidFill>
                   <a:srgbClr val="FFFFFF"/>
                 </a:solidFill>
-                <a:latin typeface="Arial" panose="020B0604020202090204"/>
-                <a:ea typeface="Arial" panose="020B0604020202090204"/>
-                <a:cs typeface="Arial" panose="020B0604020202090204"/>
+                <a:latin typeface="Arial"/>
+                <a:ea typeface="Arial"/>
+                <a:cs typeface="Arial"/>
               </a:rPr>
               <a:t>KEY FINDINGS</a:t>
             </a:r>
-            <a:endParaRPr lang="en-US" sz="1050" b="1" dirty="0">
-              <a:solidFill>
-                <a:srgbClr val="FFFFFF"/>
-              </a:solidFill>
-              <a:latin typeface="Arial" panose="020B0604020202090204"/>
-              <a:ea typeface="Arial" panose="020B0604020202090204"/>
-              <a:cs typeface="Arial" panose="020B0604020202090204"/>
-            </a:endParaRPr>
           </a:p>
         </p:txBody>
       </p:sp>
@@ -4131,20 +3699,12 @@
                 <a:solidFill>
                   <a:srgbClr val="20243A"/>
                 </a:solidFill>
-                <a:latin typeface="Arial" panose="020B0604020202090204"/>
-                <a:ea typeface="Arial" panose="020B0604020202090204"/>
-                <a:cs typeface="Arial" panose="020B0604020202090204"/>
+                <a:latin typeface="Arial"/>
+                <a:ea typeface="Arial"/>
+                <a:cs typeface="Arial"/>
               </a:rPr>
               <a:t>Experimental Evidence</a:t>
             </a:r>
-            <a:endParaRPr lang="en-US" sz="2550" b="1" dirty="0">
-              <a:solidFill>
-                <a:srgbClr val="20243A"/>
-              </a:solidFill>
-              <a:latin typeface="Arial" panose="020B0604020202090204"/>
-              <a:ea typeface="Arial" panose="020B0604020202090204"/>
-              <a:cs typeface="Arial" panose="020B0604020202090204"/>
-            </a:endParaRPr>
           </a:p>
         </p:txBody>
       </p:sp>
@@ -4179,20 +3739,12 @@
                 <a:solidFill>
                   <a:srgbClr val="D71440"/>
                 </a:solidFill>
-                <a:latin typeface="Arial" panose="020B0604020202090204"/>
-                <a:ea typeface="Arial" panose="020B0604020202090204"/>
-                <a:cs typeface="Arial" panose="020B0604020202090204"/>
+                <a:latin typeface="Arial"/>
+                <a:ea typeface="Arial"/>
+                <a:cs typeface="Arial"/>
               </a:rPr>
               <a:t>{{KEY_MESSAGE}}</a:t>
             </a:r>
-            <a:endParaRPr lang="en-US" sz="1580" b="1" dirty="0">
-              <a:solidFill>
-                <a:srgbClr val="D71440"/>
-              </a:solidFill>
-              <a:latin typeface="Arial" panose="020B0604020202090204"/>
-              <a:ea typeface="Arial" panose="020B0604020202090204"/>
-              <a:cs typeface="Arial" panose="020B0604020202090204"/>
-            </a:endParaRPr>
           </a:p>
         </p:txBody>
       </p:sp>
@@ -4231,20 +3783,12 @@
                 <a:solidFill>
                   <a:srgbClr val="5E6478"/>
                 </a:solidFill>
-                <a:latin typeface="Arial" panose="020B0604020202090204"/>
-                <a:ea typeface="Arial" panose="020B0604020202090204"/>
-                <a:cs typeface="Arial" panose="020B0604020202090204"/>
+                <a:latin typeface="Arial"/>
+                <a:ea typeface="Arial"/>
+                <a:cs typeface="Arial"/>
               </a:rPr>
               <a:t>{{CONTENT_AREA}}</a:t>
             </a:r>
-            <a:endParaRPr lang="en-US" sz="1420" dirty="0">
-              <a:solidFill>
-                <a:srgbClr val="5E6478"/>
-              </a:solidFill>
-              <a:latin typeface="Arial" panose="020B0604020202090204"/>
-              <a:ea typeface="Arial" panose="020B0604020202090204"/>
-              <a:cs typeface="Arial" panose="020B0604020202090204"/>
-            </a:endParaRPr>
           </a:p>
           <a:p>
             <a:pPr algn="l">
@@ -4260,41 +3804,24 @@
                 <a:solidFill>
                   <a:srgbClr val="5E6478"/>
                 </a:solidFill>
-                <a:latin typeface="Arial" panose="020B0604020202090204"/>
-                <a:ea typeface="Arial" panose="020B0604020202090204"/>
-                <a:cs typeface="Arial" panose="020B0604020202090204"/>
+                <a:latin typeface="Arial"/>
+                <a:ea typeface="Arial"/>
+                <a:cs typeface="Arial"/>
               </a:rPr>
               <a:t>Insert one chart, table, confusion matrix, or controlled comparison.</a:t>
             </a:r>
-            <a:br>
+            <a:br/>
+            <a:r>
               <a:rPr lang="en-US" sz="1050" dirty="0">
                 <a:solidFill>
                   <a:srgbClr val="5E6478"/>
                 </a:solidFill>
-                <a:latin typeface="Arial" panose="020B0604020202090204"/>
-                <a:ea typeface="Arial" panose="020B0604020202090204"/>
-                <a:cs typeface="Arial" panose="020B0604020202090204"/>
-              </a:rPr>
-            </a:br>
-            <a:r>
-              <a:rPr lang="en-US" sz="1050" dirty="0">
-                <a:solidFill>
-                  <a:srgbClr val="5E6478"/>
-                </a:solidFill>
-                <a:latin typeface="Arial" panose="020B0604020202090204"/>
-                <a:ea typeface="Arial" panose="020B0604020202090204"/>
-                <a:cs typeface="Arial" panose="020B0604020202090204"/>
+                <a:latin typeface="Arial"/>
+                <a:ea typeface="Arial"/>
+                <a:cs typeface="Arial"/>
               </a:rPr>
               <a:t>Label the baseline, evaluation split, metric, and uncertainty.</a:t>
             </a:r>
-            <a:endParaRPr lang="en-US" sz="1050" dirty="0">
-              <a:solidFill>
-                <a:srgbClr val="5E6478"/>
-              </a:solidFill>
-              <a:latin typeface="Arial" panose="020B0604020202090204"/>
-              <a:ea typeface="Arial" panose="020B0604020202090204"/>
-              <a:cs typeface="Arial" panose="020B0604020202090204"/>
-            </a:endParaRPr>
           </a:p>
         </p:txBody>
       </p:sp>
@@ -4333,20 +3860,12 @@
                 <a:solidFill>
                   <a:srgbClr val="20243A"/>
                 </a:solidFill>
-                <a:latin typeface="Arial" panose="020B0604020202090204"/>
-                <a:ea typeface="Arial" panose="020B0604020202090204"/>
-                <a:cs typeface="Arial" panose="020B0604020202090204"/>
+                <a:latin typeface="Arial"/>
+                <a:ea typeface="Arial"/>
+                <a:cs typeface="Arial"/>
               </a:rPr>
               <a:t>{{FINDINGS}}</a:t>
             </a:r>
-            <a:endParaRPr lang="en-US" sz="1500" dirty="0">
-              <a:solidFill>
-                <a:srgbClr val="20243A"/>
-              </a:solidFill>
-              <a:latin typeface="Arial" panose="020B0604020202090204"/>
-              <a:ea typeface="Arial" panose="020B0604020202090204"/>
-              <a:cs typeface="Arial" panose="020B0604020202090204"/>
-            </a:endParaRPr>
           </a:p>
           <a:p>
             <a:pPr algn="l">
@@ -4362,62 +3881,36 @@
                 <a:solidFill>
                   <a:srgbClr val="5E6478"/>
                 </a:solidFill>
-                <a:latin typeface="Arial" panose="020B0604020202090204"/>
-                <a:ea typeface="Arial" panose="020B0604020202090204"/>
-                <a:cs typeface="Arial" panose="020B0604020202090204"/>
+                <a:latin typeface="Arial"/>
+                <a:ea typeface="Arial"/>
+                <a:cs typeface="Arial"/>
               </a:rPr>
               <a:t>1 · What changed versus baseline?</a:t>
             </a:r>
-            <a:br>
+            <a:br/>
+            <a:r>
               <a:rPr lang="en-US" sz="1120" dirty="0">
                 <a:solidFill>
                   <a:srgbClr val="5E6478"/>
                 </a:solidFill>
-                <a:latin typeface="Arial" panose="020B0604020202090204"/>
-                <a:ea typeface="Arial" panose="020B0604020202090204"/>
-                <a:cs typeface="Arial" panose="020B0604020202090204"/>
-              </a:rPr>
-            </a:br>
+                <a:latin typeface="Arial"/>
+                <a:ea typeface="Arial"/>
+                <a:cs typeface="Arial"/>
+              </a:rPr>
+              <a:t>2 · Which class or case still fails?</a:t>
+            </a:r>
+            <a:br/>
             <a:r>
               <a:rPr lang="en-US" sz="1120" dirty="0">
                 <a:solidFill>
                   <a:srgbClr val="5E6478"/>
                 </a:solidFill>
-                <a:latin typeface="Arial" panose="020B0604020202090204"/>
-                <a:ea typeface="Arial" panose="020B0604020202090204"/>
-                <a:cs typeface="Arial" panose="020B0604020202090204"/>
-              </a:rPr>
-              <a:t>2 · Which class or case still fails?</a:t>
-            </a:r>
-            <a:br>
-              <a:rPr lang="en-US" sz="1120" dirty="0">
-                <a:solidFill>
-                  <a:srgbClr val="5E6478"/>
-                </a:solidFill>
-                <a:latin typeface="Arial" panose="020B0604020202090204"/>
-                <a:ea typeface="Arial" panose="020B0604020202090204"/>
-                <a:cs typeface="Arial" panose="020B0604020202090204"/>
-              </a:rPr>
-            </a:br>
-            <a:r>
-              <a:rPr lang="en-US" sz="1120" dirty="0">
-                <a:solidFill>
-                  <a:srgbClr val="5E6478"/>
-                </a:solidFill>
-                <a:latin typeface="Arial" panose="020B0604020202090204"/>
-                <a:ea typeface="Arial" panose="020B0604020202090204"/>
-                <a:cs typeface="Arial" panose="020B0604020202090204"/>
+                <a:latin typeface="Arial"/>
+                <a:ea typeface="Arial"/>
+                <a:cs typeface="Arial"/>
               </a:rPr>
               <a:t>3 · What experiment comes next?</a:t>
             </a:r>
-            <a:endParaRPr lang="en-US" sz="1120" dirty="0">
-              <a:solidFill>
-                <a:srgbClr val="5E6478"/>
-              </a:solidFill>
-              <a:latin typeface="Arial" panose="020B0604020202090204"/>
-              <a:ea typeface="Arial" panose="020B0604020202090204"/>
-              <a:cs typeface="Arial" panose="020B0604020202090204"/>
-            </a:endParaRPr>
           </a:p>
         </p:txBody>
       </p:sp>
@@ -4452,20 +3945,12 @@
                 <a:solidFill>
                   <a:srgbClr val="FFFFFF"/>
                 </a:solidFill>
-                <a:latin typeface="Arial" panose="020B0604020202090204"/>
-                <a:ea typeface="Arial" panose="020B0604020202090204"/>
-                <a:cs typeface="Arial" panose="020B0604020202090204"/>
+                <a:latin typeface="Arial"/>
+                <a:ea typeface="Arial"/>
+                <a:cs typeface="Arial"/>
               </a:rPr>
               <a:t>{{SOURCE}}</a:t>
             </a:r>
-            <a:endParaRPr lang="en-US" sz="900" dirty="0">
-              <a:solidFill>
-                <a:srgbClr val="FFFFFF"/>
-              </a:solidFill>
-              <a:latin typeface="Arial" panose="020B0604020202090204"/>
-              <a:ea typeface="Arial" panose="020B0604020202090204"/>
-              <a:cs typeface="Arial" panose="020B0604020202090204"/>
-            </a:endParaRPr>
           </a:p>
         </p:txBody>
       </p:sp>
@@ -4500,20 +3985,12 @@
                 <a:solidFill>
                   <a:srgbClr val="FFFFFF"/>
                 </a:solidFill>
-                <a:latin typeface="Arial" panose="020B0604020202090204"/>
-                <a:ea typeface="Arial" panose="020B0604020202090204"/>
-                <a:cs typeface="Arial" panose="020B0604020202090204"/>
+                <a:latin typeface="Arial"/>
+                <a:ea typeface="Arial"/>
+                <a:cs typeface="Arial"/>
               </a:rPr>
               <a:t>{{PAGE_NUM}}</a:t>
             </a:r>
-            <a:endParaRPr lang="en-US" sz="900" dirty="0">
-              <a:solidFill>
-                <a:srgbClr val="FFFFFF"/>
-              </a:solidFill>
-              <a:latin typeface="Arial" panose="020B0604020202090204"/>
-              <a:ea typeface="Arial" panose="020B0604020202090204"/>
-              <a:cs typeface="Arial" panose="020B0604020202090204"/>
-            </a:endParaRPr>
           </a:p>
         </p:txBody>
       </p:sp>
@@ -4581,7 +4058,7 @@
           <p:nvPr/>
         </p:nvPicPr>
         <p:blipFill>
-          <a:blip r:embed="rId1"/>
+          <a:blip r:embed="rId2"/>
           <a:stretch>
             <a:fillRect/>
           </a:stretch>
@@ -4649,20 +4126,12 @@
                 <a:solidFill>
                   <a:srgbClr val="FFFFFF"/>
                 </a:solidFill>
-                <a:latin typeface="Arial" panose="020B0604020202090204"/>
-                <a:ea typeface="Arial" panose="020B0604020202090204"/>
-                <a:cs typeface="Arial" panose="020B0604020202090204"/>
+                <a:latin typeface="Arial"/>
+                <a:ea typeface="Arial"/>
+                <a:cs typeface="Arial"/>
               </a:rPr>
               <a:t>EE6008 · HUMAN POSE ANALYTICS</a:t>
             </a:r>
-            <a:endParaRPr lang="en-US" sz="980" dirty="0">
-              <a:solidFill>
-                <a:srgbClr val="FFFFFF"/>
-              </a:solidFill>
-              <a:latin typeface="Arial" panose="020B0604020202090204"/>
-              <a:ea typeface="Arial" panose="020B0604020202090204"/>
-              <a:cs typeface="Arial" panose="020B0604020202090204"/>
-            </a:endParaRPr>
           </a:p>
         </p:txBody>
       </p:sp>
@@ -4861,20 +4330,12 @@
                 <a:solidFill>
                   <a:srgbClr val="D71440"/>
                 </a:solidFill>
-                <a:latin typeface="Arial" panose="020B0604020202090204"/>
-                <a:ea typeface="Arial" panose="020B0604020202090204"/>
-                <a:cs typeface="Arial" panose="020B0604020202090204"/>
+                <a:latin typeface="Arial"/>
+                <a:ea typeface="Arial"/>
+                <a:cs typeface="Arial"/>
               </a:rPr>
               <a:t>RISK / BLOCKER</a:t>
             </a:r>
-            <a:endParaRPr lang="en-US" sz="1050" b="1" dirty="0">
-              <a:solidFill>
-                <a:srgbClr val="D71440"/>
-              </a:solidFill>
-              <a:latin typeface="Arial" panose="020B0604020202090204"/>
-              <a:ea typeface="Arial" panose="020B0604020202090204"/>
-              <a:cs typeface="Arial" panose="020B0604020202090204"/>
-            </a:endParaRPr>
           </a:p>
         </p:txBody>
       </p:sp>
@@ -4909,20 +4370,12 @@
                 <a:solidFill>
                   <a:srgbClr val="D71440"/>
                 </a:solidFill>
-                <a:latin typeface="Arial" panose="020B0604020202090204"/>
-                <a:ea typeface="Arial" panose="020B0604020202090204"/>
-                <a:cs typeface="Arial" panose="020B0604020202090204"/>
+                <a:latin typeface="Arial"/>
+                <a:ea typeface="Arial"/>
+                <a:cs typeface="Arial"/>
               </a:rPr>
               <a:t>IMPACT ON SCOPE, EVIDENCE, OR TIMELINE</a:t>
             </a:r>
-            <a:endParaRPr lang="en-US" sz="1050" b="1" dirty="0">
-              <a:solidFill>
-                <a:srgbClr val="D71440"/>
-              </a:solidFill>
-              <a:latin typeface="Arial" panose="020B0604020202090204"/>
-              <a:ea typeface="Arial" panose="020B0604020202090204"/>
-              <a:cs typeface="Arial" panose="020B0604020202090204"/>
-            </a:endParaRPr>
           </a:p>
         </p:txBody>
       </p:sp>
@@ -4957,20 +4410,12 @@
                 <a:solidFill>
                   <a:srgbClr val="181C62"/>
                 </a:solidFill>
-                <a:latin typeface="Arial" panose="020B0604020202090204"/>
-                <a:ea typeface="Arial" panose="020B0604020202090204"/>
-                <a:cs typeface="Arial" panose="020B0604020202090204"/>
+                <a:latin typeface="Arial"/>
+                <a:ea typeface="Arial"/>
+                <a:cs typeface="Arial"/>
               </a:rPr>
               <a:t>MITIGATION / OWNER / CHECK DATE</a:t>
             </a:r>
-            <a:endParaRPr lang="en-US" sz="1050" b="1" dirty="0">
-              <a:solidFill>
-                <a:srgbClr val="181C62"/>
-              </a:solidFill>
-              <a:latin typeface="Arial" panose="020B0604020202090204"/>
-              <a:ea typeface="Arial" panose="020B0604020202090204"/>
-              <a:cs typeface="Arial" panose="020B0604020202090204"/>
-            </a:endParaRPr>
           </a:p>
         </p:txBody>
       </p:sp>
@@ -5005,20 +4450,12 @@
                 <a:solidFill>
                   <a:srgbClr val="FFFFFF"/>
                 </a:solidFill>
-                <a:latin typeface="Arial" panose="020B0604020202090204"/>
-                <a:ea typeface="Arial" panose="020B0604020202090204"/>
-                <a:cs typeface="Arial" panose="020B0604020202090204"/>
+                <a:latin typeface="Arial"/>
+                <a:ea typeface="Arial"/>
+                <a:cs typeface="Arial"/>
               </a:rPr>
               <a:t>DECISION OR SUPPORT NEEDED</a:t>
             </a:r>
-            <a:endParaRPr lang="en-US" sz="1050" b="1" dirty="0">
-              <a:solidFill>
-                <a:srgbClr val="FFFFFF"/>
-              </a:solidFill>
-              <a:latin typeface="Arial" panose="020B0604020202090204"/>
-              <a:ea typeface="Arial" panose="020B0604020202090204"/>
-              <a:cs typeface="Arial" panose="020B0604020202090204"/>
-            </a:endParaRPr>
           </a:p>
         </p:txBody>
       </p:sp>
@@ -5053,20 +4490,12 @@
                 <a:solidFill>
                   <a:srgbClr val="20243A"/>
                 </a:solidFill>
-                <a:latin typeface="Arial" panose="020B0604020202090204"/>
-                <a:ea typeface="Arial" panose="020B0604020202090204"/>
-                <a:cs typeface="Arial" panose="020B0604020202090204"/>
+                <a:latin typeface="Arial"/>
+                <a:ea typeface="Arial"/>
+                <a:cs typeface="Arial"/>
               </a:rPr>
               <a:t>Risks &amp; Decisions</a:t>
             </a:r>
-            <a:endParaRPr lang="en-US" sz="2550" b="1" dirty="0">
-              <a:solidFill>
-                <a:srgbClr val="20243A"/>
-              </a:solidFill>
-              <a:latin typeface="Arial" panose="020B0604020202090204"/>
-              <a:ea typeface="Arial" panose="020B0604020202090204"/>
-              <a:cs typeface="Arial" panose="020B0604020202090204"/>
-            </a:endParaRPr>
           </a:p>
         </p:txBody>
       </p:sp>
@@ -5105,20 +4534,12 @@
                 <a:solidFill>
                   <a:srgbClr val="D71440"/>
                 </a:solidFill>
-                <a:latin typeface="Arial" panose="020B0604020202090204"/>
-                <a:ea typeface="Arial" panose="020B0604020202090204"/>
-                <a:cs typeface="Arial" panose="020B0604020202090204"/>
+                <a:latin typeface="Arial"/>
+                <a:ea typeface="Arial"/>
+                <a:cs typeface="Arial"/>
               </a:rPr>
               <a:t>{{RISKS}}</a:t>
             </a:r>
-            <a:endParaRPr lang="en-US" sz="1580" b="1" dirty="0">
-              <a:solidFill>
-                <a:srgbClr val="D71440"/>
-              </a:solidFill>
-              <a:latin typeface="Arial" panose="020B0604020202090204"/>
-              <a:ea typeface="Arial" panose="020B0604020202090204"/>
-              <a:cs typeface="Arial" panose="020B0604020202090204"/>
-            </a:endParaRPr>
           </a:p>
           <a:p>
             <a:pPr algn="l">
@@ -5131,20 +4552,12 @@
                 <a:solidFill>
                   <a:srgbClr val="5E6478"/>
                 </a:solidFill>
-                <a:latin typeface="Arial" panose="020B0604020202090204"/>
-                <a:ea typeface="Arial" panose="020B0604020202090204"/>
-                <a:cs typeface="Arial" panose="020B0604020202090204"/>
+                <a:latin typeface="Arial"/>
+                <a:ea typeface="Arial"/>
+                <a:cs typeface="Arial"/>
               </a:rPr>
               <a:t>Describe the failure mode, trigger, and evidence.</a:t>
             </a:r>
-            <a:endParaRPr lang="en-US" sz="1050" dirty="0">
-              <a:solidFill>
-                <a:srgbClr val="5E6478"/>
-              </a:solidFill>
-              <a:latin typeface="Arial" panose="020B0604020202090204"/>
-              <a:ea typeface="Arial" panose="020B0604020202090204"/>
-              <a:cs typeface="Arial" panose="020B0604020202090204"/>
-            </a:endParaRPr>
           </a:p>
         </p:txBody>
       </p:sp>
@@ -5183,20 +4596,12 @@
                 <a:solidFill>
                   <a:srgbClr val="20243A"/>
                 </a:solidFill>
-                <a:latin typeface="Arial" panose="020B0604020202090204"/>
-                <a:ea typeface="Arial" panose="020B0604020202090204"/>
-                <a:cs typeface="Arial" panose="020B0604020202090204"/>
+                <a:latin typeface="Arial"/>
+                <a:ea typeface="Arial"/>
+                <a:cs typeface="Arial"/>
               </a:rPr>
               <a:t>{{IMPACT}}</a:t>
             </a:r>
-            <a:endParaRPr lang="en-US" sz="1580" dirty="0">
-              <a:solidFill>
-                <a:srgbClr val="20243A"/>
-              </a:solidFill>
-              <a:latin typeface="Arial" panose="020B0604020202090204"/>
-              <a:ea typeface="Arial" panose="020B0604020202090204"/>
-              <a:cs typeface="Arial" panose="020B0604020202090204"/>
-            </a:endParaRPr>
           </a:p>
           <a:p>
             <a:pPr algn="l">
@@ -5209,20 +4614,12 @@
                 <a:solidFill>
                   <a:srgbClr val="5E6478"/>
                 </a:solidFill>
-                <a:latin typeface="Arial" panose="020B0604020202090204"/>
-                <a:ea typeface="Arial" panose="020B0604020202090204"/>
-                <a:cs typeface="Arial" panose="020B0604020202090204"/>
+                <a:latin typeface="Arial"/>
+                <a:ea typeface="Arial"/>
+                <a:cs typeface="Arial"/>
               </a:rPr>
               <a:t>Quantify delay, compute cost, metric risk, or lost scope.</a:t>
             </a:r>
-            <a:endParaRPr lang="en-US" sz="1050" dirty="0">
-              <a:solidFill>
-                <a:srgbClr val="5E6478"/>
-              </a:solidFill>
-              <a:latin typeface="Arial" panose="020B0604020202090204"/>
-              <a:ea typeface="Arial" panose="020B0604020202090204"/>
-              <a:cs typeface="Arial" panose="020B0604020202090204"/>
-            </a:endParaRPr>
           </a:p>
         </p:txBody>
       </p:sp>
@@ -5261,20 +4658,12 @@
                 <a:solidFill>
                   <a:srgbClr val="181C62"/>
                 </a:solidFill>
-                <a:latin typeface="Arial" panose="020B0604020202090204"/>
-                <a:ea typeface="Arial" panose="020B0604020202090204"/>
-                <a:cs typeface="Arial" panose="020B0604020202090204"/>
+                <a:latin typeface="Arial"/>
+                <a:ea typeface="Arial"/>
+                <a:cs typeface="Arial"/>
               </a:rPr>
               <a:t>{{MITIGATION}}</a:t>
             </a:r>
-            <a:endParaRPr lang="en-US" sz="1580" dirty="0">
-              <a:solidFill>
-                <a:srgbClr val="181C62"/>
-              </a:solidFill>
-              <a:latin typeface="Arial" panose="020B0604020202090204"/>
-              <a:ea typeface="Arial" panose="020B0604020202090204"/>
-              <a:cs typeface="Arial" panose="020B0604020202090204"/>
-            </a:endParaRPr>
           </a:p>
           <a:p>
             <a:pPr algn="l">
@@ -5287,20 +4676,12 @@
                 <a:solidFill>
                   <a:srgbClr val="5E6478"/>
                 </a:solidFill>
-                <a:latin typeface="Arial" panose="020B0604020202090204"/>
-                <a:ea typeface="Arial" panose="020B0604020202090204"/>
-                <a:cs typeface="Arial" panose="020B0604020202090204"/>
+                <a:latin typeface="Arial"/>
+                <a:ea typeface="Arial"/>
+                <a:cs typeface="Arial"/>
               </a:rPr>
               <a:t>Owner: … | Check date: … | Fallback: …</a:t>
             </a:r>
-            <a:endParaRPr lang="en-US" sz="1050" dirty="0">
-              <a:solidFill>
-                <a:srgbClr val="5E6478"/>
-              </a:solidFill>
-              <a:latin typeface="Arial" panose="020B0604020202090204"/>
-              <a:ea typeface="Arial" panose="020B0604020202090204"/>
-              <a:cs typeface="Arial" panose="020B0604020202090204"/>
-            </a:endParaRPr>
           </a:p>
         </p:txBody>
       </p:sp>
@@ -5339,20 +4720,12 @@
                 <a:solidFill>
                   <a:srgbClr val="FFFFFF"/>
                 </a:solidFill>
-                <a:latin typeface="Arial" panose="020B0604020202090204"/>
-                <a:ea typeface="Arial" panose="020B0604020202090204"/>
-                <a:cs typeface="Arial" panose="020B0604020202090204"/>
+                <a:latin typeface="Arial"/>
+                <a:ea typeface="Arial"/>
+                <a:cs typeface="Arial"/>
               </a:rPr>
               <a:t>{{DECISION_NEEDED}}</a:t>
             </a:r>
-            <a:endParaRPr lang="en-US" sz="1580" b="1" dirty="0">
-              <a:solidFill>
-                <a:srgbClr val="FFFFFF"/>
-              </a:solidFill>
-              <a:latin typeface="Arial" panose="020B0604020202090204"/>
-              <a:ea typeface="Arial" panose="020B0604020202090204"/>
-              <a:cs typeface="Arial" panose="020B0604020202090204"/>
-            </a:endParaRPr>
           </a:p>
           <a:p>
             <a:pPr algn="l">
@@ -5365,20 +4738,12 @@
                 <a:solidFill>
                   <a:srgbClr val="C8C8C8"/>
                 </a:solidFill>
-                <a:latin typeface="Arial" panose="020B0604020202090204"/>
-                <a:ea typeface="Arial" panose="020B0604020202090204"/>
-                <a:cs typeface="Arial" panose="020B0604020202090204"/>
+                <a:latin typeface="Arial"/>
+                <a:ea typeface="Arial"/>
+                <a:cs typeface="Arial"/>
               </a:rPr>
               <a:t>State the choice, approver, and latest useful date.</a:t>
             </a:r>
-            <a:endParaRPr lang="en-US" sz="1050" dirty="0">
-              <a:solidFill>
-                <a:srgbClr val="C8C8C8"/>
-              </a:solidFill>
-              <a:latin typeface="Arial" panose="020B0604020202090204"/>
-              <a:ea typeface="Arial" panose="020B0604020202090204"/>
-              <a:cs typeface="Arial" panose="020B0604020202090204"/>
-            </a:endParaRPr>
           </a:p>
         </p:txBody>
       </p:sp>
@@ -5413,20 +4778,12 @@
                 <a:solidFill>
                   <a:srgbClr val="FFFFFF"/>
                 </a:solidFill>
-                <a:latin typeface="Arial" panose="020B0604020202090204"/>
-                <a:ea typeface="Arial" panose="020B0604020202090204"/>
-                <a:cs typeface="Arial" panose="020B0604020202090204"/>
+                <a:latin typeface="Arial"/>
+                <a:ea typeface="Arial"/>
+                <a:cs typeface="Arial"/>
               </a:rPr>
               <a:t>{{PAGE_NUM}}</a:t>
             </a:r>
-            <a:endParaRPr lang="en-US" sz="900" dirty="0">
-              <a:solidFill>
-                <a:srgbClr val="FFFFFF"/>
-              </a:solidFill>
-              <a:latin typeface="Arial" panose="020B0604020202090204"/>
-              <a:ea typeface="Arial" panose="020B0604020202090204"/>
-              <a:cs typeface="Arial" panose="020B0604020202090204"/>
-            </a:endParaRPr>
           </a:p>
         </p:txBody>
       </p:sp>
@@ -5494,7 +4851,7 @@
           <p:nvPr/>
         </p:nvPicPr>
         <p:blipFill>
-          <a:blip r:embed="rId1"/>
+          <a:blip r:embed="rId2"/>
           <a:stretch>
             <a:fillRect/>
           </a:stretch>
@@ -5562,20 +4919,12 @@
                 <a:solidFill>
                   <a:srgbClr val="FFFFFF"/>
                 </a:solidFill>
-                <a:latin typeface="Arial" panose="020B0604020202090204"/>
-                <a:ea typeface="Arial" panose="020B0604020202090204"/>
-                <a:cs typeface="Arial" panose="020B0604020202090204"/>
+                <a:latin typeface="Arial"/>
+                <a:ea typeface="Arial"/>
+                <a:cs typeface="Arial"/>
               </a:rPr>
               <a:t>EE6008 · HUMAN POSE ANALYTICS</a:t>
             </a:r>
-            <a:endParaRPr lang="en-US" sz="980" dirty="0">
-              <a:solidFill>
-                <a:srgbClr val="FFFFFF"/>
-              </a:solidFill>
-              <a:latin typeface="Arial" panose="020B0604020202090204"/>
-              <a:ea typeface="Arial" panose="020B0604020202090204"/>
-              <a:cs typeface="Arial" panose="020B0604020202090204"/>
-            </a:endParaRPr>
           </a:p>
         </p:txBody>
       </p:sp>
@@ -5830,20 +5179,12 @@
                 <a:solidFill>
                   <a:srgbClr val="FFFFFF"/>
                 </a:solidFill>
-                <a:latin typeface="Arial" panose="020B0604020202090204"/>
-                <a:ea typeface="Arial" panose="020B0604020202090204"/>
-                <a:cs typeface="Arial" panose="020B0604020202090204"/>
+                <a:latin typeface="Arial"/>
+                <a:ea typeface="Arial"/>
+                <a:cs typeface="Arial"/>
               </a:rPr>
               <a:t>1</a:t>
             </a:r>
-            <a:endParaRPr lang="en-US" sz="1350" b="1" dirty="0">
-              <a:solidFill>
-                <a:srgbClr val="FFFFFF"/>
-              </a:solidFill>
-              <a:latin typeface="Arial" panose="020B0604020202090204"/>
-              <a:ea typeface="Arial" panose="020B0604020202090204"/>
-              <a:cs typeface="Arial" panose="020B0604020202090204"/>
-            </a:endParaRPr>
           </a:p>
         </p:txBody>
       </p:sp>
@@ -5878,20 +5219,12 @@
                 <a:solidFill>
                   <a:srgbClr val="FFFFFF"/>
                 </a:solidFill>
-                <a:latin typeface="Arial" panose="020B0604020202090204"/>
-                <a:ea typeface="Arial" panose="020B0604020202090204"/>
-                <a:cs typeface="Arial" panose="020B0604020202090204"/>
+                <a:latin typeface="Arial"/>
+                <a:ea typeface="Arial"/>
+                <a:cs typeface="Arial"/>
               </a:rPr>
               <a:t>2</a:t>
             </a:r>
-            <a:endParaRPr lang="en-US" sz="1350" b="1" dirty="0">
-              <a:solidFill>
-                <a:srgbClr val="FFFFFF"/>
-              </a:solidFill>
-              <a:latin typeface="Arial" panose="020B0604020202090204"/>
-              <a:ea typeface="Arial" panose="020B0604020202090204"/>
-              <a:cs typeface="Arial" panose="020B0604020202090204"/>
-            </a:endParaRPr>
           </a:p>
         </p:txBody>
       </p:sp>
@@ -5926,20 +5259,12 @@
                 <a:solidFill>
                   <a:srgbClr val="FFFFFF"/>
                 </a:solidFill>
-                <a:latin typeface="Arial" panose="020B0604020202090204"/>
-                <a:ea typeface="Arial" panose="020B0604020202090204"/>
-                <a:cs typeface="Arial" panose="020B0604020202090204"/>
+                <a:latin typeface="Arial"/>
+                <a:ea typeface="Arial"/>
+                <a:cs typeface="Arial"/>
               </a:rPr>
               <a:t>3</a:t>
             </a:r>
-            <a:endParaRPr lang="en-US" sz="1350" b="1" dirty="0">
-              <a:solidFill>
-                <a:srgbClr val="FFFFFF"/>
-              </a:solidFill>
-              <a:latin typeface="Arial" panose="020B0604020202090204"/>
-              <a:ea typeface="Arial" panose="020B0604020202090204"/>
-              <a:cs typeface="Arial" panose="020B0604020202090204"/>
-            </a:endParaRPr>
           </a:p>
         </p:txBody>
       </p:sp>
@@ -5974,20 +5299,12 @@
                 <a:solidFill>
                   <a:srgbClr val="D71440"/>
                 </a:solidFill>
-                <a:latin typeface="Arial" panose="020B0604020202090204"/>
-                <a:ea typeface="Arial" panose="020B0604020202090204"/>
-                <a:cs typeface="Arial" panose="020B0604020202090204"/>
+                <a:latin typeface="Arial"/>
+                <a:ea typeface="Arial"/>
+                <a:cs typeface="Arial"/>
               </a:rPr>
               <a:t>DELIVERABLE 1 · BUILD</a:t>
             </a:r>
-            <a:endParaRPr lang="en-US" sz="980" b="1" dirty="0">
-              <a:solidFill>
-                <a:srgbClr val="D71440"/>
-              </a:solidFill>
-              <a:latin typeface="Arial" panose="020B0604020202090204"/>
-              <a:ea typeface="Arial" panose="020B0604020202090204"/>
-              <a:cs typeface="Arial" panose="020B0604020202090204"/>
-            </a:endParaRPr>
           </a:p>
         </p:txBody>
       </p:sp>
@@ -6022,20 +5339,12 @@
                 <a:solidFill>
                   <a:srgbClr val="181C62"/>
                 </a:solidFill>
-                <a:latin typeface="Arial" panose="020B0604020202090204"/>
-                <a:ea typeface="Arial" panose="020B0604020202090204"/>
-                <a:cs typeface="Arial" panose="020B0604020202090204"/>
+                <a:latin typeface="Arial"/>
+                <a:ea typeface="Arial"/>
+                <a:cs typeface="Arial"/>
               </a:rPr>
               <a:t>DELIVERABLE 2 · VALIDATE</a:t>
             </a:r>
-            <a:endParaRPr lang="en-US" sz="980" b="1" dirty="0">
-              <a:solidFill>
-                <a:srgbClr val="181C62"/>
-              </a:solidFill>
-              <a:latin typeface="Arial" panose="020B0604020202090204"/>
-              <a:ea typeface="Arial" panose="020B0604020202090204"/>
-              <a:cs typeface="Arial" panose="020B0604020202090204"/>
-            </a:endParaRPr>
           </a:p>
         </p:txBody>
       </p:sp>
@@ -6070,20 +5379,12 @@
                 <a:solidFill>
                   <a:srgbClr val="D71440"/>
                 </a:solidFill>
-                <a:latin typeface="Arial" panose="020B0604020202090204"/>
-                <a:ea typeface="Arial" panose="020B0604020202090204"/>
-                <a:cs typeface="Arial" panose="020B0604020202090204"/>
+                <a:latin typeface="Arial"/>
+                <a:ea typeface="Arial"/>
+                <a:cs typeface="Arial"/>
               </a:rPr>
               <a:t>DELIVERABLE 3 · DOCUMENT</a:t>
             </a:r>
-            <a:endParaRPr lang="en-US" sz="980" b="1" dirty="0">
-              <a:solidFill>
-                <a:srgbClr val="D71440"/>
-              </a:solidFill>
-              <a:latin typeface="Arial" panose="020B0604020202090204"/>
-              <a:ea typeface="Arial" panose="020B0604020202090204"/>
-              <a:cs typeface="Arial" panose="020B0604020202090204"/>
-            </a:endParaRPr>
           </a:p>
         </p:txBody>
       </p:sp>
@@ -6118,20 +5419,12 @@
                 <a:solidFill>
                   <a:srgbClr val="FFFFFF"/>
                 </a:solidFill>
-                <a:latin typeface="Arial" panose="020B0604020202090204"/>
-                <a:ea typeface="Arial" panose="020B0604020202090204"/>
-                <a:cs typeface="Arial" panose="020B0604020202090204"/>
+                <a:latin typeface="Arial"/>
+                <a:ea typeface="Arial"/>
+                <a:cs typeface="Arial"/>
               </a:rPr>
               <a:t>OWNER · DUE DATE · SUCCESS CHECK</a:t>
             </a:r>
-            <a:endParaRPr lang="en-US" sz="1050" b="1" dirty="0">
-              <a:solidFill>
-                <a:srgbClr val="FFFFFF"/>
-              </a:solidFill>
-              <a:latin typeface="Arial" panose="020B0604020202090204"/>
-              <a:ea typeface="Arial" panose="020B0604020202090204"/>
-              <a:cs typeface="Arial" panose="020B0604020202090204"/>
-            </a:endParaRPr>
           </a:p>
         </p:txBody>
       </p:sp>
@@ -6166,20 +5459,12 @@
                 <a:solidFill>
                   <a:srgbClr val="20243A"/>
                 </a:solidFill>
-                <a:latin typeface="Arial" panose="020B0604020202090204"/>
-                <a:ea typeface="Arial" panose="020B0604020202090204"/>
-                <a:cs typeface="Arial" panose="020B0604020202090204"/>
+                <a:latin typeface="Arial"/>
+                <a:ea typeface="Arial"/>
+                <a:cs typeface="Arial"/>
               </a:rPr>
               <a:t>Next-Week Commitments</a:t>
             </a:r>
-            <a:endParaRPr lang="en-US" sz="2550" b="1" dirty="0">
-              <a:solidFill>
-                <a:srgbClr val="20243A"/>
-              </a:solidFill>
-              <a:latin typeface="Arial" panose="020B0604020202090204"/>
-              <a:ea typeface="Arial" panose="020B0604020202090204"/>
-              <a:cs typeface="Arial" panose="020B0604020202090204"/>
-            </a:endParaRPr>
           </a:p>
         </p:txBody>
       </p:sp>
@@ -6218,20 +5503,12 @@
                 <a:solidFill>
                   <a:srgbClr val="20243A"/>
                 </a:solidFill>
-                <a:latin typeface="Arial" panose="020B0604020202090204"/>
-                <a:ea typeface="Arial" panose="020B0604020202090204"/>
-                <a:cs typeface="Arial" panose="020B0604020202090204"/>
+                <a:latin typeface="Arial"/>
+                <a:ea typeface="Arial"/>
+                <a:cs typeface="Arial"/>
               </a:rPr>
               <a:t>{{NEXT_ACTION_1}}</a:t>
             </a:r>
-            <a:endParaRPr lang="en-US" sz="1580" b="1" dirty="0">
-              <a:solidFill>
-                <a:srgbClr val="20243A"/>
-              </a:solidFill>
-              <a:latin typeface="Arial" panose="020B0604020202090204"/>
-              <a:ea typeface="Arial" panose="020B0604020202090204"/>
-              <a:cs typeface="Arial" panose="020B0604020202090204"/>
-            </a:endParaRPr>
           </a:p>
           <a:p>
             <a:pPr algn="l">
@@ -6244,20 +5521,12 @@
                 <a:solidFill>
                   <a:srgbClr val="5E6478"/>
                 </a:solidFill>
-                <a:latin typeface="Arial" panose="020B0604020202090204"/>
-                <a:ea typeface="Arial" panose="020B0604020202090204"/>
-                <a:cs typeface="Arial" panose="020B0604020202090204"/>
+                <a:latin typeface="Arial"/>
+                <a:ea typeface="Arial"/>
+                <a:cs typeface="Arial"/>
               </a:rPr>
               <a:t>Output: code, dataset, or runnable module.</a:t>
             </a:r>
-            <a:endParaRPr lang="en-US" sz="1050" dirty="0">
-              <a:solidFill>
-                <a:srgbClr val="5E6478"/>
-              </a:solidFill>
-              <a:latin typeface="Arial" panose="020B0604020202090204"/>
-              <a:ea typeface="Arial" panose="020B0604020202090204"/>
-              <a:cs typeface="Arial" panose="020B0604020202090204"/>
-            </a:endParaRPr>
           </a:p>
         </p:txBody>
       </p:sp>
@@ -6296,20 +5565,12 @@
                 <a:solidFill>
                   <a:srgbClr val="20243A"/>
                 </a:solidFill>
-                <a:latin typeface="Arial" panose="020B0604020202090204"/>
-                <a:ea typeface="Arial" panose="020B0604020202090204"/>
-                <a:cs typeface="Arial" panose="020B0604020202090204"/>
+                <a:latin typeface="Arial"/>
+                <a:ea typeface="Arial"/>
+                <a:cs typeface="Arial"/>
               </a:rPr>
               <a:t>{{NEXT_ACTION_2}}</a:t>
             </a:r>
-            <a:endParaRPr lang="en-US" sz="1580" b="1" dirty="0">
-              <a:solidFill>
-                <a:srgbClr val="20243A"/>
-              </a:solidFill>
-              <a:latin typeface="Arial" panose="020B0604020202090204"/>
-              <a:ea typeface="Arial" panose="020B0604020202090204"/>
-              <a:cs typeface="Arial" panose="020B0604020202090204"/>
-            </a:endParaRPr>
           </a:p>
           <a:p>
             <a:pPr algn="l">
@@ -6322,20 +5583,12 @@
                 <a:solidFill>
                   <a:srgbClr val="5E6478"/>
                 </a:solidFill>
-                <a:latin typeface="Arial" panose="020B0604020202090204"/>
-                <a:ea typeface="Arial" panose="020B0604020202090204"/>
-                <a:cs typeface="Arial" panose="020B0604020202090204"/>
+                <a:latin typeface="Arial"/>
+                <a:ea typeface="Arial"/>
+                <a:cs typeface="Arial"/>
               </a:rPr>
               <a:t>Output: metric table, control, or ablation result.</a:t>
             </a:r>
-            <a:endParaRPr lang="en-US" sz="1050" dirty="0">
-              <a:solidFill>
-                <a:srgbClr val="5E6478"/>
-              </a:solidFill>
-              <a:latin typeface="Arial" panose="020B0604020202090204"/>
-              <a:ea typeface="Arial" panose="020B0604020202090204"/>
-              <a:cs typeface="Arial" panose="020B0604020202090204"/>
-            </a:endParaRPr>
           </a:p>
         </p:txBody>
       </p:sp>
@@ -6374,20 +5627,12 @@
                 <a:solidFill>
                   <a:srgbClr val="20243A"/>
                 </a:solidFill>
-                <a:latin typeface="Arial" panose="020B0604020202090204"/>
-                <a:ea typeface="Arial" panose="020B0604020202090204"/>
-                <a:cs typeface="Arial" panose="020B0604020202090204"/>
+                <a:latin typeface="Arial"/>
+                <a:ea typeface="Arial"/>
+                <a:cs typeface="Arial"/>
               </a:rPr>
               <a:t>{{NEXT_ACTION_3}}</a:t>
             </a:r>
-            <a:endParaRPr lang="en-US" sz="1580" b="1" dirty="0">
-              <a:solidFill>
-                <a:srgbClr val="20243A"/>
-              </a:solidFill>
-              <a:latin typeface="Arial" panose="020B0604020202090204"/>
-              <a:ea typeface="Arial" panose="020B0604020202090204"/>
-              <a:cs typeface="Arial" panose="020B0604020202090204"/>
-            </a:endParaRPr>
           </a:p>
           <a:p>
             <a:pPr algn="l">
@@ -6400,20 +5645,12 @@
                 <a:solidFill>
                   <a:srgbClr val="5E6478"/>
                 </a:solidFill>
-                <a:latin typeface="Arial" panose="020B0604020202090204"/>
-                <a:ea typeface="Arial" panose="020B0604020202090204"/>
-                <a:cs typeface="Arial" panose="020B0604020202090204"/>
+                <a:latin typeface="Arial"/>
+                <a:ea typeface="Arial"/>
+                <a:cs typeface="Arial"/>
               </a:rPr>
               <a:t>Output: updated figure, notes, or report section.</a:t>
             </a:r>
-            <a:endParaRPr lang="en-US" sz="1050" dirty="0">
-              <a:solidFill>
-                <a:srgbClr val="5E6478"/>
-              </a:solidFill>
-              <a:latin typeface="Arial" panose="020B0604020202090204"/>
-              <a:ea typeface="Arial" panose="020B0604020202090204"/>
-              <a:cs typeface="Arial" panose="020B0604020202090204"/>
-            </a:endParaRPr>
           </a:p>
         </p:txBody>
       </p:sp>
@@ -6452,20 +5689,12 @@
                 <a:solidFill>
                   <a:srgbClr val="FFFFFF"/>
                 </a:solidFill>
-                <a:latin typeface="Arial" panose="020B0604020202090204"/>
-                <a:ea typeface="Arial" panose="020B0604020202090204"/>
-                <a:cs typeface="Arial" panose="020B0604020202090204"/>
+                <a:latin typeface="Arial"/>
+                <a:ea typeface="Arial"/>
+                <a:cs typeface="Arial"/>
               </a:rPr>
               <a:t>{{OWNER_AND_DEADLINE}}</a:t>
             </a:r>
-            <a:endParaRPr lang="en-US" sz="1580" dirty="0">
-              <a:solidFill>
-                <a:srgbClr val="FFFFFF"/>
-              </a:solidFill>
-              <a:latin typeface="Arial" panose="020B0604020202090204"/>
-              <a:ea typeface="Arial" panose="020B0604020202090204"/>
-              <a:cs typeface="Arial" panose="020B0604020202090204"/>
-            </a:endParaRPr>
           </a:p>
           <a:p>
             <a:pPr algn="l">
@@ -6481,83 +5710,48 @@
                 <a:solidFill>
                   <a:srgbClr val="C8C8C8"/>
                 </a:solidFill>
-                <a:latin typeface="Arial" panose="020B0604020202090204"/>
-                <a:ea typeface="Arial" panose="020B0604020202090204"/>
-                <a:cs typeface="Arial" panose="020B0604020202090204"/>
+                <a:latin typeface="Arial"/>
+                <a:ea typeface="Arial"/>
+                <a:cs typeface="Arial"/>
               </a:rPr>
               <a:t>Owner: …</a:t>
             </a:r>
-            <a:br>
+            <a:br/>
+            <a:r>
               <a:rPr lang="en-US" sz="1050" dirty="0">
                 <a:solidFill>
                   <a:srgbClr val="C8C8C8"/>
                 </a:solidFill>
-                <a:latin typeface="Arial" panose="020B0604020202090204"/>
-                <a:ea typeface="Arial" panose="020B0604020202090204"/>
-                <a:cs typeface="Arial" panose="020B0604020202090204"/>
-              </a:rPr>
-            </a:br>
+                <a:latin typeface="Arial"/>
+                <a:ea typeface="Arial"/>
+                <a:cs typeface="Arial"/>
+              </a:rPr>
+              <a:t>Due: …</a:t>
+            </a:r>
+            <a:br/>
             <a:r>
               <a:rPr lang="en-US" sz="1050" dirty="0">
                 <a:solidFill>
                   <a:srgbClr val="C8C8C8"/>
                 </a:solidFill>
-                <a:latin typeface="Arial" panose="020B0604020202090204"/>
-                <a:ea typeface="Arial" panose="020B0604020202090204"/>
-                <a:cs typeface="Arial" panose="020B0604020202090204"/>
-              </a:rPr>
-              <a:t>Due: …</a:t>
-            </a:r>
-            <a:br>
+                <a:latin typeface="Arial"/>
+                <a:ea typeface="Arial"/>
+                <a:cs typeface="Arial"/>
+              </a:rPr>
+              <a:t>Success check: observable output</a:t>
+            </a:r>
+            <a:br/>
+            <a:r>
               <a:rPr lang="en-US" sz="1050" dirty="0">
                 <a:solidFill>
                   <a:srgbClr val="C8C8C8"/>
                 </a:solidFill>
-                <a:latin typeface="Arial" panose="020B0604020202090204"/>
-                <a:ea typeface="Arial" panose="020B0604020202090204"/>
-                <a:cs typeface="Arial" panose="020B0604020202090204"/>
-              </a:rPr>
-            </a:br>
-            <a:r>
-              <a:rPr lang="en-US" sz="1050" dirty="0">
-                <a:solidFill>
-                  <a:srgbClr val="C8C8C8"/>
-                </a:solidFill>
-                <a:latin typeface="Arial" panose="020B0604020202090204"/>
-                <a:ea typeface="Arial" panose="020B0604020202090204"/>
-                <a:cs typeface="Arial" panose="020B0604020202090204"/>
-              </a:rPr>
-              <a:t>Success check: observable output</a:t>
-            </a:r>
-            <a:br>
-              <a:rPr lang="en-US" sz="1050" dirty="0">
-                <a:solidFill>
-                  <a:srgbClr val="C8C8C8"/>
-                </a:solidFill>
-                <a:latin typeface="Arial" panose="020B0604020202090204"/>
-                <a:ea typeface="Arial" panose="020B0604020202090204"/>
-                <a:cs typeface="Arial" panose="020B0604020202090204"/>
-              </a:rPr>
-            </a:br>
-            <a:r>
-              <a:rPr lang="en-US" sz="1050" dirty="0">
-                <a:solidFill>
-                  <a:srgbClr val="C8C8C8"/>
-                </a:solidFill>
-                <a:latin typeface="Arial" panose="020B0604020202090204"/>
-                <a:ea typeface="Arial" panose="020B0604020202090204"/>
-                <a:cs typeface="Arial" panose="020B0604020202090204"/>
+                <a:latin typeface="Arial"/>
+                <a:ea typeface="Arial"/>
+                <a:cs typeface="Arial"/>
               </a:rPr>
               <a:t>or agreed metric threshold.</a:t>
             </a:r>
-            <a:endParaRPr lang="en-US" sz="1050" dirty="0">
-              <a:solidFill>
-                <a:srgbClr val="C8C8C8"/>
-              </a:solidFill>
-              <a:latin typeface="Arial" panose="020B0604020202090204"/>
-              <a:ea typeface="Arial" panose="020B0604020202090204"/>
-              <a:cs typeface="Arial" panose="020B0604020202090204"/>
-            </a:endParaRPr>
           </a:p>
         </p:txBody>
       </p:sp>
@@ -6592,20 +5786,12 @@
                 <a:solidFill>
                   <a:srgbClr val="FFFFFF"/>
                 </a:solidFill>
-                <a:latin typeface="Arial" panose="020B0604020202090204"/>
-                <a:ea typeface="Arial" panose="020B0604020202090204"/>
-                <a:cs typeface="Arial" panose="020B0604020202090204"/>
+                <a:latin typeface="Arial"/>
+                <a:ea typeface="Arial"/>
+                <a:cs typeface="Arial"/>
               </a:rPr>
               <a:t>{{PAGE_NUM}}</a:t>
             </a:r>
-            <a:endParaRPr lang="en-US" sz="900" dirty="0">
-              <a:solidFill>
-                <a:srgbClr val="FFFFFF"/>
-              </a:solidFill>
-              <a:latin typeface="Arial" panose="020B0604020202090204"/>
-              <a:ea typeface="Arial" panose="020B0604020202090204"/>
-              <a:cs typeface="Arial" panose="020B0604020202090204"/>
-            </a:endParaRPr>
           </a:p>
         </p:txBody>
       </p:sp>
@@ -6673,7 +5859,7 @@
           <p:nvPr/>
         </p:nvPicPr>
         <p:blipFill>
-          <a:blip r:embed="rId1"/>
+          <a:blip r:embed="rId2"/>
           <a:stretch>
             <a:fillRect/>
           </a:stretch>
@@ -6741,20 +5927,12 @@
                 <a:solidFill>
                   <a:srgbClr val="FFFFFF"/>
                 </a:solidFill>
-                <a:latin typeface="Arial" panose="020B0604020202090204"/>
-                <a:ea typeface="Arial" panose="020B0604020202090204"/>
-                <a:cs typeface="Arial" panose="020B0604020202090204"/>
+                <a:latin typeface="Arial"/>
+                <a:ea typeface="Arial"/>
+                <a:cs typeface="Arial"/>
               </a:rPr>
               <a:t>EE6008 · HUMAN POSE ANALYTICS</a:t>
             </a:r>
-            <a:endParaRPr lang="en-US" sz="980" dirty="0">
-              <a:solidFill>
-                <a:srgbClr val="FFFFFF"/>
-              </a:solidFill>
-              <a:latin typeface="Arial" panose="020B0604020202090204"/>
-              <a:ea typeface="Arial" panose="020B0604020202090204"/>
-              <a:cs typeface="Arial" panose="020B0604020202090204"/>
-            </a:endParaRPr>
           </a:p>
         </p:txBody>
       </p:sp>
@@ -6837,20 +6015,12 @@
                 <a:solidFill>
                   <a:srgbClr val="20243A"/>
                 </a:solidFill>
-                <a:latin typeface="Arial" panose="020B0604020202090204"/>
-                <a:ea typeface="Arial" panose="020B0604020202090204"/>
-                <a:cs typeface="Arial" panose="020B0604020202090204"/>
+                <a:latin typeface="Arial"/>
+                <a:ea typeface="Arial"/>
+                <a:cs typeface="Arial"/>
               </a:rPr>
               <a:t>Open Canvas</a:t>
             </a:r>
-            <a:endParaRPr lang="en-US" sz="2550" b="1" dirty="0">
-              <a:solidFill>
-                <a:srgbClr val="20243A"/>
-              </a:solidFill>
-              <a:latin typeface="Arial" panose="020B0604020202090204"/>
-              <a:ea typeface="Arial" panose="020B0604020202090204"/>
-              <a:cs typeface="Arial" panose="020B0604020202090204"/>
-            </a:endParaRPr>
           </a:p>
         </p:txBody>
       </p:sp>
@@ -6885,20 +6055,12 @@
                 <a:solidFill>
                   <a:srgbClr val="FFFFFF"/>
                 </a:solidFill>
-                <a:latin typeface="Arial" panose="020B0604020202090204"/>
-                <a:ea typeface="Arial" panose="020B0604020202090204"/>
-                <a:cs typeface="Arial" panose="020B0604020202090204"/>
+                <a:latin typeface="Arial"/>
+                <a:ea typeface="Arial"/>
+                <a:cs typeface="Arial"/>
               </a:rPr>
               <a:t>{{SOURCE}}</a:t>
             </a:r>
-            <a:endParaRPr lang="en-US" sz="900" dirty="0">
-              <a:solidFill>
-                <a:srgbClr val="FFFFFF"/>
-              </a:solidFill>
-              <a:latin typeface="Arial" panose="020B0604020202090204"/>
-              <a:ea typeface="Arial" panose="020B0604020202090204"/>
-              <a:cs typeface="Arial" panose="020B0604020202090204"/>
-            </a:endParaRPr>
           </a:p>
         </p:txBody>
       </p:sp>
@@ -6933,20 +6095,12 @@
                 <a:solidFill>
                   <a:srgbClr val="FFFFFF"/>
                 </a:solidFill>
-                <a:latin typeface="Arial" panose="020B0604020202090204"/>
-                <a:ea typeface="Arial" panose="020B0604020202090204"/>
-                <a:cs typeface="Arial" panose="020B0604020202090204"/>
+                <a:latin typeface="Arial"/>
+                <a:ea typeface="Arial"/>
+                <a:cs typeface="Arial"/>
               </a:rPr>
               <a:t>{{PAGE_NUM}}</a:t>
             </a:r>
-            <a:endParaRPr lang="en-US" sz="900" dirty="0">
-              <a:solidFill>
-                <a:srgbClr val="FFFFFF"/>
-              </a:solidFill>
-              <a:latin typeface="Arial" panose="020B0604020202090204"/>
-              <a:ea typeface="Arial" panose="020B0604020202090204"/>
-              <a:cs typeface="Arial" panose="020B0604020202090204"/>
-            </a:endParaRPr>
           </a:p>
         </p:txBody>
       </p:sp>
@@ -7014,7 +6168,7 @@
           <p:nvPr/>
         </p:nvPicPr>
         <p:blipFill>
-          <a:blip r:embed="rId1"/>
+          <a:blip r:embed="rId2"/>
           <a:stretch>
             <a:fillRect/>
           </a:stretch>
@@ -7082,20 +6236,12 @@
                 <a:solidFill>
                   <a:srgbClr val="FFFFFF"/>
                 </a:solidFill>
-                <a:latin typeface="Arial" panose="020B0604020202090204"/>
-                <a:ea typeface="Arial" panose="020B0604020202090204"/>
-                <a:cs typeface="Arial" panose="020B0604020202090204"/>
+                <a:latin typeface="Arial"/>
+                <a:ea typeface="Arial"/>
+                <a:cs typeface="Arial"/>
               </a:rPr>
               <a:t>EE6008 · HUMAN POSE ANALYTICS</a:t>
             </a:r>
-            <a:endParaRPr lang="en-US" sz="980" dirty="0">
-              <a:solidFill>
-                <a:srgbClr val="FFFFFF"/>
-              </a:solidFill>
-              <a:latin typeface="Arial" panose="020B0604020202090204"/>
-              <a:ea typeface="Arial" panose="020B0604020202090204"/>
-              <a:cs typeface="Arial" panose="020B0604020202090204"/>
-            </a:endParaRPr>
           </a:p>
         </p:txBody>
       </p:sp>
@@ -7224,20 +6370,12 @@
                 <a:solidFill>
                   <a:srgbClr val="181C62"/>
                 </a:solidFill>
-                <a:latin typeface="Arial" panose="020B0604020202090204"/>
-                <a:ea typeface="Arial" panose="020B0604020202090204"/>
-                <a:cs typeface="Arial" panose="020B0604020202090204"/>
+                <a:latin typeface="Arial"/>
+                <a:ea typeface="Arial"/>
+                <a:cs typeface="Arial"/>
               </a:rPr>
               <a:t>IMAGE DESCRIPTION</a:t>
             </a:r>
-            <a:endParaRPr lang="en-US" sz="980" b="1" dirty="0">
-              <a:solidFill>
-                <a:srgbClr val="181C62"/>
-              </a:solidFill>
-              <a:latin typeface="Arial" panose="020B0604020202090204"/>
-              <a:ea typeface="Arial" panose="020B0604020202090204"/>
-              <a:cs typeface="Arial" panose="020B0604020202090204"/>
-            </a:endParaRPr>
           </a:p>
         </p:txBody>
       </p:sp>
@@ -7272,20 +6410,12 @@
                 <a:solidFill>
                   <a:srgbClr val="20243A"/>
                 </a:solidFill>
-                <a:latin typeface="Arial" panose="020B0604020202090204"/>
-                <a:ea typeface="Arial" panose="020B0604020202090204"/>
-                <a:cs typeface="Arial" panose="020B0604020202090204"/>
+                <a:latin typeface="Arial"/>
+                <a:ea typeface="Arial"/>
+                <a:cs typeface="Arial"/>
               </a:rPr>
               <a:t>Single-Image Story</a:t>
             </a:r>
-            <a:endParaRPr lang="en-US" sz="2550" b="1" dirty="0">
-              <a:solidFill>
-                <a:srgbClr val="20243A"/>
-              </a:solidFill>
-              <a:latin typeface="Arial" panose="020B0604020202090204"/>
-              <a:ea typeface="Arial" panose="020B0604020202090204"/>
-              <a:cs typeface="Arial" panose="020B0604020202090204"/>
-            </a:endParaRPr>
           </a:p>
         </p:txBody>
       </p:sp>
@@ -7298,8 +6428,8 @@
           <p:nvPr/>
         </p:nvPicPr>
         <p:blipFill>
-          <a:blip r:embed="rId2"/>
-          <a:srcRect l="4974" r="4973"/>
+          <a:blip r:embed="rId3"/>
+          <a:srcRect l="4974" t="0" r="4973" b="0"/>
           <a:stretch>
             <a:fillRect/>
           </a:stretch>
@@ -7349,20 +6479,12 @@
                 <a:solidFill>
                   <a:srgbClr val="20243A"/>
                 </a:solidFill>
-                <a:latin typeface="Arial" panose="020B0604020202090204"/>
-                <a:ea typeface="Arial" panose="020B0604020202090204"/>
-                <a:cs typeface="Arial" panose="020B0604020202090204"/>
+                <a:latin typeface="Arial"/>
+                <a:ea typeface="Arial"/>
+                <a:cs typeface="Arial"/>
               </a:rPr>
               <a:t>{{IMAGE_DESCRIPTION}}</a:t>
             </a:r>
-            <a:endParaRPr lang="en-US" sz="1580" dirty="0">
-              <a:solidFill>
-                <a:srgbClr val="20243A"/>
-              </a:solidFill>
-              <a:latin typeface="Arial" panose="020B0604020202090204"/>
-              <a:ea typeface="Arial" panose="020B0604020202090204"/>
-              <a:cs typeface="Arial" panose="020B0604020202090204"/>
-            </a:endParaRPr>
           </a:p>
           <a:p>
             <a:pPr algn="l">
@@ -7378,20 +6500,12 @@
                 <a:solidFill>
                   <a:srgbClr val="5E6478"/>
                 </a:solidFill>
-                <a:latin typeface="Arial" panose="020B0604020202090204"/>
-                <a:ea typeface="Arial" panose="020B0604020202090204"/>
-                <a:cs typeface="Arial" panose="020B0604020202090204"/>
+                <a:latin typeface="Arial"/>
+                <a:ea typeface="Arial"/>
+                <a:cs typeface="Arial"/>
               </a:rPr>
               <a:t>What does the image show?</a:t>
             </a:r>
-            <a:endParaRPr lang="en-US" sz="1120" dirty="0">
-              <a:solidFill>
-                <a:srgbClr val="5E6478"/>
-              </a:solidFill>
-              <a:latin typeface="Arial" panose="020B0604020202090204"/>
-              <a:ea typeface="Arial" panose="020B0604020202090204"/>
-              <a:cs typeface="Arial" panose="020B0604020202090204"/>
-            </a:endParaRPr>
           </a:p>
           <a:p>
             <a:pPr algn="l">
@@ -7407,20 +6521,12 @@
                 <a:solidFill>
                   <a:srgbClr val="5E6478"/>
                 </a:solidFill>
-                <a:latin typeface="Arial" panose="020B0604020202090204"/>
-                <a:ea typeface="Arial" panose="020B0604020202090204"/>
-                <a:cs typeface="Arial" panose="020B0604020202090204"/>
+                <a:latin typeface="Arial"/>
+                <a:ea typeface="Arial"/>
+                <a:cs typeface="Arial"/>
               </a:rPr>
               <a:t>Why is it relevant this week?</a:t>
             </a:r>
-            <a:endParaRPr lang="en-US" sz="1120" dirty="0">
-              <a:solidFill>
-                <a:srgbClr val="5E6478"/>
-              </a:solidFill>
-              <a:latin typeface="Arial" panose="020B0604020202090204"/>
-              <a:ea typeface="Arial" panose="020B0604020202090204"/>
-              <a:cs typeface="Arial" panose="020B0604020202090204"/>
-            </a:endParaRPr>
           </a:p>
           <a:p>
             <a:pPr algn="l">
@@ -7436,20 +6542,12 @@
                 <a:solidFill>
                   <a:srgbClr val="5E6478"/>
                 </a:solidFill>
-                <a:latin typeface="Arial" panose="020B0604020202090204"/>
-                <a:ea typeface="Arial" panose="020B0604020202090204"/>
-                <a:cs typeface="Arial" panose="020B0604020202090204"/>
+                <a:latin typeface="Arial"/>
+                <a:ea typeface="Arial"/>
+                <a:cs typeface="Arial"/>
               </a:rPr>
               <a:t>What should the audience notice?</a:t>
             </a:r>
-            <a:endParaRPr lang="en-US" sz="1120" dirty="0">
-              <a:solidFill>
-                <a:srgbClr val="5E6478"/>
-              </a:solidFill>
-              <a:latin typeface="Arial" panose="020B0604020202090204"/>
-              <a:ea typeface="Arial" panose="020B0604020202090204"/>
-              <a:cs typeface="Arial" panose="020B0604020202090204"/>
-            </a:endParaRPr>
           </a:p>
           <a:p>
             <a:pPr algn="l">
@@ -7465,20 +6563,12 @@
                 <a:solidFill>
                   <a:srgbClr val="D71440"/>
                 </a:solidFill>
-                <a:latin typeface="Arial" panose="020B0604020202090204"/>
-                <a:ea typeface="Arial" panose="020B0604020202090204"/>
-                <a:cs typeface="Arial" panose="020B0604020202090204"/>
+                <a:latin typeface="Arial"/>
+                <a:ea typeface="Arial"/>
+                <a:cs typeface="Arial"/>
               </a:rPr>
               <a:t>TIP</a:t>
             </a:r>
-            <a:endParaRPr lang="en-US" sz="1050" b="1" dirty="0">
-              <a:solidFill>
-                <a:srgbClr val="D71440"/>
-              </a:solidFill>
-              <a:latin typeface="Arial" panose="020B0604020202090204"/>
-              <a:ea typeface="Arial" panose="020B0604020202090204"/>
-              <a:cs typeface="Arial" panose="020B0604020202090204"/>
-            </a:endParaRPr>
           </a:p>
           <a:p>
             <a:pPr algn="l">
@@ -7494,62 +6584,36 @@
                 <a:solidFill>
                   <a:srgbClr val="5E6478"/>
                 </a:solidFill>
-                <a:latin typeface="Arial" panose="020B0604020202090204"/>
-                <a:ea typeface="Arial" panose="020B0604020202090204"/>
-                <a:cs typeface="Arial" panose="020B0604020202090204"/>
+                <a:latin typeface="Arial"/>
+                <a:ea typeface="Arial"/>
+                <a:cs typeface="Arial"/>
               </a:rPr>
               <a:t>Use one annotated result, system</a:t>
             </a:r>
-            <a:br>
+            <a:br/>
+            <a:r>
               <a:rPr lang="en-US" sz="1050" dirty="0">
                 <a:solidFill>
                   <a:srgbClr val="5E6478"/>
                 </a:solidFill>
-                <a:latin typeface="Arial" panose="020B0604020202090204"/>
-                <a:ea typeface="Arial" panose="020B0604020202090204"/>
-                <a:cs typeface="Arial" panose="020B0604020202090204"/>
-              </a:rPr>
-            </a:br>
+                <a:latin typeface="Arial"/>
+                <a:ea typeface="Arial"/>
+                <a:cs typeface="Arial"/>
+              </a:rPr>
+              <a:t>overview, qualitative example,</a:t>
+            </a:r>
+            <a:br/>
             <a:r>
               <a:rPr lang="en-US" sz="1050" dirty="0">
                 <a:solidFill>
                   <a:srgbClr val="5E6478"/>
                 </a:solidFill>
-                <a:latin typeface="Arial" panose="020B0604020202090204"/>
-                <a:ea typeface="Arial" panose="020B0604020202090204"/>
-                <a:cs typeface="Arial" panose="020B0604020202090204"/>
-              </a:rPr>
-              <a:t>overview, qualitative example,</a:t>
-            </a:r>
-            <a:br>
-              <a:rPr lang="en-US" sz="1050" dirty="0">
-                <a:solidFill>
-                  <a:srgbClr val="5E6478"/>
-                </a:solidFill>
-                <a:latin typeface="Arial" panose="020B0604020202090204"/>
-                <a:ea typeface="Arial" panose="020B0604020202090204"/>
-                <a:cs typeface="Arial" panose="020B0604020202090204"/>
-              </a:rPr>
-            </a:br>
-            <a:r>
-              <a:rPr lang="en-US" sz="1050" dirty="0">
-                <a:solidFill>
-                  <a:srgbClr val="5E6478"/>
-                </a:solidFill>
-                <a:latin typeface="Arial" panose="020B0604020202090204"/>
-                <a:ea typeface="Arial" panose="020B0604020202090204"/>
-                <a:cs typeface="Arial" panose="020B0604020202090204"/>
+                <a:latin typeface="Arial"/>
+                <a:ea typeface="Arial"/>
+                <a:cs typeface="Arial"/>
               </a:rPr>
               <a:t>or implementation photograph.</a:t>
             </a:r>
-            <a:endParaRPr lang="en-US" sz="1050" dirty="0">
-              <a:solidFill>
-                <a:srgbClr val="5E6478"/>
-              </a:solidFill>
-              <a:latin typeface="Arial" panose="020B0604020202090204"/>
-              <a:ea typeface="Arial" panose="020B0604020202090204"/>
-              <a:cs typeface="Arial" panose="020B0604020202090204"/>
-            </a:endParaRPr>
           </a:p>
         </p:txBody>
       </p:sp>
@@ -7584,20 +6648,12 @@
                 <a:solidFill>
                   <a:srgbClr val="FFFFFF"/>
                 </a:solidFill>
-                <a:latin typeface="Arial" panose="020B0604020202090204"/>
-                <a:ea typeface="Arial" panose="020B0604020202090204"/>
-                <a:cs typeface="Arial" panose="020B0604020202090204"/>
+                <a:latin typeface="Arial"/>
+                <a:ea typeface="Arial"/>
+                <a:cs typeface="Arial"/>
               </a:rPr>
               <a:t>{{SOURCE}}</a:t>
             </a:r>
-            <a:endParaRPr lang="en-US" sz="900" dirty="0">
-              <a:solidFill>
-                <a:srgbClr val="FFFFFF"/>
-              </a:solidFill>
-              <a:latin typeface="Arial" panose="020B0604020202090204"/>
-              <a:ea typeface="Arial" panose="020B0604020202090204"/>
-              <a:cs typeface="Arial" panose="020B0604020202090204"/>
-            </a:endParaRPr>
           </a:p>
         </p:txBody>
       </p:sp>
@@ -7632,20 +6688,12 @@
                 <a:solidFill>
                   <a:srgbClr val="FFFFFF"/>
                 </a:solidFill>
-                <a:latin typeface="Arial" panose="020B0604020202090204"/>
-                <a:ea typeface="Arial" panose="020B0604020202090204"/>
-                <a:cs typeface="Arial" panose="020B0604020202090204"/>
+                <a:latin typeface="Arial"/>
+                <a:ea typeface="Arial"/>
+                <a:cs typeface="Arial"/>
               </a:rPr>
               <a:t>{{PAGE_NUM}}</a:t>
             </a:r>
-            <a:endParaRPr lang="en-US" sz="900" dirty="0">
-              <a:solidFill>
-                <a:srgbClr val="FFFFFF"/>
-              </a:solidFill>
-              <a:latin typeface="Arial" panose="020B0604020202090204"/>
-              <a:ea typeface="Arial" panose="020B0604020202090204"/>
-              <a:cs typeface="Arial" panose="020B0604020202090204"/>
-            </a:endParaRPr>
           </a:p>
         </p:txBody>
       </p:sp>
@@ -7713,7 +6761,7 @@
           <p:nvPr/>
         </p:nvPicPr>
         <p:blipFill>
-          <a:blip r:embed="rId1"/>
+          <a:blip r:embed="rId2"/>
           <a:stretch>
             <a:fillRect/>
           </a:stretch>
@@ -7781,20 +6829,12 @@
                 <a:solidFill>
                   <a:srgbClr val="FFFFFF"/>
                 </a:solidFill>
-                <a:latin typeface="Arial" panose="020B0604020202090204"/>
-                <a:ea typeface="Arial" panose="020B0604020202090204"/>
-                <a:cs typeface="Arial" panose="020B0604020202090204"/>
+                <a:latin typeface="Arial"/>
+                <a:ea typeface="Arial"/>
+                <a:cs typeface="Arial"/>
               </a:rPr>
               <a:t>EE6008 · HUMAN POSE ANALYTICS</a:t>
             </a:r>
-            <a:endParaRPr lang="en-US" sz="980" dirty="0">
-              <a:solidFill>
-                <a:srgbClr val="FFFFFF"/>
-              </a:solidFill>
-              <a:latin typeface="Arial" panose="020B0604020202090204"/>
-              <a:ea typeface="Arial" panose="020B0604020202090204"/>
-              <a:cs typeface="Arial" panose="020B0604020202090204"/>
-            </a:endParaRPr>
           </a:p>
         </p:txBody>
       </p:sp>
@@ -7851,20 +6891,12 @@
                 <a:solidFill>
                   <a:srgbClr val="5E6478"/>
                 </a:solidFill>
-                <a:latin typeface="Arial" panose="020B0604020202090204"/>
-                <a:ea typeface="Arial" panose="020B0604020202090204"/>
-                <a:cs typeface="Arial" panose="020B0604020202090204"/>
+                <a:latin typeface="Arial"/>
+                <a:ea typeface="Arial"/>
+                <a:cs typeface="Arial"/>
               </a:rPr>
               <a:t>USE 2–4 IMAGES</a:t>
             </a:r>
-            <a:endParaRPr lang="en-US" sz="980" b="1" dirty="0">
-              <a:solidFill>
-                <a:srgbClr val="5E6478"/>
-              </a:solidFill>
-              <a:latin typeface="Arial" panose="020B0604020202090204"/>
-              <a:ea typeface="Arial" panose="020B0604020202090204"/>
-              <a:cs typeface="Arial" panose="020B0604020202090204"/>
-            </a:endParaRPr>
           </a:p>
         </p:txBody>
       </p:sp>
@@ -8091,20 +7123,12 @@
                 <a:solidFill>
                   <a:srgbClr val="20243A"/>
                 </a:solidFill>
-                <a:latin typeface="Arial" panose="020B0604020202090204"/>
-                <a:ea typeface="Arial" panose="020B0604020202090204"/>
-                <a:cs typeface="Arial" panose="020B0604020202090204"/>
+                <a:latin typeface="Arial"/>
+                <a:ea typeface="Arial"/>
+                <a:cs typeface="Arial"/>
               </a:rPr>
               <a:t>Multi-Image Story</a:t>
             </a:r>
-            <a:endParaRPr lang="en-US" sz="2550" b="1" dirty="0">
-              <a:solidFill>
-                <a:srgbClr val="20243A"/>
-              </a:solidFill>
-              <a:latin typeface="Arial" panose="020B0604020202090204"/>
-              <a:ea typeface="Arial" panose="020B0604020202090204"/>
-              <a:cs typeface="Arial" panose="020B0604020202090204"/>
-            </a:endParaRPr>
           </a:p>
         </p:txBody>
       </p:sp>
@@ -8117,8 +7141,8 @@
           <p:nvPr/>
         </p:nvPicPr>
         <p:blipFill>
-          <a:blip r:embed="rId2"/>
-          <a:srcRect t="19517" b="19517"/>
+          <a:blip r:embed="rId3"/>
+          <a:srcRect l="0" t="19517" r="0" b="19517"/>
           <a:stretch>
             <a:fillRect/>
           </a:stretch>
@@ -8142,8 +7166,8 @@
           <p:nvPr/>
         </p:nvPicPr>
         <p:blipFill>
-          <a:blip r:embed="rId3"/>
-          <a:srcRect t="14228" b="14227"/>
+          <a:blip r:embed="rId4"/>
+          <a:srcRect l="0" t="14228" r="0" b="14227"/>
           <a:stretch>
             <a:fillRect/>
           </a:stretch>
@@ -8167,8 +7191,8 @@
           <p:nvPr/>
         </p:nvPicPr>
         <p:blipFill>
-          <a:blip r:embed="rId4"/>
-          <a:srcRect t="25000" b="25000"/>
+          <a:blip r:embed="rId5"/>
+          <a:srcRect l="0" t="25000" r="0" b="25000"/>
           <a:stretch>
             <a:fillRect/>
           </a:stretch>
@@ -8192,8 +7216,8 @@
           <p:nvPr/>
         </p:nvPicPr>
         <p:blipFill>
-          <a:blip r:embed="rId5"/>
-          <a:srcRect t="28986" b="28987"/>
+          <a:blip r:embed="rId6"/>
+          <a:srcRect l="0" t="28986" r="0" b="28987"/>
           <a:stretch>
             <a:fillRect/>
           </a:stretch>
@@ -8239,20 +7263,12 @@
                 <a:solidFill>
                   <a:srgbClr val="20243A"/>
                 </a:solidFill>
-                <a:latin typeface="Arial" panose="020B0604020202090204"/>
-                <a:ea typeface="Arial" panose="020B0604020202090204"/>
-                <a:cs typeface="Arial" panose="020B0604020202090204"/>
+                <a:latin typeface="Arial"/>
+                <a:ea typeface="Arial"/>
+                <a:cs typeface="Arial"/>
               </a:rPr>
               <a:t>{{CAPTION_1}}</a:t>
             </a:r>
-            <a:endParaRPr lang="en-US" sz="1120" dirty="0">
-              <a:solidFill>
-                <a:srgbClr val="20243A"/>
-              </a:solidFill>
-              <a:latin typeface="Arial" panose="020B0604020202090204"/>
-              <a:ea typeface="Arial" panose="020B0604020202090204"/>
-              <a:cs typeface="Arial" panose="020B0604020202090204"/>
-            </a:endParaRPr>
           </a:p>
         </p:txBody>
       </p:sp>
@@ -8287,20 +7303,12 @@
                 <a:solidFill>
                   <a:srgbClr val="20243A"/>
                 </a:solidFill>
-                <a:latin typeface="Arial" panose="020B0604020202090204"/>
-                <a:ea typeface="Arial" panose="020B0604020202090204"/>
-                <a:cs typeface="Arial" panose="020B0604020202090204"/>
+                <a:latin typeface="Arial"/>
+                <a:ea typeface="Arial"/>
+                <a:cs typeface="Arial"/>
               </a:rPr>
               <a:t>{{CAPTION_2}}</a:t>
             </a:r>
-            <a:endParaRPr lang="en-US" sz="1120" dirty="0">
-              <a:solidFill>
-                <a:srgbClr val="20243A"/>
-              </a:solidFill>
-              <a:latin typeface="Arial" panose="020B0604020202090204"/>
-              <a:ea typeface="Arial" panose="020B0604020202090204"/>
-              <a:cs typeface="Arial" panose="020B0604020202090204"/>
-            </a:endParaRPr>
           </a:p>
         </p:txBody>
       </p:sp>
@@ -8335,20 +7343,12 @@
                 <a:solidFill>
                   <a:srgbClr val="20243A"/>
                 </a:solidFill>
-                <a:latin typeface="Arial" panose="020B0604020202090204"/>
-                <a:ea typeface="Arial" panose="020B0604020202090204"/>
-                <a:cs typeface="Arial" panose="020B0604020202090204"/>
+                <a:latin typeface="Arial"/>
+                <a:ea typeface="Arial"/>
+                <a:cs typeface="Arial"/>
               </a:rPr>
               <a:t>{{CAPTION_3}}</a:t>
             </a:r>
-            <a:endParaRPr lang="en-US" sz="1120" dirty="0">
-              <a:solidFill>
-                <a:srgbClr val="20243A"/>
-              </a:solidFill>
-              <a:latin typeface="Arial" panose="020B0604020202090204"/>
-              <a:ea typeface="Arial" panose="020B0604020202090204"/>
-              <a:cs typeface="Arial" panose="020B0604020202090204"/>
-            </a:endParaRPr>
           </a:p>
         </p:txBody>
       </p:sp>
@@ -8383,20 +7383,12 @@
                 <a:solidFill>
                   <a:srgbClr val="20243A"/>
                 </a:solidFill>
-                <a:latin typeface="Arial" panose="020B0604020202090204"/>
-                <a:ea typeface="Arial" panose="020B0604020202090204"/>
-                <a:cs typeface="Arial" panose="020B0604020202090204"/>
+                <a:latin typeface="Arial"/>
+                <a:ea typeface="Arial"/>
+                <a:cs typeface="Arial"/>
               </a:rPr>
               <a:t>{{CAPTION_4}}</a:t>
             </a:r>
-            <a:endParaRPr lang="en-US" sz="1120" dirty="0">
-              <a:solidFill>
-                <a:srgbClr val="20243A"/>
-              </a:solidFill>
-              <a:latin typeface="Arial" panose="020B0604020202090204"/>
-              <a:ea typeface="Arial" panose="020B0604020202090204"/>
-              <a:cs typeface="Arial" panose="020B0604020202090204"/>
-            </a:endParaRPr>
           </a:p>
         </p:txBody>
       </p:sp>
@@ -8431,20 +7423,12 @@
                 <a:solidFill>
                   <a:srgbClr val="FFFFFF"/>
                 </a:solidFill>
-                <a:latin typeface="Arial" panose="020B0604020202090204"/>
-                <a:ea typeface="Arial" panose="020B0604020202090204"/>
-                <a:cs typeface="Arial" panose="020B0604020202090204"/>
+                <a:latin typeface="Arial"/>
+                <a:ea typeface="Arial"/>
+                <a:cs typeface="Arial"/>
               </a:rPr>
               <a:t>{{SOURCE}}</a:t>
             </a:r>
-            <a:endParaRPr lang="en-US" sz="900" dirty="0">
-              <a:solidFill>
-                <a:srgbClr val="FFFFFF"/>
-              </a:solidFill>
-              <a:latin typeface="Arial" panose="020B0604020202090204"/>
-              <a:ea typeface="Arial" panose="020B0604020202090204"/>
-              <a:cs typeface="Arial" panose="020B0604020202090204"/>
-            </a:endParaRPr>
           </a:p>
         </p:txBody>
       </p:sp>
@@ -8479,20 +7463,12 @@
                 <a:solidFill>
                   <a:srgbClr val="FFFFFF"/>
                 </a:solidFill>
-                <a:latin typeface="Arial" panose="020B0604020202090204"/>
-                <a:ea typeface="Arial" panose="020B0604020202090204"/>
-                <a:cs typeface="Arial" panose="020B0604020202090204"/>
+                <a:latin typeface="Arial"/>
+                <a:ea typeface="Arial"/>
+                <a:cs typeface="Arial"/>
               </a:rPr>
               <a:t>{{PAGE_NUM}}</a:t>
             </a:r>
-            <a:endParaRPr lang="en-US" sz="900" dirty="0">
-              <a:solidFill>
-                <a:srgbClr val="FFFFFF"/>
-              </a:solidFill>
-              <a:latin typeface="Arial" panose="020B0604020202090204"/>
-              <a:ea typeface="Arial" panose="020B0604020202090204"/>
-              <a:cs typeface="Arial" panose="020B0604020202090204"/>
-            </a:endParaRPr>
           </a:p>
         </p:txBody>
       </p:sp>
@@ -8820,10 +7796,6 @@
       </a:style>
     </a:lnDef>
   </a:objectDefaults>
-  <a:extLst>
-    <a:ext uri="{05A4C25C-085E-4340-85A3-A5531E510DB2}">
-      <thm15:themeFamily xmlns:thm15="http://schemas.microsoft.com/office/thememl/2012/main" name="Office Theme" id="{62F939B6-93AF-4DB8-9C6B-D6C7DFDC589F}" vid="{4A3C46E8-61CC-4603-A589-7422A47A8E4A}"/>
-    </a:ext>
-  </a:extLst>
+  <a:extraClrSchemeLst/>
 </a:theme>
 </file>
--- a/reports/WeeklyPre/5min_pre_fully_editable.pptx
+++ b/reports/WeeklyPre/5min_pre_fully_editable.pptx
@@ -1,20 +1,20 @@
 
 <file path=ppt/presentation.xml><?xml version="1.0" encoding="utf-8"?>
-<p:presentation xmlns:a="http://schemas.openxmlformats.org/drawingml/2006/main" xmlns:r="http://schemas.openxmlformats.org/officeDocument/2006/relationships" xmlns:p="http://schemas.openxmlformats.org/presentationml/2006/main" saveSubsetFonts="1" autoCompressPictures="0">
+<p:presentation xmlns:a="http://schemas.openxmlformats.org/drawingml/2006/main" xmlns:r="http://schemas.openxmlformats.org/officeDocument/2006/relationships" xmlns:p="http://schemas.openxmlformats.org/presentationml/2006/main" autoCompressPictures="0">
   <p:sldMasterIdLst>
     <p:sldMasterId id="2147483648" r:id="rId1"/>
   </p:sldMasterIdLst>
   <p:sldIdLst>
-    <p:sldId id="256" r:id="rId7"/>
-    <p:sldId id="257" r:id="rId8"/>
-    <p:sldId id="258" r:id="rId9"/>
-    <p:sldId id="259" r:id="rId10"/>
-    <p:sldId id="260" r:id="rId11"/>
-    <p:sldId id="261" r:id="rId12"/>
-    <p:sldId id="262" r:id="rId13"/>
-    <p:sldId id="263" r:id="rId14"/>
-    <p:sldId id="264" r:id="rId15"/>
-    <p:sldId id="265" r:id="rId16"/>
+    <p:sldId id="256" r:id="rId3"/>
+    <p:sldId id="257" r:id="rId4"/>
+    <p:sldId id="258" r:id="rId5"/>
+    <p:sldId id="259" r:id="rId6"/>
+    <p:sldId id="260" r:id="rId7"/>
+    <p:sldId id="261" r:id="rId8"/>
+    <p:sldId id="262" r:id="rId9"/>
+    <p:sldId id="263" r:id="rId10"/>
+    <p:sldId id="264" r:id="rId11"/>
+    <p:sldId id="265" r:id="rId12"/>
   </p:sldIdLst>
   <p:sldSz cx="12192000" cy="6858000" type="screen4x3"/>
   <p:notesSz cx="6858000" cy="9144000"/>
@@ -113,11 +113,27 @@
       </a:defRPr>
     </a:lvl9pPr>
   </p:defaultTextStyle>
+  <p:extLst>
+    <p:ext uri="{EFAFB233-063F-42B5-8137-9DF3F51BA10A}">
+      <p15:sldGuideLst xmlns:p15="http://schemas.microsoft.com/office/powerpoint/2012/main">
+        <p15:guide id="1" orient="horz" pos="2160" userDrawn="1">
+          <p15:clr>
+            <a:srgbClr val="A4A3A4"/>
+          </p15:clr>
+        </p15:guide>
+        <p15:guide id="2" pos="2880" userDrawn="1">
+          <p15:clr>
+            <a:srgbClr val="A4A3A4"/>
+          </p15:clr>
+        </p15:guide>
+      </p15:sldGuideLst>
+    </p:ext>
+  </p:extLst>
 </p:presentation>
 </file>
 
-<file path=ppt/slideLayouts/slideLayout7.xml><?xml version="1.0" encoding="utf-8"?>
-<p:sldLayout xmlns:a="http://schemas.openxmlformats.org/drawingml/2006/main" xmlns:p="http://schemas.openxmlformats.org/presentationml/2006/main" type="blank" preserve="1">
+<file path=ppt/slideLayouts/slideLayout1.xml><?xml version="1.0" encoding="utf-8"?>
+<p:sldLayout xmlns:a="http://schemas.openxmlformats.org/drawingml/2006/main" xmlns:r="http://schemas.openxmlformats.org/officeDocument/2006/relationships" xmlns:p="http://schemas.openxmlformats.org/presentationml/2006/main" type="blank" preserve="1">
   <p:cSld name="weekly_five_minute_research_update — Blank">
     <p:spTree>
       <p:nvGrpSpPr>
@@ -150,7 +166,6 @@
           <a:p>
             <a:fld id="{5BCAD085-E8A6-8845-BD4E-CB4CCA059FC4}" type="datetimeFigureOut">
               <a:rPr lang="en-US" smtClean="0"/>
-              <a:t>1/27/13</a:t>
             </a:fld>
             <a:endParaRPr lang="en-US"/>
           </a:p>
@@ -192,7 +207,6 @@
           <a:p>
             <a:fld id="{C1FF6DA9-008F-8B48-92A6-B652298478BF}" type="slidenum">
               <a:rPr lang="en-US" smtClean="0"/>
-              <a:t>‹#›</a:t>
             </a:fld>
             <a:endParaRPr lang="en-US"/>
           </a:p>
@@ -207,8 +221,8 @@
 </file>
 
 <file path=ppt/slideMasters/slideMaster1.xml><?xml version="1.0" encoding="utf-8"?>
-<p:sldMaster xmlns:a="http://schemas.openxmlformats.org/drawingml/2006/main" xmlns:p="http://schemas.openxmlformats.org/presentationml/2006/main" xmlns:r="http://schemas.openxmlformats.org/officeDocument/2006/relationships">
-  <p:cSld name="weekly_five_minute_research_update — Master">
+<p:sldMaster xmlns:a="http://schemas.openxmlformats.org/drawingml/2006/main" xmlns:r="http://schemas.openxmlformats.org/officeDocument/2006/relationships" xmlns:p="http://schemas.openxmlformats.org/presentationml/2006/main">
+  <p:cSld>
     <p:bg>
       <p:bgRef idx="1001">
         <a:schemeClr val="bg1"/>
@@ -263,7 +277,6 @@
           <a:p>
             <a:fld id="{5BCAD085-E8A6-8845-BD4E-CB4CCA059FC4}" type="datetimeFigureOut">
               <a:rPr lang="en-US" smtClean="0"/>
-              <a:t>1/27/13</a:t>
             </a:fld>
             <a:endParaRPr lang="en-US"/>
           </a:p>
@@ -341,7 +354,6 @@
           <a:p>
             <a:fld id="{C1FF6DA9-008F-8B48-92A6-B652298478BF}" type="slidenum">
               <a:rPr lang="en-US" smtClean="0"/>
-              <a:t>‹#›</a:t>
             </a:fld>
             <a:endParaRPr lang="en-US"/>
           </a:p>
@@ -351,7 +363,7 @@
   </p:cSld>
   <p:clrMap bg1="lt1" tx1="dk1" bg2="lt2" tx2="dk2" accent1="accent1" accent2="accent2" accent3="accent3" accent4="accent4" accent5="accent5" accent6="accent6" hlink="hlink" folHlink="folHlink"/>
   <p:sldLayoutIdLst>
-    <p:sldLayoutId id="2147483655" r:id="rId7"/>
+    <p:sldLayoutId id="2147483649" r:id="rId1"/>
   </p:sldLayoutIdLst>
   <p:txStyles>
     <p:titleStyle>
@@ -375,7 +387,7 @@
         <a:spcBef>
           <a:spcPct val="20000"/>
         </a:spcBef>
-        <a:buFont typeface="Arial"/>
+        <a:buFont typeface="Arial" panose="020B0604020202090204"/>
         <a:buChar char="•"/>
         <a:defRPr sz="3200" kern="1200">
           <a:solidFill>
@@ -390,7 +402,7 @@
         <a:spcBef>
           <a:spcPct val="20000"/>
         </a:spcBef>
-        <a:buFont typeface="Arial"/>
+        <a:buFont typeface="Arial" panose="020B0604020202090204"/>
         <a:buChar char="–"/>
         <a:defRPr sz="2800" kern="1200">
           <a:solidFill>
@@ -405,7 +417,7 @@
         <a:spcBef>
           <a:spcPct val="20000"/>
         </a:spcBef>
-        <a:buFont typeface="Arial"/>
+        <a:buFont typeface="Arial" panose="020B0604020202090204"/>
         <a:buChar char="•"/>
         <a:defRPr sz="2400" kern="1200">
           <a:solidFill>
@@ -420,7 +432,7 @@
         <a:spcBef>
           <a:spcPct val="20000"/>
         </a:spcBef>
-        <a:buFont typeface="Arial"/>
+        <a:buFont typeface="Arial" panose="020B0604020202090204"/>
         <a:buChar char="–"/>
         <a:defRPr sz="2000" kern="1200">
           <a:solidFill>
@@ -435,7 +447,7 @@
         <a:spcBef>
           <a:spcPct val="20000"/>
         </a:spcBef>
-        <a:buFont typeface="Arial"/>
+        <a:buFont typeface="Arial" panose="020B0604020202090204"/>
         <a:buChar char="»"/>
         <a:defRPr sz="2000" kern="1200">
           <a:solidFill>
@@ -450,7 +462,7 @@
         <a:spcBef>
           <a:spcPct val="20000"/>
         </a:spcBef>
-        <a:buFont typeface="Arial"/>
+        <a:buFont typeface="Arial" panose="020B0604020202090204"/>
         <a:buChar char="•"/>
         <a:defRPr sz="2000" kern="1200">
           <a:solidFill>
@@ -465,7 +477,7 @@
         <a:spcBef>
           <a:spcPct val="20000"/>
         </a:spcBef>
-        <a:buFont typeface="Arial"/>
+        <a:buFont typeface="Arial" panose="020B0604020202090204"/>
         <a:buChar char="•"/>
         <a:defRPr sz="2000" kern="1200">
           <a:solidFill>
@@ -480,7 +492,7 @@
         <a:spcBef>
           <a:spcPct val="20000"/>
         </a:spcBef>
-        <a:buFont typeface="Arial"/>
+        <a:buFont typeface="Arial" panose="020B0604020202090204"/>
         <a:buChar char="•"/>
         <a:defRPr sz="2000" kern="1200">
           <a:solidFill>
@@ -495,7 +507,7 @@
         <a:spcBef>
           <a:spcPct val="20000"/>
         </a:spcBef>
-        <a:buFont typeface="Arial"/>
+        <a:buFont typeface="Arial" panose="020B0604020202090204"/>
         <a:buChar char="•"/>
         <a:defRPr sz="2000" kern="1200">
           <a:solidFill>
@@ -662,7 +674,7 @@
           <p:nvPr/>
         </p:nvPicPr>
         <p:blipFill>
-          <a:blip r:embed="rId2"/>
+          <a:blip r:embed="rId1"/>
           <a:stretch>
             <a:fillRect/>
           </a:stretch>
@@ -730,12 +742,20 @@
                 <a:solidFill>
                   <a:srgbClr val="FFFFFF"/>
                 </a:solidFill>
-                <a:latin typeface="Arial"/>
-                <a:ea typeface="Arial"/>
-                <a:cs typeface="Arial"/>
+                <a:latin typeface="Arial" panose="020B0604020202090204"/>
+                <a:ea typeface="Arial" panose="020B0604020202090204"/>
+                <a:cs typeface="Arial" panose="020B0604020202090204"/>
               </a:rPr>
               <a:t>EE6008 · HUMAN POSE ANALYTICS</a:t>
             </a:r>
+            <a:endParaRPr lang="en-US" sz="980" dirty="0">
+              <a:solidFill>
+                <a:srgbClr val="FFFFFF"/>
+              </a:solidFill>
+              <a:latin typeface="Arial" panose="020B0604020202090204"/>
+              <a:ea typeface="Arial" panose="020B0604020202090204"/>
+              <a:cs typeface="Arial" panose="020B0604020202090204"/>
+            </a:endParaRPr>
           </a:p>
         </p:txBody>
       </p:sp>
@@ -770,7 +790,7 @@
           <p:nvPr/>
         </p:nvPicPr>
         <p:blipFill>
-          <a:blip r:embed="rId3">
+          <a:blip r:embed="rId2">
             <a:alphaModFix amt="56000"/>
           </a:blip>
           <a:stretch>
@@ -901,12 +921,20 @@
                 <a:solidFill>
                   <a:srgbClr val="181C62"/>
                 </a:solidFill>
-                <a:latin typeface="Arial"/>
-                <a:ea typeface="Arial"/>
-                <a:cs typeface="Arial"/>
+                <a:latin typeface="Arial" panose="020B0604020202090204"/>
+                <a:ea typeface="Arial" panose="020B0604020202090204"/>
+                <a:cs typeface="Arial" panose="020B0604020202090204"/>
               </a:rPr>
               <a:t>Human Pose Analytics</a:t>
             </a:r>
+            <a:endParaRPr lang="en-US" sz="3150" b="1" dirty="0">
+              <a:solidFill>
+                <a:srgbClr val="181C62"/>
+              </a:solidFill>
+              <a:latin typeface="Arial" panose="020B0604020202090204"/>
+              <a:ea typeface="Arial" panose="020B0604020202090204"/>
+              <a:cs typeface="Arial" panose="020B0604020202090204"/>
+            </a:endParaRPr>
           </a:p>
         </p:txBody>
       </p:sp>
@@ -941,12 +969,20 @@
                 <a:solidFill>
                   <a:srgbClr val="20243A"/>
                 </a:solidFill>
-                <a:latin typeface="Arial"/>
-                <a:ea typeface="Arial"/>
-                <a:cs typeface="Arial"/>
+                <a:latin typeface="Arial" panose="020B0604020202090204"/>
+                <a:ea typeface="Arial" panose="020B0604020202090204"/>
+                <a:cs typeface="Arial" panose="020B0604020202090204"/>
               </a:rPr>
               <a:t>Weekly research update · {{SUBTITLE}}</a:t>
             </a:r>
+            <a:endParaRPr lang="en-US" sz="1720" dirty="0">
+              <a:solidFill>
+                <a:srgbClr val="20243A"/>
+              </a:solidFill>
+              <a:latin typeface="Arial" panose="020B0604020202090204"/>
+              <a:ea typeface="Arial" panose="020B0604020202090204"/>
+              <a:cs typeface="Arial" panose="020B0604020202090204"/>
+            </a:endParaRPr>
           </a:p>
         </p:txBody>
       </p:sp>
@@ -981,12 +1017,20 @@
                 <a:solidFill>
                   <a:srgbClr val="D71440"/>
                 </a:solidFill>
-                <a:latin typeface="Arial"/>
-                <a:ea typeface="Arial"/>
-                <a:cs typeface="Arial"/>
+                <a:latin typeface="Arial" panose="020B0604020202090204"/>
+                <a:ea typeface="Arial" panose="020B0604020202090204"/>
+                <a:cs typeface="Arial" panose="020B0604020202090204"/>
               </a:rPr>
               <a:t>Week ending · {{DATE}}</a:t>
             </a:r>
+            <a:endParaRPr lang="en-US" sz="1350" b="1" dirty="0">
+              <a:solidFill>
+                <a:srgbClr val="D71440"/>
+              </a:solidFill>
+              <a:latin typeface="Arial" panose="020B0604020202090204"/>
+              <a:ea typeface="Arial" panose="020B0604020202090204"/>
+              <a:cs typeface="Arial" panose="020B0604020202090204"/>
+            </a:endParaRPr>
           </a:p>
         </p:txBody>
       </p:sp>
@@ -1021,12 +1065,20 @@
                 <a:solidFill>
                   <a:srgbClr val="5E6478"/>
                 </a:solidFill>
-                <a:latin typeface="Arial"/>
-                <a:ea typeface="Arial"/>
-                <a:cs typeface="Arial"/>
+                <a:latin typeface="Arial" panose="020B0604020202090204"/>
+                <a:ea typeface="Arial" panose="020B0604020202090204"/>
+                <a:cs typeface="Arial" panose="020B0604020202090204"/>
               </a:rPr>
               <a:t>Presenter · {{AUTHOR}}</a:t>
             </a:r>
+            <a:endParaRPr lang="en-US" sz="1350" dirty="0">
+              <a:solidFill>
+                <a:srgbClr val="5E6478"/>
+              </a:solidFill>
+              <a:latin typeface="Arial" panose="020B0604020202090204"/>
+              <a:ea typeface="Arial" panose="020B0604020202090204"/>
+              <a:cs typeface="Arial" panose="020B0604020202090204"/>
+            </a:endParaRPr>
           </a:p>
         </p:txBody>
       </p:sp>
@@ -1094,7 +1146,7 @@
           <p:nvPr/>
         </p:nvPicPr>
         <p:blipFill>
-          <a:blip r:embed="rId2"/>
+          <a:blip r:embed="rId1"/>
           <a:stretch>
             <a:fillRect/>
           </a:stretch>
@@ -1162,12 +1214,20 @@
                 <a:solidFill>
                   <a:srgbClr val="FFFFFF"/>
                 </a:solidFill>
-                <a:latin typeface="Arial"/>
-                <a:ea typeface="Arial"/>
-                <a:cs typeface="Arial"/>
+                <a:latin typeface="Arial" panose="020B0604020202090204"/>
+                <a:ea typeface="Arial" panose="020B0604020202090204"/>
+                <a:cs typeface="Arial" panose="020B0604020202090204"/>
               </a:rPr>
               <a:t>EE6008 · HUMAN POSE ANALYTICS</a:t>
             </a:r>
+            <a:endParaRPr lang="en-US" sz="980" dirty="0">
+              <a:solidFill>
+                <a:srgbClr val="FFFFFF"/>
+              </a:solidFill>
+              <a:latin typeface="Arial" panose="020B0604020202090204"/>
+              <a:ea typeface="Arial" panose="020B0604020202090204"/>
+              <a:cs typeface="Arial" panose="020B0604020202090204"/>
+            </a:endParaRPr>
           </a:p>
         </p:txBody>
       </p:sp>
@@ -1180,7 +1240,7 @@
           <p:nvPr/>
         </p:nvPicPr>
         <p:blipFill>
-          <a:blip r:embed="rId3"/>
+          <a:blip r:embed="rId2"/>
           <a:stretch>
             <a:fillRect/>
           </a:stretch>
@@ -1254,7 +1314,7 @@
           <p:nvPr/>
         </p:nvPicPr>
         <p:blipFill>
-          <a:blip r:embed="rId4"/>
+          <a:blip r:embed="rId1"/>
           <a:stretch>
             <a:fillRect/>
           </a:stretch>
@@ -1300,12 +1360,20 @@
                 <a:solidFill>
                   <a:srgbClr val="181C62"/>
                 </a:solidFill>
-                <a:latin typeface="Arial"/>
-                <a:ea typeface="Arial"/>
-                <a:cs typeface="Arial"/>
+                <a:latin typeface="Arial" panose="020B0604020202090204"/>
+                <a:ea typeface="Arial" panose="020B0604020202090204"/>
+                <a:cs typeface="Arial" panose="020B0604020202090204"/>
               </a:rPr>
               <a:t>EE6008 · HUMAN POSE ANALYTICS</a:t>
             </a:r>
+            <a:endParaRPr lang="en-US" sz="1200" b="1" dirty="0">
+              <a:solidFill>
+                <a:srgbClr val="181C62"/>
+              </a:solidFill>
+              <a:latin typeface="Arial" panose="020B0604020202090204"/>
+              <a:ea typeface="Arial" panose="020B0604020202090204"/>
+              <a:cs typeface="Arial" panose="020B0604020202090204"/>
+            </a:endParaRPr>
           </a:p>
         </p:txBody>
       </p:sp>
@@ -1362,12 +1430,20 @@
                 <a:solidFill>
                   <a:srgbClr val="181C62"/>
                 </a:solidFill>
-                <a:latin typeface="Arial"/>
-                <a:ea typeface="Arial"/>
-                <a:cs typeface="Arial"/>
+                <a:latin typeface="Arial" panose="020B0604020202090204"/>
+                <a:ea typeface="Arial" panose="020B0604020202090204"/>
+                <a:cs typeface="Arial" panose="020B0604020202090204"/>
               </a:rPr>
               <a:t>Thank You</a:t>
             </a:r>
+            <a:endParaRPr lang="en-US" sz="4050" b="1" dirty="0">
+              <a:solidFill>
+                <a:srgbClr val="181C62"/>
+              </a:solidFill>
+              <a:latin typeface="Arial" panose="020B0604020202090204"/>
+              <a:ea typeface="Arial" panose="020B0604020202090204"/>
+              <a:cs typeface="Arial" panose="020B0604020202090204"/>
+            </a:endParaRPr>
           </a:p>
         </p:txBody>
       </p:sp>
@@ -1435,7 +1511,7 @@
           <p:nvPr/>
         </p:nvPicPr>
         <p:blipFill>
-          <a:blip r:embed="rId2"/>
+          <a:blip r:embed="rId1"/>
           <a:stretch>
             <a:fillRect/>
           </a:stretch>
@@ -1503,12 +1579,20 @@
                 <a:solidFill>
                   <a:srgbClr val="FFFFFF"/>
                 </a:solidFill>
-                <a:latin typeface="Arial"/>
-                <a:ea typeface="Arial"/>
-                <a:cs typeface="Arial"/>
+                <a:latin typeface="Arial" panose="020B0604020202090204"/>
+                <a:ea typeface="Arial" panose="020B0604020202090204"/>
+                <a:cs typeface="Arial" panose="020B0604020202090204"/>
               </a:rPr>
               <a:t>EE6008 · HUMAN POSE ANALYTICS</a:t>
             </a:r>
+            <a:endParaRPr lang="en-US" sz="980" dirty="0">
+              <a:solidFill>
+                <a:srgbClr val="FFFFFF"/>
+              </a:solidFill>
+              <a:latin typeface="Arial" panose="020B0604020202090204"/>
+              <a:ea typeface="Arial" panose="020B0604020202090204"/>
+              <a:cs typeface="Arial" panose="020B0604020202090204"/>
+            </a:endParaRPr>
           </a:p>
         </p:txBody>
       </p:sp>
@@ -1807,12 +1891,20 @@
                 <a:solidFill>
                   <a:srgbClr val="D71440"/>
                 </a:solidFill>
-                <a:latin typeface="Arial"/>
-                <a:ea typeface="Arial"/>
-                <a:cs typeface="Arial"/>
+                <a:latin typeface="Arial" panose="020B0604020202090204"/>
+                <a:ea typeface="Arial" panose="020B0604020202090204"/>
+                <a:cs typeface="Arial" panose="020B0604020202090204"/>
               </a:rPr>
               <a:t>WEEKLY TAKEAWAY</a:t>
             </a:r>
+            <a:endParaRPr lang="en-US" sz="980" b="1" dirty="0">
+              <a:solidFill>
+                <a:srgbClr val="D71440"/>
+              </a:solidFill>
+              <a:latin typeface="Arial" panose="020B0604020202090204"/>
+              <a:ea typeface="Arial" panose="020B0604020202090204"/>
+              <a:cs typeface="Arial" panose="020B0604020202090204"/>
+            </a:endParaRPr>
           </a:p>
         </p:txBody>
       </p:sp>
@@ -1847,12 +1939,20 @@
                 <a:solidFill>
                   <a:srgbClr val="FFFFFF"/>
                 </a:solidFill>
-                <a:latin typeface="Arial"/>
-                <a:ea typeface="Arial"/>
-                <a:cs typeface="Arial"/>
+                <a:latin typeface="Arial" panose="020B0604020202090204"/>
+                <a:ea typeface="Arial" panose="020B0604020202090204"/>
+                <a:cs typeface="Arial" panose="020B0604020202090204"/>
               </a:rPr>
               <a:t>PROJECT STATUS</a:t>
             </a:r>
+            <a:endParaRPr lang="en-US" sz="980" b="1" dirty="0">
+              <a:solidFill>
+                <a:srgbClr val="FFFFFF"/>
+              </a:solidFill>
+              <a:latin typeface="Arial" panose="020B0604020202090204"/>
+              <a:ea typeface="Arial" panose="020B0604020202090204"/>
+              <a:cs typeface="Arial" panose="020B0604020202090204"/>
+            </a:endParaRPr>
           </a:p>
         </p:txBody>
       </p:sp>
@@ -1887,12 +1987,20 @@
                 <a:solidFill>
                   <a:srgbClr val="181C62"/>
                 </a:solidFill>
-                <a:latin typeface="Arial"/>
-                <a:ea typeface="Arial"/>
-                <a:cs typeface="Arial"/>
+                <a:latin typeface="Arial" panose="020B0604020202090204"/>
+                <a:ea typeface="Arial" panose="020B0604020202090204"/>
+                <a:cs typeface="Arial" panose="020B0604020202090204"/>
               </a:rPr>
               <a:t>CURRENT MILESTONE · EVIDENCE · BLOCKER · NEXT CHECKPOINT</a:t>
             </a:r>
+            <a:endParaRPr lang="en-US" sz="1050" b="1" dirty="0">
+              <a:solidFill>
+                <a:srgbClr val="181C62"/>
+              </a:solidFill>
+              <a:latin typeface="Arial" panose="020B0604020202090204"/>
+              <a:ea typeface="Arial" panose="020B0604020202090204"/>
+              <a:cs typeface="Arial" panose="020B0604020202090204"/>
+            </a:endParaRPr>
           </a:p>
         </p:txBody>
       </p:sp>
@@ -1927,12 +2035,20 @@
                 <a:solidFill>
                   <a:srgbClr val="5E6478"/>
                 </a:solidFill>
-                <a:latin typeface="Arial"/>
-                <a:ea typeface="Arial"/>
-                <a:cs typeface="Arial"/>
+                <a:latin typeface="Arial" panose="020B0604020202090204"/>
+                <a:ea typeface="Arial" panose="020B0604020202090204"/>
+                <a:cs typeface="Arial" panose="020B0604020202090204"/>
               </a:rPr>
               <a:t>Kick-off</a:t>
             </a:r>
+            <a:endParaRPr lang="en-US" sz="900" dirty="0">
+              <a:solidFill>
+                <a:srgbClr val="5E6478"/>
+              </a:solidFill>
+              <a:latin typeface="Arial" panose="020B0604020202090204"/>
+              <a:ea typeface="Arial" panose="020B0604020202090204"/>
+              <a:cs typeface="Arial" panose="020B0604020202090204"/>
+            </a:endParaRPr>
           </a:p>
         </p:txBody>
       </p:sp>
@@ -1967,12 +2083,20 @@
                 <a:solidFill>
                   <a:srgbClr val="5E6478"/>
                 </a:solidFill>
-                <a:latin typeface="Arial"/>
-                <a:ea typeface="Arial"/>
-                <a:cs typeface="Arial"/>
+                <a:latin typeface="Arial" panose="020B0604020202090204"/>
+                <a:ea typeface="Arial" panose="020B0604020202090204"/>
+                <a:cs typeface="Arial" panose="020B0604020202090204"/>
               </a:rPr>
               <a:t>Data</a:t>
             </a:r>
+            <a:endParaRPr lang="en-US" sz="900" dirty="0">
+              <a:solidFill>
+                <a:srgbClr val="5E6478"/>
+              </a:solidFill>
+              <a:latin typeface="Arial" panose="020B0604020202090204"/>
+              <a:ea typeface="Arial" panose="020B0604020202090204"/>
+              <a:cs typeface="Arial" panose="020B0604020202090204"/>
+            </a:endParaRPr>
           </a:p>
         </p:txBody>
       </p:sp>
@@ -2007,12 +2131,20 @@
                 <a:solidFill>
                   <a:srgbClr val="D71440"/>
                 </a:solidFill>
-                <a:latin typeface="Arial"/>
-                <a:ea typeface="Arial"/>
-                <a:cs typeface="Arial"/>
+                <a:latin typeface="Arial" panose="020B0604020202090204"/>
+                <a:ea typeface="Arial" panose="020B0604020202090204"/>
+                <a:cs typeface="Arial" panose="020B0604020202090204"/>
               </a:rPr>
               <a:t>Baselines</a:t>
             </a:r>
+            <a:endParaRPr lang="en-US" sz="900" b="1" dirty="0">
+              <a:solidFill>
+                <a:srgbClr val="D71440"/>
+              </a:solidFill>
+              <a:latin typeface="Arial" panose="020B0604020202090204"/>
+              <a:ea typeface="Arial" panose="020B0604020202090204"/>
+              <a:cs typeface="Arial" panose="020B0604020202090204"/>
+            </a:endParaRPr>
           </a:p>
         </p:txBody>
       </p:sp>
@@ -2047,12 +2179,20 @@
                 <a:solidFill>
                   <a:srgbClr val="5E6478"/>
                 </a:solidFill>
-                <a:latin typeface="Arial"/>
-                <a:ea typeface="Arial"/>
-                <a:cs typeface="Arial"/>
+                <a:latin typeface="Arial" panose="020B0604020202090204"/>
+                <a:ea typeface="Arial" panose="020B0604020202090204"/>
+                <a:cs typeface="Arial" panose="020B0604020202090204"/>
               </a:rPr>
               <a:t>IP Module</a:t>
             </a:r>
+            <a:endParaRPr lang="en-US" sz="900" dirty="0">
+              <a:solidFill>
+                <a:srgbClr val="5E6478"/>
+              </a:solidFill>
+              <a:latin typeface="Arial" panose="020B0604020202090204"/>
+              <a:ea typeface="Arial" panose="020B0604020202090204"/>
+              <a:cs typeface="Arial" panose="020B0604020202090204"/>
+            </a:endParaRPr>
           </a:p>
         </p:txBody>
       </p:sp>
@@ -2087,12 +2227,20 @@
                 <a:solidFill>
                   <a:srgbClr val="5E6478"/>
                 </a:solidFill>
-                <a:latin typeface="Arial"/>
-                <a:ea typeface="Arial"/>
-                <a:cs typeface="Arial"/>
+                <a:latin typeface="Arial" panose="020B0604020202090204"/>
+                <a:ea typeface="Arial" panose="020B0604020202090204"/>
+                <a:cs typeface="Arial" panose="020B0604020202090204"/>
               </a:rPr>
               <a:t>Experiments</a:t>
             </a:r>
+            <a:endParaRPr lang="en-US" sz="900" dirty="0">
+              <a:solidFill>
+                <a:srgbClr val="5E6478"/>
+              </a:solidFill>
+              <a:latin typeface="Arial" panose="020B0604020202090204"/>
+              <a:ea typeface="Arial" panose="020B0604020202090204"/>
+              <a:cs typeface="Arial" panose="020B0604020202090204"/>
+            </a:endParaRPr>
           </a:p>
         </p:txBody>
       </p:sp>
@@ -2127,12 +2275,20 @@
                 <a:solidFill>
                   <a:srgbClr val="5E6478"/>
                 </a:solidFill>
-                <a:latin typeface="Arial"/>
-                <a:ea typeface="Arial"/>
-                <a:cs typeface="Arial"/>
+                <a:latin typeface="Arial" panose="020B0604020202090204"/>
+                <a:ea typeface="Arial" panose="020B0604020202090204"/>
+                <a:cs typeface="Arial" panose="020B0604020202090204"/>
               </a:rPr>
               <a:t>Final Report</a:t>
             </a:r>
+            <a:endParaRPr lang="en-US" sz="900" dirty="0">
+              <a:solidFill>
+                <a:srgbClr val="5E6478"/>
+              </a:solidFill>
+              <a:latin typeface="Arial" panose="020B0604020202090204"/>
+              <a:ea typeface="Arial" panose="020B0604020202090204"/>
+              <a:cs typeface="Arial" panose="020B0604020202090204"/>
+            </a:endParaRPr>
           </a:p>
         </p:txBody>
       </p:sp>
@@ -2167,12 +2323,20 @@
                 <a:solidFill>
                   <a:srgbClr val="20243A"/>
                 </a:solidFill>
-                <a:latin typeface="Arial"/>
-                <a:ea typeface="Arial"/>
-                <a:cs typeface="Arial"/>
+                <a:latin typeface="Arial" panose="020B0604020202090204"/>
+                <a:ea typeface="Arial" panose="020B0604020202090204"/>
+                <a:cs typeface="Arial" panose="020B0604020202090204"/>
               </a:rPr>
               <a:t>Weekly Snapshot &amp; Milestone</a:t>
             </a:r>
+            <a:endParaRPr lang="en-US" sz="2550" b="1" dirty="0">
+              <a:solidFill>
+                <a:srgbClr val="20243A"/>
+              </a:solidFill>
+              <a:latin typeface="Arial" panose="020B0604020202090204"/>
+              <a:ea typeface="Arial" panose="020B0604020202090204"/>
+              <a:cs typeface="Arial" panose="020B0604020202090204"/>
+            </a:endParaRPr>
           </a:p>
         </p:txBody>
       </p:sp>
@@ -2211,12 +2375,20 @@
                 <a:solidFill>
                   <a:srgbClr val="181C62"/>
                 </a:solidFill>
-                <a:latin typeface="Arial"/>
-                <a:ea typeface="Arial"/>
-                <a:cs typeface="Arial"/>
+                <a:latin typeface="Arial" panose="020B0604020202090204"/>
+                <a:ea typeface="Arial" panose="020B0604020202090204"/>
+                <a:cs typeface="Arial" panose="020B0604020202090204"/>
               </a:rPr>
               <a:t>{{KEY_MESSAGE}}</a:t>
             </a:r>
+            <a:endParaRPr lang="en-US" sz="1800" b="1" dirty="0">
+              <a:solidFill>
+                <a:srgbClr val="181C62"/>
+              </a:solidFill>
+              <a:latin typeface="Arial" panose="020B0604020202090204"/>
+              <a:ea typeface="Arial" panose="020B0604020202090204"/>
+              <a:cs typeface="Arial" panose="020B0604020202090204"/>
+            </a:endParaRPr>
           </a:p>
           <a:p>
             <a:pPr algn="l">
@@ -2229,12 +2401,20 @@
                 <a:solidFill>
                   <a:srgbClr val="5E6478"/>
                 </a:solidFill>
-                <a:latin typeface="Arial"/>
-                <a:ea typeface="Arial"/>
-                <a:cs typeface="Arial"/>
+                <a:latin typeface="Arial" panose="020B0604020202090204"/>
+                <a:ea typeface="Arial" panose="020B0604020202090204"/>
+                <a:cs typeface="Arial" panose="020B0604020202090204"/>
               </a:rPr>
               <a:t>State the one result or decision the supervisor should remember.</a:t>
             </a:r>
+            <a:endParaRPr lang="en-US" sz="1050" dirty="0">
+              <a:solidFill>
+                <a:srgbClr val="5E6478"/>
+              </a:solidFill>
+              <a:latin typeface="Arial" panose="020B0604020202090204"/>
+              <a:ea typeface="Arial" panose="020B0604020202090204"/>
+              <a:cs typeface="Arial" panose="020B0604020202090204"/>
+            </a:endParaRPr>
           </a:p>
         </p:txBody>
       </p:sp>
@@ -2273,12 +2453,20 @@
                 <a:solidFill>
                   <a:srgbClr val="FFFFFF"/>
                 </a:solidFill>
-                <a:latin typeface="Arial"/>
-                <a:ea typeface="Arial"/>
-                <a:cs typeface="Arial"/>
+                <a:latin typeface="Arial" panose="020B0604020202090204"/>
+                <a:ea typeface="Arial" panose="020B0604020202090204"/>
+                <a:cs typeface="Arial" panose="020B0604020202090204"/>
               </a:rPr>
               <a:t>{{STATUS}}</a:t>
             </a:r>
+            <a:endParaRPr lang="en-US" sz="1880" b="1" dirty="0">
+              <a:solidFill>
+                <a:srgbClr val="FFFFFF"/>
+              </a:solidFill>
+              <a:latin typeface="Arial" panose="020B0604020202090204"/>
+              <a:ea typeface="Arial" panose="020B0604020202090204"/>
+              <a:cs typeface="Arial" panose="020B0604020202090204"/>
+            </a:endParaRPr>
           </a:p>
           <a:p>
             <a:pPr algn="ctr">
@@ -2291,12 +2479,20 @@
                 <a:solidFill>
                   <a:srgbClr val="C8C8C8"/>
                 </a:solidFill>
-                <a:latin typeface="Arial"/>
-                <a:ea typeface="Arial"/>
-                <a:cs typeface="Arial"/>
+                <a:latin typeface="Arial" panose="020B0604020202090204"/>
+                <a:ea typeface="Arial" panose="020B0604020202090204"/>
+                <a:cs typeface="Arial" panose="020B0604020202090204"/>
               </a:rPr>
               <a:t>ON TRACK · AT RISK · BLOCKED</a:t>
             </a:r>
+            <a:endParaRPr lang="en-US" sz="980" dirty="0">
+              <a:solidFill>
+                <a:srgbClr val="C8C8C8"/>
+              </a:solidFill>
+              <a:latin typeface="Arial" panose="020B0604020202090204"/>
+              <a:ea typeface="Arial" panose="020B0604020202090204"/>
+              <a:cs typeface="Arial" panose="020B0604020202090204"/>
+            </a:endParaRPr>
           </a:p>
         </p:txBody>
       </p:sp>
@@ -2335,12 +2531,20 @@
                 <a:solidFill>
                   <a:srgbClr val="20243A"/>
                 </a:solidFill>
-                <a:latin typeface="Arial"/>
-                <a:ea typeface="Arial"/>
-                <a:cs typeface="Arial"/>
+                <a:latin typeface="Arial" panose="020B0604020202090204"/>
+                <a:ea typeface="Arial" panose="020B0604020202090204"/>
+                <a:cs typeface="Arial" panose="020B0604020202090204"/>
               </a:rPr>
               <a:t>{{MILESTONE}}</a:t>
             </a:r>
+            <a:endParaRPr lang="en-US" sz="1580" dirty="0">
+              <a:solidFill>
+                <a:srgbClr val="20243A"/>
+              </a:solidFill>
+              <a:latin typeface="Arial" panose="020B0604020202090204"/>
+              <a:ea typeface="Arial" panose="020B0604020202090204"/>
+              <a:cs typeface="Arial" panose="020B0604020202090204"/>
+            </a:endParaRPr>
           </a:p>
           <a:p>
             <a:pPr algn="l">
@@ -2353,12 +2557,20 @@
                 <a:solidFill>
                   <a:srgbClr val="5E6478"/>
                 </a:solidFill>
-                <a:latin typeface="Arial"/>
-                <a:ea typeface="Arial"/>
-                <a:cs typeface="Arial"/>
+                <a:latin typeface="Arial" panose="020B0604020202090204"/>
+                <a:ea typeface="Arial" panose="020B0604020202090204"/>
+                <a:cs typeface="Arial" panose="020B0604020202090204"/>
               </a:rPr>
               <a:t>Evidence completed: … | Current blocker: … | Next checkpoint: …</a:t>
             </a:r>
+            <a:endParaRPr lang="en-US" sz="1120" dirty="0">
+              <a:solidFill>
+                <a:srgbClr val="5E6478"/>
+              </a:solidFill>
+              <a:latin typeface="Arial" panose="020B0604020202090204"/>
+              <a:ea typeface="Arial" panose="020B0604020202090204"/>
+              <a:cs typeface="Arial" panose="020B0604020202090204"/>
+            </a:endParaRPr>
           </a:p>
         </p:txBody>
       </p:sp>
@@ -2393,12 +2605,20 @@
                 <a:solidFill>
                   <a:srgbClr val="FFFFFF"/>
                 </a:solidFill>
-                <a:latin typeface="Arial"/>
-                <a:ea typeface="Arial"/>
-                <a:cs typeface="Arial"/>
+                <a:latin typeface="Arial" panose="020B0604020202090204"/>
+                <a:ea typeface="Arial" panose="020B0604020202090204"/>
+                <a:cs typeface="Arial" panose="020B0604020202090204"/>
               </a:rPr>
               <a:t>{{SOURCE}}</a:t>
             </a:r>
+            <a:endParaRPr lang="en-US" sz="900" dirty="0">
+              <a:solidFill>
+                <a:srgbClr val="FFFFFF"/>
+              </a:solidFill>
+              <a:latin typeface="Arial" panose="020B0604020202090204"/>
+              <a:ea typeface="Arial" panose="020B0604020202090204"/>
+              <a:cs typeface="Arial" panose="020B0604020202090204"/>
+            </a:endParaRPr>
           </a:p>
         </p:txBody>
       </p:sp>
@@ -2433,12 +2653,20 @@
                 <a:solidFill>
                   <a:srgbClr val="FFFFFF"/>
                 </a:solidFill>
-                <a:latin typeface="Arial"/>
-                <a:ea typeface="Arial"/>
-                <a:cs typeface="Arial"/>
+                <a:latin typeface="Arial" panose="020B0604020202090204"/>
+                <a:ea typeface="Arial" panose="020B0604020202090204"/>
+                <a:cs typeface="Arial" panose="020B0604020202090204"/>
               </a:rPr>
               <a:t>{{PAGE_NUM}}</a:t>
             </a:r>
+            <a:endParaRPr lang="en-US" sz="900" dirty="0">
+              <a:solidFill>
+                <a:srgbClr val="FFFFFF"/>
+              </a:solidFill>
+              <a:latin typeface="Arial" panose="020B0604020202090204"/>
+              <a:ea typeface="Arial" panose="020B0604020202090204"/>
+              <a:cs typeface="Arial" panose="020B0604020202090204"/>
+            </a:endParaRPr>
           </a:p>
         </p:txBody>
       </p:sp>
@@ -2506,7 +2734,7 @@
           <p:nvPr/>
         </p:nvPicPr>
         <p:blipFill>
-          <a:blip r:embed="rId2"/>
+          <a:blip r:embed="rId1"/>
           <a:stretch>
             <a:fillRect/>
           </a:stretch>
@@ -2574,12 +2802,20 @@
                 <a:solidFill>
                   <a:srgbClr val="FFFFFF"/>
                 </a:solidFill>
-                <a:latin typeface="Arial"/>
-                <a:ea typeface="Arial"/>
-                <a:cs typeface="Arial"/>
+                <a:latin typeface="Arial" panose="020B0604020202090204"/>
+                <a:ea typeface="Arial" panose="020B0604020202090204"/>
+                <a:cs typeface="Arial" panose="020B0604020202090204"/>
               </a:rPr>
               <a:t>EE6008 · HUMAN POSE ANALYTICS</a:t>
             </a:r>
+            <a:endParaRPr lang="en-US" sz="980" dirty="0">
+              <a:solidFill>
+                <a:srgbClr val="FFFFFF"/>
+              </a:solidFill>
+              <a:latin typeface="Arial" panose="020B0604020202090204"/>
+              <a:ea typeface="Arial" panose="020B0604020202090204"/>
+              <a:cs typeface="Arial" panose="020B0604020202090204"/>
+            </a:endParaRPr>
           </a:p>
         </p:txBody>
       </p:sp>
@@ -2732,12 +2968,20 @@
                 <a:solidFill>
                   <a:srgbClr val="D71440"/>
                 </a:solidFill>
-                <a:latin typeface="Arial"/>
-                <a:ea typeface="Arial"/>
-                <a:cs typeface="Arial"/>
+                <a:latin typeface="Arial" panose="020B0604020202090204"/>
+                <a:ea typeface="Arial" panose="020B0604020202090204"/>
+                <a:cs typeface="Arial" panose="020B0604020202090204"/>
               </a:rPr>
               <a:t>THIS WEEK</a:t>
             </a:r>
+            <a:endParaRPr lang="en-US" sz="980" b="1" dirty="0">
+              <a:solidFill>
+                <a:srgbClr val="D71440"/>
+              </a:solidFill>
+              <a:latin typeface="Arial" panose="020B0604020202090204"/>
+              <a:ea typeface="Arial" panose="020B0604020202090204"/>
+              <a:cs typeface="Arial" panose="020B0604020202090204"/>
+            </a:endParaRPr>
           </a:p>
         </p:txBody>
       </p:sp>
@@ -2772,12 +3016,20 @@
                 <a:solidFill>
                   <a:srgbClr val="181C62"/>
                 </a:solidFill>
-                <a:latin typeface="Arial"/>
-                <a:ea typeface="Arial"/>
-                <a:cs typeface="Arial"/>
+                <a:latin typeface="Arial" panose="020B0604020202090204"/>
+                <a:ea typeface="Arial" panose="020B0604020202090204"/>
+                <a:cs typeface="Arial" panose="020B0604020202090204"/>
               </a:rPr>
               <a:t>PIPELINE / ARCHITECTURE / IMPLEMENTATION EVIDENCE</a:t>
             </a:r>
+            <a:endParaRPr lang="en-US" sz="980" b="1" dirty="0">
+              <a:solidFill>
+                <a:srgbClr val="181C62"/>
+              </a:solidFill>
+              <a:latin typeface="Arial" panose="020B0604020202090204"/>
+              <a:ea typeface="Arial" panose="020B0604020202090204"/>
+              <a:cs typeface="Arial" panose="020B0604020202090204"/>
+            </a:endParaRPr>
           </a:p>
         </p:txBody>
       </p:sp>
@@ -2812,12 +3064,20 @@
                 <a:solidFill>
                   <a:srgbClr val="FFFFFF"/>
                 </a:solidFill>
-                <a:latin typeface="Arial"/>
-                <a:ea typeface="Arial"/>
-                <a:cs typeface="Arial"/>
+                <a:latin typeface="Arial" panose="020B0604020202090204"/>
+                <a:ea typeface="Arial" panose="020B0604020202090204"/>
+                <a:cs typeface="Arial" panose="020B0604020202090204"/>
               </a:rPr>
               <a:t>TECHNICAL TAKEAWAY</a:t>
             </a:r>
+            <a:endParaRPr lang="en-US" sz="980" b="1" dirty="0">
+              <a:solidFill>
+                <a:srgbClr val="FFFFFF"/>
+              </a:solidFill>
+              <a:latin typeface="Arial" panose="020B0604020202090204"/>
+              <a:ea typeface="Arial" panose="020B0604020202090204"/>
+              <a:cs typeface="Arial" panose="020B0604020202090204"/>
+            </a:endParaRPr>
           </a:p>
         </p:txBody>
       </p:sp>
@@ -2830,7 +3090,7 @@
         <p:spPr>
           <a:xfrm>
             <a:off x="501396" y="543878"/>
-            <a:ext cx="3345943" cy="498729"/>
+            <a:ext cx="4773930" cy="391795"/>
           </a:xfrm>
           <a:prstGeom prst="rect">
             <a:avLst/>
@@ -2848,16 +3108,24 @@
           <a:p>
             <a:pPr algn="l"/>
             <a:r>
-              <a:rPr lang="en-US" sz="2550" b="1" dirty="0">
+              <a:rPr lang="en-US" altLang="zh-CN" sz="2550" b="1" dirty="0">
                 <a:solidFill>
                   <a:srgbClr val="20243A"/>
                 </a:solidFill>
-                <a:latin typeface="Arial"/>
-                <a:ea typeface="Arial"/>
-                <a:cs typeface="Arial"/>
-              </a:rPr>
-              <a:t>Technical Progress</a:t>
-            </a:r>
+                <a:latin typeface="Arial" panose="020B0604020202090204"/>
+                <a:ea typeface="Arial" panose="020B0604020202090204"/>
+                <a:cs typeface="Arial" panose="020B0604020202090204"/>
+              </a:rPr>
+              <a:t>Scoping the Interaction Subset</a:t>
+            </a:r>
+            <a:endParaRPr lang="en-US" altLang="zh-CN" sz="2550" b="1" dirty="0">
+              <a:solidFill>
+                <a:srgbClr val="20243A"/>
+              </a:solidFill>
+              <a:latin typeface="Arial" panose="020B0604020202090204"/>
+              <a:ea typeface="Arial" panose="020B0604020202090204"/>
+              <a:cs typeface="Arial" panose="020B0604020202090204"/>
+            </a:endParaRPr>
           </a:p>
         </p:txBody>
       </p:sp>
@@ -2896,24 +3164,41 @@
                 <a:solidFill>
                   <a:srgbClr val="20243A"/>
                 </a:solidFill>
-                <a:latin typeface="Arial"/>
-                <a:ea typeface="Arial"/>
-                <a:cs typeface="Arial"/>
+                <a:latin typeface="Arial" panose="020B0604020202090204"/>
+                <a:ea typeface="Arial" panose="020B0604020202090204"/>
+                <a:cs typeface="Arial" panose="020B0604020202090204"/>
               </a:rPr>
               <a:t>NTU RGB+D 120</a:t>
             </a:r>
-            <a:br/>
-            <a:r>
+            <a:br>
               <a:rPr lang="en-US" sz="1580" dirty="0">
                 <a:solidFill>
                   <a:srgbClr val="20243A"/>
                 </a:solidFill>
-                <a:latin typeface="Arial"/>
-                <a:ea typeface="Arial"/>
-                <a:cs typeface="Arial"/>
+                <a:latin typeface="Arial" panose="020B0604020202090204"/>
+                <a:ea typeface="Arial" panose="020B0604020202090204"/>
+                <a:cs typeface="Arial" panose="020B0604020202090204"/>
+              </a:rPr>
+            </a:br>
+            <a:r>
+              <a:rPr lang="en-US" sz="1580" dirty="0">
+                <a:solidFill>
+                  <a:srgbClr val="20243A"/>
+                </a:solidFill>
+                <a:latin typeface="Arial" panose="020B0604020202090204"/>
+                <a:ea typeface="Arial" panose="020B0604020202090204"/>
+                <a:cs typeface="Arial" panose="020B0604020202090204"/>
               </a:rPr>
               <a:t>dataset audit</a:t>
             </a:r>
+            <a:endParaRPr lang="en-US" sz="1580" dirty="0">
+              <a:solidFill>
+                <a:srgbClr val="20243A"/>
+              </a:solidFill>
+              <a:latin typeface="Arial" panose="020B0604020202090204"/>
+              <a:ea typeface="Arial" panose="020B0604020202090204"/>
+              <a:cs typeface="Arial" panose="020B0604020202090204"/>
+            </a:endParaRPr>
           </a:p>
           <a:p>
             <a:pPr algn="l">
@@ -2929,24 +3214,41 @@
                 <a:solidFill>
                   <a:srgbClr val="5E6478"/>
                 </a:solidFill>
-                <a:latin typeface="Arial"/>
-                <a:ea typeface="Arial"/>
-                <a:cs typeface="Arial"/>
+                <a:latin typeface="Arial" panose="020B0604020202090204"/>
+                <a:ea typeface="Arial" panose="020B0604020202090204"/>
+                <a:cs typeface="Arial" panose="020B0604020202090204"/>
               </a:rPr>
               <a:t>Completed · format, splits, cleaning</a:t>
             </a:r>
-            <a:br/>
-            <a:r>
+            <a:br>
               <a:rPr lang="en-US" sz="1050" dirty="0">
                 <a:solidFill>
                   <a:srgbClr val="5E6478"/>
                 </a:solidFill>
-                <a:latin typeface="Arial"/>
-                <a:ea typeface="Arial"/>
-                <a:cs typeface="Arial"/>
+                <a:latin typeface="Arial" panose="020B0604020202090204"/>
+                <a:ea typeface="Arial" panose="020B0604020202090204"/>
+                <a:cs typeface="Arial" panose="020B0604020202090204"/>
+              </a:rPr>
+            </a:br>
+            <a:r>
+              <a:rPr lang="en-US" sz="1050" dirty="0">
+                <a:solidFill>
+                  <a:srgbClr val="5E6478"/>
+                </a:solidFill>
+                <a:latin typeface="Arial" panose="020B0604020202090204"/>
+                <a:ea typeface="Arial" panose="020B0604020202090204"/>
+                <a:cs typeface="Arial" panose="020B0604020202090204"/>
               </a:rPr>
               <a:t>Planned · parser that keeps bodyID</a:t>
             </a:r>
+            <a:endParaRPr lang="en-US" sz="1050" dirty="0">
+              <a:solidFill>
+                <a:srgbClr val="5E6478"/>
+              </a:solidFill>
+              <a:latin typeface="Arial" panose="020B0604020202090204"/>
+              <a:ea typeface="Arial" panose="020B0604020202090204"/>
+              <a:cs typeface="Arial" panose="020B0604020202090204"/>
+            </a:endParaRPr>
           </a:p>
         </p:txBody>
       </p:sp>
@@ -2985,12 +3287,20 @@
                 <a:solidFill>
                   <a:srgbClr val="5E6478"/>
                 </a:solidFill>
-                <a:latin typeface="Arial"/>
-                <a:ea typeface="Arial"/>
-                <a:cs typeface="Arial"/>
+                <a:latin typeface="Arial" panose="020B0604020202090204"/>
+                <a:ea typeface="Arial" panose="020B0604020202090204"/>
+                <a:cs typeface="Arial" panose="020B0604020202090204"/>
               </a:rPr>
               <a:t>26 mutual classes · 24,732 clips</a:t>
             </a:r>
+            <a:endParaRPr lang="en-US" sz="1420" dirty="0">
+              <a:solidFill>
+                <a:srgbClr val="5E6478"/>
+              </a:solidFill>
+              <a:latin typeface="Arial" panose="020B0604020202090204"/>
+              <a:ea typeface="Arial" panose="020B0604020202090204"/>
+              <a:cs typeface="Arial" panose="020B0604020202090204"/>
+            </a:endParaRPr>
           </a:p>
           <a:p>
             <a:pPr algn="l">
@@ -3006,48 +3316,83 @@
                 <a:solidFill>
                   <a:srgbClr val="5E6478"/>
                 </a:solidFill>
-                <a:latin typeface="Arial"/>
-                <a:ea typeface="Arial"/>
-                <a:cs typeface="Arial"/>
+                <a:latin typeface="Arial" panose="020B0604020202090204"/>
+                <a:ea typeface="Arial" panose="020B0604020202090204"/>
+                <a:cs typeface="Arial" panose="020B0604020202090204"/>
               </a:rPr>
               <a:t>A050–A060 + A106–A120; the official</a:t>
             </a:r>
-            <a:br/>
-            <a:r>
+            <a:br>
               <a:rPr lang="en-US" sz="1050" dirty="0">
                 <a:solidFill>
                   <a:srgbClr val="5E6478"/>
                 </a:solidFill>
-                <a:latin typeface="Arial"/>
-                <a:ea typeface="Arial"/>
-                <a:cs typeface="Arial"/>
+                <a:latin typeface="Arial" panose="020B0604020202090204"/>
+                <a:ea typeface="Arial" panose="020B0604020202090204"/>
+                <a:cs typeface="Arial" panose="020B0604020202090204"/>
+              </a:rPr>
+            </a:br>
+            <a:r>
+              <a:rPr lang="en-US" sz="1050" dirty="0">
+                <a:solidFill>
+                  <a:srgbClr val="5E6478"/>
+                </a:solidFill>
+                <a:latin typeface="Arial" panose="020B0604020202090204"/>
+                <a:ea typeface="Arial" panose="020B0604020202090204"/>
+                <a:cs typeface="Arial" panose="020B0604020202090204"/>
               </a:rPr>
               <a:t>535-entry list removes 96 of them</a:t>
             </a:r>
-            <a:br/>
-            <a:r>
+            <a:br>
               <a:rPr lang="en-US" sz="1050" dirty="0">
                 <a:solidFill>
                   <a:srgbClr val="5E6478"/>
                 </a:solidFill>
-                <a:latin typeface="Arial"/>
-                <a:ea typeface="Arial"/>
-                <a:cs typeface="Arial"/>
+                <a:latin typeface="Arial" panose="020B0604020202090204"/>
+                <a:ea typeface="Arial" panose="020B0604020202090204"/>
+                <a:cs typeface="Arial" panose="020B0604020202090204"/>
+              </a:rPr>
+            </a:br>
+            <a:r>
+              <a:rPr lang="en-US" sz="1050" dirty="0">
+                <a:solidFill>
+                  <a:srgbClr val="5E6478"/>
+                </a:solidFill>
+                <a:latin typeface="Arial" panose="020B0604020202090204"/>
+                <a:ea typeface="Arial" panose="020B0604020202090204"/>
+                <a:cs typeface="Arial" panose="020B0604020202090204"/>
               </a:rPr>
               <a:t>X-Sub 53/53 subjects · X-Set even/odd setups</a:t>
             </a:r>
-            <a:br/>
-            <a:r>
+            <a:br>
               <a:rPr lang="en-US" sz="1050" dirty="0">
                 <a:solidFill>
                   <a:srgbClr val="5E6478"/>
                 </a:solidFill>
-                <a:latin typeface="Arial"/>
-                <a:ea typeface="Arial"/>
-                <a:cs typeface="Arial"/>
+                <a:latin typeface="Arial" panose="020B0604020202090204"/>
+                <a:ea typeface="Arial" panose="020B0604020202090204"/>
+                <a:cs typeface="Arial" panose="020B0604020202090204"/>
+              </a:rPr>
+            </a:br>
+            <a:r>
+              <a:rPr lang="en-US" sz="1050" dirty="0">
+                <a:solidFill>
+                  <a:srgbClr val="5E6478"/>
+                </a:solidFill>
+                <a:latin typeface="Arial" panose="020B0604020202090204"/>
+                <a:ea typeface="Arial" panose="020B0604020202090204"/>
+                <a:cs typeface="Arial" panose="020B0604020202090204"/>
               </a:rPr>
               <a:t>Skeleton-only download: 10.3 GB of the 2.3 TB</a:t>
             </a:r>
+            <a:endParaRPr lang="en-US" sz="1050" dirty="0">
+              <a:solidFill>
+                <a:srgbClr val="5E6478"/>
+              </a:solidFill>
+              <a:latin typeface="Arial" panose="020B0604020202090204"/>
+              <a:ea typeface="Arial" panose="020B0604020202090204"/>
+              <a:cs typeface="Arial" panose="020B0604020202090204"/>
+            </a:endParaRPr>
           </a:p>
         </p:txBody>
       </p:sp>
@@ -3086,24 +3431,41 @@
                 <a:solidFill>
                   <a:srgbClr val="FFFFFF"/>
                 </a:solidFill>
-                <a:latin typeface="Arial"/>
-                <a:ea typeface="Arial"/>
-                <a:cs typeface="Arial"/>
+                <a:latin typeface="Arial" panose="020B0604020202090204"/>
+                <a:ea typeface="Arial" panose="020B0604020202090204"/>
+                <a:cs typeface="Arial" panose="020B0604020202090204"/>
               </a:rPr>
               <a:t>Identity is lost</a:t>
             </a:r>
-            <a:br/>
-            <a:r>
+            <a:br>
               <a:rPr lang="en-US" sz="1580" b="1" dirty="0">
                 <a:solidFill>
                   <a:srgbClr val="FFFFFF"/>
                 </a:solidFill>
-                <a:latin typeface="Arial"/>
-                <a:ea typeface="Arial"/>
-                <a:cs typeface="Arial"/>
+                <a:latin typeface="Arial" panose="020B0604020202090204"/>
+                <a:ea typeface="Arial" panose="020B0604020202090204"/>
+                <a:cs typeface="Arial" panose="020B0604020202090204"/>
+              </a:rPr>
+            </a:br>
+            <a:r>
+              <a:rPr lang="en-US" sz="1580" b="1" dirty="0">
+                <a:solidFill>
+                  <a:srgbClr val="FFFFFF"/>
+                </a:solidFill>
+                <a:latin typeface="Arial" panose="020B0604020202090204"/>
+                <a:ea typeface="Arial" panose="020B0604020202090204"/>
+                <a:cs typeface="Arial" panose="020B0604020202090204"/>
               </a:rPr>
               <a:t>in preprocessing</a:t>
             </a:r>
+            <a:endParaRPr lang="en-US" sz="1580" b="1" dirty="0">
+              <a:solidFill>
+                <a:srgbClr val="FFFFFF"/>
+              </a:solidFill>
+              <a:latin typeface="Arial" panose="020B0604020202090204"/>
+              <a:ea typeface="Arial" panose="020B0604020202090204"/>
+              <a:cs typeface="Arial" panose="020B0604020202090204"/>
+            </a:endParaRPr>
           </a:p>
           <a:p>
             <a:pPr algn="l">
@@ -3119,12 +3481,20 @@
                 <a:solidFill>
                   <a:srgbClr val="C8C8C8"/>
                 </a:solidFill>
-                <a:latin typeface="Arial"/>
-                <a:ea typeface="Arial"/>
-                <a:cs typeface="Arial"/>
+                <a:latin typeface="Arial" panose="020B0604020202090204"/>
+                <a:ea typeface="Arial" panose="020B0604020202090204"/>
+                <a:cs typeface="Arial" panose="020B0604020202090204"/>
               </a:rPr>
               <a:t>Why it matters:</a:t>
             </a:r>
+            <a:endParaRPr lang="en-US" sz="1050" dirty="0">
+              <a:solidFill>
+                <a:srgbClr val="C8C8C8"/>
+              </a:solidFill>
+              <a:latin typeface="Arial" panose="020B0604020202090204"/>
+              <a:ea typeface="Arial" panose="020B0604020202090204"/>
+              <a:cs typeface="Arial" panose="020B0604020202090204"/>
+            </a:endParaRPr>
           </a:p>
           <a:p>
             <a:pPr algn="l">
@@ -3140,48 +3510,83 @@
                 <a:solidFill>
                   <a:srgbClr val="FFFFFF"/>
                 </a:solidFill>
-                <a:latin typeface="Arial"/>
-                <a:ea typeface="Arial"/>
-                <a:cs typeface="Arial"/>
+                <a:latin typeface="Arial" panose="020B0604020202090204"/>
+                <a:ea typeface="Arial" panose="020B0604020202090204"/>
+                <a:cs typeface="Arial" panose="020B0604020202090204"/>
               </a:rPr>
               <a:t>bodyID and trackingState are</a:t>
             </a:r>
-            <a:br/>
-            <a:r>
+            <a:br>
               <a:rPr lang="en-US" sz="1120" dirty="0">
                 <a:solidFill>
                   <a:srgbClr val="FFFFFF"/>
                 </a:solidFill>
-                <a:latin typeface="Arial"/>
-                <a:ea typeface="Arial"/>
-                <a:cs typeface="Arial"/>
+                <a:latin typeface="Arial" panose="020B0604020202090204"/>
+                <a:ea typeface="Arial" panose="020B0604020202090204"/>
+                <a:cs typeface="Arial" panose="020B0604020202090204"/>
+              </a:rPr>
+            </a:br>
+            <a:r>
+              <a:rPr lang="en-US" sz="1120" dirty="0">
+                <a:solidFill>
+                  <a:srgbClr val="FFFFFF"/>
+                </a:solidFill>
+                <a:latin typeface="Arial" panose="020B0604020202090204"/>
+                <a:ea typeface="Arial" panose="020B0604020202090204"/>
+                <a:cs typeface="Arial" panose="020B0604020202090204"/>
               </a:rPr>
               <a:t>dropped by CTR-GCN and pyskl.</a:t>
             </a:r>
-            <a:br/>
-            <a:r>
+            <a:br>
               <a:rPr lang="en-US" sz="1120" dirty="0">
                 <a:solidFill>
                   <a:srgbClr val="FFFFFF"/>
                 </a:solidFill>
-                <a:latin typeface="Arial"/>
-                <a:ea typeface="Arial"/>
-                <a:cs typeface="Arial"/>
+                <a:latin typeface="Arial" panose="020B0604020202090204"/>
+                <a:ea typeface="Arial" panose="020B0604020202090204"/>
+                <a:cs typeface="Arial" panose="020B0604020202090204"/>
+              </a:rPr>
+            </a:br>
+            <a:r>
+              <a:rPr lang="en-US" sz="1120" dirty="0">
+                <a:solidFill>
+                  <a:srgbClr val="FFFFFF"/>
+                </a:solidFill>
+                <a:latin typeface="Arial" panose="020B0604020202090204"/>
+                <a:ea typeface="Arial" panose="020B0604020202090204"/>
+                <a:cs typeface="Arial" panose="020B0604020202090204"/>
               </a:rPr>
               <a:t>Our plan: parse .skeleton</a:t>
             </a:r>
-            <a:br/>
-            <a:r>
+            <a:br>
               <a:rPr lang="en-US" sz="1120" dirty="0">
                 <a:solidFill>
                   <a:srgbClr val="FFFFFF"/>
                 </a:solidFill>
-                <a:latin typeface="Arial"/>
-                <a:ea typeface="Arial"/>
-                <a:cs typeface="Arial"/>
+                <a:latin typeface="Arial" panose="020B0604020202090204"/>
+                <a:ea typeface="Arial" panose="020B0604020202090204"/>
+                <a:cs typeface="Arial" panose="020B0604020202090204"/>
+              </a:rPr>
+            </a:br>
+            <a:r>
+              <a:rPr lang="en-US" sz="1120" dirty="0">
+                <a:solidFill>
+                  <a:srgbClr val="FFFFFF"/>
+                </a:solidFill>
+                <a:latin typeface="Arial" panose="020B0604020202090204"/>
+                <a:ea typeface="Arial" panose="020B0604020202090204"/>
+                <a:cs typeface="Arial" panose="020B0604020202090204"/>
               </a:rPr>
               <a:t>ourselves and keep both.</a:t>
             </a:r>
+            <a:endParaRPr lang="en-US" sz="1120" dirty="0">
+              <a:solidFill>
+                <a:srgbClr val="FFFFFF"/>
+              </a:solidFill>
+              <a:latin typeface="Arial" panose="020B0604020202090204"/>
+              <a:ea typeface="Arial" panose="020B0604020202090204"/>
+              <a:cs typeface="Arial" panose="020B0604020202090204"/>
+            </a:endParaRPr>
           </a:p>
         </p:txBody>
       </p:sp>
@@ -3216,12 +3621,20 @@
                 <a:solidFill>
                   <a:srgbClr val="FFFFFF"/>
                 </a:solidFill>
-                <a:latin typeface="Arial"/>
-                <a:ea typeface="Arial"/>
-                <a:cs typeface="Arial"/>
+                <a:latin typeface="Arial" panose="020B0604020202090204"/>
+                <a:ea typeface="Arial" panose="020B0604020202090204"/>
+                <a:cs typeface="Arial" panose="020B0604020202090204"/>
               </a:rPr>
               <a:t>{{SOURCE}}</a:t>
             </a:r>
+            <a:endParaRPr lang="en-US" sz="900" dirty="0">
+              <a:solidFill>
+                <a:srgbClr val="FFFFFF"/>
+              </a:solidFill>
+              <a:latin typeface="Arial" panose="020B0604020202090204"/>
+              <a:ea typeface="Arial" panose="020B0604020202090204"/>
+              <a:cs typeface="Arial" panose="020B0604020202090204"/>
+            </a:endParaRPr>
           </a:p>
         </p:txBody>
       </p:sp>
@@ -3256,12 +3669,20 @@
                 <a:solidFill>
                   <a:srgbClr val="FFFFFF"/>
                 </a:solidFill>
-                <a:latin typeface="Arial"/>
-                <a:ea typeface="Arial"/>
-                <a:cs typeface="Arial"/>
+                <a:latin typeface="Arial" panose="020B0604020202090204"/>
+                <a:ea typeface="Arial" panose="020B0604020202090204"/>
+                <a:cs typeface="Arial" panose="020B0604020202090204"/>
               </a:rPr>
               <a:t>{{PAGE_NUM}}</a:t>
             </a:r>
+            <a:endParaRPr lang="en-US" sz="900" dirty="0">
+              <a:solidFill>
+                <a:srgbClr val="FFFFFF"/>
+              </a:solidFill>
+              <a:latin typeface="Arial" panose="020B0604020202090204"/>
+              <a:ea typeface="Arial" panose="020B0604020202090204"/>
+              <a:cs typeface="Arial" panose="020B0604020202090204"/>
+            </a:endParaRPr>
           </a:p>
         </p:txBody>
       </p:sp>
@@ -3274,7 +3695,7 @@
           <p:nvPr/>
         </p:nvPicPr>
         <p:blipFill>
-          <a:blip r:embed="rId3"/>
+          <a:blip r:embed="rId2"/>
           <a:stretch>
             <a:fillRect/>
           </a:stretch>
@@ -3353,7 +3774,7 @@
           <p:nvPr/>
         </p:nvPicPr>
         <p:blipFill>
-          <a:blip r:embed="rId2"/>
+          <a:blip r:embed="rId1"/>
           <a:stretch>
             <a:fillRect/>
           </a:stretch>
@@ -3421,12 +3842,20 @@
                 <a:solidFill>
                   <a:srgbClr val="FFFFFF"/>
                 </a:solidFill>
-                <a:latin typeface="Arial"/>
-                <a:ea typeface="Arial"/>
-                <a:cs typeface="Arial"/>
+                <a:latin typeface="Arial" panose="020B0604020202090204"/>
+                <a:ea typeface="Arial" panose="020B0604020202090204"/>
+                <a:cs typeface="Arial" panose="020B0604020202090204"/>
               </a:rPr>
               <a:t>EE6008 · HUMAN POSE ANALYTICS</a:t>
             </a:r>
+            <a:endParaRPr lang="en-US" sz="980" dirty="0">
+              <a:solidFill>
+                <a:srgbClr val="FFFFFF"/>
+              </a:solidFill>
+              <a:latin typeface="Arial" panose="020B0604020202090204"/>
+              <a:ea typeface="Arial" panose="020B0604020202090204"/>
+              <a:cs typeface="Arial" panose="020B0604020202090204"/>
+            </a:endParaRPr>
           </a:p>
         </p:txBody>
       </p:sp>
@@ -3579,12 +4008,20 @@
                 <a:solidFill>
                   <a:srgbClr val="D71440"/>
                 </a:solidFill>
-                <a:latin typeface="Arial"/>
-                <a:ea typeface="Arial"/>
-                <a:cs typeface="Arial"/>
+                <a:latin typeface="Arial" panose="020B0604020202090204"/>
+                <a:ea typeface="Arial" panose="020B0604020202090204"/>
+                <a:cs typeface="Arial" panose="020B0604020202090204"/>
               </a:rPr>
               <a:t>ONE-LINE RESULT</a:t>
             </a:r>
+            <a:endParaRPr lang="en-US" sz="900" b="1" dirty="0">
+              <a:solidFill>
+                <a:srgbClr val="D71440"/>
+              </a:solidFill>
+              <a:latin typeface="Arial" panose="020B0604020202090204"/>
+              <a:ea typeface="Arial" panose="020B0604020202090204"/>
+              <a:cs typeface="Arial" panose="020B0604020202090204"/>
+            </a:endParaRPr>
           </a:p>
         </p:txBody>
       </p:sp>
@@ -3619,12 +4056,20 @@
                 <a:solidFill>
                   <a:srgbClr val="181C62"/>
                 </a:solidFill>
-                <a:latin typeface="Arial"/>
-                <a:ea typeface="Arial"/>
-                <a:cs typeface="Arial"/>
+                <a:latin typeface="Arial" panose="020B0604020202090204"/>
+                <a:ea typeface="Arial" panose="020B0604020202090204"/>
+                <a:cs typeface="Arial" panose="020B0604020202090204"/>
               </a:rPr>
               <a:t>EVIDENCE · BASELINE · CONTROL · METRIC</a:t>
             </a:r>
+            <a:endParaRPr lang="en-US" sz="980" b="1" dirty="0">
+              <a:solidFill>
+                <a:srgbClr val="181C62"/>
+              </a:solidFill>
+              <a:latin typeface="Arial" panose="020B0604020202090204"/>
+              <a:ea typeface="Arial" panose="020B0604020202090204"/>
+              <a:cs typeface="Arial" panose="020B0604020202090204"/>
+            </a:endParaRPr>
           </a:p>
         </p:txBody>
       </p:sp>
@@ -3659,12 +4104,20 @@
                 <a:solidFill>
                   <a:srgbClr val="FFFFFF"/>
                 </a:solidFill>
-                <a:latin typeface="Arial"/>
-                <a:ea typeface="Arial"/>
-                <a:cs typeface="Arial"/>
+                <a:latin typeface="Arial" panose="020B0604020202090204"/>
+                <a:ea typeface="Arial" panose="020B0604020202090204"/>
+                <a:cs typeface="Arial" panose="020B0604020202090204"/>
               </a:rPr>
               <a:t>KEY FINDINGS</a:t>
             </a:r>
+            <a:endParaRPr lang="en-US" sz="1050" b="1" dirty="0">
+              <a:solidFill>
+                <a:srgbClr val="FFFFFF"/>
+              </a:solidFill>
+              <a:latin typeface="Arial" panose="020B0604020202090204"/>
+              <a:ea typeface="Arial" panose="020B0604020202090204"/>
+              <a:cs typeface="Arial" panose="020B0604020202090204"/>
+            </a:endParaRPr>
           </a:p>
         </p:txBody>
       </p:sp>
@@ -3677,7 +4130,7 @@
         <p:spPr>
           <a:xfrm>
             <a:off x="501396" y="543878"/>
-            <a:ext cx="3922625" cy="498729"/>
+            <a:ext cx="4448810" cy="391795"/>
           </a:xfrm>
           <a:prstGeom prst="rect">
             <a:avLst/>
@@ -3695,16 +4148,24 @@
           <a:p>
             <a:pPr algn="l"/>
             <a:r>
-              <a:rPr lang="en-US" sz="2550" b="1" dirty="0">
+              <a:rPr lang="en-US" altLang="zh-CN" sz="2550" b="1" dirty="0">
                 <a:solidFill>
                   <a:srgbClr val="20243A"/>
                 </a:solidFill>
-                <a:latin typeface="Arial"/>
-                <a:ea typeface="Arial"/>
-                <a:cs typeface="Arial"/>
-              </a:rPr>
-              <a:t>Experimental Evidence</a:t>
-            </a:r>
+                <a:latin typeface="Arial" panose="020B0604020202090204"/>
+                <a:ea typeface="Arial" panose="020B0604020202090204"/>
+                <a:cs typeface="Arial" panose="020B0604020202090204"/>
+              </a:rPr>
+              <a:t>What the Raw File Still Holds</a:t>
+            </a:r>
+            <a:endParaRPr lang="en-US" altLang="zh-CN" sz="2550" b="1" dirty="0">
+              <a:solidFill>
+                <a:srgbClr val="20243A"/>
+              </a:solidFill>
+              <a:latin typeface="Arial" panose="020B0604020202090204"/>
+              <a:ea typeface="Arial" panose="020B0604020202090204"/>
+              <a:cs typeface="Arial" panose="020B0604020202090204"/>
+            </a:endParaRPr>
           </a:p>
         </p:txBody>
       </p:sp>
@@ -3716,8 +4177,8 @@
         </p:nvSpPr>
         <p:spPr>
           <a:xfrm>
-            <a:off x="734949" y="1639729"/>
-            <a:ext cx="2010001" cy="308039"/>
+            <a:off x="734949" y="1567729"/>
+            <a:ext cx="1769110" cy="430530"/>
           </a:xfrm>
           <a:prstGeom prst="rect">
             <a:avLst/>
@@ -3735,16 +4196,45 @@
           <a:p>
             <a:pPr algn="l"/>
             <a:r>
+              <a:rPr lang="en-US" sz="1400" b="1" dirty="0">
+                <a:solidFill>
+                  <a:srgbClr val="D71440"/>
+                </a:solidFill>
+                <a:latin typeface="Arial" panose="020B0604020202090204"/>
+                <a:ea typeface="Arial" panose="020B0604020202090204"/>
+                <a:cs typeface="Arial" panose="020B0604020202090204"/>
+              </a:rPr>
+              <a:t>Raw file vs.</a:t>
+            </a:r>
+            <a:br>
               <a:rPr lang="en-US" sz="1580" b="1" dirty="0">
                 <a:solidFill>
                   <a:srgbClr val="D71440"/>
                 </a:solidFill>
-                <a:latin typeface="Arial"/>
-                <a:ea typeface="Arial"/>
-                <a:cs typeface="Arial"/>
-              </a:rPr>
-              <a:t>{{KEY_MESSAGE}}</a:t>
-            </a:r>
+                <a:latin typeface="Arial" panose="020B0604020202090204"/>
+                <a:ea typeface="Arial" panose="020B0604020202090204"/>
+                <a:cs typeface="Arial" panose="020B0604020202090204"/>
+              </a:rPr>
+            </a:br>
+            <a:r>
+              <a:rPr lang="en-US" sz="1400" b="1" dirty="0">
+                <a:solidFill>
+                  <a:srgbClr val="D71440"/>
+                </a:solidFill>
+                <a:latin typeface="Arial" panose="020B0604020202090204"/>
+                <a:ea typeface="Arial" panose="020B0604020202090204"/>
+                <a:cs typeface="Arial" panose="020B0604020202090204"/>
+              </a:rPr>
+              <a:t>preprocessed output</a:t>
+            </a:r>
+            <a:endParaRPr lang="en-US" sz="1400" b="1" dirty="0">
+              <a:solidFill>
+                <a:srgbClr val="D71440"/>
+              </a:solidFill>
+              <a:latin typeface="Arial" panose="020B0604020202090204"/>
+              <a:ea typeface="Arial" panose="020B0604020202090204"/>
+              <a:cs typeface="Arial" panose="020B0604020202090204"/>
+            </a:endParaRPr>
           </a:p>
         </p:txBody>
       </p:sp>
@@ -3783,12 +4273,20 @@
                 <a:solidFill>
                   <a:srgbClr val="5E6478"/>
                 </a:solidFill>
-                <a:latin typeface="Arial"/>
-                <a:ea typeface="Arial"/>
-                <a:cs typeface="Arial"/>
-              </a:rPr>
-              <a:t>{{CONTENT_AREA}}</a:t>
-            </a:r>
+                <a:latin typeface="Arial" panose="020B0604020202090204"/>
+                <a:ea typeface="Arial" panose="020B0604020202090204"/>
+                <a:cs typeface="Arial" panose="020B0604020202090204"/>
+              </a:rPr>
+              <a:t>The .skeleton file carries far more than coordinates</a:t>
+            </a:r>
+            <a:endParaRPr lang="en-US" sz="1420" dirty="0">
+              <a:solidFill>
+                <a:srgbClr val="5E6478"/>
+              </a:solidFill>
+              <a:latin typeface="Arial" panose="020B0604020202090204"/>
+              <a:ea typeface="Arial" panose="020B0604020202090204"/>
+              <a:cs typeface="Arial" panose="020B0604020202090204"/>
+            </a:endParaRPr>
           </a:p>
           <a:p>
             <a:pPr algn="l">
@@ -3804,24 +4302,41 @@
                 <a:solidFill>
                   <a:srgbClr val="5E6478"/>
                 </a:solidFill>
-                <a:latin typeface="Arial"/>
-                <a:ea typeface="Arial"/>
-                <a:cs typeface="Arial"/>
-              </a:rPr>
-              <a:t>Insert one chart, table, confusion matrix, or controlled comparison.</a:t>
-            </a:r>
-            <a:br/>
-            <a:r>
+                <a:latin typeface="Arial" panose="020B0604020202090204"/>
+                <a:ea typeface="Arial" panose="020B0604020202090204"/>
+                <a:cs typeface="Arial" panose="020B0604020202090204"/>
+              </a:rPr>
+              <a:t>Per body: bodyID, trackingState, lean, hand state.  Per joint: 3D metres, depth-2D,</a:t>
+            </a:r>
+            <a:br>
               <a:rPr lang="en-US" sz="1050" dirty="0">
                 <a:solidFill>
                   <a:srgbClr val="5E6478"/>
                 </a:solidFill>
-                <a:latin typeface="Arial"/>
-                <a:ea typeface="Arial"/>
-                <a:cs typeface="Arial"/>
-              </a:rPr>
-              <a:t>Label the baseline, evaluation split, metric, and uncertainty.</a:t>
-            </a:r>
+                <a:latin typeface="Arial" panose="020B0604020202090204"/>
+                <a:ea typeface="Arial" panose="020B0604020202090204"/>
+                <a:cs typeface="Arial" panose="020B0604020202090204"/>
+              </a:rPr>
+            </a:br>
+            <a:r>
+              <a:rPr lang="en-US" sz="1050" dirty="0">
+                <a:solidFill>
+                  <a:srgbClr val="5E6478"/>
+                </a:solidFill>
+                <a:latin typeface="Arial" panose="020B0604020202090204"/>
+                <a:ea typeface="Arial" panose="020B0604020202090204"/>
+                <a:cs typeface="Arial" panose="020B0604020202090204"/>
+              </a:rPr>
+              <a:t>colour-2D, an orientation quaternion, and a per-joint reliability flag.</a:t>
+            </a:r>
+            <a:endParaRPr lang="en-US" sz="1050" dirty="0">
+              <a:solidFill>
+                <a:srgbClr val="5E6478"/>
+              </a:solidFill>
+              <a:latin typeface="Arial" panose="020B0604020202090204"/>
+              <a:ea typeface="Arial" panose="020B0604020202090204"/>
+              <a:cs typeface="Arial" panose="020B0604020202090204"/>
+            </a:endParaRPr>
           </a:p>
         </p:txBody>
       </p:sp>
@@ -3860,12 +4375,20 @@
                 <a:solidFill>
                   <a:srgbClr val="20243A"/>
                 </a:solidFill>
-                <a:latin typeface="Arial"/>
-                <a:ea typeface="Arial"/>
-                <a:cs typeface="Arial"/>
-              </a:rPr>
-              <a:t>{{FINDINGS}}</a:t>
-            </a:r>
+                <a:latin typeface="Arial" panose="020B0604020202090204"/>
+                <a:ea typeface="Arial" panose="020B0604020202090204"/>
+                <a:cs typeface="Arial" panose="020B0604020202090204"/>
+              </a:rPr>
+              <a:t>Two code-level issues</a:t>
+            </a:r>
+            <a:endParaRPr lang="en-US" sz="1500" dirty="0">
+              <a:solidFill>
+                <a:srgbClr val="20243A"/>
+              </a:solidFill>
+              <a:latin typeface="Arial" panose="020B0604020202090204"/>
+              <a:ea typeface="Arial" panose="020B0604020202090204"/>
+              <a:cs typeface="Arial" panose="020B0604020202090204"/>
+            </a:endParaRPr>
           </a:p>
           <a:p>
             <a:pPr algn="l">
@@ -3881,36 +4404,188 @@
                 <a:solidFill>
                   <a:srgbClr val="5E6478"/>
                 </a:solidFill>
-                <a:latin typeface="Arial"/>
-                <a:ea typeface="Arial"/>
-                <a:cs typeface="Arial"/>
-              </a:rPr>
-              <a:t>1 · What changed versus baseline?</a:t>
-            </a:r>
-            <a:br/>
-            <a:r>
+                <a:latin typeface="Arial" panose="020B0604020202090204"/>
+                <a:ea typeface="Arial" panose="020B0604020202090204"/>
+                <a:cs typeface="Arial" panose="020B0604020202090204"/>
+              </a:rPr>
+              <a:t>1 · CTR-GCN merges separate bodyIDs</a:t>
+            </a:r>
+            <a:br>
               <a:rPr lang="en-US" sz="1120" dirty="0">
                 <a:solidFill>
                   <a:srgbClr val="5E6478"/>
                 </a:solidFill>
-                <a:latin typeface="Arial"/>
-                <a:ea typeface="Arial"/>
-                <a:cs typeface="Arial"/>
-              </a:rPr>
-              <a:t>2 · Which class or case still fails?</a:t>
-            </a:r>
-            <a:br/>
+                <a:latin typeface="Arial" panose="020B0604020202090204"/>
+                <a:ea typeface="Arial" panose="020B0604020202090204"/>
+                <a:cs typeface="Arial" panose="020B0604020202090204"/>
+              </a:rPr>
+            </a:br>
             <a:r>
               <a:rPr lang="en-US" sz="1120" dirty="0">
                 <a:solidFill>
                   <a:srgbClr val="5E6478"/>
                 </a:solidFill>
-                <a:latin typeface="Arial"/>
-                <a:ea typeface="Arial"/>
-                <a:cs typeface="Arial"/>
-              </a:rPr>
-              <a:t>3 · What experiment comes next?</a:t>
-            </a:r>
+                <a:latin typeface="Arial" panose="020B0604020202090204"/>
+                <a:ea typeface="Arial" panose="020B0604020202090204"/>
+                <a:cs typeface="Arial" panose="020B0604020202090204"/>
+              </a:rPr>
+              <a:t>into one actor when their time spans</a:t>
+            </a:r>
+            <a:br>
+              <a:rPr lang="en-US" sz="1120" dirty="0">
+                <a:solidFill>
+                  <a:srgbClr val="5E6478"/>
+                </a:solidFill>
+                <a:latin typeface="Arial" panose="020B0604020202090204"/>
+                <a:ea typeface="Arial" panose="020B0604020202090204"/>
+                <a:cs typeface="Arial" panose="020B0604020202090204"/>
+              </a:rPr>
+            </a:br>
+            <a:r>
+              <a:rPr lang="en-US" sz="1120" dirty="0">
+                <a:solidFill>
+                  <a:srgbClr val="5E6478"/>
+                </a:solidFill>
+                <a:latin typeface="Arial" panose="020B0604020202090204"/>
+                <a:ea typeface="Arial" panose="020B0604020202090204"/>
+                <a:cs typeface="Arial" panose="020B0604020202090204"/>
+              </a:rPr>
+              <a:t>do not overlap. The IDs go to a log</a:t>
+            </a:r>
+            <a:br>
+              <a:rPr lang="en-US" sz="1120" dirty="0">
+                <a:solidFill>
+                  <a:srgbClr val="5E6478"/>
+                </a:solidFill>
+                <a:latin typeface="Arial" panose="020B0604020202090204"/>
+                <a:ea typeface="Arial" panose="020B0604020202090204"/>
+                <a:cs typeface="Arial" panose="020B0604020202090204"/>
+              </a:rPr>
+            </a:br>
+            <a:r>
+              <a:rPr lang="en-US" sz="1120" dirty="0">
+                <a:solidFill>
+                  <a:srgbClr val="5E6478"/>
+                </a:solidFill>
+                <a:latin typeface="Arial" panose="020B0604020202090204"/>
+                <a:ea typeface="Arial" panose="020B0604020202090204"/>
+                <a:cs typeface="Arial" panose="020B0604020202090204"/>
+              </a:rPr>
+              <a:t>file, never into the data.</a:t>
+            </a:r>
+            <a:br>
+              <a:rPr lang="en-US" sz="1120" dirty="0">
+                <a:solidFill>
+                  <a:srgbClr val="5E6478"/>
+                </a:solidFill>
+                <a:latin typeface="Arial" panose="020B0604020202090204"/>
+                <a:ea typeface="Arial" panose="020B0604020202090204"/>
+                <a:cs typeface="Arial" panose="020B0604020202090204"/>
+              </a:rPr>
+            </a:br>
+            <a:r>
+              <a:rPr lang="en-US" sz="1120" dirty="0">
+                <a:solidFill>
+                  <a:srgbClr val="5E6478"/>
+                </a:solidFill>
+                <a:latin typeface="Arial" panose="020B0604020202090204"/>
+                <a:ea typeface="Arial" panose="020B0604020202090204"/>
+                <a:cs typeface="Arial" panose="020B0604020202090204"/>
+              </a:rPr>
+              <a:t>2 · Its failure log parses only the last</a:t>
+            </a:r>
+            <a:br>
+              <a:rPr lang="en-US" sz="1120" dirty="0">
+                <a:solidFill>
+                  <a:srgbClr val="5E6478"/>
+                </a:solidFill>
+                <a:latin typeface="Arial" panose="020B0604020202090204"/>
+                <a:ea typeface="Arial" panose="020B0604020202090204"/>
+                <a:cs typeface="Arial" panose="020B0604020202090204"/>
+              </a:rPr>
+            </a:br>
+            <a:r>
+              <a:rPr lang="en-US" sz="1120" dirty="0">
+                <a:solidFill>
+                  <a:srgbClr val="5E6478"/>
+                </a:solidFill>
+                <a:latin typeface="Arial" panose="020B0604020202090204"/>
+                <a:ea typeface="Arial" panose="020B0604020202090204"/>
+                <a:cs typeface="Arial" panose="020B0604020202090204"/>
+              </a:rPr>
+              <a:t>two digits of the action ID, so the 15</a:t>
+            </a:r>
+            <a:br>
+              <a:rPr lang="en-US" sz="1120" dirty="0">
+                <a:solidFill>
+                  <a:srgbClr val="5E6478"/>
+                </a:solidFill>
+                <a:latin typeface="Arial" panose="020B0604020202090204"/>
+                <a:ea typeface="Arial" panose="020B0604020202090204"/>
+                <a:cs typeface="Arial" panose="020B0604020202090204"/>
+              </a:rPr>
+            </a:br>
+            <a:r>
+              <a:rPr lang="en-US" sz="1120" dirty="0">
+                <a:solidFill>
+                  <a:srgbClr val="5E6478"/>
+                </a:solidFill>
+                <a:latin typeface="Arial" panose="020B0604020202090204"/>
+                <a:ea typeface="Arial" panose="020B0604020202090204"/>
+                <a:cs typeface="Arial" panose="020B0604020202090204"/>
+              </a:rPr>
+              <a:t>classes A106–A120 are never checked.</a:t>
+            </a:r>
+            <a:br>
+              <a:rPr lang="en-US" sz="1120" dirty="0">
+                <a:solidFill>
+                  <a:srgbClr val="5E6478"/>
+                </a:solidFill>
+                <a:latin typeface="Arial" panose="020B0604020202090204"/>
+                <a:ea typeface="Arial" panose="020B0604020202090204"/>
+                <a:cs typeface="Arial" panose="020B0604020202090204"/>
+              </a:rPr>
+            </a:br>
+            <a:r>
+              <a:rPr lang="en-US" sz="1120" dirty="0">
+                <a:solidFill>
+                  <a:srgbClr val="5E6478"/>
+                </a:solidFill>
+                <a:latin typeface="Arial" panose="020B0604020202090204"/>
+                <a:ea typeface="Arial" panose="020B0604020202090204"/>
+                <a:cs typeface="Arial" panose="020B0604020202090204"/>
+              </a:rPr>
+              <a:t>3 · No official definition of the mutual</a:t>
+            </a:r>
+            <a:br>
+              <a:rPr lang="en-US" sz="1120" dirty="0">
+                <a:solidFill>
+                  <a:srgbClr val="5E6478"/>
+                </a:solidFill>
+                <a:latin typeface="Arial" panose="020B0604020202090204"/>
+                <a:ea typeface="Arial" panose="020B0604020202090204"/>
+                <a:cs typeface="Arial" panose="020B0604020202090204"/>
+              </a:rPr>
+            </a:br>
+            <a:r>
+              <a:rPr lang="en-US" sz="1120" dirty="0">
+                <a:solidFill>
+                  <a:srgbClr val="5E6478"/>
+                </a:solidFill>
+                <a:latin typeface="Arial" panose="020B0604020202090204"/>
+                <a:ea typeface="Arial" panose="020B0604020202090204"/>
+                <a:cs typeface="Arial" panose="020B0604020202090204"/>
+              </a:rPr>
+              <a:t>subset exists; each paper rolls its own.</a:t>
+            </a:r>
+            <a:endParaRPr lang="en-US" sz="1120" dirty="0">
+              <a:solidFill>
+                <a:srgbClr val="5E6478"/>
+              </a:solidFill>
+              <a:latin typeface="Arial" panose="020B0604020202090204"/>
+              <a:ea typeface="Arial" panose="020B0604020202090204"/>
+              <a:cs typeface="Arial" panose="020B0604020202090204"/>
+            </a:endParaRPr>
           </a:p>
         </p:txBody>
       </p:sp>
@@ -3945,12 +4620,20 @@
                 <a:solidFill>
                   <a:srgbClr val="FFFFFF"/>
                 </a:solidFill>
-                <a:latin typeface="Arial"/>
-                <a:ea typeface="Arial"/>
-                <a:cs typeface="Arial"/>
+                <a:latin typeface="Arial" panose="020B0604020202090204"/>
+                <a:ea typeface="Arial" panose="020B0604020202090204"/>
+                <a:cs typeface="Arial" panose="020B0604020202090204"/>
               </a:rPr>
               <a:t>{{SOURCE}}</a:t>
             </a:r>
+            <a:endParaRPr lang="en-US" sz="900" dirty="0">
+              <a:solidFill>
+                <a:srgbClr val="FFFFFF"/>
+              </a:solidFill>
+              <a:latin typeface="Arial" panose="020B0604020202090204"/>
+              <a:ea typeface="Arial" panose="020B0604020202090204"/>
+              <a:cs typeface="Arial" panose="020B0604020202090204"/>
+            </a:endParaRPr>
           </a:p>
         </p:txBody>
       </p:sp>
@@ -3985,15 +4668,47 @@
                 <a:solidFill>
                   <a:srgbClr val="FFFFFF"/>
                 </a:solidFill>
-                <a:latin typeface="Arial"/>
-                <a:ea typeface="Arial"/>
-                <a:cs typeface="Arial"/>
+                <a:latin typeface="Arial" panose="020B0604020202090204"/>
+                <a:ea typeface="Arial" panose="020B0604020202090204"/>
+                <a:cs typeface="Arial" panose="020B0604020202090204"/>
               </a:rPr>
               <a:t>{{PAGE_NUM}}</a:t>
             </a:r>
-          </a:p>
-        </p:txBody>
-      </p:sp>
+            <a:endParaRPr lang="en-US" sz="900" dirty="0">
+              <a:solidFill>
+                <a:srgbClr val="FFFFFF"/>
+              </a:solidFill>
+              <a:latin typeface="Arial" panose="020B0604020202090204"/>
+              <a:ea typeface="Arial" panose="020B0604020202090204"/>
+              <a:cs typeface="Arial" panose="020B0604020202090204"/>
+            </a:endParaRPr>
+          </a:p>
+        </p:txBody>
+      </p:sp>
+      <p:pic>
+        <p:nvPicPr>
+          <p:cNvPr id="901" name="WhatSurvivesFigure"/>
+          <p:cNvPicPr>
+            <a:picLocks noChangeAspect="1"/>
+          </p:cNvPicPr>
+          <p:nvPr/>
+        </p:nvPicPr>
+        <p:blipFill>
+          <a:blip r:embed="rId2"/>
+          <a:stretch>
+            <a:fillRect/>
+          </a:stretch>
+        </p:blipFill>
+        <p:spPr>
+          <a:xfrm>
+            <a:off x="774000" y="3816000"/>
+            <a:ext cx="6660000" cy="2159641"/>
+          </a:xfrm>
+          <a:prstGeom prst="rect">
+            <a:avLst/>
+          </a:prstGeom>
+        </p:spPr>
+      </p:pic>
     </p:spTree>
   </p:cSld>
   <p:clrMapOvr>
@@ -4058,7 +4773,7 @@
           <p:nvPr/>
         </p:nvPicPr>
         <p:blipFill>
-          <a:blip r:embed="rId2"/>
+          <a:blip r:embed="rId1"/>
           <a:stretch>
             <a:fillRect/>
           </a:stretch>
@@ -4126,12 +4841,20 @@
                 <a:solidFill>
                   <a:srgbClr val="FFFFFF"/>
                 </a:solidFill>
-                <a:latin typeface="Arial"/>
-                <a:ea typeface="Arial"/>
-                <a:cs typeface="Arial"/>
+                <a:latin typeface="Arial" panose="020B0604020202090204"/>
+                <a:ea typeface="Arial" panose="020B0604020202090204"/>
+                <a:cs typeface="Arial" panose="020B0604020202090204"/>
               </a:rPr>
               <a:t>EE6008 · HUMAN POSE ANALYTICS</a:t>
             </a:r>
+            <a:endParaRPr lang="en-US" sz="980" dirty="0">
+              <a:solidFill>
+                <a:srgbClr val="FFFFFF"/>
+              </a:solidFill>
+              <a:latin typeface="Arial" panose="020B0604020202090204"/>
+              <a:ea typeface="Arial" panose="020B0604020202090204"/>
+              <a:cs typeface="Arial" panose="020B0604020202090204"/>
+            </a:endParaRPr>
           </a:p>
         </p:txBody>
       </p:sp>
@@ -4330,12 +5053,20 @@
                 <a:solidFill>
                   <a:srgbClr val="D71440"/>
                 </a:solidFill>
-                <a:latin typeface="Arial"/>
-                <a:ea typeface="Arial"/>
-                <a:cs typeface="Arial"/>
+                <a:latin typeface="Arial" panose="020B0604020202090204"/>
+                <a:ea typeface="Arial" panose="020B0604020202090204"/>
+                <a:cs typeface="Arial" panose="020B0604020202090204"/>
               </a:rPr>
               <a:t>RISK / BLOCKER</a:t>
             </a:r>
+            <a:endParaRPr lang="en-US" sz="1050" b="1" dirty="0">
+              <a:solidFill>
+                <a:srgbClr val="D71440"/>
+              </a:solidFill>
+              <a:latin typeface="Arial" panose="020B0604020202090204"/>
+              <a:ea typeface="Arial" panose="020B0604020202090204"/>
+              <a:cs typeface="Arial" panose="020B0604020202090204"/>
+            </a:endParaRPr>
           </a:p>
         </p:txBody>
       </p:sp>
@@ -4370,12 +5101,20 @@
                 <a:solidFill>
                   <a:srgbClr val="D71440"/>
                 </a:solidFill>
-                <a:latin typeface="Arial"/>
-                <a:ea typeface="Arial"/>
-                <a:cs typeface="Arial"/>
+                <a:latin typeface="Arial" panose="020B0604020202090204"/>
+                <a:ea typeface="Arial" panose="020B0604020202090204"/>
+                <a:cs typeface="Arial" panose="020B0604020202090204"/>
               </a:rPr>
               <a:t>IMPACT ON SCOPE, EVIDENCE, OR TIMELINE</a:t>
             </a:r>
+            <a:endParaRPr lang="en-US" sz="1050" b="1" dirty="0">
+              <a:solidFill>
+                <a:srgbClr val="D71440"/>
+              </a:solidFill>
+              <a:latin typeface="Arial" panose="020B0604020202090204"/>
+              <a:ea typeface="Arial" panose="020B0604020202090204"/>
+              <a:cs typeface="Arial" panose="020B0604020202090204"/>
+            </a:endParaRPr>
           </a:p>
         </p:txBody>
       </p:sp>
@@ -4410,12 +5149,20 @@
                 <a:solidFill>
                   <a:srgbClr val="181C62"/>
                 </a:solidFill>
-                <a:latin typeface="Arial"/>
-                <a:ea typeface="Arial"/>
-                <a:cs typeface="Arial"/>
+                <a:latin typeface="Arial" panose="020B0604020202090204"/>
+                <a:ea typeface="Arial" panose="020B0604020202090204"/>
+                <a:cs typeface="Arial" panose="020B0604020202090204"/>
               </a:rPr>
               <a:t>MITIGATION / OWNER / CHECK DATE</a:t>
             </a:r>
+            <a:endParaRPr lang="en-US" sz="1050" b="1" dirty="0">
+              <a:solidFill>
+                <a:srgbClr val="181C62"/>
+              </a:solidFill>
+              <a:latin typeface="Arial" panose="020B0604020202090204"/>
+              <a:ea typeface="Arial" panose="020B0604020202090204"/>
+              <a:cs typeface="Arial" panose="020B0604020202090204"/>
+            </a:endParaRPr>
           </a:p>
         </p:txBody>
       </p:sp>
@@ -4450,12 +5197,20 @@
                 <a:solidFill>
                   <a:srgbClr val="FFFFFF"/>
                 </a:solidFill>
-                <a:latin typeface="Arial"/>
-                <a:ea typeface="Arial"/>
-                <a:cs typeface="Arial"/>
+                <a:latin typeface="Arial" panose="020B0604020202090204"/>
+                <a:ea typeface="Arial" panose="020B0604020202090204"/>
+                <a:cs typeface="Arial" panose="020B0604020202090204"/>
               </a:rPr>
               <a:t>DECISION OR SUPPORT NEEDED</a:t>
             </a:r>
+            <a:endParaRPr lang="en-US" sz="1050" b="1" dirty="0">
+              <a:solidFill>
+                <a:srgbClr val="FFFFFF"/>
+              </a:solidFill>
+              <a:latin typeface="Arial" panose="020B0604020202090204"/>
+              <a:ea typeface="Arial" panose="020B0604020202090204"/>
+              <a:cs typeface="Arial" panose="020B0604020202090204"/>
+            </a:endParaRPr>
           </a:p>
         </p:txBody>
       </p:sp>
@@ -4490,12 +5245,20 @@
                 <a:solidFill>
                   <a:srgbClr val="20243A"/>
                 </a:solidFill>
-                <a:latin typeface="Arial"/>
-                <a:ea typeface="Arial"/>
-                <a:cs typeface="Arial"/>
+                <a:latin typeface="Arial" panose="020B0604020202090204"/>
+                <a:ea typeface="Arial" panose="020B0604020202090204"/>
+                <a:cs typeface="Arial" panose="020B0604020202090204"/>
               </a:rPr>
               <a:t>Risks &amp; Decisions</a:t>
             </a:r>
+            <a:endParaRPr lang="en-US" sz="2550" b="1" dirty="0">
+              <a:solidFill>
+                <a:srgbClr val="20243A"/>
+              </a:solidFill>
+              <a:latin typeface="Arial" panose="020B0604020202090204"/>
+              <a:ea typeface="Arial" panose="020B0604020202090204"/>
+              <a:cs typeface="Arial" panose="020B0604020202090204"/>
+            </a:endParaRPr>
           </a:p>
         </p:txBody>
       </p:sp>
@@ -4534,12 +5297,20 @@
                 <a:solidFill>
                   <a:srgbClr val="D71440"/>
                 </a:solidFill>
-                <a:latin typeface="Arial"/>
-                <a:ea typeface="Arial"/>
-                <a:cs typeface="Arial"/>
+                <a:latin typeface="Arial" panose="020B0604020202090204"/>
+                <a:ea typeface="Arial" panose="020B0604020202090204"/>
+                <a:cs typeface="Arial" panose="020B0604020202090204"/>
               </a:rPr>
               <a:t>{{RISKS}}</a:t>
             </a:r>
+            <a:endParaRPr lang="en-US" sz="1580" b="1" dirty="0">
+              <a:solidFill>
+                <a:srgbClr val="D71440"/>
+              </a:solidFill>
+              <a:latin typeface="Arial" panose="020B0604020202090204"/>
+              <a:ea typeface="Arial" panose="020B0604020202090204"/>
+              <a:cs typeface="Arial" panose="020B0604020202090204"/>
+            </a:endParaRPr>
           </a:p>
           <a:p>
             <a:pPr algn="l">
@@ -4552,12 +5323,20 @@
                 <a:solidFill>
                   <a:srgbClr val="5E6478"/>
                 </a:solidFill>
-                <a:latin typeface="Arial"/>
-                <a:ea typeface="Arial"/>
-                <a:cs typeface="Arial"/>
+                <a:latin typeface="Arial" panose="020B0604020202090204"/>
+                <a:ea typeface="Arial" panose="020B0604020202090204"/>
+                <a:cs typeface="Arial" panose="020B0604020202090204"/>
               </a:rPr>
               <a:t>Describe the failure mode, trigger, and evidence.</a:t>
             </a:r>
+            <a:endParaRPr lang="en-US" sz="1050" dirty="0">
+              <a:solidFill>
+                <a:srgbClr val="5E6478"/>
+              </a:solidFill>
+              <a:latin typeface="Arial" panose="020B0604020202090204"/>
+              <a:ea typeface="Arial" panose="020B0604020202090204"/>
+              <a:cs typeface="Arial" panose="020B0604020202090204"/>
+            </a:endParaRPr>
           </a:p>
         </p:txBody>
       </p:sp>
@@ -4596,12 +5375,20 @@
                 <a:solidFill>
                   <a:srgbClr val="20243A"/>
                 </a:solidFill>
-                <a:latin typeface="Arial"/>
-                <a:ea typeface="Arial"/>
-                <a:cs typeface="Arial"/>
+                <a:latin typeface="Arial" panose="020B0604020202090204"/>
+                <a:ea typeface="Arial" panose="020B0604020202090204"/>
+                <a:cs typeface="Arial" panose="020B0604020202090204"/>
               </a:rPr>
               <a:t>{{IMPACT}}</a:t>
             </a:r>
+            <a:endParaRPr lang="en-US" sz="1580" dirty="0">
+              <a:solidFill>
+                <a:srgbClr val="20243A"/>
+              </a:solidFill>
+              <a:latin typeface="Arial" panose="020B0604020202090204"/>
+              <a:ea typeface="Arial" panose="020B0604020202090204"/>
+              <a:cs typeface="Arial" panose="020B0604020202090204"/>
+            </a:endParaRPr>
           </a:p>
           <a:p>
             <a:pPr algn="l">
@@ -4614,12 +5401,20 @@
                 <a:solidFill>
                   <a:srgbClr val="5E6478"/>
                 </a:solidFill>
-                <a:latin typeface="Arial"/>
-                <a:ea typeface="Arial"/>
-                <a:cs typeface="Arial"/>
+                <a:latin typeface="Arial" panose="020B0604020202090204"/>
+                <a:ea typeface="Arial" panose="020B0604020202090204"/>
+                <a:cs typeface="Arial" panose="020B0604020202090204"/>
               </a:rPr>
               <a:t>Quantify delay, compute cost, metric risk, or lost scope.</a:t>
             </a:r>
+            <a:endParaRPr lang="en-US" sz="1050" dirty="0">
+              <a:solidFill>
+                <a:srgbClr val="5E6478"/>
+              </a:solidFill>
+              <a:latin typeface="Arial" panose="020B0604020202090204"/>
+              <a:ea typeface="Arial" panose="020B0604020202090204"/>
+              <a:cs typeface="Arial" panose="020B0604020202090204"/>
+            </a:endParaRPr>
           </a:p>
         </p:txBody>
       </p:sp>
@@ -4658,12 +5453,20 @@
                 <a:solidFill>
                   <a:srgbClr val="181C62"/>
                 </a:solidFill>
-                <a:latin typeface="Arial"/>
-                <a:ea typeface="Arial"/>
-                <a:cs typeface="Arial"/>
+                <a:latin typeface="Arial" panose="020B0604020202090204"/>
+                <a:ea typeface="Arial" panose="020B0604020202090204"/>
+                <a:cs typeface="Arial" panose="020B0604020202090204"/>
               </a:rPr>
               <a:t>{{MITIGATION}}</a:t>
             </a:r>
+            <a:endParaRPr lang="en-US" sz="1580" dirty="0">
+              <a:solidFill>
+                <a:srgbClr val="181C62"/>
+              </a:solidFill>
+              <a:latin typeface="Arial" panose="020B0604020202090204"/>
+              <a:ea typeface="Arial" panose="020B0604020202090204"/>
+              <a:cs typeface="Arial" panose="020B0604020202090204"/>
+            </a:endParaRPr>
           </a:p>
           <a:p>
             <a:pPr algn="l">
@@ -4676,12 +5479,20 @@
                 <a:solidFill>
                   <a:srgbClr val="5E6478"/>
                 </a:solidFill>
-                <a:latin typeface="Arial"/>
-                <a:ea typeface="Arial"/>
-                <a:cs typeface="Arial"/>
+                <a:latin typeface="Arial" panose="020B0604020202090204"/>
+                <a:ea typeface="Arial" panose="020B0604020202090204"/>
+                <a:cs typeface="Arial" panose="020B0604020202090204"/>
               </a:rPr>
               <a:t>Owner: … | Check date: … | Fallback: …</a:t>
             </a:r>
+            <a:endParaRPr lang="en-US" sz="1050" dirty="0">
+              <a:solidFill>
+                <a:srgbClr val="5E6478"/>
+              </a:solidFill>
+              <a:latin typeface="Arial" panose="020B0604020202090204"/>
+              <a:ea typeface="Arial" panose="020B0604020202090204"/>
+              <a:cs typeface="Arial" panose="020B0604020202090204"/>
+            </a:endParaRPr>
           </a:p>
         </p:txBody>
       </p:sp>
@@ -4720,12 +5531,20 @@
                 <a:solidFill>
                   <a:srgbClr val="FFFFFF"/>
                 </a:solidFill>
-                <a:latin typeface="Arial"/>
-                <a:ea typeface="Arial"/>
-                <a:cs typeface="Arial"/>
+                <a:latin typeface="Arial" panose="020B0604020202090204"/>
+                <a:ea typeface="Arial" panose="020B0604020202090204"/>
+                <a:cs typeface="Arial" panose="020B0604020202090204"/>
               </a:rPr>
               <a:t>{{DECISION_NEEDED}}</a:t>
             </a:r>
+            <a:endParaRPr lang="en-US" sz="1580" b="1" dirty="0">
+              <a:solidFill>
+                <a:srgbClr val="FFFFFF"/>
+              </a:solidFill>
+              <a:latin typeface="Arial" panose="020B0604020202090204"/>
+              <a:ea typeface="Arial" panose="020B0604020202090204"/>
+              <a:cs typeface="Arial" panose="020B0604020202090204"/>
+            </a:endParaRPr>
           </a:p>
           <a:p>
             <a:pPr algn="l">
@@ -4738,12 +5557,20 @@
                 <a:solidFill>
                   <a:srgbClr val="C8C8C8"/>
                 </a:solidFill>
-                <a:latin typeface="Arial"/>
-                <a:ea typeface="Arial"/>
-                <a:cs typeface="Arial"/>
+                <a:latin typeface="Arial" panose="020B0604020202090204"/>
+                <a:ea typeface="Arial" panose="020B0604020202090204"/>
+                <a:cs typeface="Arial" panose="020B0604020202090204"/>
               </a:rPr>
               <a:t>State the choice, approver, and latest useful date.</a:t>
             </a:r>
+            <a:endParaRPr lang="en-US" sz="1050" dirty="0">
+              <a:solidFill>
+                <a:srgbClr val="C8C8C8"/>
+              </a:solidFill>
+              <a:latin typeface="Arial" panose="020B0604020202090204"/>
+              <a:ea typeface="Arial" panose="020B0604020202090204"/>
+              <a:cs typeface="Arial" panose="020B0604020202090204"/>
+            </a:endParaRPr>
           </a:p>
         </p:txBody>
       </p:sp>
@@ -4778,12 +5605,20 @@
                 <a:solidFill>
                   <a:srgbClr val="FFFFFF"/>
                 </a:solidFill>
-                <a:latin typeface="Arial"/>
-                <a:ea typeface="Arial"/>
-                <a:cs typeface="Arial"/>
+                <a:latin typeface="Arial" panose="020B0604020202090204"/>
+                <a:ea typeface="Arial" panose="020B0604020202090204"/>
+                <a:cs typeface="Arial" panose="020B0604020202090204"/>
               </a:rPr>
               <a:t>{{PAGE_NUM}}</a:t>
             </a:r>
+            <a:endParaRPr lang="en-US" sz="900" dirty="0">
+              <a:solidFill>
+                <a:srgbClr val="FFFFFF"/>
+              </a:solidFill>
+              <a:latin typeface="Arial" panose="020B0604020202090204"/>
+              <a:ea typeface="Arial" panose="020B0604020202090204"/>
+              <a:cs typeface="Arial" panose="020B0604020202090204"/>
+            </a:endParaRPr>
           </a:p>
         </p:txBody>
       </p:sp>
@@ -4851,7 +5686,7 @@
           <p:nvPr/>
         </p:nvPicPr>
         <p:blipFill>
-          <a:blip r:embed="rId2"/>
+          <a:blip r:embed="rId1"/>
           <a:stretch>
             <a:fillRect/>
           </a:stretch>
@@ -4919,12 +5754,20 @@
                 <a:solidFill>
                   <a:srgbClr val="FFFFFF"/>
                 </a:solidFill>
-                <a:latin typeface="Arial"/>
-                <a:ea typeface="Arial"/>
-                <a:cs typeface="Arial"/>
+                <a:latin typeface="Arial" panose="020B0604020202090204"/>
+                <a:ea typeface="Arial" panose="020B0604020202090204"/>
+                <a:cs typeface="Arial" panose="020B0604020202090204"/>
               </a:rPr>
               <a:t>EE6008 · HUMAN POSE ANALYTICS</a:t>
             </a:r>
+            <a:endParaRPr lang="en-US" sz="980" dirty="0">
+              <a:solidFill>
+                <a:srgbClr val="FFFFFF"/>
+              </a:solidFill>
+              <a:latin typeface="Arial" panose="020B0604020202090204"/>
+              <a:ea typeface="Arial" panose="020B0604020202090204"/>
+              <a:cs typeface="Arial" panose="020B0604020202090204"/>
+            </a:endParaRPr>
           </a:p>
         </p:txBody>
       </p:sp>
@@ -5179,12 +6022,20 @@
                 <a:solidFill>
                   <a:srgbClr val="FFFFFF"/>
                 </a:solidFill>
-                <a:latin typeface="Arial"/>
-                <a:ea typeface="Arial"/>
-                <a:cs typeface="Arial"/>
+                <a:latin typeface="Arial" panose="020B0604020202090204"/>
+                <a:ea typeface="Arial" panose="020B0604020202090204"/>
+                <a:cs typeface="Arial" panose="020B0604020202090204"/>
               </a:rPr>
               <a:t>1</a:t>
             </a:r>
+            <a:endParaRPr lang="en-US" sz="1350" b="1" dirty="0">
+              <a:solidFill>
+                <a:srgbClr val="FFFFFF"/>
+              </a:solidFill>
+              <a:latin typeface="Arial" panose="020B0604020202090204"/>
+              <a:ea typeface="Arial" panose="020B0604020202090204"/>
+              <a:cs typeface="Arial" panose="020B0604020202090204"/>
+            </a:endParaRPr>
           </a:p>
         </p:txBody>
       </p:sp>
@@ -5219,12 +6070,20 @@
                 <a:solidFill>
                   <a:srgbClr val="FFFFFF"/>
                 </a:solidFill>
-                <a:latin typeface="Arial"/>
-                <a:ea typeface="Arial"/>
-                <a:cs typeface="Arial"/>
+                <a:latin typeface="Arial" panose="020B0604020202090204"/>
+                <a:ea typeface="Arial" panose="020B0604020202090204"/>
+                <a:cs typeface="Arial" panose="020B0604020202090204"/>
               </a:rPr>
               <a:t>2</a:t>
             </a:r>
+            <a:endParaRPr lang="en-US" sz="1350" b="1" dirty="0">
+              <a:solidFill>
+                <a:srgbClr val="FFFFFF"/>
+              </a:solidFill>
+              <a:latin typeface="Arial" panose="020B0604020202090204"/>
+              <a:ea typeface="Arial" panose="020B0604020202090204"/>
+              <a:cs typeface="Arial" panose="020B0604020202090204"/>
+            </a:endParaRPr>
           </a:p>
         </p:txBody>
       </p:sp>
@@ -5259,12 +6118,20 @@
                 <a:solidFill>
                   <a:srgbClr val="FFFFFF"/>
                 </a:solidFill>
-                <a:latin typeface="Arial"/>
-                <a:ea typeface="Arial"/>
-                <a:cs typeface="Arial"/>
+                <a:latin typeface="Arial" panose="020B0604020202090204"/>
+                <a:ea typeface="Arial" panose="020B0604020202090204"/>
+                <a:cs typeface="Arial" panose="020B0604020202090204"/>
               </a:rPr>
               <a:t>3</a:t>
             </a:r>
+            <a:endParaRPr lang="en-US" sz="1350" b="1" dirty="0">
+              <a:solidFill>
+                <a:srgbClr val="FFFFFF"/>
+              </a:solidFill>
+              <a:latin typeface="Arial" panose="020B0604020202090204"/>
+              <a:ea typeface="Arial" panose="020B0604020202090204"/>
+              <a:cs typeface="Arial" panose="020B0604020202090204"/>
+            </a:endParaRPr>
           </a:p>
         </p:txBody>
       </p:sp>
@@ -5299,12 +6166,20 @@
                 <a:solidFill>
                   <a:srgbClr val="D71440"/>
                 </a:solidFill>
-                <a:latin typeface="Arial"/>
-                <a:ea typeface="Arial"/>
-                <a:cs typeface="Arial"/>
+                <a:latin typeface="Arial" panose="020B0604020202090204"/>
+                <a:ea typeface="Arial" panose="020B0604020202090204"/>
+                <a:cs typeface="Arial" panose="020B0604020202090204"/>
               </a:rPr>
               <a:t>DELIVERABLE 1 · BUILD</a:t>
             </a:r>
+            <a:endParaRPr lang="en-US" sz="980" b="1" dirty="0">
+              <a:solidFill>
+                <a:srgbClr val="D71440"/>
+              </a:solidFill>
+              <a:latin typeface="Arial" panose="020B0604020202090204"/>
+              <a:ea typeface="Arial" panose="020B0604020202090204"/>
+              <a:cs typeface="Arial" panose="020B0604020202090204"/>
+            </a:endParaRPr>
           </a:p>
         </p:txBody>
       </p:sp>
@@ -5339,12 +6214,20 @@
                 <a:solidFill>
                   <a:srgbClr val="181C62"/>
                 </a:solidFill>
-                <a:latin typeface="Arial"/>
-                <a:ea typeface="Arial"/>
-                <a:cs typeface="Arial"/>
+                <a:latin typeface="Arial" panose="020B0604020202090204"/>
+                <a:ea typeface="Arial" panose="020B0604020202090204"/>
+                <a:cs typeface="Arial" panose="020B0604020202090204"/>
               </a:rPr>
               <a:t>DELIVERABLE 2 · VALIDATE</a:t>
             </a:r>
+            <a:endParaRPr lang="en-US" sz="980" b="1" dirty="0">
+              <a:solidFill>
+                <a:srgbClr val="181C62"/>
+              </a:solidFill>
+              <a:latin typeface="Arial" panose="020B0604020202090204"/>
+              <a:ea typeface="Arial" panose="020B0604020202090204"/>
+              <a:cs typeface="Arial" panose="020B0604020202090204"/>
+            </a:endParaRPr>
           </a:p>
         </p:txBody>
       </p:sp>
@@ -5379,12 +6262,20 @@
                 <a:solidFill>
                   <a:srgbClr val="D71440"/>
                 </a:solidFill>
-                <a:latin typeface="Arial"/>
-                <a:ea typeface="Arial"/>
-                <a:cs typeface="Arial"/>
+                <a:latin typeface="Arial" panose="020B0604020202090204"/>
+                <a:ea typeface="Arial" panose="020B0604020202090204"/>
+                <a:cs typeface="Arial" panose="020B0604020202090204"/>
               </a:rPr>
               <a:t>DELIVERABLE 3 · DOCUMENT</a:t>
             </a:r>
+            <a:endParaRPr lang="en-US" sz="980" b="1" dirty="0">
+              <a:solidFill>
+                <a:srgbClr val="D71440"/>
+              </a:solidFill>
+              <a:latin typeface="Arial" panose="020B0604020202090204"/>
+              <a:ea typeface="Arial" panose="020B0604020202090204"/>
+              <a:cs typeface="Arial" panose="020B0604020202090204"/>
+            </a:endParaRPr>
           </a:p>
         </p:txBody>
       </p:sp>
@@ -5419,12 +6310,20 @@
                 <a:solidFill>
                   <a:srgbClr val="FFFFFF"/>
                 </a:solidFill>
-                <a:latin typeface="Arial"/>
-                <a:ea typeface="Arial"/>
-                <a:cs typeface="Arial"/>
+                <a:latin typeface="Arial" panose="020B0604020202090204"/>
+                <a:ea typeface="Arial" panose="020B0604020202090204"/>
+                <a:cs typeface="Arial" panose="020B0604020202090204"/>
               </a:rPr>
               <a:t>OWNER · DUE DATE · SUCCESS CHECK</a:t>
             </a:r>
+            <a:endParaRPr lang="en-US" sz="1050" b="1" dirty="0">
+              <a:solidFill>
+                <a:srgbClr val="FFFFFF"/>
+              </a:solidFill>
+              <a:latin typeface="Arial" panose="020B0604020202090204"/>
+              <a:ea typeface="Arial" panose="020B0604020202090204"/>
+              <a:cs typeface="Arial" panose="020B0604020202090204"/>
+            </a:endParaRPr>
           </a:p>
         </p:txBody>
       </p:sp>
@@ -5459,12 +6358,20 @@
                 <a:solidFill>
                   <a:srgbClr val="20243A"/>
                 </a:solidFill>
-                <a:latin typeface="Arial"/>
-                <a:ea typeface="Arial"/>
-                <a:cs typeface="Arial"/>
+                <a:latin typeface="Arial" panose="020B0604020202090204"/>
+                <a:ea typeface="Arial" panose="020B0604020202090204"/>
+                <a:cs typeface="Arial" panose="020B0604020202090204"/>
               </a:rPr>
               <a:t>Next-Week Commitments</a:t>
             </a:r>
+            <a:endParaRPr lang="en-US" sz="2550" b="1" dirty="0">
+              <a:solidFill>
+                <a:srgbClr val="20243A"/>
+              </a:solidFill>
+              <a:latin typeface="Arial" panose="020B0604020202090204"/>
+              <a:ea typeface="Arial" panose="020B0604020202090204"/>
+              <a:cs typeface="Arial" panose="020B0604020202090204"/>
+            </a:endParaRPr>
           </a:p>
         </p:txBody>
       </p:sp>
@@ -5503,12 +6410,20 @@
                 <a:solidFill>
                   <a:srgbClr val="20243A"/>
                 </a:solidFill>
-                <a:latin typeface="Arial"/>
-                <a:ea typeface="Arial"/>
-                <a:cs typeface="Arial"/>
+                <a:latin typeface="Arial" panose="020B0604020202090204"/>
+                <a:ea typeface="Arial" panose="020B0604020202090204"/>
+                <a:cs typeface="Arial" panose="020B0604020202090204"/>
               </a:rPr>
               <a:t>{{NEXT_ACTION_1}}</a:t>
             </a:r>
+            <a:endParaRPr lang="en-US" sz="1580" b="1" dirty="0">
+              <a:solidFill>
+                <a:srgbClr val="20243A"/>
+              </a:solidFill>
+              <a:latin typeface="Arial" panose="020B0604020202090204"/>
+              <a:ea typeface="Arial" panose="020B0604020202090204"/>
+              <a:cs typeface="Arial" panose="020B0604020202090204"/>
+            </a:endParaRPr>
           </a:p>
           <a:p>
             <a:pPr algn="l">
@@ -5521,12 +6436,20 @@
                 <a:solidFill>
                   <a:srgbClr val="5E6478"/>
                 </a:solidFill>
-                <a:latin typeface="Arial"/>
-                <a:ea typeface="Arial"/>
-                <a:cs typeface="Arial"/>
+                <a:latin typeface="Arial" panose="020B0604020202090204"/>
+                <a:ea typeface="Arial" panose="020B0604020202090204"/>
+                <a:cs typeface="Arial" panose="020B0604020202090204"/>
               </a:rPr>
               <a:t>Output: code, dataset, or runnable module.</a:t>
             </a:r>
+            <a:endParaRPr lang="en-US" sz="1050" dirty="0">
+              <a:solidFill>
+                <a:srgbClr val="5E6478"/>
+              </a:solidFill>
+              <a:latin typeface="Arial" panose="020B0604020202090204"/>
+              <a:ea typeface="Arial" panose="020B0604020202090204"/>
+              <a:cs typeface="Arial" panose="020B0604020202090204"/>
+            </a:endParaRPr>
           </a:p>
         </p:txBody>
       </p:sp>
@@ -5565,12 +6488,20 @@
                 <a:solidFill>
                   <a:srgbClr val="20243A"/>
                 </a:solidFill>
-                <a:latin typeface="Arial"/>
-                <a:ea typeface="Arial"/>
-                <a:cs typeface="Arial"/>
+                <a:latin typeface="Arial" panose="020B0604020202090204"/>
+                <a:ea typeface="Arial" panose="020B0604020202090204"/>
+                <a:cs typeface="Arial" panose="020B0604020202090204"/>
               </a:rPr>
               <a:t>{{NEXT_ACTION_2}}</a:t>
             </a:r>
+            <a:endParaRPr lang="en-US" sz="1580" b="1" dirty="0">
+              <a:solidFill>
+                <a:srgbClr val="20243A"/>
+              </a:solidFill>
+              <a:latin typeface="Arial" panose="020B0604020202090204"/>
+              <a:ea typeface="Arial" panose="020B0604020202090204"/>
+              <a:cs typeface="Arial" panose="020B0604020202090204"/>
+            </a:endParaRPr>
           </a:p>
           <a:p>
             <a:pPr algn="l">
@@ -5583,12 +6514,20 @@
                 <a:solidFill>
                   <a:srgbClr val="5E6478"/>
                 </a:solidFill>
-                <a:latin typeface="Arial"/>
-                <a:ea typeface="Arial"/>
-                <a:cs typeface="Arial"/>
+                <a:latin typeface="Arial" panose="020B0604020202090204"/>
+                <a:ea typeface="Arial" panose="020B0604020202090204"/>
+                <a:cs typeface="Arial" panose="020B0604020202090204"/>
               </a:rPr>
               <a:t>Output: metric table, control, or ablation result.</a:t>
             </a:r>
+            <a:endParaRPr lang="en-US" sz="1050" dirty="0">
+              <a:solidFill>
+                <a:srgbClr val="5E6478"/>
+              </a:solidFill>
+              <a:latin typeface="Arial" panose="020B0604020202090204"/>
+              <a:ea typeface="Arial" panose="020B0604020202090204"/>
+              <a:cs typeface="Arial" panose="020B0604020202090204"/>
+            </a:endParaRPr>
           </a:p>
         </p:txBody>
       </p:sp>
@@ -5627,12 +6566,20 @@
                 <a:solidFill>
                   <a:srgbClr val="20243A"/>
                 </a:solidFill>
-                <a:latin typeface="Arial"/>
-                <a:ea typeface="Arial"/>
-                <a:cs typeface="Arial"/>
+                <a:latin typeface="Arial" panose="020B0604020202090204"/>
+                <a:ea typeface="Arial" panose="020B0604020202090204"/>
+                <a:cs typeface="Arial" panose="020B0604020202090204"/>
               </a:rPr>
               <a:t>{{NEXT_ACTION_3}}</a:t>
             </a:r>
+            <a:endParaRPr lang="en-US" sz="1580" b="1" dirty="0">
+              <a:solidFill>
+                <a:srgbClr val="20243A"/>
+              </a:solidFill>
+              <a:latin typeface="Arial" panose="020B0604020202090204"/>
+              <a:ea typeface="Arial" panose="020B0604020202090204"/>
+              <a:cs typeface="Arial" panose="020B0604020202090204"/>
+            </a:endParaRPr>
           </a:p>
           <a:p>
             <a:pPr algn="l">
@@ -5645,12 +6592,20 @@
                 <a:solidFill>
                   <a:srgbClr val="5E6478"/>
                 </a:solidFill>
-                <a:latin typeface="Arial"/>
-                <a:ea typeface="Arial"/>
-                <a:cs typeface="Arial"/>
+                <a:latin typeface="Arial" panose="020B0604020202090204"/>
+                <a:ea typeface="Arial" panose="020B0604020202090204"/>
+                <a:cs typeface="Arial" panose="020B0604020202090204"/>
               </a:rPr>
               <a:t>Output: updated figure, notes, or report section.</a:t>
             </a:r>
+            <a:endParaRPr lang="en-US" sz="1050" dirty="0">
+              <a:solidFill>
+                <a:srgbClr val="5E6478"/>
+              </a:solidFill>
+              <a:latin typeface="Arial" panose="020B0604020202090204"/>
+              <a:ea typeface="Arial" panose="020B0604020202090204"/>
+              <a:cs typeface="Arial" panose="020B0604020202090204"/>
+            </a:endParaRPr>
           </a:p>
         </p:txBody>
       </p:sp>
@@ -5689,12 +6644,20 @@
                 <a:solidFill>
                   <a:srgbClr val="FFFFFF"/>
                 </a:solidFill>
-                <a:latin typeface="Arial"/>
-                <a:ea typeface="Arial"/>
-                <a:cs typeface="Arial"/>
+                <a:latin typeface="Arial" panose="020B0604020202090204"/>
+                <a:ea typeface="Arial" panose="020B0604020202090204"/>
+                <a:cs typeface="Arial" panose="020B0604020202090204"/>
               </a:rPr>
               <a:t>{{OWNER_AND_DEADLINE}}</a:t>
             </a:r>
+            <a:endParaRPr lang="en-US" sz="1580" dirty="0">
+              <a:solidFill>
+                <a:srgbClr val="FFFFFF"/>
+              </a:solidFill>
+              <a:latin typeface="Arial" panose="020B0604020202090204"/>
+              <a:ea typeface="Arial" panose="020B0604020202090204"/>
+              <a:cs typeface="Arial" panose="020B0604020202090204"/>
+            </a:endParaRPr>
           </a:p>
           <a:p>
             <a:pPr algn="l">
@@ -5710,48 +6673,83 @@
                 <a:solidFill>
                   <a:srgbClr val="C8C8C8"/>
                 </a:solidFill>
-                <a:latin typeface="Arial"/>
-                <a:ea typeface="Arial"/>
-                <a:cs typeface="Arial"/>
+                <a:latin typeface="Arial" panose="020B0604020202090204"/>
+                <a:ea typeface="Arial" panose="020B0604020202090204"/>
+                <a:cs typeface="Arial" panose="020B0604020202090204"/>
               </a:rPr>
               <a:t>Owner: …</a:t>
             </a:r>
-            <a:br/>
-            <a:r>
+            <a:br>
               <a:rPr lang="en-US" sz="1050" dirty="0">
                 <a:solidFill>
                   <a:srgbClr val="C8C8C8"/>
                 </a:solidFill>
-                <a:latin typeface="Arial"/>
-                <a:ea typeface="Arial"/>
-                <a:cs typeface="Arial"/>
+                <a:latin typeface="Arial" panose="020B0604020202090204"/>
+                <a:ea typeface="Arial" panose="020B0604020202090204"/>
+                <a:cs typeface="Arial" panose="020B0604020202090204"/>
+              </a:rPr>
+            </a:br>
+            <a:r>
+              <a:rPr lang="en-US" sz="1050" dirty="0">
+                <a:solidFill>
+                  <a:srgbClr val="C8C8C8"/>
+                </a:solidFill>
+                <a:latin typeface="Arial" panose="020B0604020202090204"/>
+                <a:ea typeface="Arial" panose="020B0604020202090204"/>
+                <a:cs typeface="Arial" panose="020B0604020202090204"/>
               </a:rPr>
               <a:t>Due: …</a:t>
             </a:r>
-            <a:br/>
-            <a:r>
+            <a:br>
               <a:rPr lang="en-US" sz="1050" dirty="0">
                 <a:solidFill>
                   <a:srgbClr val="C8C8C8"/>
                 </a:solidFill>
-                <a:latin typeface="Arial"/>
-                <a:ea typeface="Arial"/>
-                <a:cs typeface="Arial"/>
+                <a:latin typeface="Arial" panose="020B0604020202090204"/>
+                <a:ea typeface="Arial" panose="020B0604020202090204"/>
+                <a:cs typeface="Arial" panose="020B0604020202090204"/>
+              </a:rPr>
+            </a:br>
+            <a:r>
+              <a:rPr lang="en-US" sz="1050" dirty="0">
+                <a:solidFill>
+                  <a:srgbClr val="C8C8C8"/>
+                </a:solidFill>
+                <a:latin typeface="Arial" panose="020B0604020202090204"/>
+                <a:ea typeface="Arial" panose="020B0604020202090204"/>
+                <a:cs typeface="Arial" panose="020B0604020202090204"/>
               </a:rPr>
               <a:t>Success check: observable output</a:t>
             </a:r>
-            <a:br/>
-            <a:r>
+            <a:br>
               <a:rPr lang="en-US" sz="1050" dirty="0">
                 <a:solidFill>
                   <a:srgbClr val="C8C8C8"/>
                 </a:solidFill>
-                <a:latin typeface="Arial"/>
-                <a:ea typeface="Arial"/>
-                <a:cs typeface="Arial"/>
+                <a:latin typeface="Arial" panose="020B0604020202090204"/>
+                <a:ea typeface="Arial" panose="020B0604020202090204"/>
+                <a:cs typeface="Arial" panose="020B0604020202090204"/>
+              </a:rPr>
+            </a:br>
+            <a:r>
+              <a:rPr lang="en-US" sz="1050" dirty="0">
+                <a:solidFill>
+                  <a:srgbClr val="C8C8C8"/>
+                </a:solidFill>
+                <a:latin typeface="Arial" panose="020B0604020202090204"/>
+                <a:ea typeface="Arial" panose="020B0604020202090204"/>
+                <a:cs typeface="Arial" panose="020B0604020202090204"/>
               </a:rPr>
               <a:t>or agreed metric threshold.</a:t>
             </a:r>
+            <a:endParaRPr lang="en-US" sz="1050" dirty="0">
+              <a:solidFill>
+                <a:srgbClr val="C8C8C8"/>
+              </a:solidFill>
+              <a:latin typeface="Arial" panose="020B0604020202090204"/>
+              <a:ea typeface="Arial" panose="020B0604020202090204"/>
+              <a:cs typeface="Arial" panose="020B0604020202090204"/>
+            </a:endParaRPr>
           </a:p>
         </p:txBody>
       </p:sp>
@@ -5786,12 +6784,20 @@
                 <a:solidFill>
                   <a:srgbClr val="FFFFFF"/>
                 </a:solidFill>
-                <a:latin typeface="Arial"/>
-                <a:ea typeface="Arial"/>
-                <a:cs typeface="Arial"/>
+                <a:latin typeface="Arial" panose="020B0604020202090204"/>
+                <a:ea typeface="Arial" panose="020B0604020202090204"/>
+                <a:cs typeface="Arial" panose="020B0604020202090204"/>
               </a:rPr>
               <a:t>{{PAGE_NUM}}</a:t>
             </a:r>
+            <a:endParaRPr lang="en-US" sz="900" dirty="0">
+              <a:solidFill>
+                <a:srgbClr val="FFFFFF"/>
+              </a:solidFill>
+              <a:latin typeface="Arial" panose="020B0604020202090204"/>
+              <a:ea typeface="Arial" panose="020B0604020202090204"/>
+              <a:cs typeface="Arial" panose="020B0604020202090204"/>
+            </a:endParaRPr>
           </a:p>
         </p:txBody>
       </p:sp>
@@ -5859,7 +6865,7 @@
           <p:nvPr/>
         </p:nvPicPr>
         <p:blipFill>
-          <a:blip r:embed="rId2"/>
+          <a:blip r:embed="rId1"/>
           <a:stretch>
             <a:fillRect/>
           </a:stretch>
@@ -5927,12 +6933,20 @@
                 <a:solidFill>
                   <a:srgbClr val="FFFFFF"/>
                 </a:solidFill>
-                <a:latin typeface="Arial"/>
-                <a:ea typeface="Arial"/>
-                <a:cs typeface="Arial"/>
+                <a:latin typeface="Arial" panose="020B0604020202090204"/>
+                <a:ea typeface="Arial" panose="020B0604020202090204"/>
+                <a:cs typeface="Arial" panose="020B0604020202090204"/>
               </a:rPr>
               <a:t>EE6008 · HUMAN POSE ANALYTICS</a:t>
             </a:r>
+            <a:endParaRPr lang="en-US" sz="980" dirty="0">
+              <a:solidFill>
+                <a:srgbClr val="FFFFFF"/>
+              </a:solidFill>
+              <a:latin typeface="Arial" panose="020B0604020202090204"/>
+              <a:ea typeface="Arial" panose="020B0604020202090204"/>
+              <a:cs typeface="Arial" panose="020B0604020202090204"/>
+            </a:endParaRPr>
           </a:p>
         </p:txBody>
       </p:sp>
@@ -6015,12 +7029,20 @@
                 <a:solidFill>
                   <a:srgbClr val="20243A"/>
                 </a:solidFill>
-                <a:latin typeface="Arial"/>
-                <a:ea typeface="Arial"/>
-                <a:cs typeface="Arial"/>
+                <a:latin typeface="Arial" panose="020B0604020202090204"/>
+                <a:ea typeface="Arial" panose="020B0604020202090204"/>
+                <a:cs typeface="Arial" panose="020B0604020202090204"/>
               </a:rPr>
               <a:t>Open Canvas</a:t>
             </a:r>
+            <a:endParaRPr lang="en-US" sz="2550" b="1" dirty="0">
+              <a:solidFill>
+                <a:srgbClr val="20243A"/>
+              </a:solidFill>
+              <a:latin typeface="Arial" panose="020B0604020202090204"/>
+              <a:ea typeface="Arial" panose="020B0604020202090204"/>
+              <a:cs typeface="Arial" panose="020B0604020202090204"/>
+            </a:endParaRPr>
           </a:p>
         </p:txBody>
       </p:sp>
@@ -6055,12 +7077,20 @@
                 <a:solidFill>
                   <a:srgbClr val="FFFFFF"/>
                 </a:solidFill>
-                <a:latin typeface="Arial"/>
-                <a:ea typeface="Arial"/>
-                <a:cs typeface="Arial"/>
+                <a:latin typeface="Arial" panose="020B0604020202090204"/>
+                <a:ea typeface="Arial" panose="020B0604020202090204"/>
+                <a:cs typeface="Arial" panose="020B0604020202090204"/>
               </a:rPr>
               <a:t>{{SOURCE}}</a:t>
             </a:r>
+            <a:endParaRPr lang="en-US" sz="900" dirty="0">
+              <a:solidFill>
+                <a:srgbClr val="FFFFFF"/>
+              </a:solidFill>
+              <a:latin typeface="Arial" panose="020B0604020202090204"/>
+              <a:ea typeface="Arial" panose="020B0604020202090204"/>
+              <a:cs typeface="Arial" panose="020B0604020202090204"/>
+            </a:endParaRPr>
           </a:p>
         </p:txBody>
       </p:sp>
@@ -6095,12 +7125,20 @@
                 <a:solidFill>
                   <a:srgbClr val="FFFFFF"/>
                 </a:solidFill>
-                <a:latin typeface="Arial"/>
-                <a:ea typeface="Arial"/>
-                <a:cs typeface="Arial"/>
+                <a:latin typeface="Arial" panose="020B0604020202090204"/>
+                <a:ea typeface="Arial" panose="020B0604020202090204"/>
+                <a:cs typeface="Arial" panose="020B0604020202090204"/>
               </a:rPr>
               <a:t>{{PAGE_NUM}}</a:t>
             </a:r>
+            <a:endParaRPr lang="en-US" sz="900" dirty="0">
+              <a:solidFill>
+                <a:srgbClr val="FFFFFF"/>
+              </a:solidFill>
+              <a:latin typeface="Arial" panose="020B0604020202090204"/>
+              <a:ea typeface="Arial" panose="020B0604020202090204"/>
+              <a:cs typeface="Arial" panose="020B0604020202090204"/>
+            </a:endParaRPr>
           </a:p>
         </p:txBody>
       </p:sp>
@@ -6168,7 +7206,7 @@
           <p:nvPr/>
         </p:nvPicPr>
         <p:blipFill>
-          <a:blip r:embed="rId2"/>
+          <a:blip r:embed="rId1"/>
           <a:stretch>
             <a:fillRect/>
           </a:stretch>
@@ -6236,12 +7274,20 @@
                 <a:solidFill>
                   <a:srgbClr val="FFFFFF"/>
                 </a:solidFill>
-                <a:latin typeface="Arial"/>
-                <a:ea typeface="Arial"/>
-                <a:cs typeface="Arial"/>
+                <a:latin typeface="Arial" panose="020B0604020202090204"/>
+                <a:ea typeface="Arial" panose="020B0604020202090204"/>
+                <a:cs typeface="Arial" panose="020B0604020202090204"/>
               </a:rPr>
               <a:t>EE6008 · HUMAN POSE ANALYTICS</a:t>
             </a:r>
+            <a:endParaRPr lang="en-US" sz="980" dirty="0">
+              <a:solidFill>
+                <a:srgbClr val="FFFFFF"/>
+              </a:solidFill>
+              <a:latin typeface="Arial" panose="020B0604020202090204"/>
+              <a:ea typeface="Arial" panose="020B0604020202090204"/>
+              <a:cs typeface="Arial" panose="020B0604020202090204"/>
+            </a:endParaRPr>
           </a:p>
         </p:txBody>
       </p:sp>
@@ -6370,12 +7416,20 @@
                 <a:solidFill>
                   <a:srgbClr val="181C62"/>
                 </a:solidFill>
-                <a:latin typeface="Arial"/>
-                <a:ea typeface="Arial"/>
-                <a:cs typeface="Arial"/>
+                <a:latin typeface="Arial" panose="020B0604020202090204"/>
+                <a:ea typeface="Arial" panose="020B0604020202090204"/>
+                <a:cs typeface="Arial" panose="020B0604020202090204"/>
               </a:rPr>
               <a:t>IMAGE DESCRIPTION</a:t>
             </a:r>
+            <a:endParaRPr lang="en-US" sz="980" b="1" dirty="0">
+              <a:solidFill>
+                <a:srgbClr val="181C62"/>
+              </a:solidFill>
+              <a:latin typeface="Arial" panose="020B0604020202090204"/>
+              <a:ea typeface="Arial" panose="020B0604020202090204"/>
+              <a:cs typeface="Arial" panose="020B0604020202090204"/>
+            </a:endParaRPr>
           </a:p>
         </p:txBody>
       </p:sp>
@@ -6410,12 +7464,20 @@
                 <a:solidFill>
                   <a:srgbClr val="20243A"/>
                 </a:solidFill>
-                <a:latin typeface="Arial"/>
-                <a:ea typeface="Arial"/>
-                <a:cs typeface="Arial"/>
+                <a:latin typeface="Arial" panose="020B0604020202090204"/>
+                <a:ea typeface="Arial" panose="020B0604020202090204"/>
+                <a:cs typeface="Arial" panose="020B0604020202090204"/>
               </a:rPr>
               <a:t>Single-Image Story</a:t>
             </a:r>
+            <a:endParaRPr lang="en-US" sz="2550" b="1" dirty="0">
+              <a:solidFill>
+                <a:srgbClr val="20243A"/>
+              </a:solidFill>
+              <a:latin typeface="Arial" panose="020B0604020202090204"/>
+              <a:ea typeface="Arial" panose="020B0604020202090204"/>
+              <a:cs typeface="Arial" panose="020B0604020202090204"/>
+            </a:endParaRPr>
           </a:p>
         </p:txBody>
       </p:sp>
@@ -6428,8 +7490,8 @@
           <p:nvPr/>
         </p:nvPicPr>
         <p:blipFill>
-          <a:blip r:embed="rId3"/>
-          <a:srcRect l="4974" t="0" r="4973" b="0"/>
+          <a:blip r:embed="rId2"/>
+          <a:srcRect l="4974" r="4973"/>
           <a:stretch>
             <a:fillRect/>
           </a:stretch>
@@ -6479,12 +7541,20 @@
                 <a:solidFill>
                   <a:srgbClr val="20243A"/>
                 </a:solidFill>
-                <a:latin typeface="Arial"/>
-                <a:ea typeface="Arial"/>
-                <a:cs typeface="Arial"/>
+                <a:latin typeface="Arial" panose="020B0604020202090204"/>
+                <a:ea typeface="Arial" panose="020B0604020202090204"/>
+                <a:cs typeface="Arial" panose="020B0604020202090204"/>
               </a:rPr>
               <a:t>{{IMAGE_DESCRIPTION}}</a:t>
             </a:r>
+            <a:endParaRPr lang="en-US" sz="1580" dirty="0">
+              <a:solidFill>
+                <a:srgbClr val="20243A"/>
+              </a:solidFill>
+              <a:latin typeface="Arial" panose="020B0604020202090204"/>
+              <a:ea typeface="Arial" panose="020B0604020202090204"/>
+              <a:cs typeface="Arial" panose="020B0604020202090204"/>
+            </a:endParaRPr>
           </a:p>
           <a:p>
             <a:pPr algn="l">
@@ -6500,12 +7570,20 @@
                 <a:solidFill>
                   <a:srgbClr val="5E6478"/>
                 </a:solidFill>
-                <a:latin typeface="Arial"/>
-                <a:ea typeface="Arial"/>
-                <a:cs typeface="Arial"/>
+                <a:latin typeface="Arial" panose="020B0604020202090204"/>
+                <a:ea typeface="Arial" panose="020B0604020202090204"/>
+                <a:cs typeface="Arial" panose="020B0604020202090204"/>
               </a:rPr>
               <a:t>What does the image show?</a:t>
             </a:r>
+            <a:endParaRPr lang="en-US" sz="1120" dirty="0">
+              <a:solidFill>
+                <a:srgbClr val="5E6478"/>
+              </a:solidFill>
+              <a:latin typeface="Arial" panose="020B0604020202090204"/>
+              <a:ea typeface="Arial" panose="020B0604020202090204"/>
+              <a:cs typeface="Arial" panose="020B0604020202090204"/>
+            </a:endParaRPr>
           </a:p>
           <a:p>
             <a:pPr algn="l">
@@ -6521,12 +7599,20 @@
                 <a:solidFill>
                   <a:srgbClr val="5E6478"/>
                 </a:solidFill>
-                <a:latin typeface="Arial"/>
-                <a:ea typeface="Arial"/>
-                <a:cs typeface="Arial"/>
+                <a:latin typeface="Arial" panose="020B0604020202090204"/>
+                <a:ea typeface="Arial" panose="020B0604020202090204"/>
+                <a:cs typeface="Arial" panose="020B0604020202090204"/>
               </a:rPr>
               <a:t>Why is it relevant this week?</a:t>
             </a:r>
+            <a:endParaRPr lang="en-US" sz="1120" dirty="0">
+              <a:solidFill>
+                <a:srgbClr val="5E6478"/>
+              </a:solidFill>
+              <a:latin typeface="Arial" panose="020B0604020202090204"/>
+              <a:ea typeface="Arial" panose="020B0604020202090204"/>
+              <a:cs typeface="Arial" panose="020B0604020202090204"/>
+            </a:endParaRPr>
           </a:p>
           <a:p>
             <a:pPr algn="l">
@@ -6542,12 +7628,20 @@
                 <a:solidFill>
                   <a:srgbClr val="5E6478"/>
                 </a:solidFill>
-                <a:latin typeface="Arial"/>
-                <a:ea typeface="Arial"/>
-                <a:cs typeface="Arial"/>
+                <a:latin typeface="Arial" panose="020B0604020202090204"/>
+                <a:ea typeface="Arial" panose="020B0604020202090204"/>
+                <a:cs typeface="Arial" panose="020B0604020202090204"/>
               </a:rPr>
               <a:t>What should the audience notice?</a:t>
             </a:r>
+            <a:endParaRPr lang="en-US" sz="1120" dirty="0">
+              <a:solidFill>
+                <a:srgbClr val="5E6478"/>
+              </a:solidFill>
+              <a:latin typeface="Arial" panose="020B0604020202090204"/>
+              <a:ea typeface="Arial" panose="020B0604020202090204"/>
+              <a:cs typeface="Arial" panose="020B0604020202090204"/>
+            </a:endParaRPr>
           </a:p>
           <a:p>
             <a:pPr algn="l">
@@ -6563,12 +7657,20 @@
                 <a:solidFill>
                   <a:srgbClr val="D71440"/>
                 </a:solidFill>
-                <a:latin typeface="Arial"/>
-                <a:ea typeface="Arial"/>
-                <a:cs typeface="Arial"/>
+                <a:latin typeface="Arial" panose="020B0604020202090204"/>
+                <a:ea typeface="Arial" panose="020B0604020202090204"/>
+                <a:cs typeface="Arial" panose="020B0604020202090204"/>
               </a:rPr>
               <a:t>TIP</a:t>
             </a:r>
+            <a:endParaRPr lang="en-US" sz="1050" b="1" dirty="0">
+              <a:solidFill>
+                <a:srgbClr val="D71440"/>
+              </a:solidFill>
+              <a:latin typeface="Arial" panose="020B0604020202090204"/>
+              <a:ea typeface="Arial" panose="020B0604020202090204"/>
+              <a:cs typeface="Arial" panose="020B0604020202090204"/>
+            </a:endParaRPr>
           </a:p>
           <a:p>
             <a:pPr algn="l">
@@ -6584,36 +7686,62 @@
                 <a:solidFill>
                   <a:srgbClr val="5E6478"/>
                 </a:solidFill>
-                <a:latin typeface="Arial"/>
-                <a:ea typeface="Arial"/>
-                <a:cs typeface="Arial"/>
+                <a:latin typeface="Arial" panose="020B0604020202090204"/>
+                <a:ea typeface="Arial" panose="020B0604020202090204"/>
+                <a:cs typeface="Arial" panose="020B0604020202090204"/>
               </a:rPr>
               <a:t>Use one annotated result, system</a:t>
             </a:r>
-            <a:br/>
-            <a:r>
+            <a:br>
               <a:rPr lang="en-US" sz="1050" dirty="0">
                 <a:solidFill>
                   <a:srgbClr val="5E6478"/>
                 </a:solidFill>
-                <a:latin typeface="Arial"/>
-                <a:ea typeface="Arial"/>
-                <a:cs typeface="Arial"/>
+                <a:latin typeface="Arial" panose="020B0604020202090204"/>
+                <a:ea typeface="Arial" panose="020B0604020202090204"/>
+                <a:cs typeface="Arial" panose="020B0604020202090204"/>
+              </a:rPr>
+            </a:br>
+            <a:r>
+              <a:rPr lang="en-US" sz="1050" dirty="0">
+                <a:solidFill>
+                  <a:srgbClr val="5E6478"/>
+                </a:solidFill>
+                <a:latin typeface="Arial" panose="020B0604020202090204"/>
+                <a:ea typeface="Arial" panose="020B0604020202090204"/>
+                <a:cs typeface="Arial" panose="020B0604020202090204"/>
               </a:rPr>
               <a:t>overview, qualitative example,</a:t>
             </a:r>
-            <a:br/>
-            <a:r>
+            <a:br>
               <a:rPr lang="en-US" sz="1050" dirty="0">
                 <a:solidFill>
                   <a:srgbClr val="5E6478"/>
                 </a:solidFill>
-                <a:latin typeface="Arial"/>
-                <a:ea typeface="Arial"/>
-                <a:cs typeface="Arial"/>
+                <a:latin typeface="Arial" panose="020B0604020202090204"/>
+                <a:ea typeface="Arial" panose="020B0604020202090204"/>
+                <a:cs typeface="Arial" panose="020B0604020202090204"/>
+              </a:rPr>
+            </a:br>
+            <a:r>
+              <a:rPr lang="en-US" sz="1050" dirty="0">
+                <a:solidFill>
+                  <a:srgbClr val="5E6478"/>
+                </a:solidFill>
+                <a:latin typeface="Arial" panose="020B0604020202090204"/>
+                <a:ea typeface="Arial" panose="020B0604020202090204"/>
+                <a:cs typeface="Arial" panose="020B0604020202090204"/>
               </a:rPr>
               <a:t>or implementation photograph.</a:t>
             </a:r>
+            <a:endParaRPr lang="en-US" sz="1050" dirty="0">
+              <a:solidFill>
+                <a:srgbClr val="5E6478"/>
+              </a:solidFill>
+              <a:latin typeface="Arial" panose="020B0604020202090204"/>
+              <a:ea typeface="Arial" panose="020B0604020202090204"/>
+              <a:cs typeface="Arial" panose="020B0604020202090204"/>
+            </a:endParaRPr>
           </a:p>
         </p:txBody>
       </p:sp>
@@ -6648,12 +7776,20 @@
                 <a:solidFill>
                   <a:srgbClr val="FFFFFF"/>
                 </a:solidFill>
-                <a:latin typeface="Arial"/>
-                <a:ea typeface="Arial"/>
-                <a:cs typeface="Arial"/>
+                <a:latin typeface="Arial" panose="020B0604020202090204"/>
+                <a:ea typeface="Arial" panose="020B0604020202090204"/>
+                <a:cs typeface="Arial" panose="020B0604020202090204"/>
               </a:rPr>
               <a:t>{{SOURCE}}</a:t>
             </a:r>
+            <a:endParaRPr lang="en-US" sz="900" dirty="0">
+              <a:solidFill>
+                <a:srgbClr val="FFFFFF"/>
+              </a:solidFill>
+              <a:latin typeface="Arial" panose="020B0604020202090204"/>
+              <a:ea typeface="Arial" panose="020B0604020202090204"/>
+              <a:cs typeface="Arial" panose="020B0604020202090204"/>
+            </a:endParaRPr>
           </a:p>
         </p:txBody>
       </p:sp>
@@ -6688,12 +7824,20 @@
                 <a:solidFill>
                   <a:srgbClr val="FFFFFF"/>
                 </a:solidFill>
-                <a:latin typeface="Arial"/>
-                <a:ea typeface="Arial"/>
-                <a:cs typeface="Arial"/>
+                <a:latin typeface="Arial" panose="020B0604020202090204"/>
+                <a:ea typeface="Arial" panose="020B0604020202090204"/>
+                <a:cs typeface="Arial" panose="020B0604020202090204"/>
               </a:rPr>
               <a:t>{{PAGE_NUM}}</a:t>
             </a:r>
+            <a:endParaRPr lang="en-US" sz="900" dirty="0">
+              <a:solidFill>
+                <a:srgbClr val="FFFFFF"/>
+              </a:solidFill>
+              <a:latin typeface="Arial" panose="020B0604020202090204"/>
+              <a:ea typeface="Arial" panose="020B0604020202090204"/>
+              <a:cs typeface="Arial" panose="020B0604020202090204"/>
+            </a:endParaRPr>
           </a:p>
         </p:txBody>
       </p:sp>
@@ -6761,7 +7905,7 @@
           <p:nvPr/>
         </p:nvPicPr>
         <p:blipFill>
-          <a:blip r:embed="rId2"/>
+          <a:blip r:embed="rId1"/>
           <a:stretch>
             <a:fillRect/>
           </a:stretch>
@@ -6829,12 +7973,20 @@
                 <a:solidFill>
                   <a:srgbClr val="FFFFFF"/>
                 </a:solidFill>
-                <a:latin typeface="Arial"/>
-                <a:ea typeface="Arial"/>
-                <a:cs typeface="Arial"/>
+                <a:latin typeface="Arial" panose="020B0604020202090204"/>
+                <a:ea typeface="Arial" panose="020B0604020202090204"/>
+                <a:cs typeface="Arial" panose="020B0604020202090204"/>
               </a:rPr>
               <a:t>EE6008 · HUMAN POSE ANALYTICS</a:t>
             </a:r>
+            <a:endParaRPr lang="en-US" sz="980" dirty="0">
+              <a:solidFill>
+                <a:srgbClr val="FFFFFF"/>
+              </a:solidFill>
+              <a:latin typeface="Arial" panose="020B0604020202090204"/>
+              <a:ea typeface="Arial" panose="020B0604020202090204"/>
+              <a:cs typeface="Arial" panose="020B0604020202090204"/>
+            </a:endParaRPr>
           </a:p>
         </p:txBody>
       </p:sp>
@@ -6891,12 +8043,20 @@
                 <a:solidFill>
                   <a:srgbClr val="5E6478"/>
                 </a:solidFill>
-                <a:latin typeface="Arial"/>
-                <a:ea typeface="Arial"/>
-                <a:cs typeface="Arial"/>
+                <a:latin typeface="Arial" panose="020B0604020202090204"/>
+                <a:ea typeface="Arial" panose="020B0604020202090204"/>
+                <a:cs typeface="Arial" panose="020B0604020202090204"/>
               </a:rPr>
               <a:t>USE 2–4 IMAGES</a:t>
             </a:r>
+            <a:endParaRPr lang="en-US" sz="980" b="1" dirty="0">
+              <a:solidFill>
+                <a:srgbClr val="5E6478"/>
+              </a:solidFill>
+              <a:latin typeface="Arial" panose="020B0604020202090204"/>
+              <a:ea typeface="Arial" panose="020B0604020202090204"/>
+              <a:cs typeface="Arial" panose="020B0604020202090204"/>
+            </a:endParaRPr>
           </a:p>
         </p:txBody>
       </p:sp>
@@ -7123,12 +8283,20 @@
                 <a:solidFill>
                   <a:srgbClr val="20243A"/>
                 </a:solidFill>
-                <a:latin typeface="Arial"/>
-                <a:ea typeface="Arial"/>
-                <a:cs typeface="Arial"/>
+                <a:latin typeface="Arial" panose="020B0604020202090204"/>
+                <a:ea typeface="Arial" panose="020B0604020202090204"/>
+                <a:cs typeface="Arial" panose="020B0604020202090204"/>
               </a:rPr>
               <a:t>Multi-Image Story</a:t>
             </a:r>
+            <a:endParaRPr lang="en-US" sz="2550" b="1" dirty="0">
+              <a:solidFill>
+                <a:srgbClr val="20243A"/>
+              </a:solidFill>
+              <a:latin typeface="Arial" panose="020B0604020202090204"/>
+              <a:ea typeface="Arial" panose="020B0604020202090204"/>
+              <a:cs typeface="Arial" panose="020B0604020202090204"/>
+            </a:endParaRPr>
           </a:p>
         </p:txBody>
       </p:sp>
@@ -7141,8 +8309,8 @@
           <p:nvPr/>
         </p:nvPicPr>
         <p:blipFill>
-          <a:blip r:embed="rId3"/>
-          <a:srcRect l="0" t="19517" r="0" b="19517"/>
+          <a:blip r:embed="rId2"/>
+          <a:srcRect t="19517" b="19517"/>
           <a:stretch>
             <a:fillRect/>
           </a:stretch>
@@ -7166,8 +8334,8 @@
           <p:nvPr/>
         </p:nvPicPr>
         <p:blipFill>
-          <a:blip r:embed="rId4"/>
-          <a:srcRect l="0" t="14228" r="0" b="14227"/>
+          <a:blip r:embed="rId3"/>
+          <a:srcRect t="14228" b="14227"/>
           <a:stretch>
             <a:fillRect/>
           </a:stretch>
@@ -7191,8 +8359,8 @@
           <p:nvPr/>
         </p:nvPicPr>
         <p:blipFill>
-          <a:blip r:embed="rId5"/>
-          <a:srcRect l="0" t="25000" r="0" b="25000"/>
+          <a:blip r:embed="rId4"/>
+          <a:srcRect t="25000" b="25000"/>
           <a:stretch>
             <a:fillRect/>
           </a:stretch>
@@ -7216,8 +8384,8 @@
           <p:nvPr/>
         </p:nvPicPr>
         <p:blipFill>
-          <a:blip r:embed="rId6"/>
-          <a:srcRect l="0" t="28986" r="0" b="28987"/>
+          <a:blip r:embed="rId5"/>
+          <a:srcRect t="28986" b="28987"/>
           <a:stretch>
             <a:fillRect/>
           </a:stretch>
@@ -7263,12 +8431,20 @@
                 <a:solidFill>
                   <a:srgbClr val="20243A"/>
                 </a:solidFill>
-                <a:latin typeface="Arial"/>
-                <a:ea typeface="Arial"/>
-                <a:cs typeface="Arial"/>
+                <a:latin typeface="Arial" panose="020B0604020202090204"/>
+                <a:ea typeface="Arial" panose="020B0604020202090204"/>
+                <a:cs typeface="Arial" panose="020B0604020202090204"/>
               </a:rPr>
               <a:t>{{CAPTION_1}}</a:t>
             </a:r>
+            <a:endParaRPr lang="en-US" sz="1120" dirty="0">
+              <a:solidFill>
+                <a:srgbClr val="20243A"/>
+              </a:solidFill>
+              <a:latin typeface="Arial" panose="020B0604020202090204"/>
+              <a:ea typeface="Arial" panose="020B0604020202090204"/>
+              <a:cs typeface="Arial" panose="020B0604020202090204"/>
+            </a:endParaRPr>
           </a:p>
         </p:txBody>
       </p:sp>
@@ -7303,12 +8479,20 @@
                 <a:solidFill>
                   <a:srgbClr val="20243A"/>
                 </a:solidFill>
-                <a:latin typeface="Arial"/>
-                <a:ea typeface="Arial"/>
-                <a:cs typeface="Arial"/>
+                <a:latin typeface="Arial" panose="020B0604020202090204"/>
+                <a:ea typeface="Arial" panose="020B0604020202090204"/>
+                <a:cs typeface="Arial" panose="020B0604020202090204"/>
               </a:rPr>
               <a:t>{{CAPTION_2}}</a:t>
             </a:r>
+            <a:endParaRPr lang="en-US" sz="1120" dirty="0">
+              <a:solidFill>
+                <a:srgbClr val="20243A"/>
+              </a:solidFill>
+              <a:latin typeface="Arial" panose="020B0604020202090204"/>
+              <a:ea typeface="Arial" panose="020B0604020202090204"/>
+              <a:cs typeface="Arial" panose="020B0604020202090204"/>
+            </a:endParaRPr>
           </a:p>
         </p:txBody>
       </p:sp>
@@ -7343,12 +8527,20 @@
                 <a:solidFill>
                   <a:srgbClr val="20243A"/>
                 </a:solidFill>
-                <a:latin typeface="Arial"/>
-                <a:ea typeface="Arial"/>
-                <a:cs typeface="Arial"/>
+                <a:latin typeface="Arial" panose="020B0604020202090204"/>
+                <a:ea typeface="Arial" panose="020B0604020202090204"/>
+                <a:cs typeface="Arial" panose="020B0604020202090204"/>
               </a:rPr>
               <a:t>{{CAPTION_3}}</a:t>
             </a:r>
+            <a:endParaRPr lang="en-US" sz="1120" dirty="0">
+              <a:solidFill>
+                <a:srgbClr val="20243A"/>
+              </a:solidFill>
+              <a:latin typeface="Arial" panose="020B0604020202090204"/>
+              <a:ea typeface="Arial" panose="020B0604020202090204"/>
+              <a:cs typeface="Arial" panose="020B0604020202090204"/>
+            </a:endParaRPr>
           </a:p>
         </p:txBody>
       </p:sp>
@@ -7383,12 +8575,20 @@
                 <a:solidFill>
                   <a:srgbClr val="20243A"/>
                 </a:solidFill>
-                <a:latin typeface="Arial"/>
-                <a:ea typeface="Arial"/>
-                <a:cs typeface="Arial"/>
+                <a:latin typeface="Arial" panose="020B0604020202090204"/>
+                <a:ea typeface="Arial" panose="020B0604020202090204"/>
+                <a:cs typeface="Arial" panose="020B0604020202090204"/>
               </a:rPr>
               <a:t>{{CAPTION_4}}</a:t>
             </a:r>
+            <a:endParaRPr lang="en-US" sz="1120" dirty="0">
+              <a:solidFill>
+                <a:srgbClr val="20243A"/>
+              </a:solidFill>
+              <a:latin typeface="Arial" panose="020B0604020202090204"/>
+              <a:ea typeface="Arial" panose="020B0604020202090204"/>
+              <a:cs typeface="Arial" panose="020B0604020202090204"/>
+            </a:endParaRPr>
           </a:p>
         </p:txBody>
       </p:sp>
@@ -7423,12 +8623,20 @@
                 <a:solidFill>
                   <a:srgbClr val="FFFFFF"/>
                 </a:solidFill>
-                <a:latin typeface="Arial"/>
-                <a:ea typeface="Arial"/>
-                <a:cs typeface="Arial"/>
+                <a:latin typeface="Arial" panose="020B0604020202090204"/>
+                <a:ea typeface="Arial" panose="020B0604020202090204"/>
+                <a:cs typeface="Arial" panose="020B0604020202090204"/>
               </a:rPr>
               <a:t>{{SOURCE}}</a:t>
             </a:r>
+            <a:endParaRPr lang="en-US" sz="900" dirty="0">
+              <a:solidFill>
+                <a:srgbClr val="FFFFFF"/>
+              </a:solidFill>
+              <a:latin typeface="Arial" panose="020B0604020202090204"/>
+              <a:ea typeface="Arial" panose="020B0604020202090204"/>
+              <a:cs typeface="Arial" panose="020B0604020202090204"/>
+            </a:endParaRPr>
           </a:p>
         </p:txBody>
       </p:sp>
@@ -7463,12 +8671,20 @@
                 <a:solidFill>
                   <a:srgbClr val="FFFFFF"/>
                 </a:solidFill>
-                <a:latin typeface="Arial"/>
-                <a:ea typeface="Arial"/>
-                <a:cs typeface="Arial"/>
+                <a:latin typeface="Arial" panose="020B0604020202090204"/>
+                <a:ea typeface="Arial" panose="020B0604020202090204"/>
+                <a:cs typeface="Arial" panose="020B0604020202090204"/>
               </a:rPr>
               <a:t>{{PAGE_NUM}}</a:t>
             </a:r>
+            <a:endParaRPr lang="en-US" sz="900" dirty="0">
+              <a:solidFill>
+                <a:srgbClr val="FFFFFF"/>
+              </a:solidFill>
+              <a:latin typeface="Arial" panose="020B0604020202090204"/>
+              <a:ea typeface="Arial" panose="020B0604020202090204"/>
+              <a:cs typeface="Arial" panose="020B0604020202090204"/>
+            </a:endParaRPr>
           </a:p>
         </p:txBody>
       </p:sp>
@@ -7796,6 +9012,10 @@
       </a:style>
     </a:lnDef>
   </a:objectDefaults>
-  <a:extraClrSchemeLst/>
+  <a:extLst>
+    <a:ext uri="{05A4C25C-085E-4340-85A3-A5531E510DB2}">
+      <thm15:themeFamily xmlns:thm15="http://schemas.microsoft.com/office/thememl/2012/main" name="Office Theme" id="{62F939B6-93AF-4DB8-9C6B-D6C7DFDC589F}" vid="{4A3C46E8-61CC-4603-A589-7422A47A8E4A}"/>
+    </a:ext>
+  </a:extLst>
 </a:theme>
 </file>
--- a/reports/WeeklyPre/5min_pre_fully_editable.pptx
+++ b/reports/WeeklyPre/5min_pre_fully_editable.pptx
@@ -18,6 +18,9 @@
   </p:sldIdLst>
   <p:sldSz cx="12192000" cy="6858000" type="screen4x3"/>
   <p:notesSz cx="6858000" cy="9144000"/>
+  <p:custDataLst>
+    <p:tags r:id="rId16"/>
+  </p:custDataLst>
   <p:defaultTextStyle>
     <a:defPPr>
       <a:defRPr lang="en-US"/>
@@ -116,12 +119,12 @@
   <p:extLst>
     <p:ext uri="{EFAFB233-063F-42B5-8137-9DF3F51BA10A}">
       <p15:sldGuideLst xmlns:p15="http://schemas.microsoft.com/office/powerpoint/2012/main">
-        <p15:guide id="1" orient="horz" pos="2160" userDrawn="1">
+        <p15:guide id="1" orient="horz" pos="2196" userDrawn="1">
           <p15:clr>
             <a:srgbClr val="A4A3A4"/>
           </p15:clr>
         </p15:guide>
-        <p15:guide id="2" pos="2880" userDrawn="1">
+        <p15:guide id="2" pos="2876" userDrawn="1">
           <p15:clr>
             <a:srgbClr val="A4A3A4"/>
           </p15:clr>
@@ -387,7 +390,7 @@
         <a:spcBef>
           <a:spcPct val="20000"/>
         </a:spcBef>
-        <a:buFont typeface="Arial" panose="020B0604020202090204"/>
+        <a:buFont typeface="Arial" panose="020B0604020202020204"/>
         <a:buChar char="•"/>
         <a:defRPr sz="3200" kern="1200">
           <a:solidFill>
@@ -402,7 +405,7 @@
         <a:spcBef>
           <a:spcPct val="20000"/>
         </a:spcBef>
-        <a:buFont typeface="Arial" panose="020B0604020202090204"/>
+        <a:buFont typeface="Arial" panose="020B0604020202020204"/>
         <a:buChar char="–"/>
         <a:defRPr sz="2800" kern="1200">
           <a:solidFill>
@@ -417,7 +420,7 @@
         <a:spcBef>
           <a:spcPct val="20000"/>
         </a:spcBef>
-        <a:buFont typeface="Arial" panose="020B0604020202090204"/>
+        <a:buFont typeface="Arial" panose="020B0604020202020204"/>
         <a:buChar char="•"/>
         <a:defRPr sz="2400" kern="1200">
           <a:solidFill>
@@ -432,7 +435,7 @@
         <a:spcBef>
           <a:spcPct val="20000"/>
         </a:spcBef>
-        <a:buFont typeface="Arial" panose="020B0604020202090204"/>
+        <a:buFont typeface="Arial" panose="020B0604020202020204"/>
         <a:buChar char="–"/>
         <a:defRPr sz="2000" kern="1200">
           <a:solidFill>
@@ -447,7 +450,7 @@
         <a:spcBef>
           <a:spcPct val="20000"/>
         </a:spcBef>
-        <a:buFont typeface="Arial" panose="020B0604020202090204"/>
+        <a:buFont typeface="Arial" panose="020B0604020202020204"/>
         <a:buChar char="»"/>
         <a:defRPr sz="2000" kern="1200">
           <a:solidFill>
@@ -462,7 +465,7 @@
         <a:spcBef>
           <a:spcPct val="20000"/>
         </a:spcBef>
-        <a:buFont typeface="Arial" panose="020B0604020202090204"/>
+        <a:buFont typeface="Arial" panose="020B0604020202020204"/>
         <a:buChar char="•"/>
         <a:defRPr sz="2000" kern="1200">
           <a:solidFill>
@@ -477,7 +480,7 @@
         <a:spcBef>
           <a:spcPct val="20000"/>
         </a:spcBef>
-        <a:buFont typeface="Arial" panose="020B0604020202090204"/>
+        <a:buFont typeface="Arial" panose="020B0604020202020204"/>
         <a:buChar char="•"/>
         <a:defRPr sz="2000" kern="1200">
           <a:solidFill>
@@ -492,7 +495,7 @@
         <a:spcBef>
           <a:spcPct val="20000"/>
         </a:spcBef>
-        <a:buFont typeface="Arial" panose="020B0604020202090204"/>
+        <a:buFont typeface="Arial" panose="020B0604020202020204"/>
         <a:buChar char="•"/>
         <a:defRPr sz="2000" kern="1200">
           <a:solidFill>
@@ -507,7 +510,7 @@
         <a:spcBef>
           <a:spcPct val="20000"/>
         </a:spcBef>
-        <a:buFont typeface="Arial" panose="020B0604020202090204"/>
+        <a:buFont typeface="Arial" panose="020B0604020202020204"/>
         <a:buChar char="•"/>
         <a:defRPr sz="2000" kern="1200">
           <a:solidFill>
@@ -742,9 +745,9 @@
                 <a:solidFill>
                   <a:srgbClr val="FFFFFF"/>
                 </a:solidFill>
-                <a:latin typeface="Arial" panose="020B0604020202090204"/>
-                <a:ea typeface="Arial" panose="020B0604020202090204"/>
-                <a:cs typeface="Arial" panose="020B0604020202090204"/>
+                <a:latin typeface="Arial" panose="020B0604020202020204"/>
+                <a:ea typeface="Arial" panose="020B0604020202020204"/>
+                <a:cs typeface="Arial" panose="020B0604020202020204"/>
               </a:rPr>
               <a:t>EE6008 · HUMAN POSE ANALYTICS</a:t>
             </a:r>
@@ -752,9 +755,9 @@
               <a:solidFill>
                 <a:srgbClr val="FFFFFF"/>
               </a:solidFill>
-              <a:latin typeface="Arial" panose="020B0604020202090204"/>
-              <a:ea typeface="Arial" panose="020B0604020202090204"/>
-              <a:cs typeface="Arial" panose="020B0604020202090204"/>
+              <a:latin typeface="Arial" panose="020B0604020202020204"/>
+              <a:ea typeface="Arial" panose="020B0604020202020204"/>
+              <a:cs typeface="Arial" panose="020B0604020202020204"/>
             </a:endParaRPr>
           </a:p>
         </p:txBody>
@@ -921,9 +924,9 @@
                 <a:solidFill>
                   <a:srgbClr val="181C62"/>
                 </a:solidFill>
-                <a:latin typeface="Arial" panose="020B0604020202090204"/>
-                <a:ea typeface="Arial" panose="020B0604020202090204"/>
-                <a:cs typeface="Arial" panose="020B0604020202090204"/>
+                <a:latin typeface="Arial" panose="020B0604020202020204"/>
+                <a:ea typeface="Arial" panose="020B0604020202020204"/>
+                <a:cs typeface="Arial" panose="020B0604020202020204"/>
               </a:rPr>
               <a:t>Human Pose Analytics</a:t>
             </a:r>
@@ -931,9 +934,9 @@
               <a:solidFill>
                 <a:srgbClr val="181C62"/>
               </a:solidFill>
-              <a:latin typeface="Arial" panose="020B0604020202090204"/>
-              <a:ea typeface="Arial" panose="020B0604020202090204"/>
-              <a:cs typeface="Arial" panose="020B0604020202090204"/>
+              <a:latin typeface="Arial" panose="020B0604020202020204"/>
+              <a:ea typeface="Arial" panose="020B0604020202020204"/>
+              <a:cs typeface="Arial" panose="020B0604020202020204"/>
             </a:endParaRPr>
           </a:p>
         </p:txBody>
@@ -969,9 +972,9 @@
                 <a:solidFill>
                   <a:srgbClr val="20243A"/>
                 </a:solidFill>
-                <a:latin typeface="Arial" panose="020B0604020202090204"/>
-                <a:ea typeface="Arial" panose="020B0604020202090204"/>
-                <a:cs typeface="Arial" panose="020B0604020202090204"/>
+                <a:latin typeface="Arial" panose="020B0604020202020204"/>
+                <a:ea typeface="Arial" panose="020B0604020202020204"/>
+                <a:cs typeface="Arial" panose="020B0604020202020204"/>
               </a:rPr>
               <a:t>Weekly research update · {{SUBTITLE}}</a:t>
             </a:r>
@@ -979,9 +982,9 @@
               <a:solidFill>
                 <a:srgbClr val="20243A"/>
               </a:solidFill>
-              <a:latin typeface="Arial" panose="020B0604020202090204"/>
-              <a:ea typeface="Arial" panose="020B0604020202090204"/>
-              <a:cs typeface="Arial" panose="020B0604020202090204"/>
+              <a:latin typeface="Arial" panose="020B0604020202020204"/>
+              <a:ea typeface="Arial" panose="020B0604020202020204"/>
+              <a:cs typeface="Arial" panose="020B0604020202020204"/>
             </a:endParaRPr>
           </a:p>
         </p:txBody>
@@ -1017,9 +1020,9 @@
                 <a:solidFill>
                   <a:srgbClr val="D71440"/>
                 </a:solidFill>
-                <a:latin typeface="Arial" panose="020B0604020202090204"/>
-                <a:ea typeface="Arial" panose="020B0604020202090204"/>
-                <a:cs typeface="Arial" panose="020B0604020202090204"/>
+                <a:latin typeface="Arial" panose="020B0604020202020204"/>
+                <a:ea typeface="Arial" panose="020B0604020202020204"/>
+                <a:cs typeface="Arial" panose="020B0604020202020204"/>
               </a:rPr>
               <a:t>Week ending · {{DATE}}</a:t>
             </a:r>
@@ -1027,9 +1030,9 @@
               <a:solidFill>
                 <a:srgbClr val="D71440"/>
               </a:solidFill>
-              <a:latin typeface="Arial" panose="020B0604020202090204"/>
-              <a:ea typeface="Arial" panose="020B0604020202090204"/>
-              <a:cs typeface="Arial" panose="020B0604020202090204"/>
+              <a:latin typeface="Arial" panose="020B0604020202020204"/>
+              <a:ea typeface="Arial" panose="020B0604020202020204"/>
+              <a:cs typeface="Arial" panose="020B0604020202020204"/>
             </a:endParaRPr>
           </a:p>
         </p:txBody>
@@ -1065,9 +1068,9 @@
                 <a:solidFill>
                   <a:srgbClr val="5E6478"/>
                 </a:solidFill>
-                <a:latin typeface="Arial" panose="020B0604020202090204"/>
-                <a:ea typeface="Arial" panose="020B0604020202090204"/>
-                <a:cs typeface="Arial" panose="020B0604020202090204"/>
+                <a:latin typeface="Arial" panose="020B0604020202020204"/>
+                <a:ea typeface="Arial" panose="020B0604020202020204"/>
+                <a:cs typeface="Arial" panose="020B0604020202020204"/>
               </a:rPr>
               <a:t>Presenter · {{AUTHOR}}</a:t>
             </a:r>
@@ -1075,9 +1078,9 @@
               <a:solidFill>
                 <a:srgbClr val="5E6478"/>
               </a:solidFill>
-              <a:latin typeface="Arial" panose="020B0604020202090204"/>
-              <a:ea typeface="Arial" panose="020B0604020202090204"/>
-              <a:cs typeface="Arial" panose="020B0604020202090204"/>
+              <a:latin typeface="Arial" panose="020B0604020202020204"/>
+              <a:ea typeface="Arial" panose="020B0604020202020204"/>
+              <a:cs typeface="Arial" panose="020B0604020202020204"/>
             </a:endParaRPr>
           </a:p>
         </p:txBody>
@@ -1214,9 +1217,9 @@
                 <a:solidFill>
                   <a:srgbClr val="FFFFFF"/>
                 </a:solidFill>
-                <a:latin typeface="Arial" panose="020B0604020202090204"/>
-                <a:ea typeface="Arial" panose="020B0604020202090204"/>
-                <a:cs typeface="Arial" panose="020B0604020202090204"/>
+                <a:latin typeface="Arial" panose="020B0604020202020204"/>
+                <a:ea typeface="Arial" panose="020B0604020202020204"/>
+                <a:cs typeface="Arial" panose="020B0604020202020204"/>
               </a:rPr>
               <a:t>EE6008 · HUMAN POSE ANALYTICS</a:t>
             </a:r>
@@ -1224,9 +1227,9 @@
               <a:solidFill>
                 <a:srgbClr val="FFFFFF"/>
               </a:solidFill>
-              <a:latin typeface="Arial" panose="020B0604020202090204"/>
-              <a:ea typeface="Arial" panose="020B0604020202090204"/>
-              <a:cs typeface="Arial" panose="020B0604020202090204"/>
+              <a:latin typeface="Arial" panose="020B0604020202020204"/>
+              <a:ea typeface="Arial" panose="020B0604020202020204"/>
+              <a:cs typeface="Arial" panose="020B0604020202020204"/>
             </a:endParaRPr>
           </a:p>
         </p:txBody>
@@ -1360,9 +1363,9 @@
                 <a:solidFill>
                   <a:srgbClr val="181C62"/>
                 </a:solidFill>
-                <a:latin typeface="Arial" panose="020B0604020202090204"/>
-                <a:ea typeface="Arial" panose="020B0604020202090204"/>
-                <a:cs typeface="Arial" panose="020B0604020202090204"/>
+                <a:latin typeface="Arial" panose="020B0604020202020204"/>
+                <a:ea typeface="Arial" panose="020B0604020202020204"/>
+                <a:cs typeface="Arial" panose="020B0604020202020204"/>
               </a:rPr>
               <a:t>EE6008 · HUMAN POSE ANALYTICS</a:t>
             </a:r>
@@ -1370,9 +1373,9 @@
               <a:solidFill>
                 <a:srgbClr val="181C62"/>
               </a:solidFill>
-              <a:latin typeface="Arial" panose="020B0604020202090204"/>
-              <a:ea typeface="Arial" panose="020B0604020202090204"/>
-              <a:cs typeface="Arial" panose="020B0604020202090204"/>
+              <a:latin typeface="Arial" panose="020B0604020202020204"/>
+              <a:ea typeface="Arial" panose="020B0604020202020204"/>
+              <a:cs typeface="Arial" panose="020B0604020202020204"/>
             </a:endParaRPr>
           </a:p>
         </p:txBody>
@@ -1430,9 +1433,9 @@
                 <a:solidFill>
                   <a:srgbClr val="181C62"/>
                 </a:solidFill>
-                <a:latin typeface="Arial" panose="020B0604020202090204"/>
-                <a:ea typeface="Arial" panose="020B0604020202090204"/>
-                <a:cs typeface="Arial" panose="020B0604020202090204"/>
+                <a:latin typeface="Arial" panose="020B0604020202020204"/>
+                <a:ea typeface="Arial" panose="020B0604020202020204"/>
+                <a:cs typeface="Arial" panose="020B0604020202020204"/>
               </a:rPr>
               <a:t>Thank You</a:t>
             </a:r>
@@ -1440,9 +1443,9 @@
               <a:solidFill>
                 <a:srgbClr val="181C62"/>
               </a:solidFill>
-              <a:latin typeface="Arial" panose="020B0604020202090204"/>
-              <a:ea typeface="Arial" panose="020B0604020202090204"/>
-              <a:cs typeface="Arial" panose="020B0604020202090204"/>
+              <a:latin typeface="Arial" panose="020B0604020202020204"/>
+              <a:ea typeface="Arial" panose="020B0604020202020204"/>
+              <a:cs typeface="Arial" panose="020B0604020202020204"/>
             </a:endParaRPr>
           </a:p>
         </p:txBody>
@@ -1579,9 +1582,9 @@
                 <a:solidFill>
                   <a:srgbClr val="FFFFFF"/>
                 </a:solidFill>
-                <a:latin typeface="Arial" panose="020B0604020202090204"/>
-                <a:ea typeface="Arial" panose="020B0604020202090204"/>
-                <a:cs typeface="Arial" panose="020B0604020202090204"/>
+                <a:latin typeface="Arial" panose="020B0604020202020204"/>
+                <a:ea typeface="Arial" panose="020B0604020202020204"/>
+                <a:cs typeface="Arial" panose="020B0604020202020204"/>
               </a:rPr>
               <a:t>EE6008 · HUMAN POSE ANALYTICS</a:t>
             </a:r>
@@ -1589,9 +1592,9 @@
               <a:solidFill>
                 <a:srgbClr val="FFFFFF"/>
               </a:solidFill>
-              <a:latin typeface="Arial" panose="020B0604020202090204"/>
-              <a:ea typeface="Arial" panose="020B0604020202090204"/>
-              <a:cs typeface="Arial" panose="020B0604020202090204"/>
+              <a:latin typeface="Arial" panose="020B0604020202020204"/>
+              <a:ea typeface="Arial" panose="020B0604020202020204"/>
+              <a:cs typeface="Arial" panose="020B0604020202020204"/>
             </a:endParaRPr>
           </a:p>
         </p:txBody>
@@ -1891,9 +1894,9 @@
                 <a:solidFill>
                   <a:srgbClr val="D71440"/>
                 </a:solidFill>
-                <a:latin typeface="Arial" panose="020B0604020202090204"/>
-                <a:ea typeface="Arial" panose="020B0604020202090204"/>
-                <a:cs typeface="Arial" panose="020B0604020202090204"/>
+                <a:latin typeface="Arial" panose="020B0604020202020204"/>
+                <a:ea typeface="Arial" panose="020B0604020202020204"/>
+                <a:cs typeface="Arial" panose="020B0604020202020204"/>
               </a:rPr>
               <a:t>WEEKLY TAKEAWAY</a:t>
             </a:r>
@@ -1901,9 +1904,9 @@
               <a:solidFill>
                 <a:srgbClr val="D71440"/>
               </a:solidFill>
-              <a:latin typeface="Arial" panose="020B0604020202090204"/>
-              <a:ea typeface="Arial" panose="020B0604020202090204"/>
-              <a:cs typeface="Arial" panose="020B0604020202090204"/>
+              <a:latin typeface="Arial" panose="020B0604020202020204"/>
+              <a:ea typeface="Arial" panose="020B0604020202020204"/>
+              <a:cs typeface="Arial" panose="020B0604020202020204"/>
             </a:endParaRPr>
           </a:p>
         </p:txBody>
@@ -1939,9 +1942,9 @@
                 <a:solidFill>
                   <a:srgbClr val="FFFFFF"/>
                 </a:solidFill>
-                <a:latin typeface="Arial" panose="020B0604020202090204"/>
-                <a:ea typeface="Arial" panose="020B0604020202090204"/>
-                <a:cs typeface="Arial" panose="020B0604020202090204"/>
+                <a:latin typeface="Arial" panose="020B0604020202020204"/>
+                <a:ea typeface="Arial" panose="020B0604020202020204"/>
+                <a:cs typeface="Arial" panose="020B0604020202020204"/>
               </a:rPr>
               <a:t>PROJECT STATUS</a:t>
             </a:r>
@@ -1949,9 +1952,9 @@
               <a:solidFill>
                 <a:srgbClr val="FFFFFF"/>
               </a:solidFill>
-              <a:latin typeface="Arial" panose="020B0604020202090204"/>
-              <a:ea typeface="Arial" panose="020B0604020202090204"/>
-              <a:cs typeface="Arial" panose="020B0604020202090204"/>
+              <a:latin typeface="Arial" panose="020B0604020202020204"/>
+              <a:ea typeface="Arial" panose="020B0604020202020204"/>
+              <a:cs typeface="Arial" panose="020B0604020202020204"/>
             </a:endParaRPr>
           </a:p>
         </p:txBody>
@@ -1987,9 +1990,9 @@
                 <a:solidFill>
                   <a:srgbClr val="181C62"/>
                 </a:solidFill>
-                <a:latin typeface="Arial" panose="020B0604020202090204"/>
-                <a:ea typeface="Arial" panose="020B0604020202090204"/>
-                <a:cs typeface="Arial" panose="020B0604020202090204"/>
+                <a:latin typeface="Arial" panose="020B0604020202020204"/>
+                <a:ea typeface="Arial" panose="020B0604020202020204"/>
+                <a:cs typeface="Arial" panose="020B0604020202020204"/>
               </a:rPr>
               <a:t>CURRENT MILESTONE · EVIDENCE · BLOCKER · NEXT CHECKPOINT</a:t>
             </a:r>
@@ -1997,9 +2000,9 @@
               <a:solidFill>
                 <a:srgbClr val="181C62"/>
               </a:solidFill>
-              <a:latin typeface="Arial" panose="020B0604020202090204"/>
-              <a:ea typeface="Arial" panose="020B0604020202090204"/>
-              <a:cs typeface="Arial" panose="020B0604020202090204"/>
+              <a:latin typeface="Arial" panose="020B0604020202020204"/>
+              <a:ea typeface="Arial" panose="020B0604020202020204"/>
+              <a:cs typeface="Arial" panose="020B0604020202020204"/>
             </a:endParaRPr>
           </a:p>
         </p:txBody>
@@ -2035,9 +2038,9 @@
                 <a:solidFill>
                   <a:srgbClr val="5E6478"/>
                 </a:solidFill>
-                <a:latin typeface="Arial" panose="020B0604020202090204"/>
-                <a:ea typeface="Arial" panose="020B0604020202090204"/>
-                <a:cs typeface="Arial" panose="020B0604020202090204"/>
+                <a:latin typeface="Arial" panose="020B0604020202020204"/>
+                <a:ea typeface="Arial" panose="020B0604020202020204"/>
+                <a:cs typeface="Arial" panose="020B0604020202020204"/>
               </a:rPr>
               <a:t>Kick-off</a:t>
             </a:r>
@@ -2045,9 +2048,9 @@
               <a:solidFill>
                 <a:srgbClr val="5E6478"/>
               </a:solidFill>
-              <a:latin typeface="Arial" panose="020B0604020202090204"/>
-              <a:ea typeface="Arial" panose="020B0604020202090204"/>
-              <a:cs typeface="Arial" panose="020B0604020202090204"/>
+              <a:latin typeface="Arial" panose="020B0604020202020204"/>
+              <a:ea typeface="Arial" panose="020B0604020202020204"/>
+              <a:cs typeface="Arial" panose="020B0604020202020204"/>
             </a:endParaRPr>
           </a:p>
         </p:txBody>
@@ -2083,9 +2086,9 @@
                 <a:solidFill>
                   <a:srgbClr val="5E6478"/>
                 </a:solidFill>
-                <a:latin typeface="Arial" panose="020B0604020202090204"/>
-                <a:ea typeface="Arial" panose="020B0604020202090204"/>
-                <a:cs typeface="Arial" panose="020B0604020202090204"/>
+                <a:latin typeface="Arial" panose="020B0604020202020204"/>
+                <a:ea typeface="Arial" panose="020B0604020202020204"/>
+                <a:cs typeface="Arial" panose="020B0604020202020204"/>
               </a:rPr>
               <a:t>Data</a:t>
             </a:r>
@@ -2093,9 +2096,9 @@
               <a:solidFill>
                 <a:srgbClr val="5E6478"/>
               </a:solidFill>
-              <a:latin typeface="Arial" panose="020B0604020202090204"/>
-              <a:ea typeface="Arial" panose="020B0604020202090204"/>
-              <a:cs typeface="Arial" panose="020B0604020202090204"/>
+              <a:latin typeface="Arial" panose="020B0604020202020204"/>
+              <a:ea typeface="Arial" panose="020B0604020202020204"/>
+              <a:cs typeface="Arial" panose="020B0604020202020204"/>
             </a:endParaRPr>
           </a:p>
         </p:txBody>
@@ -2131,9 +2134,9 @@
                 <a:solidFill>
                   <a:srgbClr val="D71440"/>
                 </a:solidFill>
-                <a:latin typeface="Arial" panose="020B0604020202090204"/>
-                <a:ea typeface="Arial" panose="020B0604020202090204"/>
-                <a:cs typeface="Arial" panose="020B0604020202090204"/>
+                <a:latin typeface="Arial" panose="020B0604020202020204"/>
+                <a:ea typeface="Arial" panose="020B0604020202020204"/>
+                <a:cs typeface="Arial" panose="020B0604020202020204"/>
               </a:rPr>
               <a:t>Baselines</a:t>
             </a:r>
@@ -2141,9 +2144,9 @@
               <a:solidFill>
                 <a:srgbClr val="D71440"/>
               </a:solidFill>
-              <a:latin typeface="Arial" panose="020B0604020202090204"/>
-              <a:ea typeface="Arial" panose="020B0604020202090204"/>
-              <a:cs typeface="Arial" panose="020B0604020202090204"/>
+              <a:latin typeface="Arial" panose="020B0604020202020204"/>
+              <a:ea typeface="Arial" panose="020B0604020202020204"/>
+              <a:cs typeface="Arial" panose="020B0604020202020204"/>
             </a:endParaRPr>
           </a:p>
         </p:txBody>
@@ -2179,9 +2182,9 @@
                 <a:solidFill>
                   <a:srgbClr val="5E6478"/>
                 </a:solidFill>
-                <a:latin typeface="Arial" panose="020B0604020202090204"/>
-                <a:ea typeface="Arial" panose="020B0604020202090204"/>
-                <a:cs typeface="Arial" panose="020B0604020202090204"/>
+                <a:latin typeface="Arial" panose="020B0604020202020204"/>
+                <a:ea typeface="Arial" panose="020B0604020202020204"/>
+                <a:cs typeface="Arial" panose="020B0604020202020204"/>
               </a:rPr>
               <a:t>IP Module</a:t>
             </a:r>
@@ -2189,9 +2192,9 @@
               <a:solidFill>
                 <a:srgbClr val="5E6478"/>
               </a:solidFill>
-              <a:latin typeface="Arial" panose="020B0604020202090204"/>
-              <a:ea typeface="Arial" panose="020B0604020202090204"/>
-              <a:cs typeface="Arial" panose="020B0604020202090204"/>
+              <a:latin typeface="Arial" panose="020B0604020202020204"/>
+              <a:ea typeface="Arial" panose="020B0604020202020204"/>
+              <a:cs typeface="Arial" panose="020B0604020202020204"/>
             </a:endParaRPr>
           </a:p>
         </p:txBody>
@@ -2227,9 +2230,9 @@
                 <a:solidFill>
                   <a:srgbClr val="5E6478"/>
                 </a:solidFill>
-                <a:latin typeface="Arial" panose="020B0604020202090204"/>
-                <a:ea typeface="Arial" panose="020B0604020202090204"/>
-                <a:cs typeface="Arial" panose="020B0604020202090204"/>
+                <a:latin typeface="Arial" panose="020B0604020202020204"/>
+                <a:ea typeface="Arial" panose="020B0604020202020204"/>
+                <a:cs typeface="Arial" panose="020B0604020202020204"/>
               </a:rPr>
               <a:t>Experiments</a:t>
             </a:r>
@@ -2237,9 +2240,9 @@
               <a:solidFill>
                 <a:srgbClr val="5E6478"/>
               </a:solidFill>
-              <a:latin typeface="Arial" panose="020B0604020202090204"/>
-              <a:ea typeface="Arial" panose="020B0604020202090204"/>
-              <a:cs typeface="Arial" panose="020B0604020202090204"/>
+              <a:latin typeface="Arial" panose="020B0604020202020204"/>
+              <a:ea typeface="Arial" panose="020B0604020202020204"/>
+              <a:cs typeface="Arial" panose="020B0604020202020204"/>
             </a:endParaRPr>
           </a:p>
         </p:txBody>
@@ -2275,9 +2278,9 @@
                 <a:solidFill>
                   <a:srgbClr val="5E6478"/>
                 </a:solidFill>
-                <a:latin typeface="Arial" panose="020B0604020202090204"/>
-                <a:ea typeface="Arial" panose="020B0604020202090204"/>
-                <a:cs typeface="Arial" panose="020B0604020202090204"/>
+                <a:latin typeface="Arial" panose="020B0604020202020204"/>
+                <a:ea typeface="Arial" panose="020B0604020202020204"/>
+                <a:cs typeface="Arial" panose="020B0604020202020204"/>
               </a:rPr>
               <a:t>Final Report</a:t>
             </a:r>
@@ -2285,9 +2288,9 @@
               <a:solidFill>
                 <a:srgbClr val="5E6478"/>
               </a:solidFill>
-              <a:latin typeface="Arial" panose="020B0604020202090204"/>
-              <a:ea typeface="Arial" panose="020B0604020202090204"/>
-              <a:cs typeface="Arial" panose="020B0604020202090204"/>
+              <a:latin typeface="Arial" panose="020B0604020202020204"/>
+              <a:ea typeface="Arial" panose="020B0604020202020204"/>
+              <a:cs typeface="Arial" panose="020B0604020202020204"/>
             </a:endParaRPr>
           </a:p>
         </p:txBody>
@@ -2323,9 +2326,9 @@
                 <a:solidFill>
                   <a:srgbClr val="20243A"/>
                 </a:solidFill>
-                <a:latin typeface="Arial" panose="020B0604020202090204"/>
-                <a:ea typeface="Arial" panose="020B0604020202090204"/>
-                <a:cs typeface="Arial" panose="020B0604020202090204"/>
+                <a:latin typeface="Arial" panose="020B0604020202020204"/>
+                <a:ea typeface="Arial" panose="020B0604020202020204"/>
+                <a:cs typeface="Arial" panose="020B0604020202020204"/>
               </a:rPr>
               <a:t>Weekly Snapshot &amp; Milestone</a:t>
             </a:r>
@@ -2333,9 +2336,9 @@
               <a:solidFill>
                 <a:srgbClr val="20243A"/>
               </a:solidFill>
-              <a:latin typeface="Arial" panose="020B0604020202090204"/>
-              <a:ea typeface="Arial" panose="020B0604020202090204"/>
-              <a:cs typeface="Arial" panose="020B0604020202090204"/>
+              <a:latin typeface="Arial" panose="020B0604020202020204"/>
+              <a:ea typeface="Arial" panose="020B0604020202020204"/>
+              <a:cs typeface="Arial" panose="020B0604020202020204"/>
             </a:endParaRPr>
           </a:p>
         </p:txBody>
@@ -2375,9 +2378,9 @@
                 <a:solidFill>
                   <a:srgbClr val="181C62"/>
                 </a:solidFill>
-                <a:latin typeface="Arial" panose="020B0604020202090204"/>
-                <a:ea typeface="Arial" panose="020B0604020202090204"/>
-                <a:cs typeface="Arial" panose="020B0604020202090204"/>
+                <a:latin typeface="Arial" panose="020B0604020202020204"/>
+                <a:ea typeface="Arial" panose="020B0604020202020204"/>
+                <a:cs typeface="Arial" panose="020B0604020202020204"/>
               </a:rPr>
               <a:t>{{KEY_MESSAGE}}</a:t>
             </a:r>
@@ -2385,9 +2388,9 @@
               <a:solidFill>
                 <a:srgbClr val="181C62"/>
               </a:solidFill>
-              <a:latin typeface="Arial" panose="020B0604020202090204"/>
-              <a:ea typeface="Arial" panose="020B0604020202090204"/>
-              <a:cs typeface="Arial" panose="020B0604020202090204"/>
+              <a:latin typeface="Arial" panose="020B0604020202020204"/>
+              <a:ea typeface="Arial" panose="020B0604020202020204"/>
+              <a:cs typeface="Arial" panose="020B0604020202020204"/>
             </a:endParaRPr>
           </a:p>
           <a:p>
@@ -2401,9 +2404,9 @@
                 <a:solidFill>
                   <a:srgbClr val="5E6478"/>
                 </a:solidFill>
-                <a:latin typeface="Arial" panose="020B0604020202090204"/>
-                <a:ea typeface="Arial" panose="020B0604020202090204"/>
-                <a:cs typeface="Arial" panose="020B0604020202090204"/>
+                <a:latin typeface="Arial" panose="020B0604020202020204"/>
+                <a:ea typeface="Arial" panose="020B0604020202020204"/>
+                <a:cs typeface="Arial" panose="020B0604020202020204"/>
               </a:rPr>
               <a:t>State the one result or decision the supervisor should remember.</a:t>
             </a:r>
@@ -2411,9 +2414,9 @@
               <a:solidFill>
                 <a:srgbClr val="5E6478"/>
               </a:solidFill>
-              <a:latin typeface="Arial" panose="020B0604020202090204"/>
-              <a:ea typeface="Arial" panose="020B0604020202090204"/>
-              <a:cs typeface="Arial" panose="020B0604020202090204"/>
+              <a:latin typeface="Arial" panose="020B0604020202020204"/>
+              <a:ea typeface="Arial" panose="020B0604020202020204"/>
+              <a:cs typeface="Arial" panose="020B0604020202020204"/>
             </a:endParaRPr>
           </a:p>
         </p:txBody>
@@ -2453,9 +2456,9 @@
                 <a:solidFill>
                   <a:srgbClr val="FFFFFF"/>
                 </a:solidFill>
-                <a:latin typeface="Arial" panose="020B0604020202090204"/>
-                <a:ea typeface="Arial" panose="020B0604020202090204"/>
-                <a:cs typeface="Arial" panose="020B0604020202090204"/>
+                <a:latin typeface="Arial" panose="020B0604020202020204"/>
+                <a:ea typeface="Arial" panose="020B0604020202020204"/>
+                <a:cs typeface="Arial" panose="020B0604020202020204"/>
               </a:rPr>
               <a:t>{{STATUS}}</a:t>
             </a:r>
@@ -2463,9 +2466,9 @@
               <a:solidFill>
                 <a:srgbClr val="FFFFFF"/>
               </a:solidFill>
-              <a:latin typeface="Arial" panose="020B0604020202090204"/>
-              <a:ea typeface="Arial" panose="020B0604020202090204"/>
-              <a:cs typeface="Arial" panose="020B0604020202090204"/>
+              <a:latin typeface="Arial" panose="020B0604020202020204"/>
+              <a:ea typeface="Arial" panose="020B0604020202020204"/>
+              <a:cs typeface="Arial" panose="020B0604020202020204"/>
             </a:endParaRPr>
           </a:p>
           <a:p>
@@ -2479,9 +2482,9 @@
                 <a:solidFill>
                   <a:srgbClr val="C8C8C8"/>
                 </a:solidFill>
-                <a:latin typeface="Arial" panose="020B0604020202090204"/>
-                <a:ea typeface="Arial" panose="020B0604020202090204"/>
-                <a:cs typeface="Arial" panose="020B0604020202090204"/>
+                <a:latin typeface="Arial" panose="020B0604020202020204"/>
+                <a:ea typeface="Arial" panose="020B0604020202020204"/>
+                <a:cs typeface="Arial" panose="020B0604020202020204"/>
               </a:rPr>
               <a:t>ON TRACK · AT RISK · BLOCKED</a:t>
             </a:r>
@@ -2489,9 +2492,9 @@
               <a:solidFill>
                 <a:srgbClr val="C8C8C8"/>
               </a:solidFill>
-              <a:latin typeface="Arial" panose="020B0604020202090204"/>
-              <a:ea typeface="Arial" panose="020B0604020202090204"/>
-              <a:cs typeface="Arial" panose="020B0604020202090204"/>
+              <a:latin typeface="Arial" panose="020B0604020202020204"/>
+              <a:ea typeface="Arial" panose="020B0604020202020204"/>
+              <a:cs typeface="Arial" panose="020B0604020202020204"/>
             </a:endParaRPr>
           </a:p>
         </p:txBody>
@@ -2531,9 +2534,9 @@
                 <a:solidFill>
                   <a:srgbClr val="20243A"/>
                 </a:solidFill>
-                <a:latin typeface="Arial" panose="020B0604020202090204"/>
-                <a:ea typeface="Arial" panose="020B0604020202090204"/>
-                <a:cs typeface="Arial" panose="020B0604020202090204"/>
+                <a:latin typeface="Arial" panose="020B0604020202020204"/>
+                <a:ea typeface="Arial" panose="020B0604020202020204"/>
+                <a:cs typeface="Arial" panose="020B0604020202020204"/>
               </a:rPr>
               <a:t>{{MILESTONE}}</a:t>
             </a:r>
@@ -2541,9 +2544,9 @@
               <a:solidFill>
                 <a:srgbClr val="20243A"/>
               </a:solidFill>
-              <a:latin typeface="Arial" panose="020B0604020202090204"/>
-              <a:ea typeface="Arial" panose="020B0604020202090204"/>
-              <a:cs typeface="Arial" panose="020B0604020202090204"/>
+              <a:latin typeface="Arial" panose="020B0604020202020204"/>
+              <a:ea typeface="Arial" panose="020B0604020202020204"/>
+              <a:cs typeface="Arial" panose="020B0604020202020204"/>
             </a:endParaRPr>
           </a:p>
           <a:p>
@@ -2557,9 +2560,9 @@
                 <a:solidFill>
                   <a:srgbClr val="5E6478"/>
                 </a:solidFill>
-                <a:latin typeface="Arial" panose="020B0604020202090204"/>
-                <a:ea typeface="Arial" panose="020B0604020202090204"/>
-                <a:cs typeface="Arial" panose="020B0604020202090204"/>
+                <a:latin typeface="Arial" panose="020B0604020202020204"/>
+                <a:ea typeface="Arial" panose="020B0604020202020204"/>
+                <a:cs typeface="Arial" panose="020B0604020202020204"/>
               </a:rPr>
               <a:t>Evidence completed: … | Current blocker: … | Next checkpoint: …</a:t>
             </a:r>
@@ -2567,9 +2570,9 @@
               <a:solidFill>
                 <a:srgbClr val="5E6478"/>
               </a:solidFill>
-              <a:latin typeface="Arial" panose="020B0604020202090204"/>
-              <a:ea typeface="Arial" panose="020B0604020202090204"/>
-              <a:cs typeface="Arial" panose="020B0604020202090204"/>
+              <a:latin typeface="Arial" panose="020B0604020202020204"/>
+              <a:ea typeface="Arial" panose="020B0604020202020204"/>
+              <a:cs typeface="Arial" panose="020B0604020202020204"/>
             </a:endParaRPr>
           </a:p>
         </p:txBody>
@@ -2605,9 +2608,9 @@
                 <a:solidFill>
                   <a:srgbClr val="FFFFFF"/>
                 </a:solidFill>
-                <a:latin typeface="Arial" panose="020B0604020202090204"/>
-                <a:ea typeface="Arial" panose="020B0604020202090204"/>
-                <a:cs typeface="Arial" panose="020B0604020202090204"/>
+                <a:latin typeface="Arial" panose="020B0604020202020204"/>
+                <a:ea typeface="Arial" panose="020B0604020202020204"/>
+                <a:cs typeface="Arial" panose="020B0604020202020204"/>
               </a:rPr>
               <a:t>{{SOURCE}}</a:t>
             </a:r>
@@ -2615,9 +2618,9 @@
               <a:solidFill>
                 <a:srgbClr val="FFFFFF"/>
               </a:solidFill>
-              <a:latin typeface="Arial" panose="020B0604020202090204"/>
-              <a:ea typeface="Arial" panose="020B0604020202090204"/>
-              <a:cs typeface="Arial" panose="020B0604020202090204"/>
+              <a:latin typeface="Arial" panose="020B0604020202020204"/>
+              <a:ea typeface="Arial" panose="020B0604020202020204"/>
+              <a:cs typeface="Arial" panose="020B0604020202020204"/>
             </a:endParaRPr>
           </a:p>
         </p:txBody>
@@ -2653,9 +2656,9 @@
                 <a:solidFill>
                   <a:srgbClr val="FFFFFF"/>
                 </a:solidFill>
-                <a:latin typeface="Arial" panose="020B0604020202090204"/>
-                <a:ea typeface="Arial" panose="020B0604020202090204"/>
-                <a:cs typeface="Arial" panose="020B0604020202090204"/>
+                <a:latin typeface="Arial" panose="020B0604020202020204"/>
+                <a:ea typeface="Arial" panose="020B0604020202020204"/>
+                <a:cs typeface="Arial" panose="020B0604020202020204"/>
               </a:rPr>
               <a:t>{{PAGE_NUM}}</a:t>
             </a:r>
@@ -2663,9 +2666,9 @@
               <a:solidFill>
                 <a:srgbClr val="FFFFFF"/>
               </a:solidFill>
-              <a:latin typeface="Arial" panose="020B0604020202090204"/>
-              <a:ea typeface="Arial" panose="020B0604020202090204"/>
-              <a:cs typeface="Arial" panose="020B0604020202090204"/>
+              <a:latin typeface="Arial" panose="020B0604020202020204"/>
+              <a:ea typeface="Arial" panose="020B0604020202020204"/>
+              <a:cs typeface="Arial" panose="020B0604020202020204"/>
             </a:endParaRPr>
           </a:p>
         </p:txBody>
@@ -2802,9 +2805,9 @@
                 <a:solidFill>
                   <a:srgbClr val="FFFFFF"/>
                 </a:solidFill>
-                <a:latin typeface="Arial" panose="020B0604020202090204"/>
-                <a:ea typeface="Arial" panose="020B0604020202090204"/>
-                <a:cs typeface="Arial" panose="020B0604020202090204"/>
+                <a:latin typeface="Arial" panose="020B0604020202020204"/>
+                <a:ea typeface="Arial" panose="020B0604020202020204"/>
+                <a:cs typeface="Arial" panose="020B0604020202020204"/>
               </a:rPr>
               <a:t>EE6008 · HUMAN POSE ANALYTICS</a:t>
             </a:r>
@@ -2812,9 +2815,9 @@
               <a:solidFill>
                 <a:srgbClr val="FFFFFF"/>
               </a:solidFill>
-              <a:latin typeface="Arial" panose="020B0604020202090204"/>
-              <a:ea typeface="Arial" panose="020B0604020202090204"/>
-              <a:cs typeface="Arial" panose="020B0604020202090204"/>
+              <a:latin typeface="Arial" panose="020B0604020202020204"/>
+              <a:ea typeface="Arial" panose="020B0604020202020204"/>
+              <a:cs typeface="Arial" panose="020B0604020202020204"/>
             </a:endParaRPr>
           </a:p>
         </p:txBody>
@@ -2968,9 +2971,9 @@
                 <a:solidFill>
                   <a:srgbClr val="D71440"/>
                 </a:solidFill>
-                <a:latin typeface="Arial" panose="020B0604020202090204"/>
-                <a:ea typeface="Arial" panose="020B0604020202090204"/>
-                <a:cs typeface="Arial" panose="020B0604020202090204"/>
+                <a:latin typeface="Arial" panose="020B0604020202020204"/>
+                <a:ea typeface="Arial" panose="020B0604020202020204"/>
+                <a:cs typeface="Arial" panose="020B0604020202020204"/>
               </a:rPr>
               <a:t>THIS WEEK</a:t>
             </a:r>
@@ -2978,9 +2981,9 @@
               <a:solidFill>
                 <a:srgbClr val="D71440"/>
               </a:solidFill>
-              <a:latin typeface="Arial" panose="020B0604020202090204"/>
-              <a:ea typeface="Arial" panose="020B0604020202090204"/>
-              <a:cs typeface="Arial" panose="020B0604020202090204"/>
+              <a:latin typeface="Arial" panose="020B0604020202020204"/>
+              <a:ea typeface="Arial" panose="020B0604020202020204"/>
+              <a:cs typeface="Arial" panose="020B0604020202020204"/>
             </a:endParaRPr>
           </a:p>
         </p:txBody>
@@ -3016,9 +3019,9 @@
                 <a:solidFill>
                   <a:srgbClr val="181C62"/>
                 </a:solidFill>
-                <a:latin typeface="Arial" panose="020B0604020202090204"/>
-                <a:ea typeface="Arial" panose="020B0604020202090204"/>
-                <a:cs typeface="Arial" panose="020B0604020202090204"/>
+                <a:latin typeface="Arial" panose="020B0604020202020204"/>
+                <a:ea typeface="Arial" panose="020B0604020202020204"/>
+                <a:cs typeface="Arial" panose="020B0604020202020204"/>
               </a:rPr>
               <a:t>PIPELINE / ARCHITECTURE / IMPLEMENTATION EVIDENCE</a:t>
             </a:r>
@@ -3026,9 +3029,9 @@
               <a:solidFill>
                 <a:srgbClr val="181C62"/>
               </a:solidFill>
-              <a:latin typeface="Arial" panose="020B0604020202090204"/>
-              <a:ea typeface="Arial" panose="020B0604020202090204"/>
-              <a:cs typeface="Arial" panose="020B0604020202090204"/>
+              <a:latin typeface="Arial" panose="020B0604020202020204"/>
+              <a:ea typeface="Arial" panose="020B0604020202020204"/>
+              <a:cs typeface="Arial" panose="020B0604020202020204"/>
             </a:endParaRPr>
           </a:p>
         </p:txBody>
@@ -3064,9 +3067,9 @@
                 <a:solidFill>
                   <a:srgbClr val="FFFFFF"/>
                 </a:solidFill>
-                <a:latin typeface="Arial" panose="020B0604020202090204"/>
-                <a:ea typeface="Arial" panose="020B0604020202090204"/>
-                <a:cs typeface="Arial" panose="020B0604020202090204"/>
+                <a:latin typeface="Arial" panose="020B0604020202020204"/>
+                <a:ea typeface="Arial" panose="020B0604020202020204"/>
+                <a:cs typeface="Arial" panose="020B0604020202020204"/>
               </a:rPr>
               <a:t>TECHNICAL TAKEAWAY</a:t>
             </a:r>
@@ -3074,9 +3077,9 @@
               <a:solidFill>
                 <a:srgbClr val="FFFFFF"/>
               </a:solidFill>
-              <a:latin typeface="Arial" panose="020B0604020202090204"/>
-              <a:ea typeface="Arial" panose="020B0604020202090204"/>
-              <a:cs typeface="Arial" panose="020B0604020202090204"/>
+              <a:latin typeface="Arial" panose="020B0604020202020204"/>
+              <a:ea typeface="Arial" panose="020B0604020202020204"/>
+              <a:cs typeface="Arial" panose="020B0604020202020204"/>
             </a:endParaRPr>
           </a:p>
         </p:txBody>
@@ -3112,9 +3115,9 @@
                 <a:solidFill>
                   <a:srgbClr val="20243A"/>
                 </a:solidFill>
-                <a:latin typeface="Arial" panose="020B0604020202090204"/>
-                <a:ea typeface="Arial" panose="020B0604020202090204"/>
-                <a:cs typeface="Arial" panose="020B0604020202090204"/>
+                <a:latin typeface="Arial" panose="020B0604020202020204"/>
+                <a:ea typeface="Arial" panose="020B0604020202020204"/>
+                <a:cs typeface="Arial" panose="020B0604020202020204"/>
               </a:rPr>
               <a:t>Scoping the Interaction Subset</a:t>
             </a:r>
@@ -3122,9 +3125,9 @@
               <a:solidFill>
                 <a:srgbClr val="20243A"/>
               </a:solidFill>
-              <a:latin typeface="Arial" panose="020B0604020202090204"/>
-              <a:ea typeface="Arial" panose="020B0604020202090204"/>
-              <a:cs typeface="Arial" panose="020B0604020202090204"/>
+              <a:latin typeface="Arial" panose="020B0604020202020204"/>
+              <a:ea typeface="Arial" panose="020B0604020202020204"/>
+              <a:cs typeface="Arial" panose="020B0604020202020204"/>
             </a:endParaRPr>
           </a:p>
         </p:txBody>
@@ -3164,9 +3167,9 @@
                 <a:solidFill>
                   <a:srgbClr val="20243A"/>
                 </a:solidFill>
-                <a:latin typeface="Arial" panose="020B0604020202090204"/>
-                <a:ea typeface="Arial" panose="020B0604020202090204"/>
-                <a:cs typeface="Arial" panose="020B0604020202090204"/>
+                <a:latin typeface="Arial" panose="020B0604020202020204"/>
+                <a:ea typeface="Arial" panose="020B0604020202020204"/>
+                <a:cs typeface="Arial" panose="020B0604020202020204"/>
               </a:rPr>
               <a:t>NTU RGB+D 120</a:t>
             </a:r>
@@ -3175,9 +3178,9 @@
                 <a:solidFill>
                   <a:srgbClr val="20243A"/>
                 </a:solidFill>
-                <a:latin typeface="Arial" panose="020B0604020202090204"/>
-                <a:ea typeface="Arial" panose="020B0604020202090204"/>
-                <a:cs typeface="Arial" panose="020B0604020202090204"/>
+                <a:latin typeface="Arial" panose="020B0604020202020204"/>
+                <a:ea typeface="Arial" panose="020B0604020202020204"/>
+                <a:cs typeface="Arial" panose="020B0604020202020204"/>
               </a:rPr>
             </a:br>
             <a:r>
@@ -3185,9 +3188,9 @@
                 <a:solidFill>
                   <a:srgbClr val="20243A"/>
                 </a:solidFill>
-                <a:latin typeface="Arial" panose="020B0604020202090204"/>
-                <a:ea typeface="Arial" panose="020B0604020202090204"/>
-                <a:cs typeface="Arial" panose="020B0604020202090204"/>
+                <a:latin typeface="Arial" panose="020B0604020202020204"/>
+                <a:ea typeface="Arial" panose="020B0604020202020204"/>
+                <a:cs typeface="Arial" panose="020B0604020202020204"/>
               </a:rPr>
               <a:t>dataset audit</a:t>
             </a:r>
@@ -3195,9 +3198,9 @@
               <a:solidFill>
                 <a:srgbClr val="20243A"/>
               </a:solidFill>
-              <a:latin typeface="Arial" panose="020B0604020202090204"/>
-              <a:ea typeface="Arial" panose="020B0604020202090204"/>
-              <a:cs typeface="Arial" panose="020B0604020202090204"/>
+              <a:latin typeface="Arial" panose="020B0604020202020204"/>
+              <a:ea typeface="Arial" panose="020B0604020202020204"/>
+              <a:cs typeface="Arial" panose="020B0604020202020204"/>
             </a:endParaRPr>
           </a:p>
           <a:p>
@@ -3214,9 +3217,9 @@
                 <a:solidFill>
                   <a:srgbClr val="5E6478"/>
                 </a:solidFill>
-                <a:latin typeface="Arial" panose="020B0604020202090204"/>
-                <a:ea typeface="Arial" panose="020B0604020202090204"/>
-                <a:cs typeface="Arial" panose="020B0604020202090204"/>
+                <a:latin typeface="Arial" panose="020B0604020202020204"/>
+                <a:ea typeface="Arial" panose="020B0604020202020204"/>
+                <a:cs typeface="Arial" panose="020B0604020202020204"/>
               </a:rPr>
               <a:t>Completed · format, splits, cleaning</a:t>
             </a:r>
@@ -3225,9 +3228,9 @@
                 <a:solidFill>
                   <a:srgbClr val="5E6478"/>
                 </a:solidFill>
-                <a:latin typeface="Arial" panose="020B0604020202090204"/>
-                <a:ea typeface="Arial" panose="020B0604020202090204"/>
-                <a:cs typeface="Arial" panose="020B0604020202090204"/>
+                <a:latin typeface="Arial" panose="020B0604020202020204"/>
+                <a:ea typeface="Arial" panose="020B0604020202020204"/>
+                <a:cs typeface="Arial" panose="020B0604020202020204"/>
               </a:rPr>
             </a:br>
             <a:r>
@@ -3235,9 +3238,9 @@
                 <a:solidFill>
                   <a:srgbClr val="5E6478"/>
                 </a:solidFill>
-                <a:latin typeface="Arial" panose="020B0604020202090204"/>
-                <a:ea typeface="Arial" panose="020B0604020202090204"/>
-                <a:cs typeface="Arial" panose="020B0604020202090204"/>
+                <a:latin typeface="Arial" panose="020B0604020202020204"/>
+                <a:ea typeface="Arial" panose="020B0604020202020204"/>
+                <a:cs typeface="Arial" panose="020B0604020202020204"/>
               </a:rPr>
               <a:t>Planned · parser that keeps bodyID</a:t>
             </a:r>
@@ -3245,9 +3248,9 @@
               <a:solidFill>
                 <a:srgbClr val="5E6478"/>
               </a:solidFill>
-              <a:latin typeface="Arial" panose="020B0604020202090204"/>
-              <a:ea typeface="Arial" panose="020B0604020202090204"/>
-              <a:cs typeface="Arial" panose="020B0604020202090204"/>
+              <a:latin typeface="Arial" panose="020B0604020202020204"/>
+              <a:ea typeface="Arial" panose="020B0604020202020204"/>
+              <a:cs typeface="Arial" panose="020B0604020202020204"/>
             </a:endParaRPr>
           </a:p>
         </p:txBody>
@@ -3287,9 +3290,9 @@
                 <a:solidFill>
                   <a:srgbClr val="5E6478"/>
                 </a:solidFill>
-                <a:latin typeface="Arial" panose="020B0604020202090204"/>
-                <a:ea typeface="Arial" panose="020B0604020202090204"/>
-                <a:cs typeface="Arial" panose="020B0604020202090204"/>
+                <a:latin typeface="Arial" panose="020B0604020202020204"/>
+                <a:ea typeface="Arial" panose="020B0604020202020204"/>
+                <a:cs typeface="Arial" panose="020B0604020202020204"/>
               </a:rPr>
               <a:t>26 mutual classes · 24,732 clips</a:t>
             </a:r>
@@ -3297,9 +3300,9 @@
               <a:solidFill>
                 <a:srgbClr val="5E6478"/>
               </a:solidFill>
-              <a:latin typeface="Arial" panose="020B0604020202090204"/>
-              <a:ea typeface="Arial" panose="020B0604020202090204"/>
-              <a:cs typeface="Arial" panose="020B0604020202090204"/>
+              <a:latin typeface="Arial" panose="020B0604020202020204"/>
+              <a:ea typeface="Arial" panose="020B0604020202020204"/>
+              <a:cs typeface="Arial" panose="020B0604020202020204"/>
             </a:endParaRPr>
           </a:p>
           <a:p>
@@ -3316,9 +3319,9 @@
                 <a:solidFill>
                   <a:srgbClr val="5E6478"/>
                 </a:solidFill>
-                <a:latin typeface="Arial" panose="020B0604020202090204"/>
-                <a:ea typeface="Arial" panose="020B0604020202090204"/>
-                <a:cs typeface="Arial" panose="020B0604020202090204"/>
+                <a:latin typeface="Arial" panose="020B0604020202020204"/>
+                <a:ea typeface="Arial" panose="020B0604020202020204"/>
+                <a:cs typeface="Arial" panose="020B0604020202020204"/>
               </a:rPr>
               <a:t>A050–A060 + A106–A120; the official</a:t>
             </a:r>
@@ -3327,9 +3330,9 @@
                 <a:solidFill>
                   <a:srgbClr val="5E6478"/>
                 </a:solidFill>
-                <a:latin typeface="Arial" panose="020B0604020202090204"/>
-                <a:ea typeface="Arial" panose="020B0604020202090204"/>
-                <a:cs typeface="Arial" panose="020B0604020202090204"/>
+                <a:latin typeface="Arial" panose="020B0604020202020204"/>
+                <a:ea typeface="Arial" panose="020B0604020202020204"/>
+                <a:cs typeface="Arial" panose="020B0604020202020204"/>
               </a:rPr>
             </a:br>
             <a:r>
@@ -3337,9 +3340,9 @@
                 <a:solidFill>
                   <a:srgbClr val="5E6478"/>
                 </a:solidFill>
-                <a:latin typeface="Arial" panose="020B0604020202090204"/>
-                <a:ea typeface="Arial" panose="020B0604020202090204"/>
-                <a:cs typeface="Arial" panose="020B0604020202090204"/>
+                <a:latin typeface="Arial" panose="020B0604020202020204"/>
+                <a:ea typeface="Arial" panose="020B0604020202020204"/>
+                <a:cs typeface="Arial" panose="020B0604020202020204"/>
               </a:rPr>
               <a:t>535-entry list removes 96 of them</a:t>
             </a:r>
@@ -3348,9 +3351,9 @@
                 <a:solidFill>
                   <a:srgbClr val="5E6478"/>
                 </a:solidFill>
-                <a:latin typeface="Arial" panose="020B0604020202090204"/>
-                <a:ea typeface="Arial" panose="020B0604020202090204"/>
-                <a:cs typeface="Arial" panose="020B0604020202090204"/>
+                <a:latin typeface="Arial" panose="020B0604020202020204"/>
+                <a:ea typeface="Arial" panose="020B0604020202020204"/>
+                <a:cs typeface="Arial" panose="020B0604020202020204"/>
               </a:rPr>
             </a:br>
             <a:r>
@@ -3358,9 +3361,9 @@
                 <a:solidFill>
                   <a:srgbClr val="5E6478"/>
                 </a:solidFill>
-                <a:latin typeface="Arial" panose="020B0604020202090204"/>
-                <a:ea typeface="Arial" panose="020B0604020202090204"/>
-                <a:cs typeface="Arial" panose="020B0604020202090204"/>
+                <a:latin typeface="Arial" panose="020B0604020202020204"/>
+                <a:ea typeface="Arial" panose="020B0604020202020204"/>
+                <a:cs typeface="Arial" panose="020B0604020202020204"/>
               </a:rPr>
               <a:t>X-Sub 53/53 subjects · X-Set even/odd setups</a:t>
             </a:r>
@@ -3369,9 +3372,9 @@
                 <a:solidFill>
                   <a:srgbClr val="5E6478"/>
                 </a:solidFill>
-                <a:latin typeface="Arial" panose="020B0604020202090204"/>
-                <a:ea typeface="Arial" panose="020B0604020202090204"/>
-                <a:cs typeface="Arial" panose="020B0604020202090204"/>
+                <a:latin typeface="Arial" panose="020B0604020202020204"/>
+                <a:ea typeface="Arial" panose="020B0604020202020204"/>
+                <a:cs typeface="Arial" panose="020B0604020202020204"/>
               </a:rPr>
             </a:br>
             <a:r>
@@ -3379,9 +3382,9 @@
                 <a:solidFill>
                   <a:srgbClr val="5E6478"/>
                 </a:solidFill>
-                <a:latin typeface="Arial" panose="020B0604020202090204"/>
-                <a:ea typeface="Arial" panose="020B0604020202090204"/>
-                <a:cs typeface="Arial" panose="020B0604020202090204"/>
+                <a:latin typeface="Arial" panose="020B0604020202020204"/>
+                <a:ea typeface="Arial" panose="020B0604020202020204"/>
+                <a:cs typeface="Arial" panose="020B0604020202020204"/>
               </a:rPr>
               <a:t>Skeleton-only download: 10.3 GB of the 2.3 TB</a:t>
             </a:r>
@@ -3389,9 +3392,9 @@
               <a:solidFill>
                 <a:srgbClr val="5E6478"/>
               </a:solidFill>
-              <a:latin typeface="Arial" panose="020B0604020202090204"/>
-              <a:ea typeface="Arial" panose="020B0604020202090204"/>
-              <a:cs typeface="Arial" panose="020B0604020202090204"/>
+              <a:latin typeface="Arial" panose="020B0604020202020204"/>
+              <a:ea typeface="Arial" panose="020B0604020202020204"/>
+              <a:cs typeface="Arial" panose="020B0604020202020204"/>
             </a:endParaRPr>
           </a:p>
         </p:txBody>
@@ -3431,9 +3434,9 @@
                 <a:solidFill>
                   <a:srgbClr val="FFFFFF"/>
                 </a:solidFill>
-                <a:latin typeface="Arial" panose="020B0604020202090204"/>
-                <a:ea typeface="Arial" panose="020B0604020202090204"/>
-                <a:cs typeface="Arial" panose="020B0604020202090204"/>
+                <a:latin typeface="Arial" panose="020B0604020202020204"/>
+                <a:ea typeface="Arial" panose="020B0604020202020204"/>
+                <a:cs typeface="Arial" panose="020B0604020202020204"/>
               </a:rPr>
               <a:t>Identity is lost</a:t>
             </a:r>
@@ -3442,9 +3445,9 @@
                 <a:solidFill>
                   <a:srgbClr val="FFFFFF"/>
                 </a:solidFill>
-                <a:latin typeface="Arial" panose="020B0604020202090204"/>
-                <a:ea typeface="Arial" panose="020B0604020202090204"/>
-                <a:cs typeface="Arial" panose="020B0604020202090204"/>
+                <a:latin typeface="Arial" panose="020B0604020202020204"/>
+                <a:ea typeface="Arial" panose="020B0604020202020204"/>
+                <a:cs typeface="Arial" panose="020B0604020202020204"/>
               </a:rPr>
             </a:br>
             <a:r>
@@ -3452,9 +3455,9 @@
                 <a:solidFill>
                   <a:srgbClr val="FFFFFF"/>
                 </a:solidFill>
-                <a:latin typeface="Arial" panose="020B0604020202090204"/>
-                <a:ea typeface="Arial" panose="020B0604020202090204"/>
-                <a:cs typeface="Arial" panose="020B0604020202090204"/>
+                <a:latin typeface="Arial" panose="020B0604020202020204"/>
+                <a:ea typeface="Arial" panose="020B0604020202020204"/>
+                <a:cs typeface="Arial" panose="020B0604020202020204"/>
               </a:rPr>
               <a:t>in preprocessing</a:t>
             </a:r>
@@ -3462,9 +3465,9 @@
               <a:solidFill>
                 <a:srgbClr val="FFFFFF"/>
               </a:solidFill>
-              <a:latin typeface="Arial" panose="020B0604020202090204"/>
-              <a:ea typeface="Arial" panose="020B0604020202090204"/>
-              <a:cs typeface="Arial" panose="020B0604020202090204"/>
+              <a:latin typeface="Arial" panose="020B0604020202020204"/>
+              <a:ea typeface="Arial" panose="020B0604020202020204"/>
+              <a:cs typeface="Arial" panose="020B0604020202020204"/>
             </a:endParaRPr>
           </a:p>
           <a:p>
@@ -3481,9 +3484,9 @@
                 <a:solidFill>
                   <a:srgbClr val="C8C8C8"/>
                 </a:solidFill>
-                <a:latin typeface="Arial" panose="020B0604020202090204"/>
-                <a:ea typeface="Arial" panose="020B0604020202090204"/>
-                <a:cs typeface="Arial" panose="020B0604020202090204"/>
+                <a:latin typeface="Arial" panose="020B0604020202020204"/>
+                <a:ea typeface="Arial" panose="020B0604020202020204"/>
+                <a:cs typeface="Arial" panose="020B0604020202020204"/>
               </a:rPr>
               <a:t>Why it matters:</a:t>
             </a:r>
@@ -3491,9 +3494,9 @@
               <a:solidFill>
                 <a:srgbClr val="C8C8C8"/>
               </a:solidFill>
-              <a:latin typeface="Arial" panose="020B0604020202090204"/>
-              <a:ea typeface="Arial" panose="020B0604020202090204"/>
-              <a:cs typeface="Arial" panose="020B0604020202090204"/>
+              <a:latin typeface="Arial" panose="020B0604020202020204"/>
+              <a:ea typeface="Arial" panose="020B0604020202020204"/>
+              <a:cs typeface="Arial" panose="020B0604020202020204"/>
             </a:endParaRPr>
           </a:p>
           <a:p>
@@ -3510,9 +3513,9 @@
                 <a:solidFill>
                   <a:srgbClr val="FFFFFF"/>
                 </a:solidFill>
-                <a:latin typeface="Arial" panose="020B0604020202090204"/>
-                <a:ea typeface="Arial" panose="020B0604020202090204"/>
-                <a:cs typeface="Arial" panose="020B0604020202090204"/>
+                <a:latin typeface="Arial" panose="020B0604020202020204"/>
+                <a:ea typeface="Arial" panose="020B0604020202020204"/>
+                <a:cs typeface="Arial" panose="020B0604020202020204"/>
               </a:rPr>
               <a:t>bodyID and trackingState are</a:t>
             </a:r>
@@ -3521,9 +3524,9 @@
                 <a:solidFill>
                   <a:srgbClr val="FFFFFF"/>
                 </a:solidFill>
-                <a:latin typeface="Arial" panose="020B0604020202090204"/>
-                <a:ea typeface="Arial" panose="020B0604020202090204"/>
-                <a:cs typeface="Arial" panose="020B0604020202090204"/>
+                <a:latin typeface="Arial" panose="020B0604020202020204"/>
+                <a:ea typeface="Arial" panose="020B0604020202020204"/>
+                <a:cs typeface="Arial" panose="020B0604020202020204"/>
               </a:rPr>
             </a:br>
             <a:r>
@@ -3531,9 +3534,9 @@
                 <a:solidFill>
                   <a:srgbClr val="FFFFFF"/>
                 </a:solidFill>
-                <a:latin typeface="Arial" panose="020B0604020202090204"/>
-                <a:ea typeface="Arial" panose="020B0604020202090204"/>
-                <a:cs typeface="Arial" panose="020B0604020202090204"/>
+                <a:latin typeface="Arial" panose="020B0604020202020204"/>
+                <a:ea typeface="Arial" panose="020B0604020202020204"/>
+                <a:cs typeface="Arial" panose="020B0604020202020204"/>
               </a:rPr>
               <a:t>dropped by CTR-GCN and pyskl.</a:t>
             </a:r>
@@ -3542,9 +3545,9 @@
                 <a:solidFill>
                   <a:srgbClr val="FFFFFF"/>
                 </a:solidFill>
-                <a:latin typeface="Arial" panose="020B0604020202090204"/>
-                <a:ea typeface="Arial" panose="020B0604020202090204"/>
-                <a:cs typeface="Arial" panose="020B0604020202090204"/>
+                <a:latin typeface="Arial" panose="020B0604020202020204"/>
+                <a:ea typeface="Arial" panose="020B0604020202020204"/>
+                <a:cs typeface="Arial" panose="020B0604020202020204"/>
               </a:rPr>
             </a:br>
             <a:r>
@@ -3552,9 +3555,9 @@
                 <a:solidFill>
                   <a:srgbClr val="FFFFFF"/>
                 </a:solidFill>
-                <a:latin typeface="Arial" panose="020B0604020202090204"/>
-                <a:ea typeface="Arial" panose="020B0604020202090204"/>
-                <a:cs typeface="Arial" panose="020B0604020202090204"/>
+                <a:latin typeface="Arial" panose="020B0604020202020204"/>
+                <a:ea typeface="Arial" panose="020B0604020202020204"/>
+                <a:cs typeface="Arial" panose="020B0604020202020204"/>
               </a:rPr>
               <a:t>Our plan: parse .skeleton</a:t>
             </a:r>
@@ -3563,9 +3566,9 @@
                 <a:solidFill>
                   <a:srgbClr val="FFFFFF"/>
                 </a:solidFill>
-                <a:latin typeface="Arial" panose="020B0604020202090204"/>
-                <a:ea typeface="Arial" panose="020B0604020202090204"/>
-                <a:cs typeface="Arial" panose="020B0604020202090204"/>
+                <a:latin typeface="Arial" panose="020B0604020202020204"/>
+                <a:ea typeface="Arial" panose="020B0604020202020204"/>
+                <a:cs typeface="Arial" panose="020B0604020202020204"/>
               </a:rPr>
             </a:br>
             <a:r>
@@ -3573,9 +3576,9 @@
                 <a:solidFill>
                   <a:srgbClr val="FFFFFF"/>
                 </a:solidFill>
-                <a:latin typeface="Arial" panose="020B0604020202090204"/>
-                <a:ea typeface="Arial" panose="020B0604020202090204"/>
-                <a:cs typeface="Arial" panose="020B0604020202090204"/>
+                <a:latin typeface="Arial" panose="020B0604020202020204"/>
+                <a:ea typeface="Arial" panose="020B0604020202020204"/>
+                <a:cs typeface="Arial" panose="020B0604020202020204"/>
               </a:rPr>
               <a:t>ourselves and keep both.</a:t>
             </a:r>
@@ -3583,9 +3586,9 @@
               <a:solidFill>
                 <a:srgbClr val="FFFFFF"/>
               </a:solidFill>
-              <a:latin typeface="Arial" panose="020B0604020202090204"/>
-              <a:ea typeface="Arial" panose="020B0604020202090204"/>
-              <a:cs typeface="Arial" panose="020B0604020202090204"/>
+              <a:latin typeface="Arial" panose="020B0604020202020204"/>
+              <a:ea typeface="Arial" panose="020B0604020202020204"/>
+              <a:cs typeface="Arial" panose="020B0604020202020204"/>
             </a:endParaRPr>
           </a:p>
         </p:txBody>
@@ -3621,9 +3624,9 @@
                 <a:solidFill>
                   <a:srgbClr val="FFFFFF"/>
                 </a:solidFill>
-                <a:latin typeface="Arial" panose="020B0604020202090204"/>
-                <a:ea typeface="Arial" panose="020B0604020202090204"/>
-                <a:cs typeface="Arial" panose="020B0604020202090204"/>
+                <a:latin typeface="Arial" panose="020B0604020202020204"/>
+                <a:ea typeface="Arial" panose="020B0604020202020204"/>
+                <a:cs typeface="Arial" panose="020B0604020202020204"/>
               </a:rPr>
               <a:t>{{SOURCE}}</a:t>
             </a:r>
@@ -3631,9 +3634,9 @@
               <a:solidFill>
                 <a:srgbClr val="FFFFFF"/>
               </a:solidFill>
-              <a:latin typeface="Arial" panose="020B0604020202090204"/>
-              <a:ea typeface="Arial" panose="020B0604020202090204"/>
-              <a:cs typeface="Arial" panose="020B0604020202090204"/>
+              <a:latin typeface="Arial" panose="020B0604020202020204"/>
+              <a:ea typeface="Arial" panose="020B0604020202020204"/>
+              <a:cs typeface="Arial" panose="020B0604020202020204"/>
             </a:endParaRPr>
           </a:p>
         </p:txBody>
@@ -3669,9 +3672,9 @@
                 <a:solidFill>
                   <a:srgbClr val="FFFFFF"/>
                 </a:solidFill>
-                <a:latin typeface="Arial" panose="020B0604020202090204"/>
-                <a:ea typeface="Arial" panose="020B0604020202090204"/>
-                <a:cs typeface="Arial" panose="020B0604020202090204"/>
+                <a:latin typeface="Arial" panose="020B0604020202020204"/>
+                <a:ea typeface="Arial" panose="020B0604020202020204"/>
+                <a:cs typeface="Arial" panose="020B0604020202020204"/>
               </a:rPr>
               <a:t>{{PAGE_NUM}}</a:t>
             </a:r>
@@ -3679,9 +3682,9 @@
               <a:solidFill>
                 <a:srgbClr val="FFFFFF"/>
               </a:solidFill>
-              <a:latin typeface="Arial" panose="020B0604020202090204"/>
-              <a:ea typeface="Arial" panose="020B0604020202090204"/>
-              <a:cs typeface="Arial" panose="020B0604020202090204"/>
+              <a:latin typeface="Arial" panose="020B0604020202020204"/>
+              <a:ea typeface="Arial" panose="020B0604020202020204"/>
+              <a:cs typeface="Arial" panose="020B0604020202020204"/>
             </a:endParaRPr>
           </a:p>
         </p:txBody>
@@ -3842,9 +3845,9 @@
                 <a:solidFill>
                   <a:srgbClr val="FFFFFF"/>
                 </a:solidFill>
-                <a:latin typeface="Arial" panose="020B0604020202090204"/>
-                <a:ea typeface="Arial" panose="020B0604020202090204"/>
-                <a:cs typeface="Arial" panose="020B0604020202090204"/>
+                <a:latin typeface="Arial" panose="020B0604020202020204"/>
+                <a:ea typeface="Arial" panose="020B0604020202020204"/>
+                <a:cs typeface="Arial" panose="020B0604020202020204"/>
               </a:rPr>
               <a:t>EE6008 · HUMAN POSE ANALYTICS</a:t>
             </a:r>
@@ -3852,9 +3855,9 @@
               <a:solidFill>
                 <a:srgbClr val="FFFFFF"/>
               </a:solidFill>
-              <a:latin typeface="Arial" panose="020B0604020202090204"/>
-              <a:ea typeface="Arial" panose="020B0604020202090204"/>
-              <a:cs typeface="Arial" panose="020B0604020202090204"/>
+              <a:latin typeface="Arial" panose="020B0604020202020204"/>
+              <a:ea typeface="Arial" panose="020B0604020202020204"/>
+              <a:cs typeface="Arial" panose="020B0604020202020204"/>
             </a:endParaRPr>
           </a:p>
         </p:txBody>
@@ -4008,9 +4011,9 @@
                 <a:solidFill>
                   <a:srgbClr val="D71440"/>
                 </a:solidFill>
-                <a:latin typeface="Arial" panose="020B0604020202090204"/>
-                <a:ea typeface="Arial" panose="020B0604020202090204"/>
-                <a:cs typeface="Arial" panose="020B0604020202090204"/>
+                <a:latin typeface="Arial" panose="020B0604020202020204"/>
+                <a:ea typeface="Arial" panose="020B0604020202020204"/>
+                <a:cs typeface="Arial" panose="020B0604020202020204"/>
               </a:rPr>
               <a:t>ONE-LINE RESULT</a:t>
             </a:r>
@@ -4018,9 +4021,9 @@
               <a:solidFill>
                 <a:srgbClr val="D71440"/>
               </a:solidFill>
-              <a:latin typeface="Arial" panose="020B0604020202090204"/>
-              <a:ea typeface="Arial" panose="020B0604020202090204"/>
-              <a:cs typeface="Arial" panose="020B0604020202090204"/>
+              <a:latin typeface="Arial" panose="020B0604020202020204"/>
+              <a:ea typeface="Arial" panose="020B0604020202020204"/>
+              <a:cs typeface="Arial" panose="020B0604020202020204"/>
             </a:endParaRPr>
           </a:p>
         </p:txBody>
@@ -4056,9 +4059,9 @@
                 <a:solidFill>
                   <a:srgbClr val="181C62"/>
                 </a:solidFill>
-                <a:latin typeface="Arial" panose="020B0604020202090204"/>
-                <a:ea typeface="Arial" panose="020B0604020202090204"/>
-                <a:cs typeface="Arial" panose="020B0604020202090204"/>
+                <a:latin typeface="Arial" panose="020B0604020202020204"/>
+                <a:ea typeface="Arial" panose="020B0604020202020204"/>
+                <a:cs typeface="Arial" panose="020B0604020202020204"/>
               </a:rPr>
               <a:t>EVIDENCE · BASELINE · CONTROL · METRIC</a:t>
             </a:r>
@@ -4066,9 +4069,9 @@
               <a:solidFill>
                 <a:srgbClr val="181C62"/>
               </a:solidFill>
-              <a:latin typeface="Arial" panose="020B0604020202090204"/>
-              <a:ea typeface="Arial" panose="020B0604020202090204"/>
-              <a:cs typeface="Arial" panose="020B0604020202090204"/>
+              <a:latin typeface="Arial" panose="020B0604020202020204"/>
+              <a:ea typeface="Arial" panose="020B0604020202020204"/>
+              <a:cs typeface="Arial" panose="020B0604020202020204"/>
             </a:endParaRPr>
           </a:p>
         </p:txBody>
@@ -4104,9 +4107,9 @@
                 <a:solidFill>
                   <a:srgbClr val="FFFFFF"/>
                 </a:solidFill>
-                <a:latin typeface="Arial" panose="020B0604020202090204"/>
-                <a:ea typeface="Arial" panose="020B0604020202090204"/>
-                <a:cs typeface="Arial" panose="020B0604020202090204"/>
+                <a:latin typeface="Arial" panose="020B0604020202020204"/>
+                <a:ea typeface="Arial" panose="020B0604020202020204"/>
+                <a:cs typeface="Arial" panose="020B0604020202020204"/>
               </a:rPr>
               <a:t>KEY FINDINGS</a:t>
             </a:r>
@@ -4114,9 +4117,9 @@
               <a:solidFill>
                 <a:srgbClr val="FFFFFF"/>
               </a:solidFill>
-              <a:latin typeface="Arial" panose="020B0604020202090204"/>
-              <a:ea typeface="Arial" panose="020B0604020202090204"/>
-              <a:cs typeface="Arial" panose="020B0604020202090204"/>
+              <a:latin typeface="Arial" panose="020B0604020202020204"/>
+              <a:ea typeface="Arial" panose="020B0604020202020204"/>
+              <a:cs typeface="Arial" panose="020B0604020202020204"/>
             </a:endParaRPr>
           </a:p>
         </p:txBody>
@@ -4152,9 +4155,9 @@
                 <a:solidFill>
                   <a:srgbClr val="20243A"/>
                 </a:solidFill>
-                <a:latin typeface="Arial" panose="020B0604020202090204"/>
-                <a:ea typeface="Arial" panose="020B0604020202090204"/>
-                <a:cs typeface="Arial" panose="020B0604020202090204"/>
+                <a:latin typeface="Arial" panose="020B0604020202020204"/>
+                <a:ea typeface="Arial" panose="020B0604020202020204"/>
+                <a:cs typeface="Arial" panose="020B0604020202020204"/>
               </a:rPr>
               <a:t>What the Raw File Still Holds</a:t>
             </a:r>
@@ -4162,9 +4165,9 @@
               <a:solidFill>
                 <a:srgbClr val="20243A"/>
               </a:solidFill>
-              <a:latin typeface="Arial" panose="020B0604020202090204"/>
-              <a:ea typeface="Arial" panose="020B0604020202090204"/>
-              <a:cs typeface="Arial" panose="020B0604020202090204"/>
+              <a:latin typeface="Arial" panose="020B0604020202020204"/>
+              <a:ea typeface="Arial" panose="020B0604020202020204"/>
+              <a:cs typeface="Arial" panose="020B0604020202020204"/>
             </a:endParaRPr>
           </a:p>
         </p:txBody>
@@ -4200,9 +4203,9 @@
                 <a:solidFill>
                   <a:srgbClr val="D71440"/>
                 </a:solidFill>
-                <a:latin typeface="Arial" panose="020B0604020202090204"/>
-                <a:ea typeface="Arial" panose="020B0604020202090204"/>
-                <a:cs typeface="Arial" panose="020B0604020202090204"/>
+                <a:latin typeface="Arial" panose="020B0604020202020204"/>
+                <a:ea typeface="Arial" panose="020B0604020202020204"/>
+                <a:cs typeface="Arial" panose="020B0604020202020204"/>
               </a:rPr>
               <a:t>Raw file vs.</a:t>
             </a:r>
@@ -4211,9 +4214,9 @@
                 <a:solidFill>
                   <a:srgbClr val="D71440"/>
                 </a:solidFill>
-                <a:latin typeface="Arial" panose="020B0604020202090204"/>
-                <a:ea typeface="Arial" panose="020B0604020202090204"/>
-                <a:cs typeface="Arial" panose="020B0604020202090204"/>
+                <a:latin typeface="Arial" panose="020B0604020202020204"/>
+                <a:ea typeface="Arial" panose="020B0604020202020204"/>
+                <a:cs typeface="Arial" panose="020B0604020202020204"/>
               </a:rPr>
             </a:br>
             <a:r>
@@ -4221,9 +4224,9 @@
                 <a:solidFill>
                   <a:srgbClr val="D71440"/>
                 </a:solidFill>
-                <a:latin typeface="Arial" panose="020B0604020202090204"/>
-                <a:ea typeface="Arial" panose="020B0604020202090204"/>
-                <a:cs typeface="Arial" panose="020B0604020202090204"/>
+                <a:latin typeface="Arial" panose="020B0604020202020204"/>
+                <a:ea typeface="Arial" panose="020B0604020202020204"/>
+                <a:cs typeface="Arial" panose="020B0604020202020204"/>
               </a:rPr>
               <a:t>preprocessed output</a:t>
             </a:r>
@@ -4231,9 +4234,9 @@
               <a:solidFill>
                 <a:srgbClr val="D71440"/>
               </a:solidFill>
-              <a:latin typeface="Arial" panose="020B0604020202090204"/>
-              <a:ea typeface="Arial" panose="020B0604020202090204"/>
-              <a:cs typeface="Arial" panose="020B0604020202090204"/>
+              <a:latin typeface="Arial" panose="020B0604020202020204"/>
+              <a:ea typeface="Arial" panose="020B0604020202020204"/>
+              <a:cs typeface="Arial" panose="020B0604020202020204"/>
             </a:endParaRPr>
           </a:p>
         </p:txBody>
@@ -4273,9 +4276,9 @@
                 <a:solidFill>
                   <a:srgbClr val="5E6478"/>
                 </a:solidFill>
-                <a:latin typeface="Arial" panose="020B0604020202090204"/>
-                <a:ea typeface="Arial" panose="020B0604020202090204"/>
-                <a:cs typeface="Arial" panose="020B0604020202090204"/>
+                <a:latin typeface="Arial" panose="020B0604020202020204"/>
+                <a:ea typeface="Arial" panose="020B0604020202020204"/>
+                <a:cs typeface="Arial" panose="020B0604020202020204"/>
               </a:rPr>
               <a:t>The .skeleton file carries far more than coordinates</a:t>
             </a:r>
@@ -4283,9 +4286,9 @@
               <a:solidFill>
                 <a:srgbClr val="5E6478"/>
               </a:solidFill>
-              <a:latin typeface="Arial" panose="020B0604020202090204"/>
-              <a:ea typeface="Arial" panose="020B0604020202090204"/>
-              <a:cs typeface="Arial" panose="020B0604020202090204"/>
+              <a:latin typeface="Arial" panose="020B0604020202020204"/>
+              <a:ea typeface="Arial" panose="020B0604020202020204"/>
+              <a:cs typeface="Arial" panose="020B0604020202020204"/>
             </a:endParaRPr>
           </a:p>
           <a:p>
@@ -4302,9 +4305,9 @@
                 <a:solidFill>
                   <a:srgbClr val="5E6478"/>
                 </a:solidFill>
-                <a:latin typeface="Arial" panose="020B0604020202090204"/>
-                <a:ea typeface="Arial" panose="020B0604020202090204"/>
-                <a:cs typeface="Arial" panose="020B0604020202090204"/>
+                <a:latin typeface="Arial" panose="020B0604020202020204"/>
+                <a:ea typeface="Arial" panose="020B0604020202020204"/>
+                <a:cs typeface="Arial" panose="020B0604020202020204"/>
               </a:rPr>
               <a:t>Per body: bodyID, trackingState, lean, hand state.  Per joint: 3D metres, depth-2D,</a:t>
             </a:r>
@@ -4313,9 +4316,9 @@
                 <a:solidFill>
                   <a:srgbClr val="5E6478"/>
                 </a:solidFill>
-                <a:latin typeface="Arial" panose="020B0604020202090204"/>
-                <a:ea typeface="Arial" panose="020B0604020202090204"/>
-                <a:cs typeface="Arial" panose="020B0604020202090204"/>
+                <a:latin typeface="Arial" panose="020B0604020202020204"/>
+                <a:ea typeface="Arial" panose="020B0604020202020204"/>
+                <a:cs typeface="Arial" panose="020B0604020202020204"/>
               </a:rPr>
             </a:br>
             <a:r>
@@ -4323,9 +4326,9 @@
                 <a:solidFill>
                   <a:srgbClr val="5E6478"/>
                 </a:solidFill>
-                <a:latin typeface="Arial" panose="020B0604020202090204"/>
-                <a:ea typeface="Arial" panose="020B0604020202090204"/>
-                <a:cs typeface="Arial" panose="020B0604020202090204"/>
+                <a:latin typeface="Arial" panose="020B0604020202020204"/>
+                <a:ea typeface="Arial" panose="020B0604020202020204"/>
+                <a:cs typeface="Arial" panose="020B0604020202020204"/>
               </a:rPr>
               <a:t>colour-2D, an orientation quaternion, and a per-joint reliability flag.</a:t>
             </a:r>
@@ -4333,9 +4336,9 @@
               <a:solidFill>
                 <a:srgbClr val="5E6478"/>
               </a:solidFill>
-              <a:latin typeface="Arial" panose="020B0604020202090204"/>
-              <a:ea typeface="Arial" panose="020B0604020202090204"/>
-              <a:cs typeface="Arial" panose="020B0604020202090204"/>
+              <a:latin typeface="Arial" panose="020B0604020202020204"/>
+              <a:ea typeface="Arial" panose="020B0604020202020204"/>
+              <a:cs typeface="Arial" panose="020B0604020202020204"/>
             </a:endParaRPr>
           </a:p>
         </p:txBody>
@@ -4375,9 +4378,9 @@
                 <a:solidFill>
                   <a:srgbClr val="20243A"/>
                 </a:solidFill>
-                <a:latin typeface="Arial" panose="020B0604020202090204"/>
-                <a:ea typeface="Arial" panose="020B0604020202090204"/>
-                <a:cs typeface="Arial" panose="020B0604020202090204"/>
+                <a:latin typeface="Arial" panose="020B0604020202020204"/>
+                <a:ea typeface="Arial" panose="020B0604020202020204"/>
+                <a:cs typeface="Arial" panose="020B0604020202020204"/>
               </a:rPr>
               <a:t>Two code-level issues</a:t>
             </a:r>
@@ -4385,9 +4388,9 @@
               <a:solidFill>
                 <a:srgbClr val="20243A"/>
               </a:solidFill>
-              <a:latin typeface="Arial" panose="020B0604020202090204"/>
-              <a:ea typeface="Arial" panose="020B0604020202090204"/>
-              <a:cs typeface="Arial" panose="020B0604020202090204"/>
+              <a:latin typeface="Arial" panose="020B0604020202020204"/>
+              <a:ea typeface="Arial" panose="020B0604020202020204"/>
+              <a:cs typeface="Arial" panose="020B0604020202020204"/>
             </a:endParaRPr>
           </a:p>
           <a:p>
@@ -4404,9 +4407,9 @@
                 <a:solidFill>
                   <a:srgbClr val="5E6478"/>
                 </a:solidFill>
-                <a:latin typeface="Arial" panose="020B0604020202090204"/>
-                <a:ea typeface="Arial" panose="020B0604020202090204"/>
-                <a:cs typeface="Arial" panose="020B0604020202090204"/>
+                <a:latin typeface="Arial" panose="020B0604020202020204"/>
+                <a:ea typeface="Arial" panose="020B0604020202020204"/>
+                <a:cs typeface="Arial" panose="020B0604020202020204"/>
               </a:rPr>
               <a:t>1 · CTR-GCN merges separate bodyIDs</a:t>
             </a:r>
@@ -4415,9 +4418,9 @@
                 <a:solidFill>
                   <a:srgbClr val="5E6478"/>
                 </a:solidFill>
-                <a:latin typeface="Arial" panose="020B0604020202090204"/>
-                <a:ea typeface="Arial" panose="020B0604020202090204"/>
-                <a:cs typeface="Arial" panose="020B0604020202090204"/>
+                <a:latin typeface="Arial" panose="020B0604020202020204"/>
+                <a:ea typeface="Arial" panose="020B0604020202020204"/>
+                <a:cs typeface="Arial" panose="020B0604020202020204"/>
               </a:rPr>
             </a:br>
             <a:r>
@@ -4425,9 +4428,9 @@
                 <a:solidFill>
                   <a:srgbClr val="5E6478"/>
                 </a:solidFill>
-                <a:latin typeface="Arial" panose="020B0604020202090204"/>
-                <a:ea typeface="Arial" panose="020B0604020202090204"/>
-                <a:cs typeface="Arial" panose="020B0604020202090204"/>
+                <a:latin typeface="Arial" panose="020B0604020202020204"/>
+                <a:ea typeface="Arial" panose="020B0604020202020204"/>
+                <a:cs typeface="Arial" panose="020B0604020202020204"/>
               </a:rPr>
               <a:t>into one actor when their time spans</a:t>
             </a:r>
@@ -4436,9 +4439,9 @@
                 <a:solidFill>
                   <a:srgbClr val="5E6478"/>
                 </a:solidFill>
-                <a:latin typeface="Arial" panose="020B0604020202090204"/>
-                <a:ea typeface="Arial" panose="020B0604020202090204"/>
-                <a:cs typeface="Arial" panose="020B0604020202090204"/>
+                <a:latin typeface="Arial" panose="020B0604020202020204"/>
+                <a:ea typeface="Arial" panose="020B0604020202020204"/>
+                <a:cs typeface="Arial" panose="020B0604020202020204"/>
               </a:rPr>
             </a:br>
             <a:r>
@@ -4446,9 +4449,9 @@
                 <a:solidFill>
                   <a:srgbClr val="5E6478"/>
                 </a:solidFill>
-                <a:latin typeface="Arial" panose="020B0604020202090204"/>
-                <a:ea typeface="Arial" panose="020B0604020202090204"/>
-                <a:cs typeface="Arial" panose="020B0604020202090204"/>
+                <a:latin typeface="Arial" panose="020B0604020202020204"/>
+                <a:ea typeface="Arial" panose="020B0604020202020204"/>
+                <a:cs typeface="Arial" panose="020B0604020202020204"/>
               </a:rPr>
               <a:t>do not overlap. The IDs go to a log</a:t>
             </a:r>
@@ -4457,9 +4460,9 @@
                 <a:solidFill>
                   <a:srgbClr val="5E6478"/>
                 </a:solidFill>
-                <a:latin typeface="Arial" panose="020B0604020202090204"/>
-                <a:ea typeface="Arial" panose="020B0604020202090204"/>
-                <a:cs typeface="Arial" panose="020B0604020202090204"/>
+                <a:latin typeface="Arial" panose="020B0604020202020204"/>
+                <a:ea typeface="Arial" panose="020B0604020202020204"/>
+                <a:cs typeface="Arial" panose="020B0604020202020204"/>
               </a:rPr>
             </a:br>
             <a:r>
@@ -4467,9 +4470,9 @@
                 <a:solidFill>
                   <a:srgbClr val="5E6478"/>
                 </a:solidFill>
-                <a:latin typeface="Arial" panose="020B0604020202090204"/>
-                <a:ea typeface="Arial" panose="020B0604020202090204"/>
-                <a:cs typeface="Arial" panose="020B0604020202090204"/>
+                <a:latin typeface="Arial" panose="020B0604020202020204"/>
+                <a:ea typeface="Arial" panose="020B0604020202020204"/>
+                <a:cs typeface="Arial" panose="020B0604020202020204"/>
               </a:rPr>
               <a:t>file, never into the data.</a:t>
             </a:r>
@@ -4478,9 +4481,9 @@
                 <a:solidFill>
                   <a:srgbClr val="5E6478"/>
                 </a:solidFill>
-                <a:latin typeface="Arial" panose="020B0604020202090204"/>
-                <a:ea typeface="Arial" panose="020B0604020202090204"/>
-                <a:cs typeface="Arial" panose="020B0604020202090204"/>
+                <a:latin typeface="Arial" panose="020B0604020202020204"/>
+                <a:ea typeface="Arial" panose="020B0604020202020204"/>
+                <a:cs typeface="Arial" panose="020B0604020202020204"/>
               </a:rPr>
             </a:br>
             <a:r>
@@ -4488,9 +4491,9 @@
                 <a:solidFill>
                   <a:srgbClr val="5E6478"/>
                 </a:solidFill>
-                <a:latin typeface="Arial" panose="020B0604020202090204"/>
-                <a:ea typeface="Arial" panose="020B0604020202090204"/>
-                <a:cs typeface="Arial" panose="020B0604020202090204"/>
+                <a:latin typeface="Arial" panose="020B0604020202020204"/>
+                <a:ea typeface="Arial" panose="020B0604020202020204"/>
+                <a:cs typeface="Arial" panose="020B0604020202020204"/>
               </a:rPr>
               <a:t>2 · Its failure log parses only the last</a:t>
             </a:r>
@@ -4499,9 +4502,9 @@
                 <a:solidFill>
                   <a:srgbClr val="5E6478"/>
                 </a:solidFill>
-                <a:latin typeface="Arial" panose="020B0604020202090204"/>
-                <a:ea typeface="Arial" panose="020B0604020202090204"/>
-                <a:cs typeface="Arial" panose="020B0604020202090204"/>
+                <a:latin typeface="Arial" panose="020B0604020202020204"/>
+                <a:ea typeface="Arial" panose="020B0604020202020204"/>
+                <a:cs typeface="Arial" panose="020B0604020202020204"/>
               </a:rPr>
             </a:br>
             <a:r>
@@ -4509,9 +4512,9 @@
                 <a:solidFill>
                   <a:srgbClr val="5E6478"/>
                 </a:solidFill>
-                <a:latin typeface="Arial" panose="020B0604020202090204"/>
-                <a:ea typeface="Arial" panose="020B0604020202090204"/>
-                <a:cs typeface="Arial" panose="020B0604020202090204"/>
+                <a:latin typeface="Arial" panose="020B0604020202020204"/>
+                <a:ea typeface="Arial" panose="020B0604020202020204"/>
+                <a:cs typeface="Arial" panose="020B0604020202020204"/>
               </a:rPr>
               <a:t>two digits of the action ID, so the 15</a:t>
             </a:r>
@@ -4520,9 +4523,9 @@
                 <a:solidFill>
                   <a:srgbClr val="5E6478"/>
                 </a:solidFill>
-                <a:latin typeface="Arial" panose="020B0604020202090204"/>
-                <a:ea typeface="Arial" panose="020B0604020202090204"/>
-                <a:cs typeface="Arial" panose="020B0604020202090204"/>
+                <a:latin typeface="Arial" panose="020B0604020202020204"/>
+                <a:ea typeface="Arial" panose="020B0604020202020204"/>
+                <a:cs typeface="Arial" panose="020B0604020202020204"/>
               </a:rPr>
             </a:br>
             <a:r>
@@ -4530,9 +4533,9 @@
                 <a:solidFill>
                   <a:srgbClr val="5E6478"/>
                 </a:solidFill>
-                <a:latin typeface="Arial" panose="020B0604020202090204"/>
-                <a:ea typeface="Arial" panose="020B0604020202090204"/>
-                <a:cs typeface="Arial" panose="020B0604020202090204"/>
+                <a:latin typeface="Arial" panose="020B0604020202020204"/>
+                <a:ea typeface="Arial" panose="020B0604020202020204"/>
+                <a:cs typeface="Arial" panose="020B0604020202020204"/>
               </a:rPr>
               <a:t>classes A106–A120 are never checked.</a:t>
             </a:r>
@@ -4541,9 +4544,9 @@
                 <a:solidFill>
                   <a:srgbClr val="5E6478"/>
                 </a:solidFill>
-                <a:latin typeface="Arial" panose="020B0604020202090204"/>
-                <a:ea typeface="Arial" panose="020B0604020202090204"/>
-                <a:cs typeface="Arial" panose="020B0604020202090204"/>
+                <a:latin typeface="Arial" panose="020B0604020202020204"/>
+                <a:ea typeface="Arial" panose="020B0604020202020204"/>
+                <a:cs typeface="Arial" panose="020B0604020202020204"/>
               </a:rPr>
             </a:br>
             <a:r>
@@ -4551,9 +4554,9 @@
                 <a:solidFill>
                   <a:srgbClr val="5E6478"/>
                 </a:solidFill>
-                <a:latin typeface="Arial" panose="020B0604020202090204"/>
-                <a:ea typeface="Arial" panose="020B0604020202090204"/>
-                <a:cs typeface="Arial" panose="020B0604020202090204"/>
+                <a:latin typeface="Arial" panose="020B0604020202020204"/>
+                <a:ea typeface="Arial" panose="020B0604020202020204"/>
+                <a:cs typeface="Arial" panose="020B0604020202020204"/>
               </a:rPr>
               <a:t>3 · No official definition of the mutual</a:t>
             </a:r>
@@ -4562,9 +4565,9 @@
                 <a:solidFill>
                   <a:srgbClr val="5E6478"/>
                 </a:solidFill>
-                <a:latin typeface="Arial" panose="020B0604020202090204"/>
-                <a:ea typeface="Arial" panose="020B0604020202090204"/>
-                <a:cs typeface="Arial" panose="020B0604020202090204"/>
+                <a:latin typeface="Arial" panose="020B0604020202020204"/>
+                <a:ea typeface="Arial" panose="020B0604020202020204"/>
+                <a:cs typeface="Arial" panose="020B0604020202020204"/>
               </a:rPr>
             </a:br>
             <a:r>
@@ -4572,9 +4575,9 @@
                 <a:solidFill>
                   <a:srgbClr val="5E6478"/>
                 </a:solidFill>
-                <a:latin typeface="Arial" panose="020B0604020202090204"/>
-                <a:ea typeface="Arial" panose="020B0604020202090204"/>
-                <a:cs typeface="Arial" panose="020B0604020202090204"/>
+                <a:latin typeface="Arial" panose="020B0604020202020204"/>
+                <a:ea typeface="Arial" panose="020B0604020202020204"/>
+                <a:cs typeface="Arial" panose="020B0604020202020204"/>
               </a:rPr>
               <a:t>subset exists; each paper rolls its own.</a:t>
             </a:r>
@@ -4582,9 +4585,9 @@
               <a:solidFill>
                 <a:srgbClr val="5E6478"/>
               </a:solidFill>
-              <a:latin typeface="Arial" panose="020B0604020202090204"/>
-              <a:ea typeface="Arial" panose="020B0604020202090204"/>
-              <a:cs typeface="Arial" panose="020B0604020202090204"/>
+              <a:latin typeface="Arial" panose="020B0604020202020204"/>
+              <a:ea typeface="Arial" panose="020B0604020202020204"/>
+              <a:cs typeface="Arial" panose="020B0604020202020204"/>
             </a:endParaRPr>
           </a:p>
         </p:txBody>
@@ -4620,9 +4623,9 @@
                 <a:solidFill>
                   <a:srgbClr val="FFFFFF"/>
                 </a:solidFill>
-                <a:latin typeface="Arial" panose="020B0604020202090204"/>
-                <a:ea typeface="Arial" panose="020B0604020202090204"/>
-                <a:cs typeface="Arial" panose="020B0604020202090204"/>
+                <a:latin typeface="Arial" panose="020B0604020202020204"/>
+                <a:ea typeface="Arial" panose="020B0604020202020204"/>
+                <a:cs typeface="Arial" panose="020B0604020202020204"/>
               </a:rPr>
               <a:t>{{SOURCE}}</a:t>
             </a:r>
@@ -4630,9 +4633,9 @@
               <a:solidFill>
                 <a:srgbClr val="FFFFFF"/>
               </a:solidFill>
-              <a:latin typeface="Arial" panose="020B0604020202090204"/>
-              <a:ea typeface="Arial" panose="020B0604020202090204"/>
-              <a:cs typeface="Arial" panose="020B0604020202090204"/>
+              <a:latin typeface="Arial" panose="020B0604020202020204"/>
+              <a:ea typeface="Arial" panose="020B0604020202020204"/>
+              <a:cs typeface="Arial" panose="020B0604020202020204"/>
             </a:endParaRPr>
           </a:p>
         </p:txBody>
@@ -4668,9 +4671,9 @@
                 <a:solidFill>
                   <a:srgbClr val="FFFFFF"/>
                 </a:solidFill>
-                <a:latin typeface="Arial" panose="020B0604020202090204"/>
-                <a:ea typeface="Arial" panose="020B0604020202090204"/>
-                <a:cs typeface="Arial" panose="020B0604020202090204"/>
+                <a:latin typeface="Arial" panose="020B0604020202020204"/>
+                <a:ea typeface="Arial" panose="020B0604020202020204"/>
+                <a:cs typeface="Arial" panose="020B0604020202020204"/>
               </a:rPr>
               <a:t>{{PAGE_NUM}}</a:t>
             </a:r>
@@ -4678,9 +4681,9 @@
               <a:solidFill>
                 <a:srgbClr val="FFFFFF"/>
               </a:solidFill>
-              <a:latin typeface="Arial" panose="020B0604020202090204"/>
-              <a:ea typeface="Arial" panose="020B0604020202090204"/>
-              <a:cs typeface="Arial" panose="020B0604020202090204"/>
+              <a:latin typeface="Arial" panose="020B0604020202020204"/>
+              <a:ea typeface="Arial" panose="020B0604020202020204"/>
+              <a:cs typeface="Arial" panose="020B0604020202020204"/>
             </a:endParaRPr>
           </a:p>
         </p:txBody>
@@ -4841,9 +4844,9 @@
                 <a:solidFill>
                   <a:srgbClr val="FFFFFF"/>
                 </a:solidFill>
-                <a:latin typeface="Arial" panose="020B0604020202090204"/>
-                <a:ea typeface="Arial" panose="020B0604020202090204"/>
-                <a:cs typeface="Arial" panose="020B0604020202090204"/>
+                <a:latin typeface="Arial" panose="020B0604020202020204"/>
+                <a:ea typeface="Arial" panose="020B0604020202020204"/>
+                <a:cs typeface="Arial" panose="020B0604020202020204"/>
               </a:rPr>
               <a:t>EE6008 · HUMAN POSE ANALYTICS</a:t>
             </a:r>
@@ -4851,9 +4854,9 @@
               <a:solidFill>
                 <a:srgbClr val="FFFFFF"/>
               </a:solidFill>
-              <a:latin typeface="Arial" panose="020B0604020202090204"/>
-              <a:ea typeface="Arial" panose="020B0604020202090204"/>
-              <a:cs typeface="Arial" panose="020B0604020202090204"/>
+              <a:latin typeface="Arial" panose="020B0604020202020204"/>
+              <a:ea typeface="Arial" panose="020B0604020202020204"/>
+              <a:cs typeface="Arial" panose="020B0604020202020204"/>
             </a:endParaRPr>
           </a:p>
         </p:txBody>
@@ -5031,7 +5034,7 @@
         <p:spPr>
           <a:xfrm>
             <a:off x="794766" y="1639252"/>
-            <a:ext cx="1131928" cy="205359"/>
+            <a:ext cx="2374900" cy="276860"/>
           </a:xfrm>
           <a:prstGeom prst="rect">
             <a:avLst/>
@@ -5049,23 +5052,23 @@
           <a:p>
             <a:pPr algn="l"/>
             <a:r>
-              <a:rPr lang="en-US" sz="1050" b="1" dirty="0">
+              <a:rPr lang="en-US" b="1" dirty="0">
                 <a:solidFill>
                   <a:srgbClr val="D71440"/>
                 </a:solidFill>
-                <a:latin typeface="Arial" panose="020B0604020202090204"/>
-                <a:ea typeface="Arial" panose="020B0604020202090204"/>
-                <a:cs typeface="Arial" panose="020B0604020202090204"/>
-              </a:rPr>
-              <a:t>RISK / BLOCKER</a:t>
-            </a:r>
-            <a:endParaRPr lang="en-US" sz="1050" b="1" dirty="0">
+                <a:latin typeface="Arial" panose="020B0604020202020204"/>
+                <a:ea typeface="Arial" panose="020B0604020202020204"/>
+                <a:cs typeface="Arial" panose="020B0604020202020204"/>
+              </a:rPr>
+              <a:t>CTR-GCN · ICCV 2021</a:t>
+            </a:r>
+            <a:endParaRPr lang="en-US" b="1" dirty="0">
               <a:solidFill>
                 <a:srgbClr val="D71440"/>
               </a:solidFill>
-              <a:latin typeface="Arial" panose="020B0604020202090204"/>
-              <a:ea typeface="Arial" panose="020B0604020202090204"/>
-              <a:cs typeface="Arial" panose="020B0604020202090204"/>
+              <a:latin typeface="Arial" panose="020B0604020202020204"/>
+              <a:ea typeface="Arial" panose="020B0604020202020204"/>
+              <a:cs typeface="Arial" panose="020B0604020202020204"/>
             </a:endParaRPr>
           </a:p>
         </p:txBody>
@@ -5079,7 +5082,7 @@
         <p:spPr>
           <a:xfrm>
             <a:off x="6328791" y="1639252"/>
-            <a:ext cx="3092173" cy="205359"/>
+            <a:ext cx="3272155" cy="276860"/>
           </a:xfrm>
           <a:prstGeom prst="rect">
             <a:avLst/>
@@ -5097,23 +5100,23 @@
           <a:p>
             <a:pPr algn="l"/>
             <a:r>
-              <a:rPr lang="en-US" sz="1050" b="1" dirty="0">
+              <a:rPr lang="en-US" b="1" dirty="0">
                 <a:solidFill>
                   <a:srgbClr val="D71440"/>
                 </a:solidFill>
-                <a:latin typeface="Arial" panose="020B0604020202090204"/>
-                <a:ea typeface="Arial" panose="020B0604020202090204"/>
-                <a:cs typeface="Arial" panose="020B0604020202090204"/>
-              </a:rPr>
-              <a:t>IMPACT ON SCOPE, EVIDENCE, OR TIMELINE</a:t>
-            </a:r>
-            <a:endParaRPr lang="en-US" sz="1050" b="1" dirty="0">
+                <a:latin typeface="Arial" panose="020B0604020202020204"/>
+                <a:ea typeface="Arial" panose="020B0604020202020204"/>
+                <a:cs typeface="Arial" panose="020B0604020202020204"/>
+              </a:rPr>
+              <a:t>SKELETONX · IEEE TMM 2025</a:t>
+            </a:r>
+            <a:endParaRPr lang="en-US" b="1" dirty="0">
               <a:solidFill>
                 <a:srgbClr val="D71440"/>
               </a:solidFill>
-              <a:latin typeface="Arial" panose="020B0604020202090204"/>
-              <a:ea typeface="Arial" panose="020B0604020202090204"/>
-              <a:cs typeface="Arial" panose="020B0604020202090204"/>
+              <a:latin typeface="Arial" panose="020B0604020202020204"/>
+              <a:ea typeface="Arial" panose="020B0604020202020204"/>
+              <a:cs typeface="Arial" panose="020B0604020202020204"/>
             </a:endParaRPr>
           </a:p>
         </p:txBody>
@@ -5127,7 +5130,7 @@
         <p:spPr>
           <a:xfrm>
             <a:off x="794766" y="3925252"/>
-            <a:ext cx="2496259" cy="205359"/>
+            <a:ext cx="3771265" cy="276860"/>
           </a:xfrm>
           <a:prstGeom prst="rect">
             <a:avLst/>
@@ -5145,23 +5148,34 @@
           <a:p>
             <a:pPr algn="l"/>
             <a:r>
-              <a:rPr lang="en-US" sz="1050" b="1" dirty="0">
+              <a:rPr lang="en-US" b="1" dirty="0">
                 <a:solidFill>
                   <a:srgbClr val="181C62"/>
                 </a:solidFill>
-                <a:latin typeface="Arial" panose="020B0604020202090204"/>
-                <a:ea typeface="Arial" panose="020B0604020202090204"/>
-                <a:cs typeface="Arial" panose="020B0604020202090204"/>
-              </a:rPr>
-              <a:t>MITIGATION / OWNER / CHECK DATE</a:t>
-            </a:r>
-            <a:endParaRPr lang="en-US" sz="1050" b="1" dirty="0">
+                <a:latin typeface="Arial" panose="020B0604020202020204"/>
+                <a:ea typeface="Arial" panose="020B0604020202020204"/>
+                <a:cs typeface="Arial" panose="020B0604020202020204"/>
+              </a:rPr>
+              <a:t>RELATIONSHIP TO OUR PROJEC</a:t>
+            </a:r>
+            <a:r>
+              <a:rPr lang="en-US" sz="1800" b="1" dirty="0">
+                <a:solidFill>
+                  <a:srgbClr val="181C62"/>
+                </a:solidFill>
+                <a:latin typeface="Arial" panose="020B0604020202020204"/>
+                <a:ea typeface="Arial" panose="020B0604020202020204"/>
+                <a:cs typeface="Arial" panose="020B0604020202020204"/>
+              </a:rPr>
+              <a:t>T</a:t>
+            </a:r>
+            <a:endParaRPr lang="en-US" sz="1800" b="1" dirty="0">
               <a:solidFill>
                 <a:srgbClr val="181C62"/>
               </a:solidFill>
-              <a:latin typeface="Arial" panose="020B0604020202090204"/>
-              <a:ea typeface="Arial" panose="020B0604020202090204"/>
-              <a:cs typeface="Arial" panose="020B0604020202090204"/>
+              <a:latin typeface="Arial" panose="020B0604020202020204"/>
+              <a:ea typeface="Arial" panose="020B0604020202020204"/>
+              <a:cs typeface="Arial" panose="020B0604020202020204"/>
             </a:endParaRPr>
           </a:p>
         </p:txBody>
@@ -5175,7 +5189,7 @@
         <p:spPr>
           <a:xfrm>
             <a:off x="6328791" y="3925252"/>
-            <a:ext cx="2151256" cy="205359"/>
+            <a:ext cx="3437255" cy="276860"/>
           </a:xfrm>
           <a:prstGeom prst="rect">
             <a:avLst/>
@@ -5193,23 +5207,23 @@
           <a:p>
             <a:pPr algn="l"/>
             <a:r>
-              <a:rPr lang="en-US" sz="1050" b="1" dirty="0">
+              <a:rPr lang="en-US" b="1" dirty="0">
                 <a:solidFill>
                   <a:srgbClr val="FFFFFF"/>
                 </a:solidFill>
-                <a:latin typeface="Arial" panose="020B0604020202090204"/>
-                <a:ea typeface="Arial" panose="020B0604020202090204"/>
-                <a:cs typeface="Arial" panose="020B0604020202090204"/>
-              </a:rPr>
-              <a:t>DECISION OR SUPPORT NEEDED</a:t>
-            </a:r>
-            <a:endParaRPr lang="en-US" sz="1050" b="1" dirty="0">
+                <a:latin typeface="Arial" panose="020B0604020202020204"/>
+                <a:ea typeface="Arial" panose="020B0604020202020204"/>
+                <a:cs typeface="Arial" panose="020B0604020202020204"/>
+              </a:rPr>
+              <a:t>BASELINE RECOMMENDATION</a:t>
+            </a:r>
+            <a:endParaRPr lang="en-US" b="1" dirty="0">
               <a:solidFill>
                 <a:srgbClr val="FFFFFF"/>
               </a:solidFill>
-              <a:latin typeface="Arial" panose="020B0604020202090204"/>
-              <a:ea typeface="Arial" panose="020B0604020202090204"/>
-              <a:cs typeface="Arial" panose="020B0604020202090204"/>
+              <a:latin typeface="Arial" panose="020B0604020202020204"/>
+              <a:ea typeface="Arial" panose="020B0604020202020204"/>
+              <a:cs typeface="Arial" panose="020B0604020202020204"/>
             </a:endParaRPr>
           </a:p>
         </p:txBody>
@@ -5223,7 +5237,7 @@
         <p:spPr>
           <a:xfrm>
             <a:off x="501396" y="543878"/>
-            <a:ext cx="2969122" cy="498729"/>
+            <a:ext cx="6664325" cy="391795"/>
           </a:xfrm>
           <a:prstGeom prst="rect">
             <a:avLst/>
@@ -5245,19 +5259,19 @@
                 <a:solidFill>
                   <a:srgbClr val="20243A"/>
                 </a:solidFill>
-                <a:latin typeface="Arial" panose="020B0604020202090204"/>
-                <a:ea typeface="Arial" panose="020B0604020202090204"/>
-                <a:cs typeface="Arial" panose="020B0604020202090204"/>
-              </a:rPr>
-              <a:t>Risks &amp; Decisions</a:t>
+                <a:latin typeface="Arial" panose="020B0604020202020204"/>
+                <a:ea typeface="Arial" panose="020B0604020202020204"/>
+                <a:cs typeface="Arial" panose="020B0604020202020204"/>
+              </a:rPr>
+              <a:t>Paper Review &amp; Baseline Recommendation</a:t>
             </a:r>
             <a:endParaRPr lang="en-US" sz="2550" b="1" dirty="0">
               <a:solidFill>
                 <a:srgbClr val="20243A"/>
               </a:solidFill>
-              <a:latin typeface="Arial" panose="020B0604020202090204"/>
-              <a:ea typeface="Arial" panose="020B0604020202090204"/>
-              <a:cs typeface="Arial" panose="020B0604020202090204"/>
+              <a:latin typeface="Arial" panose="020B0604020202020204"/>
+              <a:ea typeface="Arial" panose="020B0604020202020204"/>
+              <a:cs typeface="Arial" panose="020B0604020202020204"/>
             </a:endParaRPr>
           </a:p>
         </p:txBody>
@@ -5270,8 +5284,8 @@
         </p:nvSpPr>
         <p:spPr>
           <a:xfrm>
-            <a:off x="792099" y="2077879"/>
-            <a:ext cx="3269742" cy="603314"/>
+            <a:off x="791845" y="2077720"/>
+            <a:ext cx="4071620" cy="1192530"/>
           </a:xfrm>
           <a:prstGeom prst="rect">
             <a:avLst/>
@@ -5282,7 +5296,7 @@
           </a:ln>
         </p:spPr>
         <p:txBody>
-          <a:bodyPr wrap="none" lIns="0" tIns="0" rIns="0" bIns="0" anchor="t" anchorCtr="0">
+          <a:bodyPr wrap="square" lIns="0" tIns="0" rIns="0" bIns="0" anchor="t" anchorCtr="0">
             <a:spAutoFit/>
           </a:bodyPr>
           <a:lstStyle/>
@@ -5293,23 +5307,23 @@
               </a:lnSpc>
             </a:pPr>
             <a:r>
-              <a:rPr lang="en-US" sz="1580" b="1" dirty="0">
-                <a:solidFill>
-                  <a:srgbClr val="D71440"/>
-                </a:solidFill>
-                <a:latin typeface="Arial" panose="020B0604020202090204"/>
-                <a:ea typeface="Arial" panose="020B0604020202090204"/>
-                <a:cs typeface="Arial" panose="020B0604020202090204"/>
-              </a:rPr>
-              <a:t>{{RISKS}}</a:t>
-            </a:r>
-            <a:endParaRPr lang="en-US" sz="1580" b="1" dirty="0">
-              <a:solidFill>
-                <a:srgbClr val="D71440"/>
-              </a:solidFill>
-              <a:latin typeface="Arial" panose="020B0604020202090204"/>
-              <a:ea typeface="Arial" panose="020B0604020202090204"/>
-              <a:cs typeface="Arial" panose="020B0604020202090204"/>
+              <a:rPr lang="en-US" sz="1600" b="1" dirty="0">
+                <a:solidFill>
+                  <a:srgbClr val="FF0000"/>
+                </a:solidFill>
+                <a:latin typeface="Arial" panose="020B0604020202020204"/>
+                <a:ea typeface="Arial" panose="020B0604020202020204"/>
+                <a:cs typeface="Arial" panose="020B0604020202020204"/>
+              </a:rPr>
+              <a:t>Strong GCN Backbone</a:t>
+            </a:r>
+            <a:endParaRPr lang="en-US" sz="1050" dirty="0">
+              <a:solidFill>
+                <a:srgbClr val="5E6478"/>
+              </a:solidFill>
+              <a:latin typeface="Arial" panose="020B0604020202020204"/>
+              <a:ea typeface="Arial" panose="020B0604020202020204"/>
+              <a:cs typeface="Arial" panose="020B0604020202020204"/>
             </a:endParaRPr>
           </a:p>
           <a:p>
@@ -5319,51 +5333,25 @@
               </a:lnSpc>
             </a:pPr>
             <a:r>
-              <a:rPr lang="en-US" sz="1050" dirty="0">
+              <a:rPr lang="en-US" sz="1600" dirty="0">
                 <a:solidFill>
                   <a:srgbClr val="5E6478"/>
                 </a:solidFill>
-                <a:latin typeface="Arial" panose="020B0604020202090204"/>
-                <a:ea typeface="Arial" panose="020B0604020202090204"/>
-                <a:cs typeface="Arial" panose="020B0604020202090204"/>
-              </a:rPr>
-              <a:t>Describe the failure mode, trigger, and evidence.</a:t>
-            </a:r>
-            <a:endParaRPr lang="en-US" sz="1050" dirty="0">
+                <a:latin typeface="Arial" panose="020B0604020202020204"/>
+                <a:ea typeface="Arial" panose="020B0604020202020204"/>
+                <a:cs typeface="Arial" panose="020B0604020202020204"/>
+              </a:rPr>
+              <a:t>• Dynamic joint topology</a:t>
+            </a:r>
+            <a:endParaRPr lang="en-US" sz="1600" dirty="0">
               <a:solidFill>
                 <a:srgbClr val="5E6478"/>
               </a:solidFill>
-              <a:latin typeface="Arial" panose="020B0604020202090204"/>
-              <a:ea typeface="Arial" panose="020B0604020202090204"/>
-              <a:cs typeface="Arial" panose="020B0604020202090204"/>
-            </a:endParaRPr>
-          </a:p>
-        </p:txBody>
-      </p:sp>
-      <p:sp>
-        <p:nvSpPr>
-          <p:cNvPr id="19" name="TextBox 19"/>
-          <p:cNvSpPr txBox="1"/>
-          <p:nvPr/>
-        </p:nvSpPr>
-        <p:spPr>
-          <a:xfrm>
-            <a:off x="6326124" y="2077879"/>
-            <a:ext cx="3843147" cy="603314"/>
-          </a:xfrm>
-          <a:prstGeom prst="rect">
-            <a:avLst/>
-          </a:prstGeom>
-          <a:noFill/>
-          <a:ln>
-            <a:noFill/>
-          </a:ln>
-        </p:spPr>
-        <p:txBody>
-          <a:bodyPr wrap="none" lIns="0" tIns="0" rIns="0" bIns="0" anchor="t" anchorCtr="0">
-            <a:spAutoFit/>
-          </a:bodyPr>
-          <a:lstStyle/>
+              <a:latin typeface="Arial" panose="020B0604020202020204"/>
+              <a:ea typeface="Arial" panose="020B0604020202020204"/>
+              <a:cs typeface="Arial" panose="020B0604020202020204"/>
+            </a:endParaRPr>
+          </a:p>
           <a:p>
             <a:pPr algn="l">
               <a:lnSpc>
@@ -5371,23 +5359,23 @@
               </a:lnSpc>
             </a:pPr>
             <a:r>
-              <a:rPr lang="en-US" sz="1580" dirty="0">
-                <a:solidFill>
-                  <a:srgbClr val="20243A"/>
-                </a:solidFill>
-                <a:latin typeface="Arial" panose="020B0604020202090204"/>
-                <a:ea typeface="Arial" panose="020B0604020202090204"/>
-                <a:cs typeface="Arial" panose="020B0604020202090204"/>
-              </a:rPr>
-              <a:t>{{IMPACT}}</a:t>
-            </a:r>
-            <a:endParaRPr lang="en-US" sz="1580" dirty="0">
-              <a:solidFill>
-                <a:srgbClr val="20243A"/>
-              </a:solidFill>
-              <a:latin typeface="Arial" panose="020B0604020202090204"/>
-              <a:ea typeface="Arial" panose="020B0604020202090204"/>
-              <a:cs typeface="Arial" panose="020B0604020202090204"/>
+              <a:rPr lang="en-US" sz="1600" dirty="0">
+                <a:solidFill>
+                  <a:srgbClr val="5E6478"/>
+                </a:solidFill>
+                <a:latin typeface="Arial" panose="020B0604020202020204"/>
+                <a:ea typeface="Arial" panose="020B0604020202020204"/>
+                <a:cs typeface="Arial" panose="020B0604020202020204"/>
+              </a:rPr>
+              <a:t>• Person slots encoded separately</a:t>
+            </a:r>
+            <a:endParaRPr lang="en-US" sz="1600" dirty="0">
+              <a:solidFill>
+                <a:srgbClr val="5E6478"/>
+              </a:solidFill>
+              <a:latin typeface="Arial" panose="020B0604020202020204"/>
+              <a:ea typeface="Arial" panose="020B0604020202020204"/>
+              <a:cs typeface="Arial" panose="020B0604020202020204"/>
             </a:endParaRPr>
           </a:p>
           <a:p>
@@ -5397,37 +5385,37 @@
               </a:lnSpc>
             </a:pPr>
             <a:r>
-              <a:rPr lang="en-US" sz="1050" dirty="0">
+              <a:rPr lang="en-US" sz="1600" dirty="0">
                 <a:solidFill>
                   <a:srgbClr val="5E6478"/>
                 </a:solidFill>
-                <a:latin typeface="Arial" panose="020B0604020202090204"/>
-                <a:ea typeface="Arial" panose="020B0604020202090204"/>
-                <a:cs typeface="Arial" panose="020B0604020202090204"/>
-              </a:rPr>
-              <a:t>Quantify delay, compute cost, metric risk, or lost scope.</a:t>
-            </a:r>
-            <a:endParaRPr lang="en-US" sz="1050" dirty="0">
+                <a:latin typeface="Arial" panose="020B0604020202020204"/>
+                <a:ea typeface="Arial" panose="020B0604020202020204"/>
+                <a:cs typeface="Arial" panose="020B0604020202020204"/>
+              </a:rPr>
+              <a:t>• Final mean pooling removes the distinction</a:t>
+            </a:r>
+            <a:endParaRPr lang="en-US" sz="1600" dirty="0">
               <a:solidFill>
                 <a:srgbClr val="5E6478"/>
               </a:solidFill>
-              <a:latin typeface="Arial" panose="020B0604020202090204"/>
-              <a:ea typeface="Arial" panose="020B0604020202090204"/>
-              <a:cs typeface="Arial" panose="020B0604020202090204"/>
-            </a:endParaRPr>
-          </a:p>
-        </p:txBody>
-      </p:sp>
-      <p:sp>
-        <p:nvSpPr>
-          <p:cNvPr id="20" name="TextBox 20"/>
+              <a:latin typeface="Arial" panose="020B0604020202020204"/>
+              <a:ea typeface="Arial" panose="020B0604020202020204"/>
+              <a:cs typeface="Arial" panose="020B0604020202020204"/>
+            </a:endParaRPr>
+          </a:p>
+        </p:txBody>
+      </p:sp>
+      <p:sp>
+        <p:nvSpPr>
+          <p:cNvPr id="19" name="TextBox 19"/>
           <p:cNvSpPr txBox="1"/>
           <p:nvPr/>
         </p:nvSpPr>
         <p:spPr>
           <a:xfrm>
-            <a:off x="792099" y="4363879"/>
-            <a:ext cx="2456307" cy="603314"/>
+            <a:off x="6325870" y="2077720"/>
+            <a:ext cx="3451860" cy="1192530"/>
           </a:xfrm>
           <a:prstGeom prst="rect">
             <a:avLst/>
@@ -5438,7 +5426,7 @@
           </a:ln>
         </p:spPr>
         <p:txBody>
-          <a:bodyPr wrap="none" lIns="0" tIns="0" rIns="0" bIns="0" anchor="t" anchorCtr="0">
+          <a:bodyPr wrap="square" lIns="0" tIns="0" rIns="0" bIns="0" anchor="t" anchorCtr="0">
             <a:spAutoFit/>
           </a:bodyPr>
           <a:lstStyle/>
@@ -5449,23 +5437,23 @@
               </a:lnSpc>
             </a:pPr>
             <a:r>
-              <a:rPr lang="en-US" sz="1580" dirty="0">
-                <a:solidFill>
-                  <a:srgbClr val="181C62"/>
-                </a:solidFill>
-                <a:latin typeface="Arial" panose="020B0604020202090204"/>
-                <a:ea typeface="Arial" panose="020B0604020202090204"/>
-                <a:cs typeface="Arial" panose="020B0604020202090204"/>
-              </a:rPr>
-              <a:t>{{MITIGATION}}</a:t>
-            </a:r>
-            <a:endParaRPr lang="en-US" sz="1580" dirty="0">
-              <a:solidFill>
-                <a:srgbClr val="181C62"/>
-              </a:solidFill>
-              <a:latin typeface="Arial" panose="020B0604020202090204"/>
-              <a:ea typeface="Arial" panose="020B0604020202090204"/>
-              <a:cs typeface="Arial" panose="020B0604020202090204"/>
+              <a:rPr lang="en-US" sz="1600" b="1" dirty="0">
+                <a:solidFill>
+                  <a:srgbClr val="FF0000"/>
+                </a:solidFill>
+                <a:latin typeface="Arial" panose="020B0604020202020204"/>
+                <a:ea typeface="Arial" panose="020B0604020202020204"/>
+                <a:cs typeface="Arial" panose="020B0604020202020204"/>
+              </a:rPr>
+              <a:t>Data-Efficient Framework</a:t>
+            </a:r>
+            <a:endParaRPr lang="en-US" sz="1600" b="1" dirty="0">
+              <a:solidFill>
+                <a:srgbClr val="FF0000"/>
+              </a:solidFill>
+              <a:latin typeface="Arial" panose="020B0604020202020204"/>
+              <a:ea typeface="Arial" panose="020B0604020202020204"/>
+              <a:cs typeface="Arial" panose="020B0604020202020204"/>
             </a:endParaRPr>
           </a:p>
           <a:p>
@@ -5475,51 +5463,25 @@
               </a:lnSpc>
             </a:pPr>
             <a:r>
-              <a:rPr lang="en-US" sz="1050" dirty="0">
+              <a:rPr lang="en-US" sz="1600" dirty="0">
                 <a:solidFill>
                   <a:srgbClr val="5E6478"/>
                 </a:solidFill>
-                <a:latin typeface="Arial" panose="020B0604020202090204"/>
-                <a:ea typeface="Arial" panose="020B0604020202090204"/>
-                <a:cs typeface="Arial" panose="020B0604020202090204"/>
-              </a:rPr>
-              <a:t>Owner: … | Check date: … | Fallback: …</a:t>
-            </a:r>
-            <a:endParaRPr lang="en-US" sz="1050" dirty="0">
+                <a:latin typeface="Arial" panose="020B0604020202020204"/>
+                <a:ea typeface="Arial" panose="020B0604020202020204"/>
+                <a:cs typeface="Arial" panose="020B0604020202020204"/>
+              </a:rPr>
+              <a:t>• Uses a GCN backbone</a:t>
+            </a:r>
+            <a:endParaRPr lang="en-US" sz="1600" dirty="0">
               <a:solidFill>
                 <a:srgbClr val="5E6478"/>
               </a:solidFill>
-              <a:latin typeface="Arial" panose="020B0604020202090204"/>
-              <a:ea typeface="Arial" panose="020B0604020202090204"/>
-              <a:cs typeface="Arial" panose="020B0604020202090204"/>
-            </a:endParaRPr>
-          </a:p>
-        </p:txBody>
-      </p:sp>
-      <p:sp>
-        <p:nvSpPr>
-          <p:cNvPr id="21" name="TextBox 21"/>
-          <p:cNvSpPr txBox="1"/>
-          <p:nvPr/>
-        </p:nvSpPr>
-        <p:spPr>
-          <a:xfrm>
-            <a:off x="6326124" y="4363879"/>
-            <a:ext cx="3423095" cy="603314"/>
-          </a:xfrm>
-          <a:prstGeom prst="rect">
-            <a:avLst/>
-          </a:prstGeom>
-          <a:noFill/>
-          <a:ln>
-            <a:noFill/>
-          </a:ln>
-        </p:spPr>
-        <p:txBody>
-          <a:bodyPr wrap="none" lIns="0" tIns="0" rIns="0" bIns="0" anchor="t" anchorCtr="0">
-            <a:spAutoFit/>
-          </a:bodyPr>
-          <a:lstStyle/>
+              <a:latin typeface="Arial" panose="020B0604020202020204"/>
+              <a:ea typeface="Arial" panose="020B0604020202020204"/>
+              <a:cs typeface="Arial" panose="020B0604020202020204"/>
+            </a:endParaRPr>
+          </a:p>
           <a:p>
             <a:pPr algn="l">
               <a:lnSpc>
@@ -5527,23 +5489,23 @@
               </a:lnSpc>
             </a:pPr>
             <a:r>
-              <a:rPr lang="en-US" sz="1580" b="1" dirty="0">
-                <a:solidFill>
-                  <a:srgbClr val="FFFFFF"/>
-                </a:solidFill>
-                <a:latin typeface="Arial" panose="020B0604020202090204"/>
-                <a:ea typeface="Arial" panose="020B0604020202090204"/>
-                <a:cs typeface="Arial" panose="020B0604020202090204"/>
-              </a:rPr>
-              <a:t>{{DECISION_NEEDED}}</a:t>
-            </a:r>
-            <a:endParaRPr lang="en-US" sz="1580" b="1" dirty="0">
-              <a:solidFill>
-                <a:srgbClr val="FFFFFF"/>
-              </a:solidFill>
-              <a:latin typeface="Arial" panose="020B0604020202090204"/>
-              <a:ea typeface="Arial" panose="020B0604020202090204"/>
-              <a:cs typeface="Arial" panose="020B0604020202090204"/>
+              <a:rPr lang="en-US" sz="1600" dirty="0">
+                <a:solidFill>
+                  <a:srgbClr val="5E6478"/>
+                </a:solidFill>
+                <a:latin typeface="Arial" panose="020B0604020202020204"/>
+                <a:ea typeface="Arial" panose="020B0604020202020204"/>
+                <a:cs typeface="Arial" panose="020B0604020202020204"/>
+              </a:rPr>
+              <a:t>• Cross-sample feature aggregation</a:t>
+            </a:r>
+            <a:endParaRPr lang="en-US" sz="1600" dirty="0">
+              <a:solidFill>
+                <a:srgbClr val="5E6478"/>
+              </a:solidFill>
+              <a:latin typeface="Arial" panose="020B0604020202020204"/>
+              <a:ea typeface="Arial" panose="020B0604020202020204"/>
+              <a:cs typeface="Arial" panose="020B0604020202020204"/>
             </a:endParaRPr>
           </a:p>
           <a:p>
@@ -5553,23 +5515,242 @@
               </a:lnSpc>
             </a:pPr>
             <a:r>
+              <a:rPr lang="en-US" sz="1600" dirty="0">
+                <a:solidFill>
+                  <a:srgbClr val="5E6478"/>
+                </a:solidFill>
+                <a:latin typeface="Arial" panose="020B0604020202020204"/>
+                <a:ea typeface="Arial" panose="020B0604020202020204"/>
+                <a:cs typeface="Arial" panose="020B0604020202020204"/>
+              </a:rPr>
+              <a:t>• Performer ID ≠ within-clip identity</a:t>
+            </a:r>
+            <a:r>
               <a:rPr lang="en-US" sz="1050" dirty="0">
                 <a:solidFill>
+                  <a:srgbClr val="5E6478"/>
+                </a:solidFill>
+                <a:latin typeface="Arial" panose="020B0604020202020204"/>
+                <a:ea typeface="Arial" panose="020B0604020202020204"/>
+                <a:cs typeface="Arial" panose="020B0604020202020204"/>
+              </a:rPr>
+              <a:t>.</a:t>
+            </a:r>
+            <a:endParaRPr lang="en-US" sz="1050" dirty="0">
+              <a:solidFill>
+                <a:srgbClr val="5E6478"/>
+              </a:solidFill>
+              <a:latin typeface="Arial" panose="020B0604020202020204"/>
+              <a:ea typeface="Arial" panose="020B0604020202020204"/>
+              <a:cs typeface="Arial" panose="020B0604020202020204"/>
+            </a:endParaRPr>
+          </a:p>
+        </p:txBody>
+      </p:sp>
+      <p:sp>
+        <p:nvSpPr>
+          <p:cNvPr id="20" name="TextBox 20"/>
+          <p:cNvSpPr txBox="1"/>
+          <p:nvPr/>
+        </p:nvSpPr>
+        <p:spPr>
+          <a:xfrm>
+            <a:off x="791845" y="4363720"/>
+            <a:ext cx="4086860" cy="1192530"/>
+          </a:xfrm>
+          <a:prstGeom prst="rect">
+            <a:avLst/>
+          </a:prstGeom>
+          <a:noFill/>
+          <a:ln>
+            <a:noFill/>
+          </a:ln>
+        </p:spPr>
+        <p:txBody>
+          <a:bodyPr wrap="square" lIns="0" tIns="0" rIns="0" bIns="0" anchor="t" anchorCtr="0">
+            <a:spAutoFit/>
+          </a:bodyPr>
+          <a:lstStyle/>
+          <a:p>
+            <a:pPr algn="l">
+              <a:lnSpc>
+                <a:spcPts val="2325"/>
+              </a:lnSpc>
+            </a:pPr>
+            <a:r>
+              <a:rPr lang="en-US" sz="1600" b="1" dirty="0">
+                <a:solidFill>
+                  <a:srgbClr val="5E6478"/>
+                </a:solidFill>
+                <a:latin typeface="Arial" panose="020B0604020202020204"/>
+                <a:ea typeface="Arial" panose="020B0604020202020204"/>
+                <a:cs typeface="Arial" panose="020B0604020202020204"/>
+              </a:rPr>
+              <a:t>Shared Research Gap</a:t>
+            </a:r>
+            <a:endParaRPr lang="en-US" sz="1600" b="1" dirty="0">
+              <a:solidFill>
+                <a:srgbClr val="5E6478"/>
+              </a:solidFill>
+              <a:latin typeface="Arial" panose="020B0604020202020204"/>
+              <a:ea typeface="Arial" panose="020B0604020202020204"/>
+              <a:cs typeface="Arial" panose="020B0604020202020204"/>
+            </a:endParaRPr>
+          </a:p>
+          <a:p>
+            <a:pPr algn="l">
+              <a:lnSpc>
+                <a:spcPts val="2325"/>
+              </a:lnSpc>
+            </a:pPr>
+            <a:r>
+              <a:rPr lang="en-US" sz="1600" dirty="0">
+                <a:solidFill>
+                  <a:srgbClr val="5E6478"/>
+                </a:solidFill>
+                <a:latin typeface="Arial" panose="020B0604020202020204"/>
+                <a:ea typeface="Arial" panose="020B0604020202020204"/>
+                <a:cs typeface="Arial" panose="020B0604020202020204"/>
+              </a:rPr>
+              <a:t>• No explicit within-clip identity</a:t>
+            </a:r>
+            <a:endParaRPr lang="en-US" sz="1600" dirty="0">
+              <a:solidFill>
+                <a:srgbClr val="5E6478"/>
+              </a:solidFill>
+              <a:latin typeface="Arial" panose="020B0604020202020204"/>
+              <a:ea typeface="Arial" panose="020B0604020202020204"/>
+              <a:cs typeface="Arial" panose="020B0604020202020204"/>
+            </a:endParaRPr>
+          </a:p>
+          <a:p>
+            <a:pPr algn="l">
+              <a:lnSpc>
+                <a:spcPts val="2325"/>
+              </a:lnSpc>
+            </a:pPr>
+            <a:r>
+              <a:rPr lang="en-US" sz="1600" dirty="0">
+                <a:solidFill>
+                  <a:srgbClr val="5E6478"/>
+                </a:solidFill>
+                <a:latin typeface="Arial" panose="020B0604020202020204"/>
+                <a:ea typeface="Arial" panose="020B0604020202020204"/>
+                <a:cs typeface="Arial" panose="020B0604020202020204"/>
+              </a:rPr>
+              <a:t>• No explicit cross-person geometry</a:t>
+            </a:r>
+            <a:endParaRPr lang="en-US" sz="1600" dirty="0">
+              <a:solidFill>
+                <a:srgbClr val="5E6478"/>
+              </a:solidFill>
+              <a:latin typeface="Arial" panose="020B0604020202020204"/>
+              <a:ea typeface="Arial" panose="020B0604020202020204"/>
+              <a:cs typeface="Arial" panose="020B0604020202020204"/>
+            </a:endParaRPr>
+          </a:p>
+          <a:p>
+            <a:pPr algn="l">
+              <a:lnSpc>
+                <a:spcPts val="2325"/>
+              </a:lnSpc>
+            </a:pPr>
+            <a:r>
+              <a:rPr lang="en-US" sz="1600" dirty="0">
+                <a:solidFill>
+                  <a:srgbClr val="5E6478"/>
+                </a:solidFill>
+                <a:latin typeface="Arial" panose="020B0604020202020204"/>
+                <a:ea typeface="Arial" panose="020B0604020202020204"/>
+                <a:cs typeface="Arial" panose="020B0604020202020204"/>
+              </a:rPr>
+              <a:t>• No explicit role-aware modelling</a:t>
+            </a:r>
+            <a:endParaRPr lang="en-US" sz="1600" dirty="0">
+              <a:solidFill>
+                <a:srgbClr val="5E6478"/>
+              </a:solidFill>
+              <a:latin typeface="Arial" panose="020B0604020202020204"/>
+              <a:ea typeface="Arial" panose="020B0604020202020204"/>
+              <a:cs typeface="Arial" panose="020B0604020202020204"/>
+            </a:endParaRPr>
+          </a:p>
+        </p:txBody>
+      </p:sp>
+      <p:sp>
+        <p:nvSpPr>
+          <p:cNvPr id="21" name="TextBox 21"/>
+          <p:cNvSpPr txBox="1"/>
+          <p:nvPr/>
+        </p:nvSpPr>
+        <p:spPr>
+          <a:xfrm>
+            <a:off x="6325870" y="4363720"/>
+            <a:ext cx="3272155" cy="894080"/>
+          </a:xfrm>
+          <a:prstGeom prst="rect">
+            <a:avLst/>
+          </a:prstGeom>
+          <a:noFill/>
+          <a:ln>
+            <a:noFill/>
+          </a:ln>
+        </p:spPr>
+        <p:txBody>
+          <a:bodyPr wrap="square" lIns="0" tIns="0" rIns="0" bIns="0" anchor="t" anchorCtr="0">
+            <a:spAutoFit/>
+          </a:bodyPr>
+          <a:lstStyle/>
+          <a:p>
+            <a:pPr algn="l">
+              <a:lnSpc>
+                <a:spcPts val="2325"/>
+              </a:lnSpc>
+            </a:pPr>
+            <a:r>
+              <a:rPr lang="en-US" sz="1600" dirty="0">
+                <a:solidFill>
                   <a:srgbClr val="C8C8C8"/>
                 </a:solidFill>
-                <a:latin typeface="Arial" panose="020B0604020202090204"/>
-                <a:ea typeface="Arial" panose="020B0604020202090204"/>
-                <a:cs typeface="Arial" panose="020B0604020202090204"/>
-              </a:rPr>
-              <a:t>State the choice, approver, and latest useful date.</a:t>
-            </a:r>
-            <a:endParaRPr lang="en-US" sz="1050" dirty="0">
+                <a:latin typeface="Arial" panose="020B0604020202020204"/>
+                <a:ea typeface="Arial" panose="020B0604020202020204"/>
+                <a:cs typeface="Arial" panose="020B0604020202020204"/>
+              </a:rPr>
+              <a:t>Primary candidate: CTR-GCN</a:t>
+            </a:r>
+            <a:endParaRPr lang="en-US" sz="1600" dirty="0">
               <a:solidFill>
                 <a:srgbClr val="C8C8C8"/>
               </a:solidFill>
-              <a:latin typeface="Arial" panose="020B0604020202090204"/>
-              <a:ea typeface="Arial" panose="020B0604020202090204"/>
-              <a:cs typeface="Arial" panose="020B0604020202090204"/>
+              <a:latin typeface="Arial" panose="020B0604020202020204"/>
+              <a:ea typeface="Arial" panose="020B0604020202020204"/>
+              <a:cs typeface="Arial" panose="020B0604020202020204"/>
+            </a:endParaRPr>
+          </a:p>
+          <a:p>
+            <a:pPr algn="l">
+              <a:lnSpc>
+                <a:spcPts val="2325"/>
+              </a:lnSpc>
+            </a:pPr>
+            <a:r>
+              <a:rPr lang="en-US" sz="1600" dirty="0">
+                <a:solidFill>
+                  <a:srgbClr val="C8C8C8"/>
+                </a:solidFill>
+                <a:latin typeface="Arial" panose="020B0604020202020204"/>
+                <a:ea typeface="Arial" panose="020B0604020202020204"/>
+                <a:cs typeface="Arial" panose="020B0604020202020204"/>
+              </a:rPr>
+              <a:t>Secondary comparison: SkeletonX-CTR-GCN</a:t>
+            </a:r>
+            <a:endParaRPr lang="en-US" sz="1600" dirty="0">
+              <a:solidFill>
+                <a:srgbClr val="C8C8C8"/>
+              </a:solidFill>
+              <a:latin typeface="Arial" panose="020B0604020202020204"/>
+              <a:ea typeface="Arial" panose="020B0604020202020204"/>
+              <a:cs typeface="Arial" panose="020B0604020202020204"/>
             </a:endParaRPr>
           </a:p>
         </p:txBody>
@@ -5605,9 +5786,9 @@
                 <a:solidFill>
                   <a:srgbClr val="FFFFFF"/>
                 </a:solidFill>
-                <a:latin typeface="Arial" panose="020B0604020202090204"/>
-                <a:ea typeface="Arial" panose="020B0604020202090204"/>
-                <a:cs typeface="Arial" panose="020B0604020202090204"/>
+                <a:latin typeface="Arial" panose="020B0604020202020204"/>
+                <a:ea typeface="Arial" panose="020B0604020202020204"/>
+                <a:cs typeface="Arial" panose="020B0604020202020204"/>
               </a:rPr>
               <a:t>{{PAGE_NUM}}</a:t>
             </a:r>
@@ -5615,9 +5796,9 @@
               <a:solidFill>
                 <a:srgbClr val="FFFFFF"/>
               </a:solidFill>
-              <a:latin typeface="Arial" panose="020B0604020202090204"/>
-              <a:ea typeface="Arial" panose="020B0604020202090204"/>
-              <a:cs typeface="Arial" panose="020B0604020202090204"/>
+              <a:latin typeface="Arial" panose="020B0604020202020204"/>
+              <a:ea typeface="Arial" panose="020B0604020202020204"/>
+              <a:cs typeface="Arial" panose="020B0604020202020204"/>
             </a:endParaRPr>
           </a:p>
         </p:txBody>
@@ -5754,9 +5935,9 @@
                 <a:solidFill>
                   <a:srgbClr val="FFFFFF"/>
                 </a:solidFill>
-                <a:latin typeface="Arial" panose="020B0604020202090204"/>
-                <a:ea typeface="Arial" panose="020B0604020202090204"/>
-                <a:cs typeface="Arial" panose="020B0604020202090204"/>
+                <a:latin typeface="Arial" panose="020B0604020202020204"/>
+                <a:ea typeface="Arial" panose="020B0604020202020204"/>
+                <a:cs typeface="Arial" panose="020B0604020202020204"/>
               </a:rPr>
               <a:t>EE6008 · HUMAN POSE ANALYTICS</a:t>
             </a:r>
@@ -5764,9 +5945,9 @@
               <a:solidFill>
                 <a:srgbClr val="FFFFFF"/>
               </a:solidFill>
-              <a:latin typeface="Arial" panose="020B0604020202090204"/>
-              <a:ea typeface="Arial" panose="020B0604020202090204"/>
-              <a:cs typeface="Arial" panose="020B0604020202090204"/>
+              <a:latin typeface="Arial" panose="020B0604020202020204"/>
+              <a:ea typeface="Arial" panose="020B0604020202020204"/>
+              <a:cs typeface="Arial" panose="020B0604020202020204"/>
             </a:endParaRPr>
           </a:p>
         </p:txBody>
@@ -6022,9 +6203,9 @@
                 <a:solidFill>
                   <a:srgbClr val="FFFFFF"/>
                 </a:solidFill>
-                <a:latin typeface="Arial" panose="020B0604020202090204"/>
-                <a:ea typeface="Arial" panose="020B0604020202090204"/>
-                <a:cs typeface="Arial" panose="020B0604020202090204"/>
+                <a:latin typeface="Arial" panose="020B0604020202020204"/>
+                <a:ea typeface="Arial" panose="020B0604020202020204"/>
+                <a:cs typeface="Arial" panose="020B0604020202020204"/>
               </a:rPr>
               <a:t>1</a:t>
             </a:r>
@@ -6032,9 +6213,9 @@
               <a:solidFill>
                 <a:srgbClr val="FFFFFF"/>
               </a:solidFill>
-              <a:latin typeface="Arial" panose="020B0604020202090204"/>
-              <a:ea typeface="Arial" panose="020B0604020202090204"/>
-              <a:cs typeface="Arial" panose="020B0604020202090204"/>
+              <a:latin typeface="Arial" panose="020B0604020202020204"/>
+              <a:ea typeface="Arial" panose="020B0604020202020204"/>
+              <a:cs typeface="Arial" panose="020B0604020202020204"/>
             </a:endParaRPr>
           </a:p>
         </p:txBody>
@@ -6070,9 +6251,9 @@
                 <a:solidFill>
                   <a:srgbClr val="FFFFFF"/>
                 </a:solidFill>
-                <a:latin typeface="Arial" panose="020B0604020202090204"/>
-                <a:ea typeface="Arial" panose="020B0604020202090204"/>
-                <a:cs typeface="Arial" panose="020B0604020202090204"/>
+                <a:latin typeface="Arial" panose="020B0604020202020204"/>
+                <a:ea typeface="Arial" panose="020B0604020202020204"/>
+                <a:cs typeface="Arial" panose="020B0604020202020204"/>
               </a:rPr>
               <a:t>2</a:t>
             </a:r>
@@ -6080,9 +6261,9 @@
               <a:solidFill>
                 <a:srgbClr val="FFFFFF"/>
               </a:solidFill>
-              <a:latin typeface="Arial" panose="020B0604020202090204"/>
-              <a:ea typeface="Arial" panose="020B0604020202090204"/>
-              <a:cs typeface="Arial" panose="020B0604020202090204"/>
+              <a:latin typeface="Arial" panose="020B0604020202020204"/>
+              <a:ea typeface="Arial" panose="020B0604020202020204"/>
+              <a:cs typeface="Arial" panose="020B0604020202020204"/>
             </a:endParaRPr>
           </a:p>
         </p:txBody>
@@ -6118,9 +6299,9 @@
                 <a:solidFill>
                   <a:srgbClr val="FFFFFF"/>
                 </a:solidFill>
-                <a:latin typeface="Arial" panose="020B0604020202090204"/>
-                <a:ea typeface="Arial" panose="020B0604020202090204"/>
-                <a:cs typeface="Arial" panose="020B0604020202090204"/>
+                <a:latin typeface="Arial" panose="020B0604020202020204"/>
+                <a:ea typeface="Arial" panose="020B0604020202020204"/>
+                <a:cs typeface="Arial" panose="020B0604020202020204"/>
               </a:rPr>
               <a:t>3</a:t>
             </a:r>
@@ -6128,9 +6309,9 @@
               <a:solidFill>
                 <a:srgbClr val="FFFFFF"/>
               </a:solidFill>
-              <a:latin typeface="Arial" panose="020B0604020202090204"/>
-              <a:ea typeface="Arial" panose="020B0604020202090204"/>
-              <a:cs typeface="Arial" panose="020B0604020202090204"/>
+              <a:latin typeface="Arial" panose="020B0604020202020204"/>
+              <a:ea typeface="Arial" panose="020B0604020202020204"/>
+              <a:cs typeface="Arial" panose="020B0604020202020204"/>
             </a:endParaRPr>
           </a:p>
         </p:txBody>
@@ -6166,9 +6347,9 @@
                 <a:solidFill>
                   <a:srgbClr val="D71440"/>
                 </a:solidFill>
-                <a:latin typeface="Arial" panose="020B0604020202090204"/>
-                <a:ea typeface="Arial" panose="020B0604020202090204"/>
-                <a:cs typeface="Arial" panose="020B0604020202090204"/>
+                <a:latin typeface="Arial" panose="020B0604020202020204"/>
+                <a:ea typeface="Arial" panose="020B0604020202020204"/>
+                <a:cs typeface="Arial" panose="020B0604020202020204"/>
               </a:rPr>
               <a:t>DELIVERABLE 1 · BUILD</a:t>
             </a:r>
@@ -6176,9 +6357,9 @@
               <a:solidFill>
                 <a:srgbClr val="D71440"/>
               </a:solidFill>
-              <a:latin typeface="Arial" panose="020B0604020202090204"/>
-              <a:ea typeface="Arial" panose="020B0604020202090204"/>
-              <a:cs typeface="Arial" panose="020B0604020202090204"/>
+              <a:latin typeface="Arial" panose="020B0604020202020204"/>
+              <a:ea typeface="Arial" panose="020B0604020202020204"/>
+              <a:cs typeface="Arial" panose="020B0604020202020204"/>
             </a:endParaRPr>
           </a:p>
         </p:txBody>
@@ -6214,9 +6395,9 @@
                 <a:solidFill>
                   <a:srgbClr val="181C62"/>
                 </a:solidFill>
-                <a:latin typeface="Arial" panose="020B0604020202090204"/>
-                <a:ea typeface="Arial" panose="020B0604020202090204"/>
-                <a:cs typeface="Arial" panose="020B0604020202090204"/>
+                <a:latin typeface="Arial" panose="020B0604020202020204"/>
+                <a:ea typeface="Arial" panose="020B0604020202020204"/>
+                <a:cs typeface="Arial" panose="020B0604020202020204"/>
               </a:rPr>
               <a:t>DELIVERABLE 2 · VALIDATE</a:t>
             </a:r>
@@ -6224,9 +6405,9 @@
               <a:solidFill>
                 <a:srgbClr val="181C62"/>
               </a:solidFill>
-              <a:latin typeface="Arial" panose="020B0604020202090204"/>
-              <a:ea typeface="Arial" panose="020B0604020202090204"/>
-              <a:cs typeface="Arial" panose="020B0604020202090204"/>
+              <a:latin typeface="Arial" panose="020B0604020202020204"/>
+              <a:ea typeface="Arial" panose="020B0604020202020204"/>
+              <a:cs typeface="Arial" panose="020B0604020202020204"/>
             </a:endParaRPr>
           </a:p>
         </p:txBody>
@@ -6262,9 +6443,9 @@
                 <a:solidFill>
                   <a:srgbClr val="D71440"/>
                 </a:solidFill>
-                <a:latin typeface="Arial" panose="020B0604020202090204"/>
-                <a:ea typeface="Arial" panose="020B0604020202090204"/>
-                <a:cs typeface="Arial" panose="020B0604020202090204"/>
+                <a:latin typeface="Arial" panose="020B0604020202020204"/>
+                <a:ea typeface="Arial" panose="020B0604020202020204"/>
+                <a:cs typeface="Arial" panose="020B0604020202020204"/>
               </a:rPr>
               <a:t>DELIVERABLE 3 · DOCUMENT</a:t>
             </a:r>
@@ -6272,9 +6453,9 @@
               <a:solidFill>
                 <a:srgbClr val="D71440"/>
               </a:solidFill>
-              <a:latin typeface="Arial" panose="020B0604020202090204"/>
-              <a:ea typeface="Arial" panose="020B0604020202090204"/>
-              <a:cs typeface="Arial" panose="020B0604020202090204"/>
+              <a:latin typeface="Arial" panose="020B0604020202020204"/>
+              <a:ea typeface="Arial" panose="020B0604020202020204"/>
+              <a:cs typeface="Arial" panose="020B0604020202020204"/>
             </a:endParaRPr>
           </a:p>
         </p:txBody>
@@ -6310,9 +6491,9 @@
                 <a:solidFill>
                   <a:srgbClr val="FFFFFF"/>
                 </a:solidFill>
-                <a:latin typeface="Arial" panose="020B0604020202090204"/>
-                <a:ea typeface="Arial" panose="020B0604020202090204"/>
-                <a:cs typeface="Arial" panose="020B0604020202090204"/>
+                <a:latin typeface="Arial" panose="020B0604020202020204"/>
+                <a:ea typeface="Arial" panose="020B0604020202020204"/>
+                <a:cs typeface="Arial" panose="020B0604020202020204"/>
               </a:rPr>
               <a:t>OWNER · DUE DATE · SUCCESS CHECK</a:t>
             </a:r>
@@ -6320,9 +6501,9 @@
               <a:solidFill>
                 <a:srgbClr val="FFFFFF"/>
               </a:solidFill>
-              <a:latin typeface="Arial" panose="020B0604020202090204"/>
-              <a:ea typeface="Arial" panose="020B0604020202090204"/>
-              <a:cs typeface="Arial" panose="020B0604020202090204"/>
+              <a:latin typeface="Arial" panose="020B0604020202020204"/>
+              <a:ea typeface="Arial" panose="020B0604020202020204"/>
+              <a:cs typeface="Arial" panose="020B0604020202020204"/>
             </a:endParaRPr>
           </a:p>
         </p:txBody>
@@ -6358,9 +6539,9 @@
                 <a:solidFill>
                   <a:srgbClr val="20243A"/>
                 </a:solidFill>
-                <a:latin typeface="Arial" panose="020B0604020202090204"/>
-                <a:ea typeface="Arial" panose="020B0604020202090204"/>
-                <a:cs typeface="Arial" panose="020B0604020202090204"/>
+                <a:latin typeface="Arial" panose="020B0604020202020204"/>
+                <a:ea typeface="Arial" panose="020B0604020202020204"/>
+                <a:cs typeface="Arial" panose="020B0604020202020204"/>
               </a:rPr>
               <a:t>Next-Week Commitments</a:t>
             </a:r>
@@ -6368,9 +6549,9 @@
               <a:solidFill>
                 <a:srgbClr val="20243A"/>
               </a:solidFill>
-              <a:latin typeface="Arial" panose="020B0604020202090204"/>
-              <a:ea typeface="Arial" panose="020B0604020202090204"/>
-              <a:cs typeface="Arial" panose="020B0604020202090204"/>
+              <a:latin typeface="Arial" panose="020B0604020202020204"/>
+              <a:ea typeface="Arial" panose="020B0604020202020204"/>
+              <a:cs typeface="Arial" panose="020B0604020202020204"/>
             </a:endParaRPr>
           </a:p>
         </p:txBody>
@@ -6410,9 +6591,9 @@
                 <a:solidFill>
                   <a:srgbClr val="20243A"/>
                 </a:solidFill>
-                <a:latin typeface="Arial" panose="020B0604020202090204"/>
-                <a:ea typeface="Arial" panose="020B0604020202090204"/>
-                <a:cs typeface="Arial" panose="020B0604020202090204"/>
+                <a:latin typeface="Arial" panose="020B0604020202020204"/>
+                <a:ea typeface="Arial" panose="020B0604020202020204"/>
+                <a:cs typeface="Arial" panose="020B0604020202020204"/>
               </a:rPr>
               <a:t>{{NEXT_ACTION_1}}</a:t>
             </a:r>
@@ -6420,9 +6601,9 @@
               <a:solidFill>
                 <a:srgbClr val="20243A"/>
               </a:solidFill>
-              <a:latin typeface="Arial" panose="020B0604020202090204"/>
-              <a:ea typeface="Arial" panose="020B0604020202090204"/>
-              <a:cs typeface="Arial" panose="020B0604020202090204"/>
+              <a:latin typeface="Arial" panose="020B0604020202020204"/>
+              <a:ea typeface="Arial" panose="020B0604020202020204"/>
+              <a:cs typeface="Arial" panose="020B0604020202020204"/>
             </a:endParaRPr>
           </a:p>
           <a:p>
@@ -6436,9 +6617,9 @@
                 <a:solidFill>
                   <a:srgbClr val="5E6478"/>
                 </a:solidFill>
-                <a:latin typeface="Arial" panose="020B0604020202090204"/>
-                <a:ea typeface="Arial" panose="020B0604020202090204"/>
-                <a:cs typeface="Arial" panose="020B0604020202090204"/>
+                <a:latin typeface="Arial" panose="020B0604020202020204"/>
+                <a:ea typeface="Arial" panose="020B0604020202020204"/>
+                <a:cs typeface="Arial" panose="020B0604020202020204"/>
               </a:rPr>
               <a:t>Output: code, dataset, or runnable module.</a:t>
             </a:r>
@@ -6446,9 +6627,9 @@
               <a:solidFill>
                 <a:srgbClr val="5E6478"/>
               </a:solidFill>
-              <a:latin typeface="Arial" panose="020B0604020202090204"/>
-              <a:ea typeface="Arial" panose="020B0604020202090204"/>
-              <a:cs typeface="Arial" panose="020B0604020202090204"/>
+              <a:latin typeface="Arial" panose="020B0604020202020204"/>
+              <a:ea typeface="Arial" panose="020B0604020202020204"/>
+              <a:cs typeface="Arial" panose="020B0604020202020204"/>
             </a:endParaRPr>
           </a:p>
         </p:txBody>
@@ -6488,9 +6669,9 @@
                 <a:solidFill>
                   <a:srgbClr val="20243A"/>
                 </a:solidFill>
-                <a:latin typeface="Arial" panose="020B0604020202090204"/>
-                <a:ea typeface="Arial" panose="020B0604020202090204"/>
-                <a:cs typeface="Arial" panose="020B0604020202090204"/>
+                <a:latin typeface="Arial" panose="020B0604020202020204"/>
+                <a:ea typeface="Arial" panose="020B0604020202020204"/>
+                <a:cs typeface="Arial" panose="020B0604020202020204"/>
               </a:rPr>
               <a:t>{{NEXT_ACTION_2}}</a:t>
             </a:r>
@@ -6498,9 +6679,9 @@
               <a:solidFill>
                 <a:srgbClr val="20243A"/>
               </a:solidFill>
-              <a:latin typeface="Arial" panose="020B0604020202090204"/>
-              <a:ea typeface="Arial" panose="020B0604020202090204"/>
-              <a:cs typeface="Arial" panose="020B0604020202090204"/>
+              <a:latin typeface="Arial" panose="020B0604020202020204"/>
+              <a:ea typeface="Arial" panose="020B0604020202020204"/>
+              <a:cs typeface="Arial" panose="020B0604020202020204"/>
             </a:endParaRPr>
           </a:p>
           <a:p>
@@ -6514,9 +6695,9 @@
                 <a:solidFill>
                   <a:srgbClr val="5E6478"/>
                 </a:solidFill>
-                <a:latin typeface="Arial" panose="020B0604020202090204"/>
-                <a:ea typeface="Arial" panose="020B0604020202090204"/>
-                <a:cs typeface="Arial" panose="020B0604020202090204"/>
+                <a:latin typeface="Arial" panose="020B0604020202020204"/>
+                <a:ea typeface="Arial" panose="020B0604020202020204"/>
+                <a:cs typeface="Arial" panose="020B0604020202020204"/>
               </a:rPr>
               <a:t>Output: metric table, control, or ablation result.</a:t>
             </a:r>
@@ -6524,9 +6705,9 @@
               <a:solidFill>
                 <a:srgbClr val="5E6478"/>
               </a:solidFill>
-              <a:latin typeface="Arial" panose="020B0604020202090204"/>
-              <a:ea typeface="Arial" panose="020B0604020202090204"/>
-              <a:cs typeface="Arial" panose="020B0604020202090204"/>
+              <a:latin typeface="Arial" panose="020B0604020202020204"/>
+              <a:ea typeface="Arial" panose="020B0604020202020204"/>
+              <a:cs typeface="Arial" panose="020B0604020202020204"/>
             </a:endParaRPr>
           </a:p>
         </p:txBody>
@@ -6566,9 +6747,9 @@
                 <a:solidFill>
                   <a:srgbClr val="20243A"/>
                 </a:solidFill>
-                <a:latin typeface="Arial" panose="020B0604020202090204"/>
-                <a:ea typeface="Arial" panose="020B0604020202090204"/>
-                <a:cs typeface="Arial" panose="020B0604020202090204"/>
+                <a:latin typeface="Arial" panose="020B0604020202020204"/>
+                <a:ea typeface="Arial" panose="020B0604020202020204"/>
+                <a:cs typeface="Arial" panose="020B0604020202020204"/>
               </a:rPr>
               <a:t>{{NEXT_ACTION_3}}</a:t>
             </a:r>
@@ -6576,9 +6757,9 @@
               <a:solidFill>
                 <a:srgbClr val="20243A"/>
               </a:solidFill>
-              <a:latin typeface="Arial" panose="020B0604020202090204"/>
-              <a:ea typeface="Arial" panose="020B0604020202090204"/>
-              <a:cs typeface="Arial" panose="020B0604020202090204"/>
+              <a:latin typeface="Arial" panose="020B0604020202020204"/>
+              <a:ea typeface="Arial" panose="020B0604020202020204"/>
+              <a:cs typeface="Arial" panose="020B0604020202020204"/>
             </a:endParaRPr>
           </a:p>
           <a:p>
@@ -6592,9 +6773,9 @@
                 <a:solidFill>
                   <a:srgbClr val="5E6478"/>
                 </a:solidFill>
-                <a:latin typeface="Arial" panose="020B0604020202090204"/>
-                <a:ea typeface="Arial" panose="020B0604020202090204"/>
-                <a:cs typeface="Arial" panose="020B0604020202090204"/>
+                <a:latin typeface="Arial" panose="020B0604020202020204"/>
+                <a:ea typeface="Arial" panose="020B0604020202020204"/>
+                <a:cs typeface="Arial" panose="020B0604020202020204"/>
               </a:rPr>
               <a:t>Output: updated figure, notes, or report section.</a:t>
             </a:r>
@@ -6602,9 +6783,9 @@
               <a:solidFill>
                 <a:srgbClr val="5E6478"/>
               </a:solidFill>
-              <a:latin typeface="Arial" panose="020B0604020202090204"/>
-              <a:ea typeface="Arial" panose="020B0604020202090204"/>
-              <a:cs typeface="Arial" panose="020B0604020202090204"/>
+              <a:latin typeface="Arial" panose="020B0604020202020204"/>
+              <a:ea typeface="Arial" panose="020B0604020202020204"/>
+              <a:cs typeface="Arial" panose="020B0604020202020204"/>
             </a:endParaRPr>
           </a:p>
         </p:txBody>
@@ -6644,9 +6825,9 @@
                 <a:solidFill>
                   <a:srgbClr val="FFFFFF"/>
                 </a:solidFill>
-                <a:latin typeface="Arial" panose="020B0604020202090204"/>
-                <a:ea typeface="Arial" panose="020B0604020202090204"/>
-                <a:cs typeface="Arial" panose="020B0604020202090204"/>
+                <a:latin typeface="Arial" panose="020B0604020202020204"/>
+                <a:ea typeface="Arial" panose="020B0604020202020204"/>
+                <a:cs typeface="Arial" panose="020B0604020202020204"/>
               </a:rPr>
               <a:t>{{OWNER_AND_DEADLINE}}</a:t>
             </a:r>
@@ -6654,9 +6835,9 @@
               <a:solidFill>
                 <a:srgbClr val="FFFFFF"/>
               </a:solidFill>
-              <a:latin typeface="Arial" panose="020B0604020202090204"/>
-              <a:ea typeface="Arial" panose="020B0604020202090204"/>
-              <a:cs typeface="Arial" panose="020B0604020202090204"/>
+              <a:latin typeface="Arial" panose="020B0604020202020204"/>
+              <a:ea typeface="Arial" panose="020B0604020202020204"/>
+              <a:cs typeface="Arial" panose="020B0604020202020204"/>
             </a:endParaRPr>
           </a:p>
           <a:p>
@@ -6673,9 +6854,9 @@
                 <a:solidFill>
                   <a:srgbClr val="C8C8C8"/>
                 </a:solidFill>
-                <a:latin typeface="Arial" panose="020B0604020202090204"/>
-                <a:ea typeface="Arial" panose="020B0604020202090204"/>
-                <a:cs typeface="Arial" panose="020B0604020202090204"/>
+                <a:latin typeface="Arial" panose="020B0604020202020204"/>
+                <a:ea typeface="Arial" panose="020B0604020202020204"/>
+                <a:cs typeface="Arial" panose="020B0604020202020204"/>
               </a:rPr>
               <a:t>Owner: …</a:t>
             </a:r>
@@ -6684,9 +6865,9 @@
                 <a:solidFill>
                   <a:srgbClr val="C8C8C8"/>
                 </a:solidFill>
-                <a:latin typeface="Arial" panose="020B0604020202090204"/>
-                <a:ea typeface="Arial" panose="020B0604020202090204"/>
-                <a:cs typeface="Arial" panose="020B0604020202090204"/>
+                <a:latin typeface="Arial" panose="020B0604020202020204"/>
+                <a:ea typeface="Arial" panose="020B0604020202020204"/>
+                <a:cs typeface="Arial" panose="020B0604020202020204"/>
               </a:rPr>
             </a:br>
             <a:r>
@@ -6694,9 +6875,9 @@
                 <a:solidFill>
                   <a:srgbClr val="C8C8C8"/>
                 </a:solidFill>
-                <a:latin typeface="Arial" panose="020B0604020202090204"/>
-                <a:ea typeface="Arial" panose="020B0604020202090204"/>
-                <a:cs typeface="Arial" panose="020B0604020202090204"/>
+                <a:latin typeface="Arial" panose="020B0604020202020204"/>
+                <a:ea typeface="Arial" panose="020B0604020202020204"/>
+                <a:cs typeface="Arial" panose="020B0604020202020204"/>
               </a:rPr>
               <a:t>Due: …</a:t>
             </a:r>
@@ -6705,9 +6886,9 @@
                 <a:solidFill>
                   <a:srgbClr val="C8C8C8"/>
                 </a:solidFill>
-                <a:latin typeface="Arial" panose="020B0604020202090204"/>
-                <a:ea typeface="Arial" panose="020B0604020202090204"/>
-                <a:cs typeface="Arial" panose="020B0604020202090204"/>
+                <a:latin typeface="Arial" panose="020B0604020202020204"/>
+                <a:ea typeface="Arial" panose="020B0604020202020204"/>
+                <a:cs typeface="Arial" panose="020B0604020202020204"/>
               </a:rPr>
             </a:br>
             <a:r>
@@ -6715,9 +6896,9 @@
                 <a:solidFill>
                   <a:srgbClr val="C8C8C8"/>
                 </a:solidFill>
-                <a:latin typeface="Arial" panose="020B0604020202090204"/>
-                <a:ea typeface="Arial" panose="020B0604020202090204"/>
-                <a:cs typeface="Arial" panose="020B0604020202090204"/>
+                <a:latin typeface="Arial" panose="020B0604020202020204"/>
+                <a:ea typeface="Arial" panose="020B0604020202020204"/>
+                <a:cs typeface="Arial" panose="020B0604020202020204"/>
               </a:rPr>
               <a:t>Success check: observable output</a:t>
             </a:r>
@@ -6726,9 +6907,9 @@
                 <a:solidFill>
                   <a:srgbClr val="C8C8C8"/>
                 </a:solidFill>
-                <a:latin typeface="Arial" panose="020B0604020202090204"/>
-                <a:ea typeface="Arial" panose="020B0604020202090204"/>
-                <a:cs typeface="Arial" panose="020B0604020202090204"/>
+                <a:latin typeface="Arial" panose="020B0604020202020204"/>
+                <a:ea typeface="Arial" panose="020B0604020202020204"/>
+                <a:cs typeface="Arial" panose="020B0604020202020204"/>
               </a:rPr>
             </a:br>
             <a:r>
@@ -6736,9 +6917,9 @@
                 <a:solidFill>
                   <a:srgbClr val="C8C8C8"/>
                 </a:solidFill>
-                <a:latin typeface="Arial" panose="020B0604020202090204"/>
-                <a:ea typeface="Arial" panose="020B0604020202090204"/>
-                <a:cs typeface="Arial" panose="020B0604020202090204"/>
+                <a:latin typeface="Arial" panose="020B0604020202020204"/>
+                <a:ea typeface="Arial" panose="020B0604020202020204"/>
+                <a:cs typeface="Arial" panose="020B0604020202020204"/>
               </a:rPr>
               <a:t>or agreed metric threshold.</a:t>
             </a:r>
@@ -6746,9 +6927,9 @@
               <a:solidFill>
                 <a:srgbClr val="C8C8C8"/>
               </a:solidFill>
-              <a:latin typeface="Arial" panose="020B0604020202090204"/>
-              <a:ea typeface="Arial" panose="020B0604020202090204"/>
-              <a:cs typeface="Arial" panose="020B0604020202090204"/>
+              <a:latin typeface="Arial" panose="020B0604020202020204"/>
+              <a:ea typeface="Arial" panose="020B0604020202020204"/>
+              <a:cs typeface="Arial" panose="020B0604020202020204"/>
             </a:endParaRPr>
           </a:p>
         </p:txBody>
@@ -6784,9 +6965,9 @@
                 <a:solidFill>
                   <a:srgbClr val="FFFFFF"/>
                 </a:solidFill>
-                <a:latin typeface="Arial" panose="020B0604020202090204"/>
-                <a:ea typeface="Arial" panose="020B0604020202090204"/>
-                <a:cs typeface="Arial" panose="020B0604020202090204"/>
+                <a:latin typeface="Arial" panose="020B0604020202020204"/>
+                <a:ea typeface="Arial" panose="020B0604020202020204"/>
+                <a:cs typeface="Arial" panose="020B0604020202020204"/>
               </a:rPr>
               <a:t>{{PAGE_NUM}}</a:t>
             </a:r>
@@ -6794,9 +6975,9 @@
               <a:solidFill>
                 <a:srgbClr val="FFFFFF"/>
               </a:solidFill>
-              <a:latin typeface="Arial" panose="020B0604020202090204"/>
-              <a:ea typeface="Arial" panose="020B0604020202090204"/>
-              <a:cs typeface="Arial" panose="020B0604020202090204"/>
+              <a:latin typeface="Arial" panose="020B0604020202020204"/>
+              <a:ea typeface="Arial" panose="020B0604020202020204"/>
+              <a:cs typeface="Arial" panose="020B0604020202020204"/>
             </a:endParaRPr>
           </a:p>
         </p:txBody>
@@ -6933,9 +7114,9 @@
                 <a:solidFill>
                   <a:srgbClr val="FFFFFF"/>
                 </a:solidFill>
-                <a:latin typeface="Arial" panose="020B0604020202090204"/>
-                <a:ea typeface="Arial" panose="020B0604020202090204"/>
-                <a:cs typeface="Arial" panose="020B0604020202090204"/>
+                <a:latin typeface="Arial" panose="020B0604020202020204"/>
+                <a:ea typeface="Arial" panose="020B0604020202020204"/>
+                <a:cs typeface="Arial" panose="020B0604020202020204"/>
               </a:rPr>
               <a:t>EE6008 · HUMAN POSE ANALYTICS</a:t>
             </a:r>
@@ -6943,9 +7124,9 @@
               <a:solidFill>
                 <a:srgbClr val="FFFFFF"/>
               </a:solidFill>
-              <a:latin typeface="Arial" panose="020B0604020202090204"/>
-              <a:ea typeface="Arial" panose="020B0604020202090204"/>
-              <a:cs typeface="Arial" panose="020B0604020202090204"/>
+              <a:latin typeface="Arial" panose="020B0604020202020204"/>
+              <a:ea typeface="Arial" panose="020B0604020202020204"/>
+              <a:cs typeface="Arial" panose="020B0604020202020204"/>
             </a:endParaRPr>
           </a:p>
         </p:txBody>
@@ -7029,9 +7210,9 @@
                 <a:solidFill>
                   <a:srgbClr val="20243A"/>
                 </a:solidFill>
-                <a:latin typeface="Arial" panose="020B0604020202090204"/>
-                <a:ea typeface="Arial" panose="020B0604020202090204"/>
-                <a:cs typeface="Arial" panose="020B0604020202090204"/>
+                <a:latin typeface="Arial" panose="020B0604020202020204"/>
+                <a:ea typeface="Arial" panose="020B0604020202020204"/>
+                <a:cs typeface="Arial" panose="020B0604020202020204"/>
               </a:rPr>
               <a:t>Open Canvas</a:t>
             </a:r>
@@ -7039,9 +7220,9 @@
               <a:solidFill>
                 <a:srgbClr val="20243A"/>
               </a:solidFill>
-              <a:latin typeface="Arial" panose="020B0604020202090204"/>
-              <a:ea typeface="Arial" panose="020B0604020202090204"/>
-              <a:cs typeface="Arial" panose="020B0604020202090204"/>
+              <a:latin typeface="Arial" panose="020B0604020202020204"/>
+              <a:ea typeface="Arial" panose="020B0604020202020204"/>
+              <a:cs typeface="Arial" panose="020B0604020202020204"/>
             </a:endParaRPr>
           </a:p>
         </p:txBody>
@@ -7077,9 +7258,9 @@
                 <a:solidFill>
                   <a:srgbClr val="FFFFFF"/>
                 </a:solidFill>
-                <a:latin typeface="Arial" panose="020B0604020202090204"/>
-                <a:ea typeface="Arial" panose="020B0604020202090204"/>
-                <a:cs typeface="Arial" panose="020B0604020202090204"/>
+                <a:latin typeface="Arial" panose="020B0604020202020204"/>
+                <a:ea typeface="Arial" panose="020B0604020202020204"/>
+                <a:cs typeface="Arial" panose="020B0604020202020204"/>
               </a:rPr>
               <a:t>{{SOURCE}}</a:t>
             </a:r>
@@ -7087,9 +7268,9 @@
               <a:solidFill>
                 <a:srgbClr val="FFFFFF"/>
               </a:solidFill>
-              <a:latin typeface="Arial" panose="020B0604020202090204"/>
-              <a:ea typeface="Arial" panose="020B0604020202090204"/>
-              <a:cs typeface="Arial" panose="020B0604020202090204"/>
+              <a:latin typeface="Arial" panose="020B0604020202020204"/>
+              <a:ea typeface="Arial" panose="020B0604020202020204"/>
+              <a:cs typeface="Arial" panose="020B0604020202020204"/>
             </a:endParaRPr>
           </a:p>
         </p:txBody>
@@ -7125,9 +7306,9 @@
                 <a:solidFill>
                   <a:srgbClr val="FFFFFF"/>
                 </a:solidFill>
-                <a:latin typeface="Arial" panose="020B0604020202090204"/>
-                <a:ea typeface="Arial" panose="020B0604020202090204"/>
-                <a:cs typeface="Arial" panose="020B0604020202090204"/>
+                <a:latin typeface="Arial" panose="020B0604020202020204"/>
+                <a:ea typeface="Arial" panose="020B0604020202020204"/>
+                <a:cs typeface="Arial" panose="020B0604020202020204"/>
               </a:rPr>
               <a:t>{{PAGE_NUM}}</a:t>
             </a:r>
@@ -7135,9 +7316,9 @@
               <a:solidFill>
                 <a:srgbClr val="FFFFFF"/>
               </a:solidFill>
-              <a:latin typeface="Arial" panose="020B0604020202090204"/>
-              <a:ea typeface="Arial" panose="020B0604020202090204"/>
-              <a:cs typeface="Arial" panose="020B0604020202090204"/>
+              <a:latin typeface="Arial" panose="020B0604020202020204"/>
+              <a:ea typeface="Arial" panose="020B0604020202020204"/>
+              <a:cs typeface="Arial" panose="020B0604020202020204"/>
             </a:endParaRPr>
           </a:p>
         </p:txBody>
@@ -7274,9 +7455,9 @@
                 <a:solidFill>
                   <a:srgbClr val="FFFFFF"/>
                 </a:solidFill>
-                <a:latin typeface="Arial" panose="020B0604020202090204"/>
-                <a:ea typeface="Arial" panose="020B0604020202090204"/>
-                <a:cs typeface="Arial" panose="020B0604020202090204"/>
+                <a:latin typeface="Arial" panose="020B0604020202020204"/>
+                <a:ea typeface="Arial" panose="020B0604020202020204"/>
+                <a:cs typeface="Arial" panose="020B0604020202020204"/>
               </a:rPr>
               <a:t>EE6008 · HUMAN POSE ANALYTICS</a:t>
             </a:r>
@@ -7284,9 +7465,9 @@
               <a:solidFill>
                 <a:srgbClr val="FFFFFF"/>
               </a:solidFill>
-              <a:latin typeface="Arial" panose="020B0604020202090204"/>
-              <a:ea typeface="Arial" panose="020B0604020202090204"/>
-              <a:cs typeface="Arial" panose="020B0604020202090204"/>
+              <a:latin typeface="Arial" panose="020B0604020202020204"/>
+              <a:ea typeface="Arial" panose="020B0604020202020204"/>
+              <a:cs typeface="Arial" panose="020B0604020202020204"/>
             </a:endParaRPr>
           </a:p>
         </p:txBody>
@@ -7416,9 +7597,9 @@
                 <a:solidFill>
                   <a:srgbClr val="181C62"/>
                 </a:solidFill>
-                <a:latin typeface="Arial" panose="020B0604020202090204"/>
-                <a:ea typeface="Arial" panose="020B0604020202090204"/>
-                <a:cs typeface="Arial" panose="020B0604020202090204"/>
+                <a:latin typeface="Arial" panose="020B0604020202020204"/>
+                <a:ea typeface="Arial" panose="020B0604020202020204"/>
+                <a:cs typeface="Arial" panose="020B0604020202020204"/>
               </a:rPr>
               <a:t>IMAGE DESCRIPTION</a:t>
             </a:r>
@@ -7426,9 +7607,9 @@
               <a:solidFill>
                 <a:srgbClr val="181C62"/>
               </a:solidFill>
-              <a:latin typeface="Arial" panose="020B0604020202090204"/>
-              <a:ea typeface="Arial" panose="020B0604020202090204"/>
-              <a:cs typeface="Arial" panose="020B0604020202090204"/>
+              <a:latin typeface="Arial" panose="020B0604020202020204"/>
+              <a:ea typeface="Arial" panose="020B0604020202020204"/>
+              <a:cs typeface="Arial" panose="020B0604020202020204"/>
             </a:endParaRPr>
           </a:p>
         </p:txBody>
@@ -7464,9 +7645,9 @@
                 <a:solidFill>
                   <a:srgbClr val="20243A"/>
                 </a:solidFill>
-                <a:latin typeface="Arial" panose="020B0604020202090204"/>
-                <a:ea typeface="Arial" panose="020B0604020202090204"/>
-                <a:cs typeface="Arial" panose="020B0604020202090204"/>
+                <a:latin typeface="Arial" panose="020B0604020202020204"/>
+                <a:ea typeface="Arial" panose="020B0604020202020204"/>
+                <a:cs typeface="Arial" panose="020B0604020202020204"/>
               </a:rPr>
               <a:t>Single-Image Story</a:t>
             </a:r>
@@ -7474,9 +7655,9 @@
               <a:solidFill>
                 <a:srgbClr val="20243A"/>
               </a:solidFill>
-              <a:latin typeface="Arial" panose="020B0604020202090204"/>
-              <a:ea typeface="Arial" panose="020B0604020202090204"/>
-              <a:cs typeface="Arial" panose="020B0604020202090204"/>
+              <a:latin typeface="Arial" panose="020B0604020202020204"/>
+              <a:ea typeface="Arial" panose="020B0604020202020204"/>
+              <a:cs typeface="Arial" panose="020B0604020202020204"/>
             </a:endParaRPr>
           </a:p>
         </p:txBody>
@@ -7541,9 +7722,9 @@
                 <a:solidFill>
                   <a:srgbClr val="20243A"/>
                 </a:solidFill>
-                <a:latin typeface="Arial" panose="020B0604020202090204"/>
-                <a:ea typeface="Arial" panose="020B0604020202090204"/>
-                <a:cs typeface="Arial" panose="020B0604020202090204"/>
+                <a:latin typeface="Arial" panose="020B0604020202020204"/>
+                <a:ea typeface="Arial" panose="020B0604020202020204"/>
+                <a:cs typeface="Arial" panose="020B0604020202020204"/>
               </a:rPr>
               <a:t>{{IMAGE_DESCRIPTION}}</a:t>
             </a:r>
@@ -7551,9 +7732,9 @@
               <a:solidFill>
                 <a:srgbClr val="20243A"/>
               </a:solidFill>
-              <a:latin typeface="Arial" panose="020B0604020202090204"/>
-              <a:ea typeface="Arial" panose="020B0604020202090204"/>
-              <a:cs typeface="Arial" panose="020B0604020202090204"/>
+              <a:latin typeface="Arial" panose="020B0604020202020204"/>
+              <a:ea typeface="Arial" panose="020B0604020202020204"/>
+              <a:cs typeface="Arial" panose="020B0604020202020204"/>
             </a:endParaRPr>
           </a:p>
           <a:p>
@@ -7570,9 +7751,9 @@
                 <a:solidFill>
                   <a:srgbClr val="5E6478"/>
                 </a:solidFill>
-                <a:latin typeface="Arial" panose="020B0604020202090204"/>
-                <a:ea typeface="Arial" panose="020B0604020202090204"/>
-                <a:cs typeface="Arial" panose="020B0604020202090204"/>
+                <a:latin typeface="Arial" panose="020B0604020202020204"/>
+                <a:ea typeface="Arial" panose="020B0604020202020204"/>
+                <a:cs typeface="Arial" panose="020B0604020202020204"/>
               </a:rPr>
               <a:t>What does the image show?</a:t>
             </a:r>
@@ -7580,9 +7761,9 @@
               <a:solidFill>
                 <a:srgbClr val="5E6478"/>
               </a:solidFill>
-              <a:latin typeface="Arial" panose="020B0604020202090204"/>
-              <a:ea typeface="Arial" panose="020B0604020202090204"/>
-              <a:cs typeface="Arial" panose="020B0604020202090204"/>
+              <a:latin typeface="Arial" panose="020B0604020202020204"/>
+              <a:ea typeface="Arial" panose="020B0604020202020204"/>
+              <a:cs typeface="Arial" panose="020B0604020202020204"/>
             </a:endParaRPr>
           </a:p>
           <a:p>
@@ -7599,9 +7780,9 @@
                 <a:solidFill>
                   <a:srgbClr val="5E6478"/>
                 </a:solidFill>
-                <a:latin typeface="Arial" panose="020B0604020202090204"/>
-                <a:ea typeface="Arial" panose="020B0604020202090204"/>
-                <a:cs typeface="Arial" panose="020B0604020202090204"/>
+                <a:latin typeface="Arial" panose="020B0604020202020204"/>
+                <a:ea typeface="Arial" panose="020B0604020202020204"/>
+                <a:cs typeface="Arial" panose="020B0604020202020204"/>
               </a:rPr>
               <a:t>Why is it relevant this week?</a:t>
             </a:r>
@@ -7609,9 +7790,9 @@
               <a:solidFill>
                 <a:srgbClr val="5E6478"/>
               </a:solidFill>
-              <a:latin typeface="Arial" panose="020B0604020202090204"/>
-              <a:ea typeface="Arial" panose="020B0604020202090204"/>
-              <a:cs typeface="Arial" panose="020B0604020202090204"/>
+              <a:latin typeface="Arial" panose="020B0604020202020204"/>
+              <a:ea typeface="Arial" panose="020B0604020202020204"/>
+              <a:cs typeface="Arial" panose="020B0604020202020204"/>
             </a:endParaRPr>
           </a:p>
           <a:p>
@@ -7628,9 +7809,9 @@
                 <a:solidFill>
                   <a:srgbClr val="5E6478"/>
                 </a:solidFill>
-                <a:latin typeface="Arial" panose="020B0604020202090204"/>
-                <a:ea typeface="Arial" panose="020B0604020202090204"/>
-                <a:cs typeface="Arial" panose="020B0604020202090204"/>
+                <a:latin typeface="Arial" panose="020B0604020202020204"/>
+                <a:ea typeface="Arial" panose="020B0604020202020204"/>
+                <a:cs typeface="Arial" panose="020B0604020202020204"/>
               </a:rPr>
               <a:t>What should the audience notice?</a:t>
             </a:r>
@@ -7638,9 +7819,9 @@
               <a:solidFill>
                 <a:srgbClr val="5E6478"/>
               </a:solidFill>
-              <a:latin typeface="Arial" panose="020B0604020202090204"/>
-              <a:ea typeface="Arial" panose="020B0604020202090204"/>
-              <a:cs typeface="Arial" panose="020B0604020202090204"/>
+              <a:latin typeface="Arial" panose="020B0604020202020204"/>
+              <a:ea typeface="Arial" panose="020B0604020202020204"/>
+              <a:cs typeface="Arial" panose="020B0604020202020204"/>
             </a:endParaRPr>
           </a:p>
           <a:p>
@@ -7657,9 +7838,9 @@
                 <a:solidFill>
                   <a:srgbClr val="D71440"/>
                 </a:solidFill>
-                <a:latin typeface="Arial" panose="020B0604020202090204"/>
-                <a:ea typeface="Arial" panose="020B0604020202090204"/>
-                <a:cs typeface="Arial" panose="020B0604020202090204"/>
+                <a:latin typeface="Arial" panose="020B0604020202020204"/>
+                <a:ea typeface="Arial" panose="020B0604020202020204"/>
+                <a:cs typeface="Arial" panose="020B0604020202020204"/>
               </a:rPr>
               <a:t>TIP</a:t>
             </a:r>
@@ -7667,9 +7848,9 @@
               <a:solidFill>
                 <a:srgbClr val="D71440"/>
               </a:solidFill>
-              <a:latin typeface="Arial" panose="020B0604020202090204"/>
-              <a:ea typeface="Arial" panose="020B0604020202090204"/>
-              <a:cs typeface="Arial" panose="020B0604020202090204"/>
+              <a:latin typeface="Arial" panose="020B0604020202020204"/>
+              <a:ea typeface="Arial" panose="020B0604020202020204"/>
+              <a:cs typeface="Arial" panose="020B0604020202020204"/>
             </a:endParaRPr>
           </a:p>
           <a:p>
@@ -7686,9 +7867,9 @@
                 <a:solidFill>
                   <a:srgbClr val="5E6478"/>
                 </a:solidFill>
-                <a:latin typeface="Arial" panose="020B0604020202090204"/>
-                <a:ea typeface="Arial" panose="020B0604020202090204"/>
-                <a:cs typeface="Arial" panose="020B0604020202090204"/>
+                <a:latin typeface="Arial" panose="020B0604020202020204"/>
+                <a:ea typeface="Arial" panose="020B0604020202020204"/>
+                <a:cs typeface="Arial" panose="020B0604020202020204"/>
               </a:rPr>
               <a:t>Use one annotated result, system</a:t>
             </a:r>
@@ -7697,9 +7878,9 @@
                 <a:solidFill>
                   <a:srgbClr val="5E6478"/>
                 </a:solidFill>
-                <a:latin typeface="Arial" panose="020B0604020202090204"/>
-                <a:ea typeface="Arial" panose="020B0604020202090204"/>
-                <a:cs typeface="Arial" panose="020B0604020202090204"/>
+                <a:latin typeface="Arial" panose="020B0604020202020204"/>
+                <a:ea typeface="Arial" panose="020B0604020202020204"/>
+                <a:cs typeface="Arial" panose="020B0604020202020204"/>
               </a:rPr>
             </a:br>
             <a:r>
@@ -7707,9 +7888,9 @@
                 <a:solidFill>
                   <a:srgbClr val="5E6478"/>
                 </a:solidFill>
-                <a:latin typeface="Arial" panose="020B0604020202090204"/>
-                <a:ea typeface="Arial" panose="020B0604020202090204"/>
-                <a:cs typeface="Arial" panose="020B0604020202090204"/>
+                <a:latin typeface="Arial" panose="020B0604020202020204"/>
+                <a:ea typeface="Arial" panose="020B0604020202020204"/>
+                <a:cs typeface="Arial" panose="020B0604020202020204"/>
               </a:rPr>
               <a:t>overview, qualitative example,</a:t>
             </a:r>
@@ -7718,9 +7899,9 @@
                 <a:solidFill>
                   <a:srgbClr val="5E6478"/>
                 </a:solidFill>
-                <a:latin typeface="Arial" panose="020B0604020202090204"/>
-                <a:ea typeface="Arial" panose="020B0604020202090204"/>
-                <a:cs typeface="Arial" panose="020B0604020202090204"/>
+                <a:latin typeface="Arial" panose="020B0604020202020204"/>
+                <a:ea typeface="Arial" panose="020B0604020202020204"/>
+                <a:cs typeface="Arial" panose="020B0604020202020204"/>
               </a:rPr>
             </a:br>
             <a:r>
@@ -7728,9 +7909,9 @@
                 <a:solidFill>
                   <a:srgbClr val="5E6478"/>
                 </a:solidFill>
-                <a:latin typeface="Arial" panose="020B0604020202090204"/>
-                <a:ea typeface="Arial" panose="020B0604020202090204"/>
-                <a:cs typeface="Arial" panose="020B0604020202090204"/>
+                <a:latin typeface="Arial" panose="020B0604020202020204"/>
+                <a:ea typeface="Arial" panose="020B0604020202020204"/>
+                <a:cs typeface="Arial" panose="020B0604020202020204"/>
               </a:rPr>
               <a:t>or implementation photograph.</a:t>
             </a:r>
@@ -7738,9 +7919,9 @@
               <a:solidFill>
                 <a:srgbClr val="5E6478"/>
               </a:solidFill>
-              <a:latin typeface="Arial" panose="020B0604020202090204"/>
-              <a:ea typeface="Arial" panose="020B0604020202090204"/>
-              <a:cs typeface="Arial" panose="020B0604020202090204"/>
+              <a:latin typeface="Arial" panose="020B0604020202020204"/>
+              <a:ea typeface="Arial" panose="020B0604020202020204"/>
+              <a:cs typeface="Arial" panose="020B0604020202020204"/>
             </a:endParaRPr>
           </a:p>
         </p:txBody>
@@ -7776,9 +7957,9 @@
                 <a:solidFill>
                   <a:srgbClr val="FFFFFF"/>
                 </a:solidFill>
-                <a:latin typeface="Arial" panose="020B0604020202090204"/>
-                <a:ea typeface="Arial" panose="020B0604020202090204"/>
-                <a:cs typeface="Arial" panose="020B0604020202090204"/>
+                <a:latin typeface="Arial" panose="020B0604020202020204"/>
+                <a:ea typeface="Arial" panose="020B0604020202020204"/>
+                <a:cs typeface="Arial" panose="020B0604020202020204"/>
               </a:rPr>
               <a:t>{{SOURCE}}</a:t>
             </a:r>
@@ -7786,9 +7967,9 @@
               <a:solidFill>
                 <a:srgbClr val="FFFFFF"/>
               </a:solidFill>
-              <a:latin typeface="Arial" panose="020B0604020202090204"/>
-              <a:ea typeface="Arial" panose="020B0604020202090204"/>
-              <a:cs typeface="Arial" panose="020B0604020202090204"/>
+              <a:latin typeface="Arial" panose="020B0604020202020204"/>
+              <a:ea typeface="Arial" panose="020B0604020202020204"/>
+              <a:cs typeface="Arial" panose="020B0604020202020204"/>
             </a:endParaRPr>
           </a:p>
         </p:txBody>
@@ -7824,9 +8005,9 @@
                 <a:solidFill>
                   <a:srgbClr val="FFFFFF"/>
                 </a:solidFill>
-                <a:latin typeface="Arial" panose="020B0604020202090204"/>
-                <a:ea typeface="Arial" panose="020B0604020202090204"/>
-                <a:cs typeface="Arial" panose="020B0604020202090204"/>
+                <a:latin typeface="Arial" panose="020B0604020202020204"/>
+                <a:ea typeface="Arial" panose="020B0604020202020204"/>
+                <a:cs typeface="Arial" panose="020B0604020202020204"/>
               </a:rPr>
               <a:t>{{PAGE_NUM}}</a:t>
             </a:r>
@@ -7834,9 +8015,9 @@
               <a:solidFill>
                 <a:srgbClr val="FFFFFF"/>
               </a:solidFill>
-              <a:latin typeface="Arial" panose="020B0604020202090204"/>
-              <a:ea typeface="Arial" panose="020B0604020202090204"/>
-              <a:cs typeface="Arial" panose="020B0604020202090204"/>
+              <a:latin typeface="Arial" panose="020B0604020202020204"/>
+              <a:ea typeface="Arial" panose="020B0604020202020204"/>
+              <a:cs typeface="Arial" panose="020B0604020202020204"/>
             </a:endParaRPr>
           </a:p>
         </p:txBody>
@@ -7973,9 +8154,9 @@
                 <a:solidFill>
                   <a:srgbClr val="FFFFFF"/>
                 </a:solidFill>
-                <a:latin typeface="Arial" panose="020B0604020202090204"/>
-                <a:ea typeface="Arial" panose="020B0604020202090204"/>
-                <a:cs typeface="Arial" panose="020B0604020202090204"/>
+                <a:latin typeface="Arial" panose="020B0604020202020204"/>
+                <a:ea typeface="Arial" panose="020B0604020202020204"/>
+                <a:cs typeface="Arial" panose="020B0604020202020204"/>
               </a:rPr>
               <a:t>EE6008 · HUMAN POSE ANALYTICS</a:t>
             </a:r>
@@ -7983,9 +8164,9 @@
               <a:solidFill>
                 <a:srgbClr val="FFFFFF"/>
               </a:solidFill>
-              <a:latin typeface="Arial" panose="020B0604020202090204"/>
-              <a:ea typeface="Arial" panose="020B0604020202090204"/>
-              <a:cs typeface="Arial" panose="020B0604020202090204"/>
+              <a:latin typeface="Arial" panose="020B0604020202020204"/>
+              <a:ea typeface="Arial" panose="020B0604020202020204"/>
+              <a:cs typeface="Arial" panose="020B0604020202020204"/>
             </a:endParaRPr>
           </a:p>
         </p:txBody>
@@ -8043,9 +8224,9 @@
                 <a:solidFill>
                   <a:srgbClr val="5E6478"/>
                 </a:solidFill>
-                <a:latin typeface="Arial" panose="020B0604020202090204"/>
-                <a:ea typeface="Arial" panose="020B0604020202090204"/>
-                <a:cs typeface="Arial" panose="020B0604020202090204"/>
+                <a:latin typeface="Arial" panose="020B0604020202020204"/>
+                <a:ea typeface="Arial" panose="020B0604020202020204"/>
+                <a:cs typeface="Arial" panose="020B0604020202020204"/>
               </a:rPr>
               <a:t>USE 2–4 IMAGES</a:t>
             </a:r>
@@ -8053,9 +8234,9 @@
               <a:solidFill>
                 <a:srgbClr val="5E6478"/>
               </a:solidFill>
-              <a:latin typeface="Arial" panose="020B0604020202090204"/>
-              <a:ea typeface="Arial" panose="020B0604020202090204"/>
-              <a:cs typeface="Arial" panose="020B0604020202090204"/>
+              <a:latin typeface="Arial" panose="020B0604020202020204"/>
+              <a:ea typeface="Arial" panose="020B0604020202020204"/>
+              <a:cs typeface="Arial" panose="020B0604020202020204"/>
             </a:endParaRPr>
           </a:p>
         </p:txBody>
@@ -8283,9 +8464,9 @@
                 <a:solidFill>
                   <a:srgbClr val="20243A"/>
                 </a:solidFill>
-                <a:latin typeface="Arial" panose="020B0604020202090204"/>
-                <a:ea typeface="Arial" panose="020B0604020202090204"/>
-                <a:cs typeface="Arial" panose="020B0604020202090204"/>
+                <a:latin typeface="Arial" panose="020B0604020202020204"/>
+                <a:ea typeface="Arial" panose="020B0604020202020204"/>
+                <a:cs typeface="Arial" panose="020B0604020202020204"/>
               </a:rPr>
               <a:t>Multi-Image Story</a:t>
             </a:r>
@@ -8293,9 +8474,9 @@
               <a:solidFill>
                 <a:srgbClr val="20243A"/>
               </a:solidFill>
-              <a:latin typeface="Arial" panose="020B0604020202090204"/>
-              <a:ea typeface="Arial" panose="020B0604020202090204"/>
-              <a:cs typeface="Arial" panose="020B0604020202090204"/>
+              <a:latin typeface="Arial" panose="020B0604020202020204"/>
+              <a:ea typeface="Arial" panose="020B0604020202020204"/>
+              <a:cs typeface="Arial" panose="020B0604020202020204"/>
             </a:endParaRPr>
           </a:p>
         </p:txBody>
@@ -8431,9 +8612,9 @@
                 <a:solidFill>
                   <a:srgbClr val="20243A"/>
                 </a:solidFill>
-                <a:latin typeface="Arial" panose="020B0604020202090204"/>
-                <a:ea typeface="Arial" panose="020B0604020202090204"/>
-                <a:cs typeface="Arial" panose="020B0604020202090204"/>
+                <a:latin typeface="Arial" panose="020B0604020202020204"/>
+                <a:ea typeface="Arial" panose="020B0604020202020204"/>
+                <a:cs typeface="Arial" panose="020B0604020202020204"/>
               </a:rPr>
               <a:t>{{CAPTION_1}}</a:t>
             </a:r>
@@ -8441,9 +8622,9 @@
               <a:solidFill>
                 <a:srgbClr val="20243A"/>
               </a:solidFill>
-              <a:latin typeface="Arial" panose="020B0604020202090204"/>
-              <a:ea typeface="Arial" panose="020B0604020202090204"/>
-              <a:cs typeface="Arial" panose="020B0604020202090204"/>
+              <a:latin typeface="Arial" panose="020B0604020202020204"/>
+              <a:ea typeface="Arial" panose="020B0604020202020204"/>
+              <a:cs typeface="Arial" panose="020B0604020202020204"/>
             </a:endParaRPr>
           </a:p>
         </p:txBody>
@@ -8479,9 +8660,9 @@
                 <a:solidFill>
                   <a:srgbClr val="20243A"/>
                 </a:solidFill>
-                <a:latin typeface="Arial" panose="020B0604020202090204"/>
-                <a:ea typeface="Arial" panose="020B0604020202090204"/>
-                <a:cs typeface="Arial" panose="020B0604020202090204"/>
+                <a:latin typeface="Arial" panose="020B0604020202020204"/>
+                <a:ea typeface="Arial" panose="020B0604020202020204"/>
+                <a:cs typeface="Arial" panose="020B0604020202020204"/>
               </a:rPr>
               <a:t>{{CAPTION_2}}</a:t>
             </a:r>
@@ -8489,9 +8670,9 @@
               <a:solidFill>
                 <a:srgbClr val="20243A"/>
               </a:solidFill>
-              <a:latin typeface="Arial" panose="020B0604020202090204"/>
-              <a:ea typeface="Arial" panose="020B0604020202090204"/>
-              <a:cs typeface="Arial" panose="020B0604020202090204"/>
+              <a:latin typeface="Arial" panose="020B0604020202020204"/>
+              <a:ea typeface="Arial" panose="020B0604020202020204"/>
+              <a:cs typeface="Arial" panose="020B0604020202020204"/>
             </a:endParaRPr>
           </a:p>
         </p:txBody>
@@ -8527,9 +8708,9 @@
                 <a:solidFill>
                   <a:srgbClr val="20243A"/>
                 </a:solidFill>
-                <a:latin typeface="Arial" panose="020B0604020202090204"/>
-                <a:ea typeface="Arial" panose="020B0604020202090204"/>
-                <a:cs typeface="Arial" panose="020B0604020202090204"/>
+                <a:latin typeface="Arial" panose="020B0604020202020204"/>
+                <a:ea typeface="Arial" panose="020B0604020202020204"/>
+                <a:cs typeface="Arial" panose="020B0604020202020204"/>
               </a:rPr>
               <a:t>{{CAPTION_3}}</a:t>
             </a:r>
@@ -8537,9 +8718,9 @@
               <a:solidFill>
                 <a:srgbClr val="20243A"/>
               </a:solidFill>
-              <a:latin typeface="Arial" panose="020B0604020202090204"/>
-              <a:ea typeface="Arial" panose="020B0604020202090204"/>
-              <a:cs typeface="Arial" panose="020B0604020202090204"/>
+              <a:latin typeface="Arial" panose="020B0604020202020204"/>
+              <a:ea typeface="Arial" panose="020B0604020202020204"/>
+              <a:cs typeface="Arial" panose="020B0604020202020204"/>
             </a:endParaRPr>
           </a:p>
         </p:txBody>
@@ -8575,9 +8756,9 @@
                 <a:solidFill>
                   <a:srgbClr val="20243A"/>
                 </a:solidFill>
-                <a:latin typeface="Arial" panose="020B0604020202090204"/>
-                <a:ea typeface="Arial" panose="020B0604020202090204"/>
-                <a:cs typeface="Arial" panose="020B0604020202090204"/>
+                <a:latin typeface="Arial" panose="020B0604020202020204"/>
+                <a:ea typeface="Arial" panose="020B0604020202020204"/>
+                <a:cs typeface="Arial" panose="020B0604020202020204"/>
               </a:rPr>
               <a:t>{{CAPTION_4}}</a:t>
             </a:r>
@@ -8585,9 +8766,9 @@
               <a:solidFill>
                 <a:srgbClr val="20243A"/>
               </a:solidFill>
-              <a:latin typeface="Arial" panose="020B0604020202090204"/>
-              <a:ea typeface="Arial" panose="020B0604020202090204"/>
-              <a:cs typeface="Arial" panose="020B0604020202090204"/>
+              <a:latin typeface="Arial" panose="020B0604020202020204"/>
+              <a:ea typeface="Arial" panose="020B0604020202020204"/>
+              <a:cs typeface="Arial" panose="020B0604020202020204"/>
             </a:endParaRPr>
           </a:p>
         </p:txBody>
@@ -8623,9 +8804,9 @@
                 <a:solidFill>
                   <a:srgbClr val="FFFFFF"/>
                 </a:solidFill>
-                <a:latin typeface="Arial" panose="020B0604020202090204"/>
-                <a:ea typeface="Arial" panose="020B0604020202090204"/>
-                <a:cs typeface="Arial" panose="020B0604020202090204"/>
+                <a:latin typeface="Arial" panose="020B0604020202020204"/>
+                <a:ea typeface="Arial" panose="020B0604020202020204"/>
+                <a:cs typeface="Arial" panose="020B0604020202020204"/>
               </a:rPr>
               <a:t>{{SOURCE}}</a:t>
             </a:r>
@@ -8633,9 +8814,9 @@
               <a:solidFill>
                 <a:srgbClr val="FFFFFF"/>
               </a:solidFill>
-              <a:latin typeface="Arial" panose="020B0604020202090204"/>
-              <a:ea typeface="Arial" panose="020B0604020202090204"/>
-              <a:cs typeface="Arial" panose="020B0604020202090204"/>
+              <a:latin typeface="Arial" panose="020B0604020202020204"/>
+              <a:ea typeface="Arial" panose="020B0604020202020204"/>
+              <a:cs typeface="Arial" panose="020B0604020202020204"/>
             </a:endParaRPr>
           </a:p>
         </p:txBody>
@@ -8671,9 +8852,9 @@
                 <a:solidFill>
                   <a:srgbClr val="FFFFFF"/>
                 </a:solidFill>
-                <a:latin typeface="Arial" panose="020B0604020202090204"/>
-                <a:ea typeface="Arial" panose="020B0604020202090204"/>
-                <a:cs typeface="Arial" panose="020B0604020202090204"/>
+                <a:latin typeface="Arial" panose="020B0604020202020204"/>
+                <a:ea typeface="Arial" panose="020B0604020202020204"/>
+                <a:cs typeface="Arial" panose="020B0604020202020204"/>
               </a:rPr>
               <a:t>{{PAGE_NUM}}</a:t>
             </a:r>
@@ -8681,9 +8862,9 @@
               <a:solidFill>
                 <a:srgbClr val="FFFFFF"/>
               </a:solidFill>
-              <a:latin typeface="Arial" panose="020B0604020202090204"/>
-              <a:ea typeface="Arial" panose="020B0604020202090204"/>
-              <a:cs typeface="Arial" panose="020B0604020202090204"/>
+              <a:latin typeface="Arial" panose="020B0604020202020204"/>
+              <a:ea typeface="Arial" panose="020B0604020202020204"/>
+              <a:cs typeface="Arial" panose="020B0604020202020204"/>
             </a:endParaRPr>
           </a:p>
         </p:txBody>
@@ -8694,6 +8875,12 @@
     <a:masterClrMapping/>
   </p:clrMapOvr>
 </p:sld>
+</file>
+
+<file path=ppt/tags/tag1.xml><?xml version="1.0" encoding="utf-8"?>
+<p:tagLst xmlns:p="http://schemas.openxmlformats.org/presentationml/2006/main">
+  <p:tag name="commondata" val="eyJoZGlkIjoiOWMxYzMwYjExMzFiOTI0NTgyNDM4YzE5NDkxZGE0MTIifQ=="/>
+</p:tagLst>
 </file>
 
 <file path=ppt/theme/theme1.xml><?xml version="1.0" encoding="utf-8"?>

--- a/reports/WeeklyPre/5min_pre_fully_editable.pptx
+++ b/reports/WeeklyPre/5min_pre_fully_editable.pptx
@@ -4,23 +4,23 @@
   <p:sldMasterIdLst>
     <p:sldMasterId id="2147483648" r:id="rId1"/>
   </p:sldMasterIdLst>
+  <p:notesMasterIdLst>
+    <p:notesMasterId r:id="rId4"/>
+  </p:notesMasterIdLst>
   <p:sldIdLst>
-    <p:sldId id="256" r:id="rId3"/>
-    <p:sldId id="257" r:id="rId4"/>
-    <p:sldId id="258" r:id="rId5"/>
-    <p:sldId id="259" r:id="rId6"/>
-    <p:sldId id="260" r:id="rId7"/>
-    <p:sldId id="261" r:id="rId8"/>
-    <p:sldId id="262" r:id="rId9"/>
-    <p:sldId id="263" r:id="rId10"/>
-    <p:sldId id="264" r:id="rId11"/>
-    <p:sldId id="265" r:id="rId12"/>
+    <p:sldId id="266" r:id="rId3"/>
+    <p:sldId id="257" r:id="rId5"/>
+    <p:sldId id="258" r:id="rId6"/>
+    <p:sldId id="259" r:id="rId7"/>
+    <p:sldId id="260" r:id="rId8"/>
+    <p:sldId id="261" r:id="rId9"/>
+    <p:sldId id="262" r:id="rId10"/>
+    <p:sldId id="263" r:id="rId11"/>
+    <p:sldId id="264" r:id="rId12"/>
+    <p:sldId id="265" r:id="rId13"/>
   </p:sldIdLst>
   <p:sldSz cx="12192000" cy="6858000" type="screen4x3"/>
   <p:notesSz cx="6858000" cy="9144000"/>
-  <p:custDataLst>
-    <p:tags r:id="rId16"/>
-  </p:custDataLst>
   <p:defaultTextStyle>
     <a:defPPr>
       <a:defRPr lang="en-US"/>
@@ -119,12 +119,12 @@
   <p:extLst>
     <p:ext uri="{EFAFB233-063F-42B5-8137-9DF3F51BA10A}">
       <p15:sldGuideLst xmlns:p15="http://schemas.microsoft.com/office/powerpoint/2012/main">
-        <p15:guide id="1" orient="horz" pos="2196" userDrawn="1">
+        <p15:guide id="1" orient="horz" pos="2160" userDrawn="1">
           <p15:clr>
             <a:srgbClr val="A4A3A4"/>
           </p15:clr>
         </p15:guide>
-        <p15:guide id="2" pos="2876" userDrawn="1">
+        <p15:guide id="2" pos="2880" userDrawn="1">
           <p15:clr>
             <a:srgbClr val="A4A3A4"/>
           </p15:clr>
@@ -133,6 +133,413 @@
     </p:ext>
   </p:extLst>
 </p:presentation>
+</file>
+
+<file path=ppt/notesMasters/notesMaster1.xml><?xml version="1.0" encoding="utf-8"?>
+<p:notesMaster xmlns:a="http://schemas.openxmlformats.org/drawingml/2006/main" xmlns:r="http://schemas.openxmlformats.org/officeDocument/2006/relationships" xmlns:p="http://schemas.openxmlformats.org/presentationml/2006/main">
+  <p:cSld>
+    <p:bg>
+      <p:bgRef idx="1001">
+        <a:schemeClr val="bg1"/>
+      </p:bgRef>
+    </p:bg>
+    <p:spTree>
+      <p:nvGrpSpPr>
+        <p:cNvPr id="1" name=""/>
+        <p:cNvGrpSpPr/>
+        <p:nvPr/>
+      </p:nvGrpSpPr>
+      <p:grpSpPr>
+        <a:xfrm>
+          <a:off x="0" y="0"/>
+          <a:ext cx="0" cy="0"/>
+          <a:chOff x="0" y="0"/>
+          <a:chExt cx="0" cy="0"/>
+        </a:xfrm>
+      </p:grpSpPr>
+      <p:sp>
+        <p:nvSpPr>
+          <p:cNvPr id="2" name="页眉占位符 1"/>
+          <p:cNvSpPr>
+            <a:spLocks noGrp="1"/>
+          </p:cNvSpPr>
+          <p:nvPr>
+            <p:ph type="hdr" sz="quarter"/>
+          </p:nvPr>
+        </p:nvSpPr>
+        <p:spPr>
+          <a:xfrm>
+            <a:off x="0" y="0"/>
+            <a:ext cx="2971800" cy="458788"/>
+          </a:xfrm>
+          <a:prstGeom prst="rect">
+            <a:avLst/>
+          </a:prstGeom>
+        </p:spPr>
+        <p:txBody>
+          <a:bodyPr vert="horz" lIns="91440" tIns="45720" rIns="91440" bIns="45720" rtlCol="0"/>
+          <a:lstStyle>
+            <a:lvl1pPr algn="l">
+              <a:defRPr sz="1200"/>
+            </a:lvl1pPr>
+          </a:lstStyle>
+          <a:p>
+            <a:endParaRPr lang="zh-CN" altLang="en-US"/>
+          </a:p>
+        </p:txBody>
+      </p:sp>
+      <p:sp>
+        <p:nvSpPr>
+          <p:cNvPr id="3" name="日期占位符 2"/>
+          <p:cNvSpPr>
+            <a:spLocks noGrp="1"/>
+          </p:cNvSpPr>
+          <p:nvPr>
+            <p:ph type="dt" idx="1"/>
+          </p:nvPr>
+        </p:nvSpPr>
+        <p:spPr>
+          <a:xfrm>
+            <a:off x="3884613" y="0"/>
+            <a:ext cx="2971800" cy="458788"/>
+          </a:xfrm>
+          <a:prstGeom prst="rect">
+            <a:avLst/>
+          </a:prstGeom>
+        </p:spPr>
+        <p:txBody>
+          <a:bodyPr vert="horz" lIns="91440" tIns="45720" rIns="91440" bIns="45720" rtlCol="0"/>
+          <a:lstStyle>
+            <a:lvl1pPr algn="r">
+              <a:defRPr sz="1200"/>
+            </a:lvl1pPr>
+          </a:lstStyle>
+          <a:p>
+            <a:fld id="{D2A48B96-639E-45A3-A0BA-2464DFDB1FAA}" type="datetimeFigureOut">
+              <a:rPr lang="zh-CN" altLang="en-US" smtClean="0"/>
+            </a:fld>
+            <a:endParaRPr lang="zh-CN" altLang="en-US"/>
+          </a:p>
+        </p:txBody>
+      </p:sp>
+      <p:sp>
+        <p:nvSpPr>
+          <p:cNvPr id="4" name="幻灯片图像占位符 3"/>
+          <p:cNvSpPr>
+            <a:spLocks noGrp="1" noRot="1" noChangeAspect="1"/>
+          </p:cNvSpPr>
+          <p:nvPr>
+            <p:ph type="sldImg" idx="2"/>
+          </p:nvPr>
+        </p:nvSpPr>
+        <p:spPr>
+          <a:xfrm>
+            <a:off x="685800" y="1143000"/>
+            <a:ext cx="5486400" cy="3086100"/>
+          </a:xfrm>
+          <a:prstGeom prst="rect">
+            <a:avLst/>
+          </a:prstGeom>
+          <a:noFill/>
+          <a:ln w="12700">
+            <a:solidFill>
+              <a:prstClr val="black"/>
+            </a:solidFill>
+          </a:ln>
+        </p:spPr>
+        <p:txBody>
+          <a:bodyPr vert="horz" lIns="91440" tIns="45720" rIns="91440" bIns="45720" rtlCol="0" anchor="ctr"/>
+          <a:lstStyle/>
+          <a:p>
+            <a:endParaRPr lang="zh-CN" altLang="en-US"/>
+          </a:p>
+        </p:txBody>
+      </p:sp>
+      <p:sp>
+        <p:nvSpPr>
+          <p:cNvPr id="5" name="备注占位符 4"/>
+          <p:cNvSpPr>
+            <a:spLocks noGrp="1"/>
+          </p:cNvSpPr>
+          <p:nvPr>
+            <p:ph type="body" sz="quarter" idx="3"/>
+          </p:nvPr>
+        </p:nvSpPr>
+        <p:spPr>
+          <a:xfrm>
+            <a:off x="685800" y="4400550"/>
+            <a:ext cx="5486400" cy="3600450"/>
+          </a:xfrm>
+          <a:prstGeom prst="rect">
+            <a:avLst/>
+          </a:prstGeom>
+        </p:spPr>
+        <p:txBody>
+          <a:bodyPr vert="horz" lIns="91440" tIns="45720" rIns="91440" bIns="45720" rtlCol="0"/>
+          <a:lstStyle/>
+          <a:p>
+            <a:pPr lvl="0"/>
+            <a:r>
+              <a:rPr lang="zh-CN" altLang="en-US" smtClean="0"/>
+              <a:t>单击此处编辑母版文本样式</a:t>
+            </a:r>
+            <a:endParaRPr lang="zh-CN" altLang="en-US" smtClean="0"/>
+          </a:p>
+          <a:p>
+            <a:pPr lvl="1"/>
+            <a:r>
+              <a:rPr lang="zh-CN" altLang="en-US" smtClean="0"/>
+              <a:t>第二级</a:t>
+            </a:r>
+            <a:endParaRPr lang="zh-CN" altLang="en-US" smtClean="0"/>
+          </a:p>
+          <a:p>
+            <a:pPr lvl="2"/>
+            <a:r>
+              <a:rPr lang="zh-CN" altLang="en-US" smtClean="0"/>
+              <a:t>第三级</a:t>
+            </a:r>
+            <a:endParaRPr lang="zh-CN" altLang="en-US" smtClean="0"/>
+          </a:p>
+          <a:p>
+            <a:pPr lvl="3"/>
+            <a:r>
+              <a:rPr lang="zh-CN" altLang="en-US" smtClean="0"/>
+              <a:t>第四级</a:t>
+            </a:r>
+            <a:endParaRPr lang="zh-CN" altLang="en-US" smtClean="0"/>
+          </a:p>
+          <a:p>
+            <a:pPr lvl="4"/>
+            <a:r>
+              <a:rPr lang="zh-CN" altLang="en-US" smtClean="0"/>
+              <a:t>第五级</a:t>
+            </a:r>
+            <a:endParaRPr lang="zh-CN" altLang="en-US"/>
+          </a:p>
+        </p:txBody>
+      </p:sp>
+      <p:sp>
+        <p:nvSpPr>
+          <p:cNvPr id="6" name="页脚占位符 5"/>
+          <p:cNvSpPr>
+            <a:spLocks noGrp="1"/>
+          </p:cNvSpPr>
+          <p:nvPr>
+            <p:ph type="ftr" sz="quarter" idx="4"/>
+          </p:nvPr>
+        </p:nvSpPr>
+        <p:spPr>
+          <a:xfrm>
+            <a:off x="0" y="8685213"/>
+            <a:ext cx="2971800" cy="458787"/>
+          </a:xfrm>
+          <a:prstGeom prst="rect">
+            <a:avLst/>
+          </a:prstGeom>
+        </p:spPr>
+        <p:txBody>
+          <a:bodyPr vert="horz" lIns="91440" tIns="45720" rIns="91440" bIns="45720" rtlCol="0" anchor="b"/>
+          <a:lstStyle>
+            <a:lvl1pPr algn="l">
+              <a:defRPr sz="1200"/>
+            </a:lvl1pPr>
+          </a:lstStyle>
+          <a:p>
+            <a:endParaRPr lang="zh-CN" altLang="en-US"/>
+          </a:p>
+        </p:txBody>
+      </p:sp>
+      <p:sp>
+        <p:nvSpPr>
+          <p:cNvPr id="7" name="灯片编号占位符 6"/>
+          <p:cNvSpPr>
+            <a:spLocks noGrp="1"/>
+          </p:cNvSpPr>
+          <p:nvPr>
+            <p:ph type="sldNum" sz="quarter" idx="5"/>
+          </p:nvPr>
+        </p:nvSpPr>
+        <p:spPr>
+          <a:xfrm>
+            <a:off x="3884613" y="8685213"/>
+            <a:ext cx="2971800" cy="458787"/>
+          </a:xfrm>
+          <a:prstGeom prst="rect">
+            <a:avLst/>
+          </a:prstGeom>
+        </p:spPr>
+        <p:txBody>
+          <a:bodyPr vert="horz" lIns="91440" tIns="45720" rIns="91440" bIns="45720" rtlCol="0" anchor="b"/>
+          <a:lstStyle>
+            <a:lvl1pPr algn="r">
+              <a:defRPr sz="1200"/>
+            </a:lvl1pPr>
+          </a:lstStyle>
+          <a:p>
+            <a:fld id="{A6837353-30EB-4A48-80EB-173D804AEFBD}" type="slidenum">
+              <a:rPr lang="zh-CN" altLang="en-US" smtClean="0"/>
+            </a:fld>
+            <a:endParaRPr lang="zh-CN" altLang="en-US"/>
+          </a:p>
+        </p:txBody>
+      </p:sp>
+    </p:spTree>
+  </p:cSld>
+  <p:clrMap bg1="lt1" tx1="dk1" bg2="lt2" tx2="dk2" accent1="accent1" accent2="accent2" accent3="accent3" accent4="accent4" accent5="accent5" accent6="accent6" hlink="hlink" folHlink="folHlink"/>
+  <p:notesStyle>
+    <a:lvl1pPr marL="0" algn="l" defTabSz="914400" rtl="0" eaLnBrk="1" latinLnBrk="0" hangingPunct="1">
+      <a:defRPr sz="1200" kern="1200">
+        <a:solidFill>
+          <a:schemeClr val="tx1"/>
+        </a:solidFill>
+        <a:latin typeface="+mn-lt"/>
+        <a:ea typeface="+mn-ea"/>
+        <a:cs typeface="+mn-cs"/>
+      </a:defRPr>
+    </a:lvl1pPr>
+    <a:lvl2pPr marL="457200" algn="l" defTabSz="914400" rtl="0" eaLnBrk="1" latinLnBrk="0" hangingPunct="1">
+      <a:defRPr sz="1200" kern="1200">
+        <a:solidFill>
+          <a:schemeClr val="tx1"/>
+        </a:solidFill>
+        <a:latin typeface="+mn-lt"/>
+        <a:ea typeface="+mn-ea"/>
+        <a:cs typeface="+mn-cs"/>
+      </a:defRPr>
+    </a:lvl2pPr>
+    <a:lvl3pPr marL="914400" algn="l" defTabSz="914400" rtl="0" eaLnBrk="1" latinLnBrk="0" hangingPunct="1">
+      <a:defRPr sz="1200" kern="1200">
+        <a:solidFill>
+          <a:schemeClr val="tx1"/>
+        </a:solidFill>
+        <a:latin typeface="+mn-lt"/>
+        <a:ea typeface="+mn-ea"/>
+        <a:cs typeface="+mn-cs"/>
+      </a:defRPr>
+    </a:lvl3pPr>
+    <a:lvl4pPr marL="1371600" algn="l" defTabSz="914400" rtl="0" eaLnBrk="1" latinLnBrk="0" hangingPunct="1">
+      <a:defRPr sz="1200" kern="1200">
+        <a:solidFill>
+          <a:schemeClr val="tx1"/>
+        </a:solidFill>
+        <a:latin typeface="+mn-lt"/>
+        <a:ea typeface="+mn-ea"/>
+        <a:cs typeface="+mn-cs"/>
+      </a:defRPr>
+    </a:lvl4pPr>
+    <a:lvl5pPr marL="1828800" algn="l" defTabSz="914400" rtl="0" eaLnBrk="1" latinLnBrk="0" hangingPunct="1">
+      <a:defRPr sz="1200" kern="1200">
+        <a:solidFill>
+          <a:schemeClr val="tx1"/>
+        </a:solidFill>
+        <a:latin typeface="+mn-lt"/>
+        <a:ea typeface="+mn-ea"/>
+        <a:cs typeface="+mn-cs"/>
+      </a:defRPr>
+    </a:lvl5pPr>
+    <a:lvl6pPr marL="2286000" algn="l" defTabSz="914400" rtl="0" eaLnBrk="1" latinLnBrk="0" hangingPunct="1">
+      <a:defRPr sz="1200" kern="1200">
+        <a:solidFill>
+          <a:schemeClr val="tx1"/>
+        </a:solidFill>
+        <a:latin typeface="+mn-lt"/>
+        <a:ea typeface="+mn-ea"/>
+        <a:cs typeface="+mn-cs"/>
+      </a:defRPr>
+    </a:lvl6pPr>
+    <a:lvl7pPr marL="2743200" algn="l" defTabSz="914400" rtl="0" eaLnBrk="1" latinLnBrk="0" hangingPunct="1">
+      <a:defRPr sz="1200" kern="1200">
+        <a:solidFill>
+          <a:schemeClr val="tx1"/>
+        </a:solidFill>
+        <a:latin typeface="+mn-lt"/>
+        <a:ea typeface="+mn-ea"/>
+        <a:cs typeface="+mn-cs"/>
+      </a:defRPr>
+    </a:lvl7pPr>
+    <a:lvl8pPr marL="3200400" algn="l" defTabSz="914400" rtl="0" eaLnBrk="1" latinLnBrk="0" hangingPunct="1">
+      <a:defRPr sz="1200" kern="1200">
+        <a:solidFill>
+          <a:schemeClr val="tx1"/>
+        </a:solidFill>
+        <a:latin typeface="+mn-lt"/>
+        <a:ea typeface="+mn-ea"/>
+        <a:cs typeface="+mn-cs"/>
+      </a:defRPr>
+    </a:lvl8pPr>
+    <a:lvl9pPr marL="3657600" algn="l" defTabSz="914400" rtl="0" eaLnBrk="1" latinLnBrk="0" hangingPunct="1">
+      <a:defRPr sz="1200" kern="1200">
+        <a:solidFill>
+          <a:schemeClr val="tx1"/>
+        </a:solidFill>
+        <a:latin typeface="+mn-lt"/>
+        <a:ea typeface="+mn-ea"/>
+        <a:cs typeface="+mn-cs"/>
+      </a:defRPr>
+    </a:lvl9pPr>
+  </p:notesStyle>
+</p:notesMaster>
+</file>
+
+<file path=ppt/notesSlides/notesSlide1.xml><?xml version="1.0" encoding="utf-8"?>
+<p:notes xmlns:a="http://schemas.openxmlformats.org/drawingml/2006/main" xmlns:r="http://schemas.openxmlformats.org/officeDocument/2006/relationships" xmlns:p="http://schemas.openxmlformats.org/presentationml/2006/main">
+  <p:cSld>
+    <p:spTree>
+      <p:nvGrpSpPr>
+        <p:cNvPr id="1" name=""/>
+        <p:cNvGrpSpPr/>
+        <p:nvPr/>
+      </p:nvGrpSpPr>
+      <p:grpSpPr>
+        <a:xfrm>
+          <a:off x="0" y="0"/>
+          <a:ext cx="0" cy="0"/>
+          <a:chOff x="0" y="0"/>
+          <a:chExt cx="0" cy="0"/>
+        </a:xfrm>
+      </p:grpSpPr>
+      <p:sp>
+        <p:nvSpPr>
+          <p:cNvPr id="2" name="Slide Image Placeholder 1"/>
+          <p:cNvSpPr>
+            <a:spLocks noGrp="1" noRot="1" noChangeAspect="1"/>
+          </p:cNvSpPr>
+          <p:nvPr>
+            <p:ph type="sldImg" idx="2"/>
+          </p:nvPr>
+        </p:nvSpPr>
+        <p:spPr/>
+      </p:sp>
+      <p:sp>
+        <p:nvSpPr>
+          <p:cNvPr id="3" name="Notes Placeholder 2"/>
+          <p:cNvSpPr>
+            <a:spLocks noGrp="1"/>
+          </p:cNvSpPr>
+          <p:nvPr>
+            <p:ph type="body" sz="quarter" idx="3"/>
+          </p:nvPr>
+        </p:nvSpPr>
+        <p:spPr/>
+        <p:txBody>
+          <a:bodyPr/>
+          <a:lstStyle/>
+          <a:p>
+            <a:r>
+              <a:rPr lang="en-US" dirty="0"/>
+              <a:t>This presentation introduces our Week 3 research framing and early technical findings. Our specific direction is instance-preserving pose representation for multi-person action recognition.</a:t>
+            </a:r>
+            <a:endParaRPr lang="en-US" dirty="0"/>
+          </a:p>
+        </p:txBody>
+      </p:sp>
+    </p:spTree>
+  </p:cSld>
+  <p:clrMapOvr>
+    <a:masterClrMapping/>
+  </p:clrMapOvr>
+</p:notes>
 </file>
 
 <file path=ppt/slideLayouts/slideLayout1.xml><?xml version="1.0" encoding="utf-8"?>
@@ -626,9 +1033,12 @@
   <p:cSld>
     <p:bg>
       <p:bgPr>
-        <a:solidFill>
-          <a:srgbClr val="FFFFFF"/>
-        </a:solidFill>
+        <a:blipFill rotWithShape="1">
+          <a:blip r:embed="rId1"/>
+          <a:stretch>
+            <a:fillRect/>
+          </a:stretch>
+        </a:blipFill>
         <a:effectLst/>
       </p:bgPr>
     </p:bg>
@@ -648,443 +1058,634 @@
       </p:grpSpPr>
       <p:sp>
         <p:nvSpPr>
-          <p:cNvPr id="2" name="Rectangle 2"/>
+          <p:cNvPr id="4" name="Rectangle 3"/>
           <p:cNvSpPr/>
           <p:nvPr/>
         </p:nvSpPr>
         <p:spPr>
           <a:xfrm>
             <a:off x="0" y="0"/>
-            <a:ext cx="171450" cy="6858000"/>
-          </a:xfrm>
-          <a:prstGeom prst="rect">
-            <a:avLst/>
-          </a:prstGeom>
-          <a:solidFill>
-            <a:srgbClr val="D71440"/>
-          </a:solidFill>
-          <a:ln>
-            <a:noFill/>
-          </a:ln>
-        </p:spPr>
+            <a:ext cx="12192635" cy="6858000"/>
+          </a:xfrm>
+          <a:prstGeom prst="rect">
+            <a:avLst/>
+          </a:prstGeom>
+          <a:gradFill>
+            <a:gsLst>
+              <a:gs pos="0">
+                <a:srgbClr val="DA1744">
+                  <a:alpha val="75000"/>
+                  <a:lumMod val="85000"/>
+                </a:srgbClr>
+              </a:gs>
+              <a:gs pos="10000">
+                <a:schemeClr val="bg1">
+                  <a:alpha val="0"/>
+                </a:schemeClr>
+              </a:gs>
+              <a:gs pos="75000">
+                <a:srgbClr val="84A1C8">
+                  <a:alpha val="75000"/>
+                </a:srgbClr>
+              </a:gs>
+              <a:gs pos="50000">
+                <a:schemeClr val="bg1">
+                  <a:alpha val="0"/>
+                </a:schemeClr>
+              </a:gs>
+              <a:gs pos="100000">
+                <a:srgbClr val="084391"/>
+              </a:gs>
+            </a:gsLst>
+            <a:lin ang="10800000" scaled="1"/>
+          </a:gradFill>
+          <a:ln>
+            <a:noFill/>
+          </a:ln>
+        </p:spPr>
+        <p:style>
+          <a:lnRef idx="1">
+            <a:schemeClr val="accent1"/>
+          </a:lnRef>
+          <a:fillRef idx="3">
+            <a:schemeClr val="accent1"/>
+          </a:fillRef>
+          <a:effectRef idx="2">
+            <a:schemeClr val="accent1"/>
+          </a:effectRef>
+          <a:fontRef idx="minor">
+            <a:schemeClr val="lt1"/>
+          </a:fontRef>
+        </p:style>
+        <p:txBody>
+          <a:bodyPr rtlCol="0" anchor="ctr"/>
+          <a:lstStyle/>
+          <a:p>
+            <a:pPr algn="ctr"/>
+          </a:p>
+        </p:txBody>
+      </p:sp>
+      <p:sp>
+        <p:nvSpPr>
+          <p:cNvPr id="6" name="Rectangle 5"/>
+          <p:cNvSpPr/>
+          <p:nvPr/>
+        </p:nvSpPr>
+        <p:spPr>
+          <a:xfrm>
+            <a:off x="713232" y="557784"/>
+            <a:ext cx="64008" cy="438912"/>
+          </a:xfrm>
+          <a:prstGeom prst="rect">
+            <a:avLst/>
+          </a:prstGeom>
+          <a:solidFill>
+            <a:srgbClr val="DA1744"/>
+          </a:solidFill>
+          <a:ln>
+            <a:noFill/>
+          </a:ln>
+        </p:spPr>
+        <p:style>
+          <a:lnRef idx="1">
+            <a:schemeClr val="accent1"/>
+          </a:lnRef>
+          <a:fillRef idx="3">
+            <a:schemeClr val="accent1"/>
+          </a:fillRef>
+          <a:effectRef idx="2">
+            <a:schemeClr val="accent1"/>
+          </a:effectRef>
+          <a:fontRef idx="minor">
+            <a:schemeClr val="lt1"/>
+          </a:fontRef>
+        </p:style>
+        <p:txBody>
+          <a:bodyPr rtlCol="0" anchor="ctr"/>
+          <a:lstStyle/>
+          <a:p>
+            <a:pPr algn="ctr"/>
+          </a:p>
+        </p:txBody>
+      </p:sp>
+      <p:sp>
+        <p:nvSpPr>
+          <p:cNvPr id="7" name="TextBox 6"/>
+          <p:cNvSpPr txBox="1"/>
+          <p:nvPr/>
+        </p:nvSpPr>
+        <p:spPr>
+          <a:xfrm>
+            <a:off x="896112" y="577088"/>
+            <a:ext cx="5074920" cy="215265"/>
+          </a:xfrm>
+          <a:prstGeom prst="rect">
+            <a:avLst/>
+          </a:prstGeom>
+          <a:noFill/>
+        </p:spPr>
+        <p:txBody>
+          <a:bodyPr wrap="square" lIns="0" tIns="0" rIns="0" bIns="0" anchor="t">
+            <a:spAutoFit/>
+          </a:bodyPr>
+          <a:lstStyle/>
+          <a:p>
+            <a:pPr algn="l">
+              <a:lnSpc>
+                <a:spcPct val="100000"/>
+              </a:lnSpc>
+              <a:spcAft>
+                <a:spcPts val="0"/>
+              </a:spcAft>
+            </a:pPr>
+            <a:r>
+              <a:rPr sz="1400" b="1">
+                <a:solidFill>
+                  <a:srgbClr val="172262"/>
+                </a:solidFill>
+                <a:latin typeface="Arial" panose="020B0604020202020204"/>
+              </a:rPr>
+              <a:t>EE6008</a:t>
+            </a:r>
+            <a:endParaRPr sz="1400" b="1">
+              <a:solidFill>
+                <a:srgbClr val="172262"/>
+              </a:solidFill>
+              <a:latin typeface="Arial" panose="020B0604020202020204"/>
+            </a:endParaRPr>
+          </a:p>
+        </p:txBody>
+      </p:sp>
+      <p:sp>
+        <p:nvSpPr>
+          <p:cNvPr id="8" name="TextBox 7"/>
+          <p:cNvSpPr txBox="1"/>
+          <p:nvPr/>
+        </p:nvSpPr>
+        <p:spPr>
+          <a:xfrm>
+            <a:off x="896112" y="841248"/>
+            <a:ext cx="3017520" cy="146050"/>
+          </a:xfrm>
+          <a:prstGeom prst="rect">
+            <a:avLst/>
+          </a:prstGeom>
+          <a:noFill/>
+        </p:spPr>
+        <p:txBody>
+          <a:bodyPr wrap="square" lIns="0" tIns="0" rIns="0" bIns="0" anchor="t">
+            <a:spAutoFit/>
+          </a:bodyPr>
+          <a:lstStyle/>
+          <a:p>
+            <a:pPr algn="l">
+              <a:lnSpc>
+                <a:spcPct val="100000"/>
+              </a:lnSpc>
+              <a:spcAft>
+                <a:spcPts val="0"/>
+              </a:spcAft>
+            </a:pPr>
+            <a:r>
+              <a:rPr sz="950" b="0">
+                <a:solidFill>
+                  <a:schemeClr val="bg1"/>
+                </a:solidFill>
+                <a:latin typeface="Arial" panose="020B0604020202020204"/>
+              </a:rPr>
+              <a:t>WEEKLY PRESENTATION</a:t>
+            </a:r>
+            <a:endParaRPr sz="950" b="0">
+              <a:solidFill>
+                <a:schemeClr val="bg1"/>
+              </a:solidFill>
+              <a:latin typeface="Arial" panose="020B0604020202020204"/>
+            </a:endParaRPr>
+          </a:p>
+        </p:txBody>
+      </p:sp>
+      <p:sp>
+        <p:nvSpPr>
+          <p:cNvPr id="9" name="TextBox 8"/>
+          <p:cNvSpPr txBox="1"/>
+          <p:nvPr/>
+        </p:nvSpPr>
+        <p:spPr>
+          <a:xfrm>
+            <a:off x="713232" y="1874519"/>
+            <a:ext cx="6172200" cy="1298448"/>
+          </a:xfrm>
+          <a:prstGeom prst="rect">
+            <a:avLst/>
+          </a:prstGeom>
+          <a:noFill/>
+        </p:spPr>
+        <p:txBody>
+          <a:bodyPr wrap="square" lIns="0" tIns="0" rIns="0" bIns="0" anchor="ctr">
+            <a:spAutoFit/>
+          </a:bodyPr>
+          <a:lstStyle/>
+          <a:p>
+            <a:pPr algn="l">
+              <a:lnSpc>
+                <a:spcPct val="100000"/>
+              </a:lnSpc>
+              <a:spcAft>
+                <a:spcPts val="0"/>
+              </a:spcAft>
+            </a:pPr>
+            <a:r>
+              <a:rPr sz="2800" b="1">
+                <a:solidFill>
+                  <a:srgbClr val="191D2C"/>
+                </a:solidFill>
+                <a:latin typeface="Arial" panose="020B0604020202020204"/>
+              </a:rPr>
+              <a:t>Human Pose Analytics</a:t>
+            </a:r>
+            <a:endParaRPr sz="2800" b="1">
+              <a:solidFill>
+                <a:srgbClr val="191D2C"/>
+              </a:solidFill>
+              <a:latin typeface="Arial" panose="020B0604020202020204"/>
+            </a:endParaRPr>
+          </a:p>
+          <a:p>
+            <a:pPr algn="l">
+              <a:lnSpc>
+                <a:spcPct val="100000"/>
+              </a:lnSpc>
+              <a:spcAft>
+                <a:spcPts val="0"/>
+              </a:spcAft>
+            </a:pPr>
+            <a:r>
+              <a:rPr sz="2800" b="1">
+                <a:solidFill>
+                  <a:srgbClr val="191D2C"/>
+                </a:solidFill>
+                <a:latin typeface="Arial" panose="020B0604020202020204"/>
+              </a:rPr>
+              <a:t>Using Artificial Intelligence</a:t>
+            </a:r>
+            <a:endParaRPr sz="2800" b="1">
+              <a:solidFill>
+                <a:srgbClr val="191D2C"/>
+              </a:solidFill>
+              <a:latin typeface="Arial" panose="020B0604020202020204"/>
+            </a:endParaRPr>
+          </a:p>
+        </p:txBody>
+      </p:sp>
+      <p:sp>
+        <p:nvSpPr>
+          <p:cNvPr id="10" name="Rectangle 9"/>
+          <p:cNvSpPr/>
+          <p:nvPr/>
+        </p:nvSpPr>
+        <p:spPr>
+          <a:xfrm>
+            <a:off x="731520" y="3319272"/>
+            <a:ext cx="585216" cy="50292"/>
+          </a:xfrm>
+          <a:prstGeom prst="rect">
+            <a:avLst/>
+          </a:prstGeom>
+          <a:solidFill>
+            <a:srgbClr val="DA1744"/>
+          </a:solidFill>
+          <a:ln>
+            <a:noFill/>
+          </a:ln>
+        </p:spPr>
+        <p:style>
+          <a:lnRef idx="1">
+            <a:schemeClr val="accent1"/>
+          </a:lnRef>
+          <a:fillRef idx="3">
+            <a:schemeClr val="accent1"/>
+          </a:fillRef>
+          <a:effectRef idx="2">
+            <a:schemeClr val="accent1"/>
+          </a:effectRef>
+          <a:fontRef idx="minor">
+            <a:schemeClr val="lt1"/>
+          </a:fontRef>
+        </p:style>
+        <p:txBody>
+          <a:bodyPr rtlCol="0" anchor="ctr"/>
+          <a:lstStyle/>
+          <a:p>
+            <a:pPr algn="ctr"/>
+          </a:p>
+        </p:txBody>
+      </p:sp>
+      <p:sp>
+        <p:nvSpPr>
+          <p:cNvPr id="11" name="TextBox 10"/>
+          <p:cNvSpPr txBox="1"/>
+          <p:nvPr/>
+        </p:nvSpPr>
+        <p:spPr>
+          <a:xfrm>
+            <a:off x="731520" y="3529584"/>
+            <a:ext cx="5715000" cy="457200"/>
+          </a:xfrm>
+          <a:prstGeom prst="rect">
+            <a:avLst/>
+          </a:prstGeom>
+          <a:noFill/>
+        </p:spPr>
+        <p:txBody>
+          <a:bodyPr wrap="square" lIns="0" tIns="0" rIns="0" bIns="0" anchor="t">
+            <a:spAutoFit/>
+          </a:bodyPr>
+          <a:lstStyle/>
+          <a:p>
+            <a:pPr algn="ctr">
+              <a:lnSpc>
+                <a:spcPct val="100000"/>
+              </a:lnSpc>
+              <a:spcAft>
+                <a:spcPts val="0"/>
+              </a:spcAft>
+            </a:pPr>
+            <a:r>
+              <a:rPr sz="1600" b="1">
+                <a:solidFill>
+                  <a:schemeClr val="bg1"/>
+                </a:solidFill>
+                <a:latin typeface="Arial" panose="020B0604020202020204"/>
+              </a:rPr>
+              <a:t>Instance-Preserving Pose Representation</a:t>
+            </a:r>
+            <a:endParaRPr sz="1600" b="1">
+              <a:solidFill>
+                <a:schemeClr val="bg1"/>
+              </a:solidFill>
+              <a:latin typeface="Arial" panose="020B0604020202020204"/>
+            </a:endParaRPr>
+          </a:p>
+        </p:txBody>
+      </p:sp>
+      <p:sp>
+        <p:nvSpPr>
+          <p:cNvPr id="12" name="Rectangle 11"/>
+          <p:cNvSpPr/>
+          <p:nvPr/>
+        </p:nvSpPr>
+        <p:spPr>
+          <a:xfrm>
+            <a:off x="731520" y="4727448"/>
+            <a:ext cx="1170432" cy="448056"/>
+          </a:xfrm>
+          <a:prstGeom prst="rect">
+            <a:avLst/>
+          </a:prstGeom>
+          <a:solidFill>
+            <a:srgbClr val="172262">
+              <a:alpha val="97000"/>
+            </a:srgbClr>
+          </a:solidFill>
+          <a:ln>
+            <a:noFill/>
+          </a:ln>
+        </p:spPr>
+        <p:style>
+          <a:lnRef idx="1">
+            <a:schemeClr val="accent1"/>
+          </a:lnRef>
+          <a:fillRef idx="3">
+            <a:schemeClr val="accent1"/>
+          </a:fillRef>
+          <a:effectRef idx="2">
+            <a:schemeClr val="accent1"/>
+          </a:effectRef>
+          <a:fontRef idx="minor">
+            <a:schemeClr val="lt1"/>
+          </a:fontRef>
+        </p:style>
+        <p:txBody>
+          <a:bodyPr rtlCol="0" anchor="ctr"/>
+          <a:lstStyle/>
+          <a:p>
+            <a:pPr algn="ctr"/>
+          </a:p>
+        </p:txBody>
+      </p:sp>
+      <p:sp>
+        <p:nvSpPr>
+          <p:cNvPr id="13" name="TextBox 12"/>
+          <p:cNvSpPr txBox="1"/>
+          <p:nvPr/>
+        </p:nvSpPr>
+        <p:spPr>
+          <a:xfrm>
+            <a:off x="731520" y="4727448"/>
+            <a:ext cx="1170432" cy="448056"/>
+          </a:xfrm>
+          <a:prstGeom prst="rect">
+            <a:avLst/>
+          </a:prstGeom>
+          <a:noFill/>
+        </p:spPr>
+        <p:txBody>
+          <a:bodyPr wrap="square" lIns="0" tIns="0" rIns="0" bIns="0" anchor="ctr">
+            <a:spAutoFit/>
+          </a:bodyPr>
+          <a:lstStyle/>
+          <a:p>
+            <a:pPr algn="ctr">
+              <a:lnSpc>
+                <a:spcPct val="100000"/>
+              </a:lnSpc>
+              <a:spcAft>
+                <a:spcPts val="0"/>
+              </a:spcAft>
+            </a:pPr>
+            <a:r>
+              <a:rPr sz="1100" b="1">
+                <a:solidFill>
+                  <a:srgbClr val="FFFFFF"/>
+                </a:solidFill>
+                <a:latin typeface="Arial" panose="020B0604020202020204"/>
+              </a:rPr>
+              <a:t>WEEK 3</a:t>
+            </a:r>
+            <a:endParaRPr sz="1100" b="1">
+              <a:solidFill>
+                <a:srgbClr val="FFFFFF"/>
+              </a:solidFill>
+              <a:latin typeface="Arial" panose="020B0604020202020204"/>
+            </a:endParaRPr>
+          </a:p>
+        </p:txBody>
+      </p:sp>
+      <p:sp>
+        <p:nvSpPr>
+          <p:cNvPr id="14" name="Rectangle 13"/>
+          <p:cNvSpPr/>
+          <p:nvPr/>
+        </p:nvSpPr>
+        <p:spPr>
+          <a:xfrm>
+            <a:off x="1901952" y="4727448"/>
+            <a:ext cx="2423160" cy="448056"/>
+          </a:xfrm>
+          <a:prstGeom prst="rect">
+            <a:avLst/>
+          </a:prstGeom>
+          <a:solidFill>
+            <a:srgbClr val="ECEEF3">
+              <a:alpha val="95000"/>
+            </a:srgbClr>
+          </a:solidFill>
+          <a:ln>
+            <a:noFill/>
+          </a:ln>
+        </p:spPr>
+        <p:style>
+          <a:lnRef idx="1">
+            <a:schemeClr val="accent1"/>
+          </a:lnRef>
+          <a:fillRef idx="3">
+            <a:schemeClr val="accent1"/>
+          </a:fillRef>
+          <a:effectRef idx="2">
+            <a:schemeClr val="accent1"/>
+          </a:effectRef>
+          <a:fontRef idx="minor">
+            <a:schemeClr val="lt1"/>
+          </a:fontRef>
+        </p:style>
+        <p:txBody>
+          <a:bodyPr rtlCol="0" anchor="ctr"/>
+          <a:lstStyle/>
+          <a:p>
+            <a:pPr algn="ctr"/>
+          </a:p>
+        </p:txBody>
+      </p:sp>
+      <p:sp>
+        <p:nvSpPr>
+          <p:cNvPr id="15" name="TextBox 14"/>
+          <p:cNvSpPr txBox="1"/>
+          <p:nvPr/>
+        </p:nvSpPr>
+        <p:spPr>
+          <a:xfrm>
+            <a:off x="1901952" y="4843844"/>
+            <a:ext cx="2423160" cy="215265"/>
+          </a:xfrm>
+          <a:prstGeom prst="rect">
+            <a:avLst/>
+          </a:prstGeom>
+          <a:noFill/>
+        </p:spPr>
+        <p:txBody>
+          <a:bodyPr wrap="square" lIns="0" tIns="0" rIns="0" bIns="0" anchor="ctr">
+            <a:spAutoFit/>
+          </a:bodyPr>
+          <a:lstStyle/>
+          <a:p>
+            <a:pPr algn="ctr">
+              <a:lnSpc>
+                <a:spcPct val="100000"/>
+              </a:lnSpc>
+              <a:spcAft>
+                <a:spcPts val="0"/>
+              </a:spcAft>
+            </a:pPr>
+            <a:r>
+              <a:rPr sz="1400" b="1">
+                <a:solidFill>
+                  <a:srgbClr val="5F6575"/>
+                </a:solidFill>
+                <a:latin typeface="Arial" panose="020B0604020202020204"/>
+              </a:rPr>
+              <a:t>Group 14</a:t>
+            </a:r>
+            <a:endParaRPr sz="1400" b="1">
+              <a:solidFill>
+                <a:srgbClr val="5F6575"/>
+              </a:solidFill>
+              <a:latin typeface="Arial" panose="020B0604020202020204"/>
+            </a:endParaRPr>
+          </a:p>
+        </p:txBody>
+      </p:sp>
+      <p:sp>
+        <p:nvSpPr>
+          <p:cNvPr id="16" name="TextBox 15"/>
+          <p:cNvSpPr txBox="1"/>
+          <p:nvPr/>
+        </p:nvSpPr>
+        <p:spPr>
+          <a:xfrm>
+            <a:off x="731520" y="5971032"/>
+            <a:ext cx="3474720" cy="228600"/>
+          </a:xfrm>
+          <a:prstGeom prst="rect">
+            <a:avLst/>
+          </a:prstGeom>
+          <a:noFill/>
+        </p:spPr>
+        <p:txBody>
+          <a:bodyPr wrap="square" lIns="0" tIns="0" rIns="0" bIns="0" anchor="t">
+            <a:spAutoFit/>
+          </a:bodyPr>
+          <a:lstStyle/>
+          <a:p>
+            <a:pPr algn="l">
+              <a:lnSpc>
+                <a:spcPct val="100000"/>
+              </a:lnSpc>
+              <a:spcAft>
+                <a:spcPts val="0"/>
+              </a:spcAft>
+            </a:pPr>
+            <a:r>
+              <a:rPr sz="800" b="0">
+                <a:solidFill>
+                  <a:srgbClr val="5F6575"/>
+                </a:solidFill>
+                <a:latin typeface="Arial" panose="020B0604020202020204"/>
+              </a:rPr>
+              <a:t>Week ending · 2026-09-01</a:t>
+            </a:r>
+            <a:endParaRPr sz="800" b="0">
+              <a:solidFill>
+                <a:srgbClr val="5F6575"/>
+              </a:solidFill>
+              <a:latin typeface="Arial" panose="020B0604020202020204"/>
+            </a:endParaRPr>
+          </a:p>
+        </p:txBody>
       </p:sp>
       <p:pic>
         <p:nvPicPr>
-          <p:cNvPr id="3" name="Image 3"/>
+          <p:cNvPr id="17" name="Image 3"/>
           <p:cNvPicPr>
             <a:picLocks noChangeAspect="1"/>
           </p:cNvPicPr>
           <p:nvPr/>
         </p:nvPicPr>
         <p:blipFill>
-          <a:blip r:embed="rId1"/>
+          <a:blip r:embed="rId2"/>
           <a:stretch>
             <a:fillRect/>
           </a:stretch>
         </p:blipFill>
         <p:spPr>
           <a:xfrm>
-            <a:off x="9810750" y="228600"/>
-            <a:ext cx="1905000" cy="685800"/>
+            <a:off x="10633075" y="570230"/>
+            <a:ext cx="1311910" cy="472440"/>
           </a:xfrm>
           <a:prstGeom prst="rect">
             <a:avLst/>
           </a:prstGeom>
         </p:spPr>
       </p:pic>
-      <p:sp>
-        <p:nvSpPr>
-          <p:cNvPr id="4" name="Rectangle 4"/>
-          <p:cNvSpPr/>
-          <p:nvPr/>
-        </p:nvSpPr>
-        <p:spPr>
-          <a:xfrm>
-            <a:off x="171450" y="6572250"/>
-            <a:ext cx="12020550" cy="285750"/>
-          </a:xfrm>
-          <a:prstGeom prst="rect">
-            <a:avLst/>
-          </a:prstGeom>
-          <a:solidFill>
-            <a:srgbClr val="181C62"/>
-          </a:solidFill>
-          <a:ln>
-            <a:noFill/>
-          </a:ln>
-        </p:spPr>
-      </p:sp>
-      <p:sp>
-        <p:nvSpPr>
-          <p:cNvPr id="5" name="TextBox 5"/>
-          <p:cNvSpPr txBox="1"/>
-          <p:nvPr/>
-        </p:nvSpPr>
-        <p:spPr>
-          <a:xfrm>
-            <a:off x="471297" y="6667024"/>
-            <a:ext cx="2114774" cy="190690"/>
-          </a:xfrm>
-          <a:prstGeom prst="rect">
-            <a:avLst/>
-          </a:prstGeom>
-          <a:noFill/>
-          <a:ln>
-            <a:noFill/>
-          </a:ln>
-        </p:spPr>
-        <p:txBody>
-          <a:bodyPr wrap="none" lIns="0" tIns="0" rIns="0" bIns="0" anchor="t" anchorCtr="0">
-            <a:spAutoFit/>
-          </a:bodyPr>
-          <a:lstStyle/>
-          <a:p>
-            <a:pPr algn="l"/>
-            <a:r>
-              <a:rPr lang="en-US" sz="980" dirty="0">
-                <a:solidFill>
-                  <a:srgbClr val="FFFFFF"/>
-                </a:solidFill>
-                <a:latin typeface="Arial" panose="020B0604020202020204"/>
-                <a:ea typeface="Arial" panose="020B0604020202020204"/>
-                <a:cs typeface="Arial" panose="020B0604020202020204"/>
-              </a:rPr>
-              <a:t>EE6008 · HUMAN POSE ANALYTICS</a:t>
-            </a:r>
-            <a:endParaRPr lang="en-US" sz="980" dirty="0">
-              <a:solidFill>
-                <a:srgbClr val="FFFFFF"/>
-              </a:solidFill>
-              <a:latin typeface="Arial" panose="020B0604020202020204"/>
-              <a:ea typeface="Arial" panose="020B0604020202020204"/>
-              <a:cs typeface="Arial" panose="020B0604020202020204"/>
-            </a:endParaRPr>
-          </a:p>
-        </p:txBody>
-      </p:sp>
-      <p:sp>
-        <p:nvSpPr>
-          <p:cNvPr id="6" name="Rectangle 6"/>
-          <p:cNvSpPr/>
-          <p:nvPr/>
-        </p:nvSpPr>
-        <p:spPr>
-          <a:xfrm>
-            <a:off x="552450" y="1200150"/>
-            <a:ext cx="114300" cy="3905250"/>
-          </a:xfrm>
-          <a:prstGeom prst="rect">
-            <a:avLst/>
-          </a:prstGeom>
-          <a:solidFill>
-            <a:srgbClr val="D71440"/>
-          </a:solidFill>
-          <a:ln>
-            <a:noFill/>
-          </a:ln>
-        </p:spPr>
-      </p:sp>
-      <p:pic>
-        <p:nvPicPr>
-          <p:cNvPr id="7" name="Image 7"/>
-          <p:cNvPicPr>
-            <a:picLocks noChangeAspect="1"/>
-          </p:cNvPicPr>
-          <p:nvPr/>
-        </p:nvPicPr>
-        <p:blipFill>
-          <a:blip r:embed="rId2">
-            <a:alphaModFix amt="56000"/>
-          </a:blip>
-          <a:stretch>
-            <a:fillRect/>
-          </a:stretch>
-        </p:blipFill>
-        <p:spPr>
-          <a:xfrm>
-            <a:off x="3762375" y="1200150"/>
-            <a:ext cx="8382000" cy="3905250"/>
-          </a:xfrm>
-          <a:prstGeom prst="rect">
-            <a:avLst/>
-          </a:prstGeom>
-        </p:spPr>
-      </p:pic>
-      <p:sp>
-        <p:nvSpPr>
-          <p:cNvPr id="8" name="Freeform 8"/>
-          <p:cNvSpPr/>
-          <p:nvPr/>
-        </p:nvSpPr>
-        <p:spPr>
-          <a:xfrm>
-            <a:off x="3714750" y="1200150"/>
-            <a:ext cx="1714500" cy="3905250"/>
-          </a:xfrm>
-          <a:custGeom>
-            <a:avLst/>
-            <a:gdLst/>
-            <a:ahLst/>
-            <a:cxnLst/>
-            <a:rect l="l" t="t" r="r" b="b"/>
-            <a:pathLst>
-              <a:path w="1714500" h="3905250">
-                <a:moveTo>
-                  <a:pt x="0" y="0"/>
-                </a:moveTo>
-                <a:lnTo>
-                  <a:pt x="1714500" y="0"/>
-                </a:lnTo>
-                <a:lnTo>
-                  <a:pt x="1047750" y="3905250"/>
-                </a:lnTo>
-                <a:lnTo>
-                  <a:pt x="0" y="3905250"/>
-                </a:lnTo>
-                <a:close/>
-              </a:path>
-            </a:pathLst>
-          </a:custGeom>
-          <a:solidFill>
-            <a:srgbClr val="FFFFFF">
-              <a:alpha val="82000"/>
-            </a:srgbClr>
-          </a:solidFill>
-          <a:ln>
-            <a:noFill/>
-          </a:ln>
-        </p:spPr>
-      </p:sp>
-      <p:sp>
-        <p:nvSpPr>
-          <p:cNvPr id="9" name="Freeform 9"/>
-          <p:cNvSpPr/>
-          <p:nvPr/>
-        </p:nvSpPr>
-        <p:spPr>
-          <a:xfrm>
-            <a:off x="4476750" y="1200150"/>
-            <a:ext cx="809625" cy="3905250"/>
-          </a:xfrm>
-          <a:custGeom>
-            <a:avLst/>
-            <a:gdLst/>
-            <a:ahLst/>
-            <a:cxnLst/>
-            <a:rect l="l" t="t" r="r" b="b"/>
-            <a:pathLst>
-              <a:path w="809625" h="3905250">
-                <a:moveTo>
-                  <a:pt x="809625" y="0"/>
-                </a:moveTo>
-                <a:lnTo>
-                  <a:pt x="0" y="3905250"/>
-                </a:lnTo>
-              </a:path>
-            </a:pathLst>
-          </a:custGeom>
-          <a:noFill/>
-          <a:ln w="28575">
-            <a:solidFill>
-              <a:srgbClr val="D71440">
-                <a:alpha val="62000"/>
-              </a:srgbClr>
-            </a:solidFill>
-          </a:ln>
-        </p:spPr>
-      </p:sp>
-      <p:sp>
-        <p:nvSpPr>
-          <p:cNvPr id="10" name="TextBox 10"/>
-          <p:cNvSpPr txBox="1"/>
-          <p:nvPr/>
-        </p:nvSpPr>
-        <p:spPr>
-          <a:xfrm>
-            <a:off x="898398" y="1603058"/>
-            <a:ext cx="4616457" cy="616077"/>
-          </a:xfrm>
-          <a:prstGeom prst="rect">
-            <a:avLst/>
-          </a:prstGeom>
-          <a:noFill/>
-          <a:ln>
-            <a:noFill/>
-          </a:ln>
-        </p:spPr>
-        <p:txBody>
-          <a:bodyPr wrap="none" lIns="0" tIns="0" rIns="0" bIns="0" anchor="t" anchorCtr="0">
-            <a:spAutoFit/>
-          </a:bodyPr>
-          <a:lstStyle/>
-          <a:p>
-            <a:pPr algn="l"/>
-            <a:r>
-              <a:rPr lang="en-US" sz="3150" b="1" dirty="0">
-                <a:solidFill>
-                  <a:srgbClr val="181C62"/>
-                </a:solidFill>
-                <a:latin typeface="Arial" panose="020B0604020202020204"/>
-                <a:ea typeface="Arial" panose="020B0604020202020204"/>
-                <a:cs typeface="Arial" panose="020B0604020202020204"/>
-              </a:rPr>
-              <a:t>Human Pose Analytics</a:t>
-            </a:r>
-            <a:endParaRPr lang="en-US" sz="3150" b="1" dirty="0">
-              <a:solidFill>
-                <a:srgbClr val="181C62"/>
-              </a:solidFill>
-              <a:latin typeface="Arial" panose="020B0604020202020204"/>
-              <a:ea typeface="Arial" panose="020B0604020202020204"/>
-              <a:cs typeface="Arial" panose="020B0604020202020204"/>
-            </a:endParaRPr>
-          </a:p>
-        </p:txBody>
-      </p:sp>
-      <p:sp>
-        <p:nvSpPr>
-          <p:cNvPr id="11" name="TextBox 11"/>
-          <p:cNvSpPr txBox="1"/>
-          <p:nvPr/>
-        </p:nvSpPr>
-        <p:spPr>
-          <a:xfrm>
-            <a:off x="905637" y="3166586"/>
-            <a:ext cx="4508738" cy="337376"/>
-          </a:xfrm>
-          <a:prstGeom prst="rect">
-            <a:avLst/>
-          </a:prstGeom>
-          <a:noFill/>
-          <a:ln>
-            <a:noFill/>
-          </a:ln>
-        </p:spPr>
-        <p:txBody>
-          <a:bodyPr wrap="none" lIns="0" tIns="0" rIns="0" bIns="0" anchor="t" anchorCtr="0">
-            <a:spAutoFit/>
-          </a:bodyPr>
-          <a:lstStyle/>
-          <a:p>
-            <a:pPr algn="l"/>
-            <a:r>
-              <a:rPr lang="en-US" sz="1720" dirty="0">
-                <a:solidFill>
-                  <a:srgbClr val="20243A"/>
-                </a:solidFill>
-                <a:latin typeface="Arial" panose="020B0604020202020204"/>
-                <a:ea typeface="Arial" panose="020B0604020202020204"/>
-                <a:cs typeface="Arial" panose="020B0604020202020204"/>
-              </a:rPr>
-              <a:t>Weekly research update · {{SUBTITLE}}</a:t>
-            </a:r>
-            <a:endParaRPr lang="en-US" sz="1720" dirty="0">
-              <a:solidFill>
-                <a:srgbClr val="20243A"/>
-              </a:solidFill>
-              <a:latin typeface="Arial" panose="020B0604020202020204"/>
-              <a:ea typeface="Arial" panose="020B0604020202020204"/>
-              <a:cs typeface="Arial" panose="020B0604020202020204"/>
-            </a:endParaRPr>
-          </a:p>
-        </p:txBody>
-      </p:sp>
-      <p:sp>
-        <p:nvSpPr>
-          <p:cNvPr id="12" name="TextBox 12"/>
-          <p:cNvSpPr txBox="1"/>
-          <p:nvPr/>
-        </p:nvSpPr>
-        <p:spPr>
-          <a:xfrm>
-            <a:off x="907542" y="4311968"/>
-            <a:ext cx="2213617" cy="264033"/>
-          </a:xfrm>
-          <a:prstGeom prst="rect">
-            <a:avLst/>
-          </a:prstGeom>
-          <a:noFill/>
-          <a:ln>
-            <a:noFill/>
-          </a:ln>
-        </p:spPr>
-        <p:txBody>
-          <a:bodyPr wrap="none" lIns="0" tIns="0" rIns="0" bIns="0" anchor="t" anchorCtr="0">
-            <a:spAutoFit/>
-          </a:bodyPr>
-          <a:lstStyle/>
-          <a:p>
-            <a:pPr algn="l"/>
-            <a:r>
-              <a:rPr lang="en-US" sz="1350" b="1" dirty="0">
-                <a:solidFill>
-                  <a:srgbClr val="D71440"/>
-                </a:solidFill>
-                <a:latin typeface="Arial" panose="020B0604020202020204"/>
-                <a:ea typeface="Arial" panose="020B0604020202020204"/>
-                <a:cs typeface="Arial" panose="020B0604020202020204"/>
-              </a:rPr>
-              <a:t>Week ending · {{DATE}}</a:t>
-            </a:r>
-            <a:endParaRPr lang="en-US" sz="1350" b="1" dirty="0">
-              <a:solidFill>
-                <a:srgbClr val="D71440"/>
-              </a:solidFill>
-              <a:latin typeface="Arial" panose="020B0604020202020204"/>
-              <a:ea typeface="Arial" panose="020B0604020202020204"/>
-              <a:cs typeface="Arial" panose="020B0604020202020204"/>
-            </a:endParaRPr>
-          </a:p>
-        </p:txBody>
-      </p:sp>
-      <p:sp>
-        <p:nvSpPr>
-          <p:cNvPr id="13" name="TextBox 13"/>
-          <p:cNvSpPr txBox="1"/>
-          <p:nvPr/>
-        </p:nvSpPr>
-        <p:spPr>
-          <a:xfrm>
-            <a:off x="907542" y="4835842"/>
-            <a:ext cx="2214860" cy="264033"/>
-          </a:xfrm>
-          <a:prstGeom prst="rect">
-            <a:avLst/>
-          </a:prstGeom>
-          <a:noFill/>
-          <a:ln>
-            <a:noFill/>
-          </a:ln>
-        </p:spPr>
-        <p:txBody>
-          <a:bodyPr wrap="none" lIns="0" tIns="0" rIns="0" bIns="0" anchor="t" anchorCtr="0">
-            <a:spAutoFit/>
-          </a:bodyPr>
-          <a:lstStyle/>
-          <a:p>
-            <a:pPr algn="l"/>
-            <a:r>
-              <a:rPr lang="en-US" sz="1350" dirty="0">
-                <a:solidFill>
-                  <a:srgbClr val="5E6478"/>
-                </a:solidFill>
-                <a:latin typeface="Arial" panose="020B0604020202020204"/>
-                <a:ea typeface="Arial" panose="020B0604020202020204"/>
-                <a:cs typeface="Arial" panose="020B0604020202020204"/>
-              </a:rPr>
-              <a:t>Presenter · {{AUTHOR}}</a:t>
-            </a:r>
-            <a:endParaRPr lang="en-US" sz="1350" dirty="0">
-              <a:solidFill>
-                <a:srgbClr val="5E6478"/>
-              </a:solidFill>
-              <a:latin typeface="Arial" panose="020B0604020202020204"/>
-              <a:ea typeface="Arial" panose="020B0604020202020204"/>
-              <a:cs typeface="Arial" panose="020B0604020202020204"/>
-            </a:endParaRPr>
-          </a:p>
-        </p:txBody>
-      </p:sp>
     </p:spTree>
   </p:cSld>
   <p:clrMapOvr>
@@ -3093,7 +3694,7 @@
         <p:spPr>
           <a:xfrm>
             <a:off x="501396" y="543878"/>
-            <a:ext cx="4773930" cy="391795"/>
+            <a:ext cx="3345943" cy="498729"/>
           </a:xfrm>
           <a:prstGeom prst="rect">
             <a:avLst/>
@@ -3111,7 +3712,7 @@
           <a:p>
             <a:pPr algn="l"/>
             <a:r>
-              <a:rPr lang="en-US" altLang="zh-CN" sz="2550" b="1" dirty="0">
+              <a:rPr lang="en-US" sz="2550" b="1" dirty="0">
                 <a:solidFill>
                   <a:srgbClr val="20243A"/>
                 </a:solidFill>
@@ -3119,9 +3720,9 @@
                 <a:ea typeface="Arial" panose="020B0604020202020204"/>
                 <a:cs typeface="Arial" panose="020B0604020202020204"/>
               </a:rPr>
-              <a:t>Scoping the Interaction Subset</a:t>
-            </a:r>
-            <a:endParaRPr lang="en-US" altLang="zh-CN" sz="2550" b="1" dirty="0">
+              <a:t>Technical Progress</a:t>
+            </a:r>
+            <a:endParaRPr lang="en-US" sz="2550" b="1" dirty="0">
               <a:solidFill>
                 <a:srgbClr val="20243A"/>
               </a:solidFill>
@@ -3171,28 +3772,7 @@
                 <a:ea typeface="Arial" panose="020B0604020202020204"/>
                 <a:cs typeface="Arial" panose="020B0604020202020204"/>
               </a:rPr>
-              <a:t>NTU RGB+D 120</a:t>
-            </a:r>
-            <a:br>
-              <a:rPr lang="en-US" sz="1580" dirty="0">
-                <a:solidFill>
-                  <a:srgbClr val="20243A"/>
-                </a:solidFill>
-                <a:latin typeface="Arial" panose="020B0604020202020204"/>
-                <a:ea typeface="Arial" panose="020B0604020202020204"/>
-                <a:cs typeface="Arial" panose="020B0604020202020204"/>
-              </a:rPr>
-            </a:br>
-            <a:r>
-              <a:rPr lang="en-US" sz="1580" dirty="0">
-                <a:solidFill>
-                  <a:srgbClr val="20243A"/>
-                </a:solidFill>
-                <a:latin typeface="Arial" panose="020B0604020202020204"/>
-                <a:ea typeface="Arial" panose="020B0604020202020204"/>
-                <a:cs typeface="Arial" panose="020B0604020202020204"/>
-              </a:rPr>
-              <a:t>dataset audit</a:t>
+              <a:t>{{TECHNICAL_PROGRESS}}</a:t>
             </a:r>
             <a:endParaRPr lang="en-US" sz="1580" dirty="0">
               <a:solidFill>
@@ -3221,7 +3801,7 @@
                 <a:ea typeface="Arial" panose="020B0604020202020204"/>
                 <a:cs typeface="Arial" panose="020B0604020202020204"/>
               </a:rPr>
-              <a:t>Completed · format, splits, cleaning</a:t>
+              <a:t>Completed · In progress · Blocked</a:t>
             </a:r>
             <a:br>
               <a:rPr lang="en-US" sz="1050" dirty="0">
@@ -3242,7 +3822,7 @@
                 <a:ea typeface="Arial" panose="020B0604020202020204"/>
                 <a:cs typeface="Arial" panose="020B0604020202020204"/>
               </a:rPr>
-              <a:t>Planned · parser that keeps bodyID</a:t>
+              <a:t>Include the concrete output, not only the activity.</a:t>
             </a:r>
             <a:endParaRPr lang="en-US" sz="1050" dirty="0">
               <a:solidFill>
@@ -3294,7 +3874,7 @@
                 <a:ea typeface="Arial" panose="020B0604020202020204"/>
                 <a:cs typeface="Arial" panose="020B0604020202020204"/>
               </a:rPr>
-              <a:t>26 mutual classes · 24,732 clips</a:t>
+              <a:t>{{CONTENT_AREA}}</a:t>
             </a:r>
             <a:endParaRPr lang="en-US" sz="1420" dirty="0">
               <a:solidFill>
@@ -3323,7 +3903,7 @@
                 <a:ea typeface="Arial" panose="020B0604020202020204"/>
                 <a:cs typeface="Arial" panose="020B0604020202020204"/>
               </a:rPr>
-              <a:t>A050–A060 + A106–A120; the official</a:t>
+              <a:t>Recommended: module diagram, interface contract,</a:t>
             </a:r>
             <a:br>
               <a:rPr lang="en-US" sz="1050" dirty="0">
@@ -3344,49 +3924,7 @@
                 <a:ea typeface="Arial" panose="020B0604020202020204"/>
                 <a:cs typeface="Arial" panose="020B0604020202020204"/>
               </a:rPr>
-              <a:t>535-entry list removes 96 of them</a:t>
-            </a:r>
-            <a:br>
-              <a:rPr lang="en-US" sz="1050" dirty="0">
-                <a:solidFill>
-                  <a:srgbClr val="5E6478"/>
-                </a:solidFill>
-                <a:latin typeface="Arial" panose="020B0604020202020204"/>
-                <a:ea typeface="Arial" panose="020B0604020202020204"/>
-                <a:cs typeface="Arial" panose="020B0604020202020204"/>
-              </a:rPr>
-            </a:br>
-            <a:r>
-              <a:rPr lang="en-US" sz="1050" dirty="0">
-                <a:solidFill>
-                  <a:srgbClr val="5E6478"/>
-                </a:solidFill>
-                <a:latin typeface="Arial" panose="020B0604020202020204"/>
-                <a:ea typeface="Arial" panose="020B0604020202020204"/>
-                <a:cs typeface="Arial" panose="020B0604020202020204"/>
-              </a:rPr>
-              <a:t>X-Sub 53/53 subjects · X-Set even/odd setups</a:t>
-            </a:r>
-            <a:br>
-              <a:rPr lang="en-US" sz="1050" dirty="0">
-                <a:solidFill>
-                  <a:srgbClr val="5E6478"/>
-                </a:solidFill>
-                <a:latin typeface="Arial" panose="020B0604020202020204"/>
-                <a:ea typeface="Arial" panose="020B0604020202020204"/>
-                <a:cs typeface="Arial" panose="020B0604020202020204"/>
-              </a:rPr>
-            </a:br>
-            <a:r>
-              <a:rPr lang="en-US" sz="1050" dirty="0">
-                <a:solidFill>
-                  <a:srgbClr val="5E6478"/>
-                </a:solidFill>
-                <a:latin typeface="Arial" panose="020B0604020202020204"/>
-                <a:ea typeface="Arial" panose="020B0604020202020204"/>
-                <a:cs typeface="Arial" panose="020B0604020202020204"/>
-              </a:rPr>
-              <a:t>Skeleton-only download: 10.3 GB of the 2.3 TB</a:t>
+              <a:t>training pipeline, code evidence, or data-flow change.</a:t>
             </a:r>
             <a:endParaRPr lang="en-US" sz="1050" dirty="0">
               <a:solidFill>
@@ -3438,28 +3976,7 @@
                 <a:ea typeface="Arial" panose="020B0604020202020204"/>
                 <a:cs typeface="Arial" panose="020B0604020202020204"/>
               </a:rPr>
-              <a:t>Identity is lost</a:t>
-            </a:r>
-            <a:br>
-              <a:rPr lang="en-US" sz="1580" b="1" dirty="0">
-                <a:solidFill>
-                  <a:srgbClr val="FFFFFF"/>
-                </a:solidFill>
-                <a:latin typeface="Arial" panose="020B0604020202020204"/>
-                <a:ea typeface="Arial" panose="020B0604020202020204"/>
-                <a:cs typeface="Arial" panose="020B0604020202020204"/>
-              </a:rPr>
-            </a:br>
-            <a:r>
-              <a:rPr lang="en-US" sz="1580" b="1" dirty="0">
-                <a:solidFill>
-                  <a:srgbClr val="FFFFFF"/>
-                </a:solidFill>
-                <a:latin typeface="Arial" panose="020B0604020202020204"/>
-                <a:ea typeface="Arial" panose="020B0604020202020204"/>
-                <a:cs typeface="Arial" panose="020B0604020202020204"/>
-              </a:rPr>
-              <a:t>in preprocessing</a:t>
+              <a:t>{{KEY_FINDING}}</a:t>
             </a:r>
             <a:endParaRPr lang="en-US" sz="1580" b="1" dirty="0">
               <a:solidFill>
@@ -3517,7 +4034,7 @@
                 <a:ea typeface="Arial" panose="020B0604020202020204"/>
                 <a:cs typeface="Arial" panose="020B0604020202020204"/>
               </a:rPr>
-              <a:t>bodyID and trackingState are</a:t>
+              <a:t>What changed in the design,</a:t>
             </a:r>
             <a:br>
               <a:rPr lang="en-US" sz="1120" dirty="0">
@@ -3538,49 +4055,7 @@
                 <a:ea typeface="Arial" panose="020B0604020202020204"/>
                 <a:cs typeface="Arial" panose="020B0604020202020204"/>
               </a:rPr>
-              <a:t>dropped by CTR-GCN and pyskl.</a:t>
-            </a:r>
-            <a:br>
-              <a:rPr lang="en-US" sz="1120" dirty="0">
-                <a:solidFill>
-                  <a:srgbClr val="FFFFFF"/>
-                </a:solidFill>
-                <a:latin typeface="Arial" panose="020B0604020202020204"/>
-                <a:ea typeface="Arial" panose="020B0604020202020204"/>
-                <a:cs typeface="Arial" panose="020B0604020202020204"/>
-              </a:rPr>
-            </a:br>
-            <a:r>
-              <a:rPr lang="en-US" sz="1120" dirty="0">
-                <a:solidFill>
-                  <a:srgbClr val="FFFFFF"/>
-                </a:solidFill>
-                <a:latin typeface="Arial" panose="020B0604020202020204"/>
-                <a:ea typeface="Arial" panose="020B0604020202020204"/>
-                <a:cs typeface="Arial" panose="020B0604020202020204"/>
-              </a:rPr>
-              <a:t>Our plan: parse .skeleton</a:t>
-            </a:r>
-            <a:br>
-              <a:rPr lang="en-US" sz="1120" dirty="0">
-                <a:solidFill>
-                  <a:srgbClr val="FFFFFF"/>
-                </a:solidFill>
-                <a:latin typeface="Arial" panose="020B0604020202020204"/>
-                <a:ea typeface="Arial" panose="020B0604020202020204"/>
-                <a:cs typeface="Arial" panose="020B0604020202020204"/>
-              </a:rPr>
-            </a:br>
-            <a:r>
-              <a:rPr lang="en-US" sz="1120" dirty="0">
-                <a:solidFill>
-                  <a:srgbClr val="FFFFFF"/>
-                </a:solidFill>
-                <a:latin typeface="Arial" panose="020B0604020202020204"/>
-                <a:ea typeface="Arial" panose="020B0604020202020204"/>
-                <a:cs typeface="Arial" panose="020B0604020202020204"/>
-              </a:rPr>
-              <a:t>ourselves and keep both.</a:t>
+              <a:t>evidence, or next decision?</a:t>
             </a:r>
             <a:endParaRPr lang="en-US" sz="1120" dirty="0">
               <a:solidFill>
@@ -3689,30 +4164,6 @@
           </a:p>
         </p:txBody>
       </p:sp>
-      <p:pic>
-        <p:nvPicPr>
-          <p:cNvPr id="900" name="MissingPerClassChart"/>
-          <p:cNvPicPr>
-            <a:picLocks noChangeAspect="1"/>
-          </p:cNvPicPr>
-          <p:nvPr/>
-        </p:nvPicPr>
-        <p:blipFill>
-          <a:blip r:embed="rId2"/>
-          <a:stretch>
-            <a:fillRect/>
-          </a:stretch>
-        </p:blipFill>
-        <p:spPr>
-          <a:xfrm>
-            <a:off x="4060000" y="3330000"/>
-            <a:ext cx="4460000" cy="2619301"/>
-          </a:xfrm>
-          <a:prstGeom prst="rect">
-            <a:avLst/>
-          </a:prstGeom>
-        </p:spPr>
-      </p:pic>
     </p:spTree>
   </p:cSld>
   <p:clrMapOvr>
@@ -4133,7 +4584,7 @@
         <p:spPr>
           <a:xfrm>
             <a:off x="501396" y="543878"/>
-            <a:ext cx="4448810" cy="391795"/>
+            <a:ext cx="3922625" cy="498729"/>
           </a:xfrm>
           <a:prstGeom prst="rect">
             <a:avLst/>
@@ -4151,7 +4602,7 @@
           <a:p>
             <a:pPr algn="l"/>
             <a:r>
-              <a:rPr lang="en-US" altLang="zh-CN" sz="2550" b="1" dirty="0">
+              <a:rPr lang="en-US" sz="2550" b="1" dirty="0">
                 <a:solidFill>
                   <a:srgbClr val="20243A"/>
                 </a:solidFill>
@@ -4159,9 +4610,9 @@
                 <a:ea typeface="Arial" panose="020B0604020202020204"/>
                 <a:cs typeface="Arial" panose="020B0604020202020204"/>
               </a:rPr>
-              <a:t>What the Raw File Still Holds</a:t>
-            </a:r>
-            <a:endParaRPr lang="en-US" altLang="zh-CN" sz="2550" b="1" dirty="0">
+              <a:t>Experimental Evidence</a:t>
+            </a:r>
+            <a:endParaRPr lang="en-US" sz="2550" b="1" dirty="0">
               <a:solidFill>
                 <a:srgbClr val="20243A"/>
               </a:solidFill>
@@ -4180,8 +4631,8 @@
         </p:nvSpPr>
         <p:spPr>
           <a:xfrm>
-            <a:off x="734949" y="1567729"/>
-            <a:ext cx="1769110" cy="430530"/>
+            <a:off x="734949" y="1639729"/>
+            <a:ext cx="2010001" cy="308039"/>
           </a:xfrm>
           <a:prstGeom prst="rect">
             <a:avLst/>
@@ -4199,7 +4650,7 @@
           <a:p>
             <a:pPr algn="l"/>
             <a:r>
-              <a:rPr lang="en-US" sz="1400" b="1" dirty="0">
+              <a:rPr lang="en-US" sz="1580" b="1" dirty="0">
                 <a:solidFill>
                   <a:srgbClr val="D71440"/>
                 </a:solidFill>
@@ -4207,30 +4658,9 @@
                 <a:ea typeface="Arial" panose="020B0604020202020204"/>
                 <a:cs typeface="Arial" panose="020B0604020202020204"/>
               </a:rPr>
-              <a:t>Raw file vs.</a:t>
-            </a:r>
-            <a:br>
-              <a:rPr lang="en-US" sz="1580" b="1" dirty="0">
-                <a:solidFill>
-                  <a:srgbClr val="D71440"/>
-                </a:solidFill>
-                <a:latin typeface="Arial" panose="020B0604020202020204"/>
-                <a:ea typeface="Arial" panose="020B0604020202020204"/>
-                <a:cs typeface="Arial" panose="020B0604020202020204"/>
-              </a:rPr>
-            </a:br>
-            <a:r>
-              <a:rPr lang="en-US" sz="1400" b="1" dirty="0">
-                <a:solidFill>
-                  <a:srgbClr val="D71440"/>
-                </a:solidFill>
-                <a:latin typeface="Arial" panose="020B0604020202020204"/>
-                <a:ea typeface="Arial" panose="020B0604020202020204"/>
-                <a:cs typeface="Arial" panose="020B0604020202020204"/>
-              </a:rPr>
-              <a:t>preprocessed output</a:t>
-            </a:r>
-            <a:endParaRPr lang="en-US" sz="1400" b="1" dirty="0">
+              <a:t>{{KEY_MESSAGE}}</a:t>
+            </a:r>
+            <a:endParaRPr lang="en-US" sz="1580" b="1" dirty="0">
               <a:solidFill>
                 <a:srgbClr val="D71440"/>
               </a:solidFill>
@@ -4280,7 +4710,7 @@
                 <a:ea typeface="Arial" panose="020B0604020202020204"/>
                 <a:cs typeface="Arial" panose="020B0604020202020204"/>
               </a:rPr>
-              <a:t>The .skeleton file carries far more than coordinates</a:t>
+              <a:t>{{CONTENT_AREA}}</a:t>
             </a:r>
             <a:endParaRPr lang="en-US" sz="1420" dirty="0">
               <a:solidFill>
@@ -4309,7 +4739,7 @@
                 <a:ea typeface="Arial" panose="020B0604020202020204"/>
                 <a:cs typeface="Arial" panose="020B0604020202020204"/>
               </a:rPr>
-              <a:t>Per body: bodyID, trackingState, lean, hand state.  Per joint: 3D metres, depth-2D,</a:t>
+              <a:t>Insert one chart, table, confusion matrix, or controlled comparison.</a:t>
             </a:r>
             <a:br>
               <a:rPr lang="en-US" sz="1050" dirty="0">
@@ -4330,7 +4760,7 @@
                 <a:ea typeface="Arial" panose="020B0604020202020204"/>
                 <a:cs typeface="Arial" panose="020B0604020202020204"/>
               </a:rPr>
-              <a:t>colour-2D, an orientation quaternion, and a per-joint reliability flag.</a:t>
+              <a:t>Label the baseline, evaluation split, metric, and uncertainty.</a:t>
             </a:r>
             <a:endParaRPr lang="en-US" sz="1050" dirty="0">
               <a:solidFill>
@@ -4382,7 +4812,7 @@
                 <a:ea typeface="Arial" panose="020B0604020202020204"/>
                 <a:cs typeface="Arial" panose="020B0604020202020204"/>
               </a:rPr>
-              <a:t>Two code-level issues</a:t>
+              <a:t>{{FINDINGS}}</a:t>
             </a:r>
             <a:endParaRPr lang="en-US" sz="1500" dirty="0">
               <a:solidFill>
@@ -4411,7 +4841,7 @@
                 <a:ea typeface="Arial" panose="020B0604020202020204"/>
                 <a:cs typeface="Arial" panose="020B0604020202020204"/>
               </a:rPr>
-              <a:t>1 · CTR-GCN merges separate bodyIDs</a:t>
+              <a:t>1 · What changed versus baseline?</a:t>
             </a:r>
             <a:br>
               <a:rPr lang="en-US" sz="1120" dirty="0">
@@ -4432,7 +4862,7 @@
                 <a:ea typeface="Arial" panose="020B0604020202020204"/>
                 <a:cs typeface="Arial" panose="020B0604020202020204"/>
               </a:rPr>
-              <a:t>into one actor when their time spans</a:t>
+              <a:t>2 · Which class or case still fails?</a:t>
             </a:r>
             <a:br>
               <a:rPr lang="en-US" sz="1120" dirty="0">
@@ -4453,133 +4883,7 @@
                 <a:ea typeface="Arial" panose="020B0604020202020204"/>
                 <a:cs typeface="Arial" panose="020B0604020202020204"/>
               </a:rPr>
-              <a:t>do not overlap. The IDs go to a log</a:t>
-            </a:r>
-            <a:br>
-              <a:rPr lang="en-US" sz="1120" dirty="0">
-                <a:solidFill>
-                  <a:srgbClr val="5E6478"/>
-                </a:solidFill>
-                <a:latin typeface="Arial" panose="020B0604020202020204"/>
-                <a:ea typeface="Arial" panose="020B0604020202020204"/>
-                <a:cs typeface="Arial" panose="020B0604020202020204"/>
-              </a:rPr>
-            </a:br>
-            <a:r>
-              <a:rPr lang="en-US" sz="1120" dirty="0">
-                <a:solidFill>
-                  <a:srgbClr val="5E6478"/>
-                </a:solidFill>
-                <a:latin typeface="Arial" panose="020B0604020202020204"/>
-                <a:ea typeface="Arial" panose="020B0604020202020204"/>
-                <a:cs typeface="Arial" panose="020B0604020202020204"/>
-              </a:rPr>
-              <a:t>file, never into the data.</a:t>
-            </a:r>
-            <a:br>
-              <a:rPr lang="en-US" sz="1120" dirty="0">
-                <a:solidFill>
-                  <a:srgbClr val="5E6478"/>
-                </a:solidFill>
-                <a:latin typeface="Arial" panose="020B0604020202020204"/>
-                <a:ea typeface="Arial" panose="020B0604020202020204"/>
-                <a:cs typeface="Arial" panose="020B0604020202020204"/>
-              </a:rPr>
-            </a:br>
-            <a:r>
-              <a:rPr lang="en-US" sz="1120" dirty="0">
-                <a:solidFill>
-                  <a:srgbClr val="5E6478"/>
-                </a:solidFill>
-                <a:latin typeface="Arial" panose="020B0604020202020204"/>
-                <a:ea typeface="Arial" panose="020B0604020202020204"/>
-                <a:cs typeface="Arial" panose="020B0604020202020204"/>
-              </a:rPr>
-              <a:t>2 · Its failure log parses only the last</a:t>
-            </a:r>
-            <a:br>
-              <a:rPr lang="en-US" sz="1120" dirty="0">
-                <a:solidFill>
-                  <a:srgbClr val="5E6478"/>
-                </a:solidFill>
-                <a:latin typeface="Arial" panose="020B0604020202020204"/>
-                <a:ea typeface="Arial" panose="020B0604020202020204"/>
-                <a:cs typeface="Arial" panose="020B0604020202020204"/>
-              </a:rPr>
-            </a:br>
-            <a:r>
-              <a:rPr lang="en-US" sz="1120" dirty="0">
-                <a:solidFill>
-                  <a:srgbClr val="5E6478"/>
-                </a:solidFill>
-                <a:latin typeface="Arial" panose="020B0604020202020204"/>
-                <a:ea typeface="Arial" panose="020B0604020202020204"/>
-                <a:cs typeface="Arial" panose="020B0604020202020204"/>
-              </a:rPr>
-              <a:t>two digits of the action ID, so the 15</a:t>
-            </a:r>
-            <a:br>
-              <a:rPr lang="en-US" sz="1120" dirty="0">
-                <a:solidFill>
-                  <a:srgbClr val="5E6478"/>
-                </a:solidFill>
-                <a:latin typeface="Arial" panose="020B0604020202020204"/>
-                <a:ea typeface="Arial" panose="020B0604020202020204"/>
-                <a:cs typeface="Arial" panose="020B0604020202020204"/>
-              </a:rPr>
-            </a:br>
-            <a:r>
-              <a:rPr lang="en-US" sz="1120" dirty="0">
-                <a:solidFill>
-                  <a:srgbClr val="5E6478"/>
-                </a:solidFill>
-                <a:latin typeface="Arial" panose="020B0604020202020204"/>
-                <a:ea typeface="Arial" panose="020B0604020202020204"/>
-                <a:cs typeface="Arial" panose="020B0604020202020204"/>
-              </a:rPr>
-              <a:t>classes A106–A120 are never checked.</a:t>
-            </a:r>
-            <a:br>
-              <a:rPr lang="en-US" sz="1120" dirty="0">
-                <a:solidFill>
-                  <a:srgbClr val="5E6478"/>
-                </a:solidFill>
-                <a:latin typeface="Arial" panose="020B0604020202020204"/>
-                <a:ea typeface="Arial" panose="020B0604020202020204"/>
-                <a:cs typeface="Arial" panose="020B0604020202020204"/>
-              </a:rPr>
-            </a:br>
-            <a:r>
-              <a:rPr lang="en-US" sz="1120" dirty="0">
-                <a:solidFill>
-                  <a:srgbClr val="5E6478"/>
-                </a:solidFill>
-                <a:latin typeface="Arial" panose="020B0604020202020204"/>
-                <a:ea typeface="Arial" panose="020B0604020202020204"/>
-                <a:cs typeface="Arial" panose="020B0604020202020204"/>
-              </a:rPr>
-              <a:t>3 · No official definition of the mutual</a:t>
-            </a:r>
-            <a:br>
-              <a:rPr lang="en-US" sz="1120" dirty="0">
-                <a:solidFill>
-                  <a:srgbClr val="5E6478"/>
-                </a:solidFill>
-                <a:latin typeface="Arial" panose="020B0604020202020204"/>
-                <a:ea typeface="Arial" panose="020B0604020202020204"/>
-                <a:cs typeface="Arial" panose="020B0604020202020204"/>
-              </a:rPr>
-            </a:br>
-            <a:r>
-              <a:rPr lang="en-US" sz="1120" dirty="0">
-                <a:solidFill>
-                  <a:srgbClr val="5E6478"/>
-                </a:solidFill>
-                <a:latin typeface="Arial" panose="020B0604020202020204"/>
-                <a:ea typeface="Arial" panose="020B0604020202020204"/>
-                <a:cs typeface="Arial" panose="020B0604020202020204"/>
-              </a:rPr>
-              <a:t>subset exists; each paper rolls its own.</a:t>
+              <a:t>3 · What experiment comes next?</a:t>
             </a:r>
             <a:endParaRPr lang="en-US" sz="1120" dirty="0">
               <a:solidFill>
@@ -4688,30 +4992,6 @@
           </a:p>
         </p:txBody>
       </p:sp>
-      <p:pic>
-        <p:nvPicPr>
-          <p:cNvPr id="901" name="WhatSurvivesFigure"/>
-          <p:cNvPicPr>
-            <a:picLocks noChangeAspect="1"/>
-          </p:cNvPicPr>
-          <p:nvPr/>
-        </p:nvPicPr>
-        <p:blipFill>
-          <a:blip r:embed="rId2"/>
-          <a:stretch>
-            <a:fillRect/>
-          </a:stretch>
-        </p:blipFill>
-        <p:spPr>
-          <a:xfrm>
-            <a:off x="774000" y="3816000"/>
-            <a:ext cx="6660000" cy="2159641"/>
-          </a:xfrm>
-          <a:prstGeom prst="rect">
-            <a:avLst/>
-          </a:prstGeom>
-        </p:spPr>
-      </p:pic>
     </p:spTree>
   </p:cSld>
   <p:clrMapOvr>
@@ -5034,7 +5314,7 @@
         <p:spPr>
           <a:xfrm>
             <a:off x="794766" y="1639252"/>
-            <a:ext cx="2374900" cy="276860"/>
+            <a:ext cx="1131928" cy="205359"/>
           </a:xfrm>
           <a:prstGeom prst="rect">
             <a:avLst/>
@@ -5052,7 +5332,7 @@
           <a:p>
             <a:pPr algn="l"/>
             <a:r>
-              <a:rPr lang="en-US" b="1" dirty="0">
+              <a:rPr lang="en-US" sz="1050" b="1" dirty="0">
                 <a:solidFill>
                   <a:srgbClr val="D71440"/>
                 </a:solidFill>
@@ -5060,9 +5340,9 @@
                 <a:ea typeface="Arial" panose="020B0604020202020204"/>
                 <a:cs typeface="Arial" panose="020B0604020202020204"/>
               </a:rPr>
-              <a:t>CTR-GCN · ICCV 2021</a:t>
-            </a:r>
-            <a:endParaRPr lang="en-US" b="1" dirty="0">
+              <a:t>RISK / BLOCKER</a:t>
+            </a:r>
+            <a:endParaRPr lang="en-US" sz="1050" b="1" dirty="0">
               <a:solidFill>
                 <a:srgbClr val="D71440"/>
               </a:solidFill>
@@ -5082,7 +5362,7 @@
         <p:spPr>
           <a:xfrm>
             <a:off x="6328791" y="1639252"/>
-            <a:ext cx="3272155" cy="276860"/>
+            <a:ext cx="3092173" cy="205359"/>
           </a:xfrm>
           <a:prstGeom prst="rect">
             <a:avLst/>
@@ -5100,7 +5380,7 @@
           <a:p>
             <a:pPr algn="l"/>
             <a:r>
-              <a:rPr lang="en-US" b="1" dirty="0">
+              <a:rPr lang="en-US" sz="1050" b="1" dirty="0">
                 <a:solidFill>
                   <a:srgbClr val="D71440"/>
                 </a:solidFill>
@@ -5108,9 +5388,9 @@
                 <a:ea typeface="Arial" panose="020B0604020202020204"/>
                 <a:cs typeface="Arial" panose="020B0604020202020204"/>
               </a:rPr>
-              <a:t>SKELETONX · IEEE TMM 2025</a:t>
-            </a:r>
-            <a:endParaRPr lang="en-US" b="1" dirty="0">
+              <a:t>IMPACT ON SCOPE, EVIDENCE, OR TIMELINE</a:t>
+            </a:r>
+            <a:endParaRPr lang="en-US" sz="1050" b="1" dirty="0">
               <a:solidFill>
                 <a:srgbClr val="D71440"/>
               </a:solidFill>
@@ -5130,7 +5410,7 @@
         <p:spPr>
           <a:xfrm>
             <a:off x="794766" y="3925252"/>
-            <a:ext cx="3771265" cy="276860"/>
+            <a:ext cx="2496259" cy="205359"/>
           </a:xfrm>
           <a:prstGeom prst="rect">
             <a:avLst/>
@@ -5148,7 +5428,7 @@
           <a:p>
             <a:pPr algn="l"/>
             <a:r>
-              <a:rPr lang="en-US" b="1" dirty="0">
+              <a:rPr lang="en-US" sz="1050" b="1" dirty="0">
                 <a:solidFill>
                   <a:srgbClr val="181C62"/>
                 </a:solidFill>
@@ -5156,20 +5436,9 @@
                 <a:ea typeface="Arial" panose="020B0604020202020204"/>
                 <a:cs typeface="Arial" panose="020B0604020202020204"/>
               </a:rPr>
-              <a:t>RELATIONSHIP TO OUR PROJEC</a:t>
-            </a:r>
-            <a:r>
-              <a:rPr lang="en-US" sz="1800" b="1" dirty="0">
-                <a:solidFill>
-                  <a:srgbClr val="181C62"/>
-                </a:solidFill>
-                <a:latin typeface="Arial" panose="020B0604020202020204"/>
-                <a:ea typeface="Arial" panose="020B0604020202020204"/>
-                <a:cs typeface="Arial" panose="020B0604020202020204"/>
-              </a:rPr>
-              <a:t>T</a:t>
-            </a:r>
-            <a:endParaRPr lang="en-US" sz="1800" b="1" dirty="0">
+              <a:t>MITIGATION / OWNER / CHECK DATE</a:t>
+            </a:r>
+            <a:endParaRPr lang="en-US" sz="1050" b="1" dirty="0">
               <a:solidFill>
                 <a:srgbClr val="181C62"/>
               </a:solidFill>
@@ -5189,7 +5458,7 @@
         <p:spPr>
           <a:xfrm>
             <a:off x="6328791" y="3925252"/>
-            <a:ext cx="3437255" cy="276860"/>
+            <a:ext cx="2151256" cy="205359"/>
           </a:xfrm>
           <a:prstGeom prst="rect">
             <a:avLst/>
@@ -5207,7 +5476,7 @@
           <a:p>
             <a:pPr algn="l"/>
             <a:r>
-              <a:rPr lang="en-US" b="1" dirty="0">
+              <a:rPr lang="en-US" sz="1050" b="1" dirty="0">
                 <a:solidFill>
                   <a:srgbClr val="FFFFFF"/>
                 </a:solidFill>
@@ -5215,9 +5484,9 @@
                 <a:ea typeface="Arial" panose="020B0604020202020204"/>
                 <a:cs typeface="Arial" panose="020B0604020202020204"/>
               </a:rPr>
-              <a:t>BASELINE RECOMMENDATION</a:t>
-            </a:r>
-            <a:endParaRPr lang="en-US" b="1" dirty="0">
+              <a:t>DECISION OR SUPPORT NEEDED</a:t>
+            </a:r>
+            <a:endParaRPr lang="en-US" sz="1050" b="1" dirty="0">
               <a:solidFill>
                 <a:srgbClr val="FFFFFF"/>
               </a:solidFill>
@@ -5237,7 +5506,7 @@
         <p:spPr>
           <a:xfrm>
             <a:off x="501396" y="543878"/>
-            <a:ext cx="6664325" cy="391795"/>
+            <a:ext cx="2969122" cy="498729"/>
           </a:xfrm>
           <a:prstGeom prst="rect">
             <a:avLst/>
@@ -5263,7 +5532,7 @@
                 <a:ea typeface="Arial" panose="020B0604020202020204"/>
                 <a:cs typeface="Arial" panose="020B0604020202020204"/>
               </a:rPr>
-              <a:t>Paper Review &amp; Baseline Recommendation</a:t>
+              <a:t>Risks &amp; Decisions</a:t>
             </a:r>
             <a:endParaRPr lang="en-US" sz="2550" b="1" dirty="0">
               <a:solidFill>
@@ -5284,8 +5553,8 @@
         </p:nvSpPr>
         <p:spPr>
           <a:xfrm>
-            <a:off x="791845" y="2077720"/>
-            <a:ext cx="4071620" cy="1192530"/>
+            <a:off x="792099" y="2077879"/>
+            <a:ext cx="3269742" cy="603314"/>
           </a:xfrm>
           <a:prstGeom prst="rect">
             <a:avLst/>
@@ -5296,7 +5565,7 @@
           </a:ln>
         </p:spPr>
         <p:txBody>
-          <a:bodyPr wrap="square" lIns="0" tIns="0" rIns="0" bIns="0" anchor="t" anchorCtr="0">
+          <a:bodyPr wrap="none" lIns="0" tIns="0" rIns="0" bIns="0" anchor="t" anchorCtr="0">
             <a:spAutoFit/>
           </a:bodyPr>
           <a:lstStyle/>
@@ -5307,19 +5576,19 @@
               </a:lnSpc>
             </a:pPr>
             <a:r>
-              <a:rPr lang="en-US" sz="1600" b="1" dirty="0">
-                <a:solidFill>
-                  <a:srgbClr val="FF0000"/>
-                </a:solidFill>
-                <a:latin typeface="Arial" panose="020B0604020202020204"/>
-                <a:ea typeface="Arial" panose="020B0604020202020204"/>
-                <a:cs typeface="Arial" panose="020B0604020202020204"/>
-              </a:rPr>
-              <a:t>Strong GCN Backbone</a:t>
-            </a:r>
-            <a:endParaRPr lang="en-US" sz="1050" dirty="0">
-              <a:solidFill>
-                <a:srgbClr val="5E6478"/>
+              <a:rPr lang="en-US" sz="1580" b="1" dirty="0">
+                <a:solidFill>
+                  <a:srgbClr val="D71440"/>
+                </a:solidFill>
+                <a:latin typeface="Arial" panose="020B0604020202020204"/>
+                <a:ea typeface="Arial" panose="020B0604020202020204"/>
+                <a:cs typeface="Arial" panose="020B0604020202020204"/>
+              </a:rPr>
+              <a:t>{{RISKS}}</a:t>
+            </a:r>
+            <a:endParaRPr lang="en-US" sz="1580" b="1" dirty="0">
+              <a:solidFill>
+                <a:srgbClr val="D71440"/>
               </a:solidFill>
               <a:latin typeface="Arial" panose="020B0604020202020204"/>
               <a:ea typeface="Arial" panose="020B0604020202020204"/>
@@ -5333,7 +5602,7 @@
               </a:lnSpc>
             </a:pPr>
             <a:r>
-              <a:rPr lang="en-US" sz="1600" dirty="0">
+              <a:rPr lang="en-US" sz="1050" dirty="0">
                 <a:solidFill>
                   <a:srgbClr val="5E6478"/>
                 </a:solidFill>
@@ -5341,9 +5610,9 @@
                 <a:ea typeface="Arial" panose="020B0604020202020204"/>
                 <a:cs typeface="Arial" panose="020B0604020202020204"/>
               </a:rPr>
-              <a:t>• Dynamic joint topology</a:t>
-            </a:r>
-            <a:endParaRPr lang="en-US" sz="1600" dirty="0">
+              <a:t>Describe the failure mode, trigger, and evidence.</a:t>
+            </a:r>
+            <a:endParaRPr lang="en-US" sz="1050" dirty="0">
               <a:solidFill>
                 <a:srgbClr val="5E6478"/>
               </a:solidFill>
@@ -5352,6 +5621,32 @@
               <a:cs typeface="Arial" panose="020B0604020202020204"/>
             </a:endParaRPr>
           </a:p>
+        </p:txBody>
+      </p:sp>
+      <p:sp>
+        <p:nvSpPr>
+          <p:cNvPr id="19" name="TextBox 19"/>
+          <p:cNvSpPr txBox="1"/>
+          <p:nvPr/>
+        </p:nvSpPr>
+        <p:spPr>
+          <a:xfrm>
+            <a:off x="6326124" y="2077879"/>
+            <a:ext cx="3843147" cy="603314"/>
+          </a:xfrm>
+          <a:prstGeom prst="rect">
+            <a:avLst/>
+          </a:prstGeom>
+          <a:noFill/>
+          <a:ln>
+            <a:noFill/>
+          </a:ln>
+        </p:spPr>
+        <p:txBody>
+          <a:bodyPr wrap="none" lIns="0" tIns="0" rIns="0" bIns="0" anchor="t" anchorCtr="0">
+            <a:spAutoFit/>
+          </a:bodyPr>
+          <a:lstStyle/>
           <a:p>
             <a:pPr algn="l">
               <a:lnSpc>
@@ -5359,19 +5654,19 @@
               </a:lnSpc>
             </a:pPr>
             <a:r>
-              <a:rPr lang="en-US" sz="1600" dirty="0">
-                <a:solidFill>
-                  <a:srgbClr val="5E6478"/>
-                </a:solidFill>
-                <a:latin typeface="Arial" panose="020B0604020202020204"/>
-                <a:ea typeface="Arial" panose="020B0604020202020204"/>
-                <a:cs typeface="Arial" panose="020B0604020202020204"/>
-              </a:rPr>
-              <a:t>• Person slots encoded separately</a:t>
-            </a:r>
-            <a:endParaRPr lang="en-US" sz="1600" dirty="0">
-              <a:solidFill>
-                <a:srgbClr val="5E6478"/>
+              <a:rPr lang="en-US" sz="1580" dirty="0">
+                <a:solidFill>
+                  <a:srgbClr val="20243A"/>
+                </a:solidFill>
+                <a:latin typeface="Arial" panose="020B0604020202020204"/>
+                <a:ea typeface="Arial" panose="020B0604020202020204"/>
+                <a:cs typeface="Arial" panose="020B0604020202020204"/>
+              </a:rPr>
+              <a:t>{{IMPACT}}</a:t>
+            </a:r>
+            <a:endParaRPr lang="en-US" sz="1580" dirty="0">
+              <a:solidFill>
+                <a:srgbClr val="20243A"/>
               </a:solidFill>
               <a:latin typeface="Arial" panose="020B0604020202020204"/>
               <a:ea typeface="Arial" panose="020B0604020202020204"/>
@@ -5385,7 +5680,7 @@
               </a:lnSpc>
             </a:pPr>
             <a:r>
-              <a:rPr lang="en-US" sz="1600" dirty="0">
+              <a:rPr lang="en-US" sz="1050" dirty="0">
                 <a:solidFill>
                   <a:srgbClr val="5E6478"/>
                 </a:solidFill>
@@ -5393,9 +5688,9 @@
                 <a:ea typeface="Arial" panose="020B0604020202020204"/>
                 <a:cs typeface="Arial" panose="020B0604020202020204"/>
               </a:rPr>
-              <a:t>• Final mean pooling removes the distinction</a:t>
-            </a:r>
-            <a:endParaRPr lang="en-US" sz="1600" dirty="0">
+              <a:t>Quantify delay, compute cost, metric risk, or lost scope.</a:t>
+            </a:r>
+            <a:endParaRPr lang="en-US" sz="1050" dirty="0">
               <a:solidFill>
                 <a:srgbClr val="5E6478"/>
               </a:solidFill>
@@ -5408,14 +5703,14 @@
       </p:sp>
       <p:sp>
         <p:nvSpPr>
-          <p:cNvPr id="19" name="TextBox 19"/>
+          <p:cNvPr id="20" name="TextBox 20"/>
           <p:cNvSpPr txBox="1"/>
           <p:nvPr/>
         </p:nvSpPr>
         <p:spPr>
           <a:xfrm>
-            <a:off x="6325870" y="2077720"/>
-            <a:ext cx="3451860" cy="1192530"/>
+            <a:off x="792099" y="4363879"/>
+            <a:ext cx="2456307" cy="603314"/>
           </a:xfrm>
           <a:prstGeom prst="rect">
             <a:avLst/>
@@ -5426,7 +5721,7 @@
           </a:ln>
         </p:spPr>
         <p:txBody>
-          <a:bodyPr wrap="square" lIns="0" tIns="0" rIns="0" bIns="0" anchor="t" anchorCtr="0">
+          <a:bodyPr wrap="none" lIns="0" tIns="0" rIns="0" bIns="0" anchor="t" anchorCtr="0">
             <a:spAutoFit/>
           </a:bodyPr>
           <a:lstStyle/>
@@ -5437,19 +5732,19 @@
               </a:lnSpc>
             </a:pPr>
             <a:r>
-              <a:rPr lang="en-US" sz="1600" b="1" dirty="0">
-                <a:solidFill>
-                  <a:srgbClr val="FF0000"/>
-                </a:solidFill>
-                <a:latin typeface="Arial" panose="020B0604020202020204"/>
-                <a:ea typeface="Arial" panose="020B0604020202020204"/>
-                <a:cs typeface="Arial" panose="020B0604020202020204"/>
-              </a:rPr>
-              <a:t>Data-Efficient Framework</a:t>
-            </a:r>
-            <a:endParaRPr lang="en-US" sz="1600" b="1" dirty="0">
-              <a:solidFill>
-                <a:srgbClr val="FF0000"/>
+              <a:rPr lang="en-US" sz="1580" dirty="0">
+                <a:solidFill>
+                  <a:srgbClr val="181C62"/>
+                </a:solidFill>
+                <a:latin typeface="Arial" panose="020B0604020202020204"/>
+                <a:ea typeface="Arial" panose="020B0604020202020204"/>
+                <a:cs typeface="Arial" panose="020B0604020202020204"/>
+              </a:rPr>
+              <a:t>{{MITIGATION}}</a:t>
+            </a:r>
+            <a:endParaRPr lang="en-US" sz="1580" dirty="0">
+              <a:solidFill>
+                <a:srgbClr val="181C62"/>
               </a:solidFill>
               <a:latin typeface="Arial" panose="020B0604020202020204"/>
               <a:ea typeface="Arial" panose="020B0604020202020204"/>
@@ -5463,7 +5758,7 @@
               </a:lnSpc>
             </a:pPr>
             <a:r>
-              <a:rPr lang="en-US" sz="1600" dirty="0">
+              <a:rPr lang="en-US" sz="1050" dirty="0">
                 <a:solidFill>
                   <a:srgbClr val="5E6478"/>
                 </a:solidFill>
@@ -5471,9 +5766,9 @@
                 <a:ea typeface="Arial" panose="020B0604020202020204"/>
                 <a:cs typeface="Arial" panose="020B0604020202020204"/>
               </a:rPr>
-              <a:t>• Uses a GCN backbone</a:t>
-            </a:r>
-            <a:endParaRPr lang="en-US" sz="1600" dirty="0">
+              <a:t>Owner: … | Check date: … | Fallback: …</a:t>
+            </a:r>
+            <a:endParaRPr lang="en-US" sz="1050" dirty="0">
               <a:solidFill>
                 <a:srgbClr val="5E6478"/>
               </a:solidFill>
@@ -5482,6 +5777,32 @@
               <a:cs typeface="Arial" panose="020B0604020202020204"/>
             </a:endParaRPr>
           </a:p>
+        </p:txBody>
+      </p:sp>
+      <p:sp>
+        <p:nvSpPr>
+          <p:cNvPr id="21" name="TextBox 21"/>
+          <p:cNvSpPr txBox="1"/>
+          <p:nvPr/>
+        </p:nvSpPr>
+        <p:spPr>
+          <a:xfrm>
+            <a:off x="6326124" y="4363879"/>
+            <a:ext cx="3423095" cy="603314"/>
+          </a:xfrm>
+          <a:prstGeom prst="rect">
+            <a:avLst/>
+          </a:prstGeom>
+          <a:noFill/>
+          <a:ln>
+            <a:noFill/>
+          </a:ln>
+        </p:spPr>
+        <p:txBody>
+          <a:bodyPr wrap="none" lIns="0" tIns="0" rIns="0" bIns="0" anchor="t" anchorCtr="0">
+            <a:spAutoFit/>
+          </a:bodyPr>
+          <a:lstStyle/>
           <a:p>
             <a:pPr algn="l">
               <a:lnSpc>
@@ -5489,19 +5810,19 @@
               </a:lnSpc>
             </a:pPr>
             <a:r>
-              <a:rPr lang="en-US" sz="1600" dirty="0">
-                <a:solidFill>
-                  <a:srgbClr val="5E6478"/>
-                </a:solidFill>
-                <a:latin typeface="Arial" panose="020B0604020202020204"/>
-                <a:ea typeface="Arial" panose="020B0604020202020204"/>
-                <a:cs typeface="Arial" panose="020B0604020202020204"/>
-              </a:rPr>
-              <a:t>• Cross-sample feature aggregation</a:t>
-            </a:r>
-            <a:endParaRPr lang="en-US" sz="1600" dirty="0">
-              <a:solidFill>
-                <a:srgbClr val="5E6478"/>
+              <a:rPr lang="en-US" sz="1580" b="1" dirty="0">
+                <a:solidFill>
+                  <a:srgbClr val="FFFFFF"/>
+                </a:solidFill>
+                <a:latin typeface="Arial" panose="020B0604020202020204"/>
+                <a:ea typeface="Arial" panose="020B0604020202020204"/>
+                <a:cs typeface="Arial" panose="020B0604020202020204"/>
+              </a:rPr>
+              <a:t>{{DECISION_NEEDED}}</a:t>
+            </a:r>
+            <a:endParaRPr lang="en-US" sz="1580" b="1" dirty="0">
+              <a:solidFill>
+                <a:srgbClr val="FFFFFF"/>
               </a:solidFill>
               <a:latin typeface="Arial" panose="020B0604020202020204"/>
               <a:ea typeface="Arial" panose="020B0604020202020204"/>
@@ -5515,236 +5836,17 @@
               </a:lnSpc>
             </a:pPr>
             <a:r>
-              <a:rPr lang="en-US" sz="1600" dirty="0">
-                <a:solidFill>
-                  <a:srgbClr val="5E6478"/>
-                </a:solidFill>
-                <a:latin typeface="Arial" panose="020B0604020202020204"/>
-                <a:ea typeface="Arial" panose="020B0604020202020204"/>
-                <a:cs typeface="Arial" panose="020B0604020202020204"/>
-              </a:rPr>
-              <a:t>• Performer ID ≠ within-clip identity</a:t>
-            </a:r>
-            <a:r>
               <a:rPr lang="en-US" sz="1050" dirty="0">
                 <a:solidFill>
-                  <a:srgbClr val="5E6478"/>
-                </a:solidFill>
-                <a:latin typeface="Arial" panose="020B0604020202020204"/>
-                <a:ea typeface="Arial" panose="020B0604020202020204"/>
-                <a:cs typeface="Arial" panose="020B0604020202020204"/>
-              </a:rPr>
-              <a:t>.</a:t>
+                  <a:srgbClr val="C8C8C8"/>
+                </a:solidFill>
+                <a:latin typeface="Arial" panose="020B0604020202020204"/>
+                <a:ea typeface="Arial" panose="020B0604020202020204"/>
+                <a:cs typeface="Arial" panose="020B0604020202020204"/>
+              </a:rPr>
+              <a:t>State the choice, approver, and latest useful date.</a:t>
             </a:r>
             <a:endParaRPr lang="en-US" sz="1050" dirty="0">
-              <a:solidFill>
-                <a:srgbClr val="5E6478"/>
-              </a:solidFill>
-              <a:latin typeface="Arial" panose="020B0604020202020204"/>
-              <a:ea typeface="Arial" panose="020B0604020202020204"/>
-              <a:cs typeface="Arial" panose="020B0604020202020204"/>
-            </a:endParaRPr>
-          </a:p>
-        </p:txBody>
-      </p:sp>
-      <p:sp>
-        <p:nvSpPr>
-          <p:cNvPr id="20" name="TextBox 20"/>
-          <p:cNvSpPr txBox="1"/>
-          <p:nvPr/>
-        </p:nvSpPr>
-        <p:spPr>
-          <a:xfrm>
-            <a:off x="791845" y="4363720"/>
-            <a:ext cx="4086860" cy="1192530"/>
-          </a:xfrm>
-          <a:prstGeom prst="rect">
-            <a:avLst/>
-          </a:prstGeom>
-          <a:noFill/>
-          <a:ln>
-            <a:noFill/>
-          </a:ln>
-        </p:spPr>
-        <p:txBody>
-          <a:bodyPr wrap="square" lIns="0" tIns="0" rIns="0" bIns="0" anchor="t" anchorCtr="0">
-            <a:spAutoFit/>
-          </a:bodyPr>
-          <a:lstStyle/>
-          <a:p>
-            <a:pPr algn="l">
-              <a:lnSpc>
-                <a:spcPts val="2325"/>
-              </a:lnSpc>
-            </a:pPr>
-            <a:r>
-              <a:rPr lang="en-US" sz="1600" b="1" dirty="0">
-                <a:solidFill>
-                  <a:srgbClr val="5E6478"/>
-                </a:solidFill>
-                <a:latin typeface="Arial" panose="020B0604020202020204"/>
-                <a:ea typeface="Arial" panose="020B0604020202020204"/>
-                <a:cs typeface="Arial" panose="020B0604020202020204"/>
-              </a:rPr>
-              <a:t>Shared Research Gap</a:t>
-            </a:r>
-            <a:endParaRPr lang="en-US" sz="1600" b="1" dirty="0">
-              <a:solidFill>
-                <a:srgbClr val="5E6478"/>
-              </a:solidFill>
-              <a:latin typeface="Arial" panose="020B0604020202020204"/>
-              <a:ea typeface="Arial" panose="020B0604020202020204"/>
-              <a:cs typeface="Arial" panose="020B0604020202020204"/>
-            </a:endParaRPr>
-          </a:p>
-          <a:p>
-            <a:pPr algn="l">
-              <a:lnSpc>
-                <a:spcPts val="2325"/>
-              </a:lnSpc>
-            </a:pPr>
-            <a:r>
-              <a:rPr lang="en-US" sz="1600" dirty="0">
-                <a:solidFill>
-                  <a:srgbClr val="5E6478"/>
-                </a:solidFill>
-                <a:latin typeface="Arial" panose="020B0604020202020204"/>
-                <a:ea typeface="Arial" panose="020B0604020202020204"/>
-                <a:cs typeface="Arial" panose="020B0604020202020204"/>
-              </a:rPr>
-              <a:t>• No explicit within-clip identity</a:t>
-            </a:r>
-            <a:endParaRPr lang="en-US" sz="1600" dirty="0">
-              <a:solidFill>
-                <a:srgbClr val="5E6478"/>
-              </a:solidFill>
-              <a:latin typeface="Arial" panose="020B0604020202020204"/>
-              <a:ea typeface="Arial" panose="020B0604020202020204"/>
-              <a:cs typeface="Arial" panose="020B0604020202020204"/>
-            </a:endParaRPr>
-          </a:p>
-          <a:p>
-            <a:pPr algn="l">
-              <a:lnSpc>
-                <a:spcPts val="2325"/>
-              </a:lnSpc>
-            </a:pPr>
-            <a:r>
-              <a:rPr lang="en-US" sz="1600" dirty="0">
-                <a:solidFill>
-                  <a:srgbClr val="5E6478"/>
-                </a:solidFill>
-                <a:latin typeface="Arial" panose="020B0604020202020204"/>
-                <a:ea typeface="Arial" panose="020B0604020202020204"/>
-                <a:cs typeface="Arial" panose="020B0604020202020204"/>
-              </a:rPr>
-              <a:t>• No explicit cross-person geometry</a:t>
-            </a:r>
-            <a:endParaRPr lang="en-US" sz="1600" dirty="0">
-              <a:solidFill>
-                <a:srgbClr val="5E6478"/>
-              </a:solidFill>
-              <a:latin typeface="Arial" panose="020B0604020202020204"/>
-              <a:ea typeface="Arial" panose="020B0604020202020204"/>
-              <a:cs typeface="Arial" panose="020B0604020202020204"/>
-            </a:endParaRPr>
-          </a:p>
-          <a:p>
-            <a:pPr algn="l">
-              <a:lnSpc>
-                <a:spcPts val="2325"/>
-              </a:lnSpc>
-            </a:pPr>
-            <a:r>
-              <a:rPr lang="en-US" sz="1600" dirty="0">
-                <a:solidFill>
-                  <a:srgbClr val="5E6478"/>
-                </a:solidFill>
-                <a:latin typeface="Arial" panose="020B0604020202020204"/>
-                <a:ea typeface="Arial" panose="020B0604020202020204"/>
-                <a:cs typeface="Arial" panose="020B0604020202020204"/>
-              </a:rPr>
-              <a:t>• No explicit role-aware modelling</a:t>
-            </a:r>
-            <a:endParaRPr lang="en-US" sz="1600" dirty="0">
-              <a:solidFill>
-                <a:srgbClr val="5E6478"/>
-              </a:solidFill>
-              <a:latin typeface="Arial" panose="020B0604020202020204"/>
-              <a:ea typeface="Arial" panose="020B0604020202020204"/>
-              <a:cs typeface="Arial" panose="020B0604020202020204"/>
-            </a:endParaRPr>
-          </a:p>
-        </p:txBody>
-      </p:sp>
-      <p:sp>
-        <p:nvSpPr>
-          <p:cNvPr id="21" name="TextBox 21"/>
-          <p:cNvSpPr txBox="1"/>
-          <p:nvPr/>
-        </p:nvSpPr>
-        <p:spPr>
-          <a:xfrm>
-            <a:off x="6325870" y="4363720"/>
-            <a:ext cx="3272155" cy="894080"/>
-          </a:xfrm>
-          <a:prstGeom prst="rect">
-            <a:avLst/>
-          </a:prstGeom>
-          <a:noFill/>
-          <a:ln>
-            <a:noFill/>
-          </a:ln>
-        </p:spPr>
-        <p:txBody>
-          <a:bodyPr wrap="square" lIns="0" tIns="0" rIns="0" bIns="0" anchor="t" anchorCtr="0">
-            <a:spAutoFit/>
-          </a:bodyPr>
-          <a:lstStyle/>
-          <a:p>
-            <a:pPr algn="l">
-              <a:lnSpc>
-                <a:spcPts val="2325"/>
-              </a:lnSpc>
-            </a:pPr>
-            <a:r>
-              <a:rPr lang="en-US" sz="1600" dirty="0">
-                <a:solidFill>
-                  <a:srgbClr val="C8C8C8"/>
-                </a:solidFill>
-                <a:latin typeface="Arial" panose="020B0604020202020204"/>
-                <a:ea typeface="Arial" panose="020B0604020202020204"/>
-                <a:cs typeface="Arial" panose="020B0604020202020204"/>
-              </a:rPr>
-              <a:t>Primary candidate: CTR-GCN</a:t>
-            </a:r>
-            <a:endParaRPr lang="en-US" sz="1600" dirty="0">
-              <a:solidFill>
-                <a:srgbClr val="C8C8C8"/>
-              </a:solidFill>
-              <a:latin typeface="Arial" panose="020B0604020202020204"/>
-              <a:ea typeface="Arial" panose="020B0604020202020204"/>
-              <a:cs typeface="Arial" panose="020B0604020202020204"/>
-            </a:endParaRPr>
-          </a:p>
-          <a:p>
-            <a:pPr algn="l">
-              <a:lnSpc>
-                <a:spcPts val="2325"/>
-              </a:lnSpc>
-            </a:pPr>
-            <a:r>
-              <a:rPr lang="en-US" sz="1600" dirty="0">
-                <a:solidFill>
-                  <a:srgbClr val="C8C8C8"/>
-                </a:solidFill>
-                <a:latin typeface="Arial" panose="020B0604020202020204"/>
-                <a:ea typeface="Arial" panose="020B0604020202020204"/>
-                <a:cs typeface="Arial" panose="020B0604020202020204"/>
-              </a:rPr>
-              <a:t>Secondary comparison: SkeletonX-CTR-GCN</a:t>
-            </a:r>
-            <a:endParaRPr lang="en-US" sz="1600" dirty="0">
               <a:solidFill>
                 <a:srgbClr val="C8C8C8"/>
               </a:solidFill>
@@ -8875,12 +8977,6 @@
     <a:masterClrMapping/>
   </p:clrMapOvr>
 </p:sld>
-</file>
-
-<file path=ppt/tags/tag1.xml><?xml version="1.0" encoding="utf-8"?>
-<p:tagLst xmlns:p="http://schemas.openxmlformats.org/presentationml/2006/main">
-  <p:tag name="commondata" val="eyJoZGlkIjoiOWMxYzMwYjExMzFiOTI0NTgyNDM4YzE5NDkxZGE0MTIifQ=="/>
-</p:tagLst>
 </file>
 
 <file path=ppt/theme/theme1.xml><?xml version="1.0" encoding="utf-8"?>
@@ -9205,4 +9301,263 @@
     </a:ext>
   </a:extLst>
 </a:theme>
+</file>
+
+<file path=ppt/theme/theme2.xml><?xml version="1.0" encoding="utf-8"?>
+<a:theme xmlns:a="http://schemas.openxmlformats.org/drawingml/2006/main" name="Office 主题">
+  <a:themeElements>
+    <a:clrScheme name="Office">
+      <a:dk1>
+        <a:sysClr val="windowText" lastClr="000000"/>
+      </a:dk1>
+      <a:lt1>
+        <a:sysClr val="window" lastClr="FFFFFF"/>
+      </a:lt1>
+      <a:dk2>
+        <a:srgbClr val="44546A"/>
+      </a:dk2>
+      <a:lt2>
+        <a:srgbClr val="E7E6E6"/>
+      </a:lt2>
+      <a:accent1>
+        <a:srgbClr val="5B9BD5"/>
+      </a:accent1>
+      <a:accent2>
+        <a:srgbClr val="ED7D31"/>
+      </a:accent2>
+      <a:accent3>
+        <a:srgbClr val="A5A5A5"/>
+      </a:accent3>
+      <a:accent4>
+        <a:srgbClr val="FFC000"/>
+      </a:accent4>
+      <a:accent5>
+        <a:srgbClr val="4472C4"/>
+      </a:accent5>
+      <a:accent6>
+        <a:srgbClr val="70AD47"/>
+      </a:accent6>
+      <a:hlink>
+        <a:srgbClr val="0563C1"/>
+      </a:hlink>
+      <a:folHlink>
+        <a:srgbClr val="954F72"/>
+      </a:folHlink>
+    </a:clrScheme>
+    <a:fontScheme name="Office">
+      <a:majorFont>
+        <a:latin typeface="Calibri Light"/>
+        <a:ea typeface=""/>
+        <a:cs typeface=""/>
+        <a:font script="Jpan" typeface="ＭＳ Ｐゴシック"/>
+        <a:font script="Hang" typeface="맑은 고딕"/>
+        <a:font script="Hans" typeface="宋体"/>
+        <a:font script="Hant" typeface="新細明體"/>
+        <a:font script="Arab" typeface="Times New Roman"/>
+        <a:font script="Hebr" typeface="Times New Roman"/>
+        <a:font script="Thai" typeface="Angsana New"/>
+        <a:font script="Ethi" typeface="Nyala"/>
+        <a:font script="Beng" typeface="Vrinda"/>
+        <a:font script="Gujr" typeface="Shruti"/>
+        <a:font script="Khmr" typeface="MoolBoran"/>
+        <a:font script="Knda" typeface="Tunga"/>
+        <a:font script="Guru" typeface="Raavi"/>
+        <a:font script="Cans" typeface="Euphemia"/>
+        <a:font script="Cher" typeface="Plantagenet Cherokee"/>
+        <a:font script="Yiii" typeface="Microsoft Yi Baiti"/>
+        <a:font script="Tibt" typeface="Microsoft Himalaya"/>
+        <a:font script="Thaa" typeface="MV Boli"/>
+        <a:font script="Deva" typeface="Mangal"/>
+        <a:font script="Telu" typeface="Gautami"/>
+        <a:font script="Taml" typeface="Latha"/>
+        <a:font script="Syrc" typeface="Estrangelo Edessa"/>
+        <a:font script="Orya" typeface="Kalinga"/>
+        <a:font script="Mlym" typeface="Kartika"/>
+        <a:font script="Laoo" typeface="DokChampa"/>
+        <a:font script="Sinh" typeface="Iskoola Pota"/>
+        <a:font script="Mong" typeface="Mongolian Baiti"/>
+        <a:font script="Viet" typeface="Times New Roman"/>
+        <a:font script="Uigh" typeface="Microsoft Uighur"/>
+        <a:font script="Geor" typeface="Sylfaen"/>
+      </a:majorFont>
+      <a:minorFont>
+        <a:latin typeface="Calibri"/>
+        <a:ea typeface=""/>
+        <a:cs typeface=""/>
+        <a:font script="Jpan" typeface="ＭＳ Ｐゴシック"/>
+        <a:font script="Hang" typeface="맑은 고딕"/>
+        <a:font script="Hans" typeface="宋体"/>
+        <a:font script="Hant" typeface="新細明體"/>
+        <a:font script="Arab" typeface="Arial"/>
+        <a:font script="Hebr" typeface="Arial"/>
+        <a:font script="Thai" typeface="Cordia New"/>
+        <a:font script="Ethi" typeface="Nyala"/>
+        <a:font script="Beng" typeface="Vrinda"/>
+        <a:font script="Gujr" typeface="Shruti"/>
+        <a:font script="Khmr" typeface="DaunPenh"/>
+        <a:font script="Knda" typeface="Tunga"/>
+        <a:font script="Guru" typeface="Raavi"/>
+        <a:font script="Cans" typeface="Euphemia"/>
+        <a:font script="Cher" typeface="Plantagenet Cherokee"/>
+        <a:font script="Yiii" typeface="Microsoft Yi Baiti"/>
+        <a:font script="Tibt" typeface="Microsoft Himalaya"/>
+        <a:font script="Thaa" typeface="MV Boli"/>
+        <a:font script="Deva" typeface="Mangal"/>
+        <a:font script="Telu" typeface="Gautami"/>
+        <a:font script="Taml" typeface="Latha"/>
+        <a:font script="Syrc" typeface="Estrangelo Edessa"/>
+        <a:font script="Orya" typeface="Kalinga"/>
+        <a:font script="Mlym" typeface="Kartika"/>
+        <a:font script="Laoo" typeface="DokChampa"/>
+        <a:font script="Sinh" typeface="Iskoola Pota"/>
+        <a:font script="Mong" typeface="Mongolian Baiti"/>
+        <a:font script="Viet" typeface="Arial"/>
+        <a:font script="Uigh" typeface="Microsoft Uighur"/>
+        <a:font script="Geor" typeface="Sylfaen"/>
+      </a:minorFont>
+    </a:fontScheme>
+    <a:fmtScheme name="Office">
+      <a:fillStyleLst>
+        <a:solidFill>
+          <a:schemeClr val="phClr"/>
+        </a:solidFill>
+        <a:gradFill rotWithShape="1">
+          <a:gsLst>
+            <a:gs pos="0">
+              <a:schemeClr val="phClr">
+                <a:lumMod val="110000"/>
+                <a:satMod val="105000"/>
+                <a:tint val="67000"/>
+              </a:schemeClr>
+            </a:gs>
+            <a:gs pos="50000">
+              <a:schemeClr val="phClr">
+                <a:lumMod val="105000"/>
+                <a:satMod val="103000"/>
+                <a:tint val="73000"/>
+              </a:schemeClr>
+            </a:gs>
+            <a:gs pos="100000">
+              <a:schemeClr val="phClr">
+                <a:lumMod val="105000"/>
+                <a:satMod val="109000"/>
+                <a:tint val="81000"/>
+              </a:schemeClr>
+            </a:gs>
+          </a:gsLst>
+          <a:lin ang="5400000" scaled="0"/>
+        </a:gradFill>
+        <a:gradFill rotWithShape="1">
+          <a:gsLst>
+            <a:gs pos="0">
+              <a:schemeClr val="phClr">
+                <a:satMod val="103000"/>
+                <a:lumMod val="102000"/>
+                <a:tint val="94000"/>
+              </a:schemeClr>
+            </a:gs>
+            <a:gs pos="50000">
+              <a:schemeClr val="phClr">
+                <a:satMod val="110000"/>
+                <a:lumMod val="100000"/>
+                <a:shade val="100000"/>
+              </a:schemeClr>
+            </a:gs>
+            <a:gs pos="100000">
+              <a:schemeClr val="phClr">
+                <a:lumMod val="99000"/>
+                <a:satMod val="120000"/>
+                <a:shade val="78000"/>
+              </a:schemeClr>
+            </a:gs>
+          </a:gsLst>
+          <a:lin ang="5400000" scaled="0"/>
+        </a:gradFill>
+      </a:fillStyleLst>
+      <a:lnStyleLst>
+        <a:ln w="6350" cap="flat" cmpd="sng" algn="ctr">
+          <a:solidFill>
+            <a:schemeClr val="phClr"/>
+          </a:solidFill>
+          <a:prstDash val="solid"/>
+          <a:miter lim="800000"/>
+        </a:ln>
+        <a:ln w="12700" cap="flat" cmpd="sng" algn="ctr">
+          <a:solidFill>
+            <a:schemeClr val="phClr"/>
+          </a:solidFill>
+          <a:prstDash val="solid"/>
+          <a:miter lim="800000"/>
+        </a:ln>
+        <a:ln w="19050" cap="flat" cmpd="sng" algn="ctr">
+          <a:solidFill>
+            <a:schemeClr val="phClr"/>
+          </a:solidFill>
+          <a:prstDash val="solid"/>
+          <a:miter lim="800000"/>
+        </a:ln>
+      </a:lnStyleLst>
+      <a:effectStyleLst>
+        <a:effectStyle>
+          <a:effectLst/>
+        </a:effectStyle>
+        <a:effectStyle>
+          <a:effectLst/>
+        </a:effectStyle>
+        <a:effectStyle>
+          <a:effectLst>
+            <a:outerShdw blurRad="57150" dist="19050" dir="5400000" algn="ctr" rotWithShape="0">
+              <a:srgbClr val="000000">
+                <a:alpha val="63000"/>
+              </a:srgbClr>
+            </a:outerShdw>
+          </a:effectLst>
+        </a:effectStyle>
+      </a:effectStyleLst>
+      <a:bgFillStyleLst>
+        <a:solidFill>
+          <a:schemeClr val="phClr"/>
+        </a:solidFill>
+        <a:solidFill>
+          <a:schemeClr val="phClr">
+            <a:tint val="95000"/>
+            <a:satMod val="170000"/>
+          </a:schemeClr>
+        </a:solidFill>
+        <a:gradFill rotWithShape="1">
+          <a:gsLst>
+            <a:gs pos="0">
+              <a:schemeClr val="phClr">
+                <a:tint val="93000"/>
+                <a:satMod val="150000"/>
+                <a:shade val="98000"/>
+                <a:lumMod val="102000"/>
+              </a:schemeClr>
+            </a:gs>
+            <a:gs pos="50000">
+              <a:schemeClr val="phClr">
+                <a:tint val="98000"/>
+                <a:satMod val="130000"/>
+                <a:shade val="90000"/>
+                <a:lumMod val="103000"/>
+              </a:schemeClr>
+            </a:gs>
+            <a:gs pos="100000">
+              <a:schemeClr val="phClr">
+                <a:shade val="63000"/>
+                <a:satMod val="120000"/>
+              </a:schemeClr>
+            </a:gs>
+          </a:gsLst>
+          <a:lin ang="5400000" scaled="0"/>
+        </a:gradFill>
+      </a:bgFillStyleLst>
+    </a:fmtScheme>
+  </a:themeElements>
+  <a:extLst>
+    <a:ext uri="{05A4C25C-085E-4340-85A3-A5531E510DB2}">
+      <thm15:themeFamily xmlns:thm15="http://schemas.microsoft.com/office/thememl/2012/main" name="Office Theme" id="{62F939B6-93AF-4DB8-9C6B-D6C7DFDC589F}" vid="{4A3C46E8-61CC-4603-A589-7422A47A8E4A}"/>
+    </a:ext>
+  </a:extLst>
+</a:theme>
 </file>